--- a/baselines/bao-cao-lightmem-baseline.pptx
+++ b/baselines/bao-cao-lightmem-baseline.pptx
@@ -2448,7 +2448,7 @@
                 <a:ea typeface="Calibri" pitchFamily="34" charset="-122"/>
                 <a:cs typeface="Calibri" pitchFamily="34" charset="-120"/>
               </a:rPr>
-              <a:t>BASELINE LÀ GÌ</a:t>
+              <a:t>CÁCH HOẠT ĐỘNG</a:t>
             </a:r>
             <a:endParaRPr lang="en-US" sz="1100" dirty="0"/>
           </a:p>
@@ -3425,7 +3425,7 @@
                 <a:ea typeface="Calibri" pitchFamily="34" charset="-122"/>
                 <a:cs typeface="Calibri" pitchFamily="34" charset="-120"/>
               </a:rPr>
-              <a:t>Điểm cần nhớ</a:t>
+              <a:t>Giới hạn quan trọng</a:t>
             </a:r>
             <a:endParaRPr lang="en-US" sz="1250" dirty="0"/>
           </a:p>
@@ -4596,7 +4596,7 @@
                 <a:ea typeface="Cambria" pitchFamily="34" charset="-122"/>
                 <a:cs typeface="Cambria" pitchFamily="34" charset="-120"/>
               </a:rPr>
-              <a:t>Độ chính xác theo loại câu hỏi</a:t>
+              <a:t>Năm loại đạt 78–100%, riêng lượt trợ lý 33%</a:t>
             </a:r>
             <a:endParaRPr lang="en-US" sz="2600" dirty="0"/>
           </a:p>
@@ -7034,7 +7034,7 @@
                 <a:ea typeface="Calibri" pitchFamily="34" charset="-122"/>
                 <a:cs typeface="Calibri" pitchFamily="34" charset="-120"/>
               </a:rPr>
-              <a:t>Bằng chứng cho kiểu 2: </a:t>
+              <a:t>Bằng chứng: </a:t>
             </a:r>
             <a:pPr indent="0" marL="0">
               <a:buNone/>
@@ -7048,7 +7048,7 @@
                 <a:ea typeface="Calibri" pitchFamily="34" charset="-122"/>
                 <a:cs typeface="Calibri" pitchFamily="34" charset="-120"/>
               </a:rPr>
-              <a:t>4/6 câu sai loại lượt trợ lý, hệ trả lời thẳng là không tìm thấy thông tin trong bộ nhớ, đúng như dự đoán từ cấu hình user_only.</a:t>
+              <a:t>4/6 câu sai loại lượt trợ lý, hệ trả lời thẳng là không tìm thấy thông tin trong bộ nhớ, khớp với cấu hình user_only.</a:t>
             </a:r>
             <a:endParaRPr lang="en-US" sz="1050" dirty="0"/>
           </a:p>
@@ -7158,7 +7158,7 @@
                 <a:ea typeface="Cambria" pitchFamily="34" charset="-122"/>
                 <a:cs typeface="Cambria" pitchFamily="34" charset="-120"/>
               </a:rPr>
-              <a:t>Chi phí và thời gian</a:t>
+              <a:t>Dựng bộ nhớ chiếm gần như toàn bộ thời gian</a:t>
             </a:r>
             <a:endParaRPr lang="en-US" sz="2600" dirty="0"/>
           </a:p>
@@ -7683,7 +7683,7 @@
                 <a:ea typeface="Calibri" pitchFamily="34" charset="-122"/>
                 <a:cs typeface="Calibri" pitchFamily="34" charset="-120"/>
               </a:rPr>
-              <a:t>GHI LẠI ĐỂ KHỎI LẶP</a:t>
+              <a:t>SỰ CỐ KỸ THUẬT</a:t>
             </a:r>
             <a:endParaRPr lang="en-US" sz="1100" dirty="0"/>
           </a:p>
@@ -9029,8 +9029,8 @@
         </p:nvSpPr>
         <p:spPr>
           <a:xfrm>
-            <a:off x="640080" y="457200"/>
-            <a:ext cx="7863840" cy="640080"/>
+            <a:off x="640080" y="411480"/>
+            <a:ext cx="7863840" cy="685800"/>
           </a:xfrm>
           <a:prstGeom prst="rect">
             <a:avLst/>
@@ -9046,7 +9046,7 @@
               <a:buNone/>
             </a:pPr>
             <a:r>
-              <a:rPr lang="en-US" sz="3200" b="1" dirty="0">
+              <a:rPr lang="en-US" sz="3000" b="1" dirty="0">
                 <a:solidFill>
                   <a:srgbClr val="FFFFFF"/>
                 </a:solidFill>
@@ -9054,9 +9054,9 @@
                 <a:ea typeface="Cambria" pitchFamily="34" charset="-122"/>
                 <a:cs typeface="Cambria" pitchFamily="34" charset="-120"/>
               </a:rPr>
-              <a:t>Tổng kết và bước tiếp</a:t>
-            </a:r>
-            <a:endParaRPr lang="en-US" sz="3200" dirty="0"/>
+              <a:t>Baseline chạy được, chưa đủ kết luận</a:t>
+            </a:r>
+            <a:endParaRPr lang="en-US" sz="3000" dirty="0"/>
           </a:p>
         </p:txBody>
       </p:sp>
@@ -9093,7 +9093,7 @@
                 <a:ea typeface="Calibri" pitchFamily="34" charset="-122"/>
                 <a:cs typeface="Calibri" pitchFamily="34" charset="-120"/>
               </a:rPr>
-              <a:t>Tạm thời, mới 125/150 câu dev</a:t>
+              <a:t>Số liệu trên 125/150 câu dev</a:t>
             </a:r>
             <a:endParaRPr lang="en-US" sz="1400" dirty="0"/>
           </a:p>

--- a/baselines/bao-cao-lightmem-baseline.pptx
+++ b/baselines/bao-cao-lightmem-baseline.pptx
@@ -14,9 +14,11 @@
     <p:sldId id="262" r:id="rId8"/>
     <p:sldId id="263" r:id="rId9"/>
     <p:sldId id="264" r:id="rId10"/>
+    <p:sldId id="265" r:id="rId11"/>
+    <p:sldId id="266" r:id="rId12"/>
   </p:sldIdLst>
   <p:notesMasterIdLst>
-    <p:notesMasterId r:id="rId11"/>
+    <p:notesMasterId r:id="rId13"/>
   </p:notesMasterIdLst>
   <p:sldSz cx="9144000" cy="5143500"/>
   <p:notesSz cx="5143500" cy="9144000"/>
@@ -1192,6 +1194,182 @@
 </p:notes>
 </file>
 
+<file path=ppt/notesSlides/notesSlide10.xml><?xml version="1.0" encoding="utf-8"?>
+<p:notes xmlns:a="http://schemas.openxmlformats.org/drawingml/2006/main" xmlns:r="http://schemas.openxmlformats.org/officeDocument/2006/relationships" xmlns:p="http://schemas.openxmlformats.org/presentationml/2006/main">
+  <p:cSld>
+    <p:spTree>
+      <p:nvGrpSpPr>
+        <p:cNvPr id="1" name=""/>
+        <p:cNvGrpSpPr/>
+        <p:nvPr/>
+      </p:nvGrpSpPr>
+      <p:grpSpPr>
+        <a:xfrm>
+          <a:off x="0" y="0"/>
+          <a:ext cx="0" cy="0"/>
+          <a:chOff x="0" y="0"/>
+          <a:chExt cx="0" cy="0"/>
+        </a:xfrm>
+      </p:grpSpPr>
+      <p:sp>
+        <p:nvSpPr>
+          <p:cNvPr id="2" name="Slide Image Placeholder 1"/>
+          <p:cNvSpPr>
+            <a:spLocks noGrp="1" noRot="1" noChangeAspect="1"/>
+          </p:cNvSpPr>
+          <p:nvPr>
+            <p:ph type="sldImg"/>
+          </p:nvPr>
+        </p:nvSpPr>
+        <p:spPr/>
+      </p:sp>
+      <p:sp>
+        <p:nvSpPr>
+          <p:cNvPr id="3" name="Notes Placeholder 2"/>
+          <p:cNvSpPr>
+            <a:spLocks noGrp="1"/>
+          </p:cNvSpPr>
+          <p:nvPr>
+            <p:ph type="body" idx="1"/>
+          </p:nvPr>
+        </p:nvSpPr>
+        <p:spPr/>
+        <p:txBody>
+          <a:bodyPr/>
+          <a:lstStyle/>
+          <a:p>
+            <a:r>
+              <a:rPr lang="en-US" dirty="0"/>
+              <a:t>Các lỗi này đều nằm ở môi trường chạy, không phải ở thiết kế baseline.</a:t>
+            </a:r>
+            <a:endParaRPr lang="en-US" dirty="0"/>
+          </a:p>
+        </p:txBody>
+      </p:sp>
+      <p:sp>
+        <p:nvSpPr>
+          <p:cNvPr id="4" name="Slide Number Placeholder 3"/>
+          <p:cNvSpPr>
+            <a:spLocks noGrp="1"/>
+          </p:cNvSpPr>
+          <p:nvPr>
+            <p:ph type="sldNum" sz="quarter" idx="10"/>
+          </p:nvPr>
+        </p:nvSpPr>
+        <p:spPr/>
+        <p:txBody>
+          <a:bodyPr/>
+          <a:lstStyle/>
+          <a:p>
+            <a:fld id="{F7021451-1387-4CA6-816F-3879F97B5CBC}" type="slidenum">
+              <a:rPr lang="en-US"/>
+              <a:t>10</a:t>
+            </a:fld>
+            <a:endParaRPr lang="en-US"/>
+          </a:p>
+        </p:txBody>
+      </p:sp>
+    </p:spTree>
+    <p:extLst>
+      <p:ext uri="{BB962C8B-B14F-4D97-AF65-F5344CB8AC3E}">
+        <p14:creationId xmlns:p14="http://schemas.microsoft.com/office/powerpoint/2010/main" val="1024086991"/>
+      </p:ext>
+    </p:extLst>
+  </p:cSld>
+  <p:clrMapOvr>
+    <a:masterClrMapping/>
+  </p:clrMapOvr>
+</p:notes>
+</file>
+
+<file path=ppt/notesSlides/notesSlide11.xml><?xml version="1.0" encoding="utf-8"?>
+<p:notes xmlns:a="http://schemas.openxmlformats.org/drawingml/2006/main" xmlns:r="http://schemas.openxmlformats.org/officeDocument/2006/relationships" xmlns:p="http://schemas.openxmlformats.org/presentationml/2006/main">
+  <p:cSld>
+    <p:spTree>
+      <p:nvGrpSpPr>
+        <p:cNvPr id="1" name=""/>
+        <p:cNvGrpSpPr/>
+        <p:nvPr/>
+      </p:nvGrpSpPr>
+      <p:grpSpPr>
+        <a:xfrm>
+          <a:off x="0" y="0"/>
+          <a:ext cx="0" cy="0"/>
+          <a:chOff x="0" y="0"/>
+          <a:chExt cx="0" cy="0"/>
+        </a:xfrm>
+      </p:grpSpPr>
+      <p:sp>
+        <p:nvSpPr>
+          <p:cNvPr id="2" name="Slide Image Placeholder 1"/>
+          <p:cNvSpPr>
+            <a:spLocks noGrp="1" noRot="1" noChangeAspect="1"/>
+          </p:cNvSpPr>
+          <p:nvPr>
+            <p:ph type="sldImg"/>
+          </p:nvPr>
+        </p:nvSpPr>
+        <p:spPr/>
+      </p:sp>
+      <p:sp>
+        <p:nvSpPr>
+          <p:cNvPr id="3" name="Notes Placeholder 2"/>
+          <p:cNvSpPr>
+            <a:spLocks noGrp="1"/>
+          </p:cNvSpPr>
+          <p:nvPr>
+            <p:ph type="body" idx="1"/>
+          </p:nvPr>
+        </p:nvSpPr>
+        <p:spPr/>
+        <p:txBody>
+          <a:bodyPr/>
+          <a:lstStyle/>
+          <a:p>
+            <a:r>
+              <a:rPr lang="en-US" dirty="0"/>
+              <a:t>Slide tổng kết tự cập nhật theo stats.json. Khi chạy xong 150 câu, chạy lại gen_stats.py và build_deck.js.</a:t>
+            </a:r>
+            <a:endParaRPr lang="en-US" dirty="0"/>
+          </a:p>
+        </p:txBody>
+      </p:sp>
+      <p:sp>
+        <p:nvSpPr>
+          <p:cNvPr id="4" name="Slide Number Placeholder 3"/>
+          <p:cNvSpPr>
+            <a:spLocks noGrp="1"/>
+          </p:cNvSpPr>
+          <p:nvPr>
+            <p:ph type="sldNum" sz="quarter" idx="10"/>
+          </p:nvPr>
+        </p:nvSpPr>
+        <p:spPr/>
+        <p:txBody>
+          <a:bodyPr/>
+          <a:lstStyle/>
+          <a:p>
+            <a:fld id="{F7021451-1387-4CA6-816F-3879F97B5CBC}" type="slidenum">
+              <a:rPr lang="en-US"/>
+              <a:t>11</a:t>
+            </a:fld>
+            <a:endParaRPr lang="en-US"/>
+          </a:p>
+        </p:txBody>
+      </p:sp>
+    </p:spTree>
+    <p:extLst>
+      <p:ext uri="{BB962C8B-B14F-4D97-AF65-F5344CB8AC3E}">
+        <p14:creationId xmlns:p14="http://schemas.microsoft.com/office/powerpoint/2010/main" val="1024086991"/>
+      </p:ext>
+    </p:extLst>
+  </p:cSld>
+  <p:clrMapOvr>
+    <a:masterClrMapping/>
+  </p:clrMapOvr>
+</p:notes>
+</file>
+
 <file path=ppt/notesSlides/notesSlide2.xml><?xml version="1.0" encoding="utf-8"?>
 <p:notes xmlns:a="http://schemas.openxmlformats.org/drawingml/2006/main" xmlns:r="http://schemas.openxmlformats.org/officeDocument/2006/relationships" xmlns:p="http://schemas.openxmlformats.org/presentationml/2006/main">
   <p:cSld>
@@ -1678,7 +1856,7 @@
           <a:p>
             <a:r>
               <a:rPr lang="en-US" dirty="0"/>
-              <a:t>Thời gian dựng bộ nhớ chiếm gần như toàn bộ; truy xuất và trả lời rất nhanh. 9router chèn thêm khoảng 2.500 token system prompt vào mỗi lời gọi, nên số token đo qua router bị phình.</a:t>
+              <a:t>Truy xuất trúng phiên chứa bằng chứng ở 124/125 câu. Trong 20 câu sai, 19 câu đã có bằng chứng trong 20 ký ức lấy về mà vẫn trả lời sai. Lưu ý: "trúng phiên" chưa chắc là "giữ được chi tiết cần thiết", vì LightMem nén và tóm tắt trước khi lưu.</a:t>
             </a:r>
             <a:endParaRPr lang="en-US" dirty="0"/>
           </a:p>
@@ -1766,7 +1944,7 @@
           <a:p>
             <a:r>
               <a:rPr lang="en-US" dirty="0"/>
-              <a:t>Các lỗi này đều nằm ở môi trường chạy, không phải ở thiết kế baseline.</a:t>
+              <a:t>Soi tay 12 câu được chấm đúng và toàn bộ 20 câu bị chấm sai. Không có câu nào được chấm đúng oan; có 2 câu nhóm cho rằng đáng lẽ nên tính đúng, nên accuracy thật có thể cao hơn khoảng 1,6 điểm.</a:t>
             </a:r>
             <a:endParaRPr lang="en-US" dirty="0"/>
           </a:p>
@@ -1854,7 +2032,7 @@
           <a:p>
             <a:r>
               <a:rPr lang="en-US" dirty="0"/>
-              <a:t>Slide tổng kết tự cập nhật theo stats.json. Khi chạy xong 150 câu, chạy lại gen_stats.py và build_deck.js.</a:t>
+              <a:t>Thời gian dựng bộ nhớ chiếm gần như toàn bộ; truy xuất và trả lời rất nhanh. 9router chèn thêm khoảng 2.500 token system prompt vào mỗi lời gọi, nên số token đo qua router bị phình.</a:t>
             </a:r>
             <a:endParaRPr lang="en-US" dirty="0"/>
           </a:p>
@@ -2391,6 +2569,2002 @@
 </p:sld>
 </file>
 
+<file path=ppt/slides/slide10.xml><?xml version="1.0" encoding="utf-8"?>
+<p:sld xmlns:a="http://schemas.openxmlformats.org/drawingml/2006/main" xmlns:r="http://schemas.openxmlformats.org/officeDocument/2006/relationships" xmlns:p="http://schemas.openxmlformats.org/presentationml/2006/main">
+  <p:cSld name="Slide 10">
+    <p:bg>
+      <p:bgPr>
+        <a:solidFill>
+          <a:srgbClr val="F7F9FB"/>
+        </a:solidFill>
+      </p:bgPr>
+    </p:bg>
+    <p:spTree>
+      <p:nvGrpSpPr>
+        <p:cNvPr id="1" name=""/>
+        <p:cNvGrpSpPr/>
+        <p:nvPr/>
+      </p:nvGrpSpPr>
+      <p:grpSpPr>
+        <a:xfrm>
+          <a:off x="0" y="0"/>
+          <a:ext cx="0" cy="0"/>
+          <a:chOff x="0" y="0"/>
+          <a:chExt cx="0" cy="0"/>
+        </a:xfrm>
+      </p:grpSpPr>
+      <p:sp>
+        <p:nvSpPr>
+          <p:cNvPr id="2" name="Text 0"/>
+          <p:cNvSpPr txBox="1"/>
+          <p:nvPr/>
+        </p:nvSpPr>
+        <p:spPr>
+          <a:xfrm>
+            <a:off x="457200" y="274320"/>
+            <a:ext cx="8229600" cy="274320"/>
+          </a:xfrm>
+          <a:prstGeom prst="rect">
+            <a:avLst/>
+          </a:prstGeom>
+          <a:noFill/>
+          <a:ln/>
+        </p:spPr>
+        <p:txBody>
+          <a:bodyPr wrap="square" lIns="0" tIns="0" rIns="0" bIns="0" rtlCol="0" anchor="ctr"/>
+          <a:lstStyle/>
+          <a:p>
+            <a:pPr indent="0" marL="0">
+              <a:buNone/>
+            </a:pPr>
+            <a:r>
+              <a:rPr lang="en-US" sz="1100" b="1" dirty="0">
+                <a:solidFill>
+                  <a:srgbClr val="1F6F8B"/>
+                </a:solidFill>
+                <a:latin typeface="Calibri" pitchFamily="34" charset="0"/>
+                <a:ea typeface="Calibri" pitchFamily="34" charset="-122"/>
+                <a:cs typeface="Calibri" pitchFamily="34" charset="-120"/>
+              </a:rPr>
+              <a:t>SỰ CỐ KỸ THUẬT</a:t>
+            </a:r>
+            <a:endParaRPr lang="en-US" sz="1100" dirty="0"/>
+          </a:p>
+        </p:txBody>
+      </p:sp>
+      <p:sp>
+        <p:nvSpPr>
+          <p:cNvPr id="3" name="Text 1"/>
+          <p:cNvSpPr txBox="1"/>
+          <p:nvPr/>
+        </p:nvSpPr>
+        <p:spPr>
+          <a:xfrm>
+            <a:off x="457200" y="502920"/>
+            <a:ext cx="8229600" cy="548640"/>
+          </a:xfrm>
+          <a:prstGeom prst="rect">
+            <a:avLst/>
+          </a:prstGeom>
+          <a:noFill/>
+          <a:ln/>
+        </p:spPr>
+        <p:txBody>
+          <a:bodyPr wrap="square" lIns="0" tIns="0" rIns="0" bIns="0" rtlCol="0" anchor="ctr"/>
+          <a:lstStyle/>
+          <a:p>
+            <a:pPr indent="0" marL="0">
+              <a:buNone/>
+            </a:pPr>
+            <a:r>
+              <a:rPr lang="en-US" sz="2600" b="1" dirty="0">
+                <a:solidFill>
+                  <a:srgbClr val="10243E"/>
+                </a:solidFill>
+                <a:latin typeface="Cambria" pitchFamily="34" charset="0"/>
+                <a:ea typeface="Cambria" pitchFamily="34" charset="-122"/>
+                <a:cs typeface="Cambria" pitchFamily="34" charset="-120"/>
+              </a:rPr>
+              <a:t>Sự cố gặp phải và cách xử lý</a:t>
+            </a:r>
+            <a:endParaRPr lang="en-US" sz="2600" dirty="0"/>
+          </a:p>
+        </p:txBody>
+      </p:sp>
+      <p:sp>
+        <p:nvSpPr>
+          <p:cNvPr id="4" name="Text 2"/>
+          <p:cNvSpPr txBox="1"/>
+          <p:nvPr/>
+        </p:nvSpPr>
+        <p:spPr>
+          <a:xfrm>
+            <a:off x="6309360" y="274320"/>
+            <a:ext cx="2377440" cy="274320"/>
+          </a:xfrm>
+          <a:prstGeom prst="rect">
+            <a:avLst/>
+          </a:prstGeom>
+          <a:noFill/>
+          <a:ln/>
+        </p:spPr>
+        <p:txBody>
+          <a:bodyPr wrap="square" lIns="0" tIns="0" rIns="0" bIns="0" rtlCol="0" anchor="ctr"/>
+          <a:lstStyle/>
+          <a:p>
+            <a:pPr algn="r" indent="0" marL="0">
+              <a:buNone/>
+            </a:pPr>
+            <a:r>
+              <a:rPr lang="en-US" sz="1000" b="1" dirty="0">
+                <a:solidFill>
+                  <a:srgbClr val="C8553D"/>
+                </a:solidFill>
+                <a:latin typeface="Calibri" pitchFamily="34" charset="0"/>
+                <a:ea typeface="Calibri" pitchFamily="34" charset="-122"/>
+                <a:cs typeface="Calibri" pitchFamily="34" charset="-120"/>
+              </a:rPr>
+              <a:t>Số liệu sơ bộ: 125/150 câu dev</a:t>
+            </a:r>
+            <a:endParaRPr lang="en-US" sz="1000" dirty="0"/>
+          </a:p>
+        </p:txBody>
+      </p:sp>
+      <p:graphicFrame>
+        <p:nvGraphicFramePr>
+          <p:cNvPr id="11" name="Table 0"/>
+          <p:cNvGraphicFramePr>
+            <a:graphicFrameLocks noGrp="1"/>
+          </p:cNvGraphicFramePr>
+          <p:nvPr>
+            <p:extLst>
+              <p:ext uri="{D42A27DB-BD31-4B8C-83A1-F6EECF244321}">
+                <p14:modId xmlns:p14="http://schemas.microsoft.com/office/powerpoint/2010/main" val="1579011935"/>
+              </p:ext>
+            </p:extLst>
+          </p:nvPr>
+        </p:nvGraphicFramePr>
+        <p:xfrm>
+          <a:off x="457200" y="1280160"/>
+          <a:ext cx="8229600" cy="914400"/>
+        </p:xfrm>
+        <a:graphic>
+          <a:graphicData uri="http://schemas.openxmlformats.org/drawingml/2006/table">
+            <a:tbl>
+              <a:tblPr/>
+              <a:tblGrid>
+                <a:gridCol w="2286000"/>
+                <a:gridCol w="3108960"/>
+                <a:gridCol w="2834640"/>
+              </a:tblGrid>
+              <a:tr h="502920">
+                <a:tc>
+                  <a:txBody>
+                    <a:bodyPr/>
+                    <a:lstStyle/>
+                    <a:p>
+                      <a:pPr indent="0" marL="0">
+                        <a:buNone/>
+                      </a:pPr>
+                      <a:r>
+                        <a:rPr lang="en-US" sz="1100" b="1" dirty="0">
+                          <a:solidFill>
+                            <a:srgbClr val="FFFFFF"/>
+                          </a:solidFill>
+                          <a:latin typeface="Calibri" pitchFamily="34" charset="0"/>
+                          <a:ea typeface="Calibri" pitchFamily="34" charset="-122"/>
+                          <a:cs typeface="Calibri" pitchFamily="34" charset="-120"/>
+                        </a:rPr>
+                        <a:t>Sự cố</a:t>
+                      </a:r>
+                      <a:endParaRPr lang="en-US" sz="1100" dirty="0">
+                        <a:latin typeface="Calibri" charset="0"/>
+                        <a:ea typeface="Calibri" charset="0"/>
+                        <a:cs typeface="Calibri" charset="0"/>
+                      </a:endParaRPr>
+                    </a:p>
+                  </a:txBody>
+                  <a:tcPr marL="91440" marR="91440" marT="45720" marB="45720" anchor="ctr">
+                    <a:lnL w="9525" cap="flat" cmpd="sng" algn="ctr">
+                      <a:solidFill>
+                        <a:srgbClr val="DCE3EA"/>
+                      </a:solidFill>
+                      <a:prstDash val="solid"/>
+                      <a:round/>
+                      <a:headEnd type="none" w="med" len="med"/>
+                      <a:tailEnd type="none" w="med" len="med"/>
+                    </a:lnL>
+                    <a:lnR w="9525" cap="flat" cmpd="sng" algn="ctr">
+                      <a:solidFill>
+                        <a:srgbClr val="DCE3EA"/>
+                      </a:solidFill>
+                      <a:prstDash val="solid"/>
+                      <a:round/>
+                      <a:headEnd type="none" w="med" len="med"/>
+                      <a:tailEnd type="none" w="med" len="med"/>
+                    </a:lnR>
+                    <a:lnT w="9525" cap="flat" cmpd="sng" algn="ctr">
+                      <a:solidFill>
+                        <a:srgbClr val="DCE3EA"/>
+                      </a:solidFill>
+                      <a:prstDash val="solid"/>
+                      <a:round/>
+                      <a:headEnd type="none" w="med" len="med"/>
+                      <a:tailEnd type="none" w="med" len="med"/>
+                    </a:lnT>
+                    <a:lnB w="9525" cap="flat" cmpd="sng" algn="ctr">
+                      <a:solidFill>
+                        <a:srgbClr val="DCE3EA"/>
+                      </a:solidFill>
+                      <a:prstDash val="solid"/>
+                      <a:round/>
+                      <a:headEnd type="none" w="med" len="med"/>
+                      <a:tailEnd type="none" w="med" len="med"/>
+                    </a:lnB>
+                    <a:solidFill>
+                      <a:srgbClr val="1F6F8B"/>
+                    </a:solidFill>
+                  </a:tcPr>
+                </a:tc>
+                <a:tc>
+                  <a:txBody>
+                    <a:bodyPr/>
+                    <a:lstStyle/>
+                    <a:p>
+                      <a:pPr indent="0" marL="0">
+                        <a:buNone/>
+                      </a:pPr>
+                      <a:r>
+                        <a:rPr lang="en-US" sz="1100" b="1" dirty="0">
+                          <a:solidFill>
+                            <a:srgbClr val="FFFFFF"/>
+                          </a:solidFill>
+                          <a:latin typeface="Calibri" pitchFamily="34" charset="0"/>
+                          <a:ea typeface="Calibri" pitchFamily="34" charset="-122"/>
+                          <a:cs typeface="Calibri" pitchFamily="34" charset="-120"/>
+                        </a:rPr>
+                        <a:t>Nguyên nhân</a:t>
+                      </a:r>
+                      <a:endParaRPr lang="en-US" sz="1100" dirty="0">
+                        <a:latin typeface="Calibri" charset="0"/>
+                        <a:ea typeface="Calibri" charset="0"/>
+                        <a:cs typeface="Calibri" charset="0"/>
+                      </a:endParaRPr>
+                    </a:p>
+                  </a:txBody>
+                  <a:tcPr marL="91440" marR="91440" marT="45720" marB="45720" anchor="ctr">
+                    <a:lnL w="9525" cap="flat" cmpd="sng" algn="ctr">
+                      <a:solidFill>
+                        <a:srgbClr val="DCE3EA"/>
+                      </a:solidFill>
+                      <a:prstDash val="solid"/>
+                      <a:round/>
+                      <a:headEnd type="none" w="med" len="med"/>
+                      <a:tailEnd type="none" w="med" len="med"/>
+                    </a:lnL>
+                    <a:lnR w="9525" cap="flat" cmpd="sng" algn="ctr">
+                      <a:solidFill>
+                        <a:srgbClr val="DCE3EA"/>
+                      </a:solidFill>
+                      <a:prstDash val="solid"/>
+                      <a:round/>
+                      <a:headEnd type="none" w="med" len="med"/>
+                      <a:tailEnd type="none" w="med" len="med"/>
+                    </a:lnR>
+                    <a:lnT w="9525" cap="flat" cmpd="sng" algn="ctr">
+                      <a:solidFill>
+                        <a:srgbClr val="DCE3EA"/>
+                      </a:solidFill>
+                      <a:prstDash val="solid"/>
+                      <a:round/>
+                      <a:headEnd type="none" w="med" len="med"/>
+                      <a:tailEnd type="none" w="med" len="med"/>
+                    </a:lnT>
+                    <a:lnB w="9525" cap="flat" cmpd="sng" algn="ctr">
+                      <a:solidFill>
+                        <a:srgbClr val="DCE3EA"/>
+                      </a:solidFill>
+                      <a:prstDash val="solid"/>
+                      <a:round/>
+                      <a:headEnd type="none" w="med" len="med"/>
+                      <a:tailEnd type="none" w="med" len="med"/>
+                    </a:lnB>
+                    <a:solidFill>
+                      <a:srgbClr val="1F6F8B"/>
+                    </a:solidFill>
+                  </a:tcPr>
+                </a:tc>
+                <a:tc>
+                  <a:txBody>
+                    <a:bodyPr/>
+                    <a:lstStyle/>
+                    <a:p>
+                      <a:pPr indent="0" marL="0">
+                        <a:buNone/>
+                      </a:pPr>
+                      <a:r>
+                        <a:rPr lang="en-US" sz="1100" b="1" dirty="0">
+                          <a:solidFill>
+                            <a:srgbClr val="FFFFFF"/>
+                          </a:solidFill>
+                          <a:latin typeface="Calibri" pitchFamily="34" charset="0"/>
+                          <a:ea typeface="Calibri" pitchFamily="34" charset="-122"/>
+                          <a:cs typeface="Calibri" pitchFamily="34" charset="-120"/>
+                        </a:rPr>
+                        <a:t>Cách xử lý</a:t>
+                      </a:r>
+                      <a:endParaRPr lang="en-US" sz="1100" dirty="0">
+                        <a:latin typeface="Calibri" charset="0"/>
+                        <a:ea typeface="Calibri" charset="0"/>
+                        <a:cs typeface="Calibri" charset="0"/>
+                      </a:endParaRPr>
+                    </a:p>
+                  </a:txBody>
+                  <a:tcPr marL="91440" marR="91440" marT="45720" marB="45720" anchor="ctr">
+                    <a:lnL w="9525" cap="flat" cmpd="sng" algn="ctr">
+                      <a:solidFill>
+                        <a:srgbClr val="DCE3EA"/>
+                      </a:solidFill>
+                      <a:prstDash val="solid"/>
+                      <a:round/>
+                      <a:headEnd type="none" w="med" len="med"/>
+                      <a:tailEnd type="none" w="med" len="med"/>
+                    </a:lnL>
+                    <a:lnR w="9525" cap="flat" cmpd="sng" algn="ctr">
+                      <a:solidFill>
+                        <a:srgbClr val="DCE3EA"/>
+                      </a:solidFill>
+                      <a:prstDash val="solid"/>
+                      <a:round/>
+                      <a:headEnd type="none" w="med" len="med"/>
+                      <a:tailEnd type="none" w="med" len="med"/>
+                    </a:lnR>
+                    <a:lnT w="9525" cap="flat" cmpd="sng" algn="ctr">
+                      <a:solidFill>
+                        <a:srgbClr val="DCE3EA"/>
+                      </a:solidFill>
+                      <a:prstDash val="solid"/>
+                      <a:round/>
+                      <a:headEnd type="none" w="med" len="med"/>
+                      <a:tailEnd type="none" w="med" len="med"/>
+                    </a:lnT>
+                    <a:lnB w="9525" cap="flat" cmpd="sng" algn="ctr">
+                      <a:solidFill>
+                        <a:srgbClr val="DCE3EA"/>
+                      </a:solidFill>
+                      <a:prstDash val="solid"/>
+                      <a:round/>
+                      <a:headEnd type="none" w="med" len="med"/>
+                      <a:tailEnd type="none" w="med" len="med"/>
+                    </a:lnB>
+                    <a:solidFill>
+                      <a:srgbClr val="1F6F8B"/>
+                    </a:solidFill>
+                  </a:tcPr>
+                </a:tc>
+              </a:tr>
+              <a:tr h="502920">
+                <a:tc>
+                  <a:txBody>
+                    <a:bodyPr/>
+                    <a:lstStyle/>
+                    <a:p>
+                      <a:pPr indent="0" marL="0">
+                        <a:buNone/>
+                      </a:pPr>
+                      <a:r>
+                        <a:rPr lang="en-US" sz="1100" dirty="0">
+                          <a:solidFill>
+                            <a:srgbClr val="1B2B3A"/>
+                          </a:solidFill>
+                          <a:latin typeface="Calibri" pitchFamily="34" charset="0"/>
+                          <a:ea typeface="Calibri" pitchFamily="34" charset="-122"/>
+                          <a:cs typeface="Calibri" pitchFamily="34" charset="-120"/>
+                        </a:rPr>
+                        <a:t>Script gốc không chạy</a:t>
+                      </a:r>
+                      <a:endParaRPr lang="en-US" sz="1100" dirty="0">
+                        <a:latin typeface="Calibri" charset="0"/>
+                        <a:ea typeface="Calibri" charset="0"/>
+                        <a:cs typeface="Calibri" charset="0"/>
+                      </a:endParaRPr>
+                    </a:p>
+                  </a:txBody>
+                  <a:tcPr marL="91440" marR="91440" marT="45720" marB="45720" anchor="ctr">
+                    <a:lnL w="9525" cap="flat" cmpd="sng" algn="ctr">
+                      <a:solidFill>
+                        <a:srgbClr val="DCE3EA"/>
+                      </a:solidFill>
+                      <a:prstDash val="solid"/>
+                      <a:round/>
+                      <a:headEnd type="none" w="med" len="med"/>
+                      <a:tailEnd type="none" w="med" len="med"/>
+                    </a:lnL>
+                    <a:lnR w="9525" cap="flat" cmpd="sng" algn="ctr">
+                      <a:solidFill>
+                        <a:srgbClr val="DCE3EA"/>
+                      </a:solidFill>
+                      <a:prstDash val="solid"/>
+                      <a:round/>
+                      <a:headEnd type="none" w="med" len="med"/>
+                      <a:tailEnd type="none" w="med" len="med"/>
+                    </a:lnR>
+                    <a:lnT w="9525" cap="flat" cmpd="sng" algn="ctr">
+                      <a:solidFill>
+                        <a:srgbClr val="DCE3EA"/>
+                      </a:solidFill>
+                      <a:prstDash val="solid"/>
+                      <a:round/>
+                      <a:headEnd type="none" w="med" len="med"/>
+                      <a:tailEnd type="none" w="med" len="med"/>
+                    </a:lnT>
+                    <a:lnB w="9525" cap="flat" cmpd="sng" algn="ctr">
+                      <a:solidFill>
+                        <a:srgbClr val="DCE3EA"/>
+                      </a:solidFill>
+                      <a:prstDash val="solid"/>
+                      <a:round/>
+                      <a:headEnd type="none" w="med" len="med"/>
+                      <a:tailEnd type="none" w="med" len="med"/>
+                    </a:lnB>
+                  </a:tcPr>
+                </a:tc>
+                <a:tc>
+                  <a:txBody>
+                    <a:bodyPr/>
+                    <a:lstStyle/>
+                    <a:p>
+                      <a:pPr indent="0" marL="0">
+                        <a:buNone/>
+                      </a:pPr>
+                      <a:r>
+                        <a:rPr lang="en-US" sz="1100" dirty="0">
+                          <a:solidFill>
+                            <a:srgbClr val="1B2B3A"/>
+                          </a:solidFill>
+                          <a:latin typeface="Calibri" pitchFamily="34" charset="0"/>
+                          <a:ea typeface="Calibri" pitchFamily="34" charset="-122"/>
+                          <a:cs typeface="Calibri" pitchFamily="34" charset="-120"/>
+                        </a:rPr>
+                        <a:t>Dùng f-string kiểu Python 3.12, môi trường là 3.11</a:t>
+                      </a:r>
+                      <a:endParaRPr lang="en-US" sz="1100" dirty="0">
+                        <a:latin typeface="Calibri" charset="0"/>
+                        <a:ea typeface="Calibri" charset="0"/>
+                        <a:cs typeface="Calibri" charset="0"/>
+                      </a:endParaRPr>
+                    </a:p>
+                  </a:txBody>
+                  <a:tcPr marL="91440" marR="91440" marT="45720" marB="45720" anchor="ctr">
+                    <a:lnL w="9525" cap="flat" cmpd="sng" algn="ctr">
+                      <a:solidFill>
+                        <a:srgbClr val="DCE3EA"/>
+                      </a:solidFill>
+                      <a:prstDash val="solid"/>
+                      <a:round/>
+                      <a:headEnd type="none" w="med" len="med"/>
+                      <a:tailEnd type="none" w="med" len="med"/>
+                    </a:lnL>
+                    <a:lnR w="9525" cap="flat" cmpd="sng" algn="ctr">
+                      <a:solidFill>
+                        <a:srgbClr val="DCE3EA"/>
+                      </a:solidFill>
+                      <a:prstDash val="solid"/>
+                      <a:round/>
+                      <a:headEnd type="none" w="med" len="med"/>
+                      <a:tailEnd type="none" w="med" len="med"/>
+                    </a:lnR>
+                    <a:lnT w="9525" cap="flat" cmpd="sng" algn="ctr">
+                      <a:solidFill>
+                        <a:srgbClr val="DCE3EA"/>
+                      </a:solidFill>
+                      <a:prstDash val="solid"/>
+                      <a:round/>
+                      <a:headEnd type="none" w="med" len="med"/>
+                      <a:tailEnd type="none" w="med" len="med"/>
+                    </a:lnT>
+                    <a:lnB w="9525" cap="flat" cmpd="sng" algn="ctr">
+                      <a:solidFill>
+                        <a:srgbClr val="DCE3EA"/>
+                      </a:solidFill>
+                      <a:prstDash val="solid"/>
+                      <a:round/>
+                      <a:headEnd type="none" w="med" len="med"/>
+                      <a:tailEnd type="none" w="med" len="med"/>
+                    </a:lnB>
+                  </a:tcPr>
+                </a:tc>
+                <a:tc>
+                  <a:txBody>
+                    <a:bodyPr/>
+                    <a:lstStyle/>
+                    <a:p>
+                      <a:pPr indent="0" marL="0">
+                        <a:buNone/>
+                      </a:pPr>
+                      <a:r>
+                        <a:rPr lang="en-US" sz="1100" dirty="0">
+                          <a:solidFill>
+                            <a:srgbClr val="1B2B3A"/>
+                          </a:solidFill>
+                          <a:latin typeface="Calibri" pitchFamily="34" charset="0"/>
+                          <a:ea typeface="Calibri" pitchFamily="34" charset="-122"/>
+                          <a:cs typeface="Calibri" pitchFamily="34" charset="-120"/>
+                        </a:rPr>
+                        <a:t>Viết script bọc ngoài, không sửa mã gốc</a:t>
+                      </a:r>
+                      <a:endParaRPr lang="en-US" sz="1100" dirty="0">
+                        <a:latin typeface="Calibri" charset="0"/>
+                        <a:ea typeface="Calibri" charset="0"/>
+                        <a:cs typeface="Calibri" charset="0"/>
+                      </a:endParaRPr>
+                    </a:p>
+                  </a:txBody>
+                  <a:tcPr marL="91440" marR="91440" marT="45720" marB="45720" anchor="ctr">
+                    <a:lnL w="9525" cap="flat" cmpd="sng" algn="ctr">
+                      <a:solidFill>
+                        <a:srgbClr val="DCE3EA"/>
+                      </a:solidFill>
+                      <a:prstDash val="solid"/>
+                      <a:round/>
+                      <a:headEnd type="none" w="med" len="med"/>
+                      <a:tailEnd type="none" w="med" len="med"/>
+                    </a:lnL>
+                    <a:lnR w="9525" cap="flat" cmpd="sng" algn="ctr">
+                      <a:solidFill>
+                        <a:srgbClr val="DCE3EA"/>
+                      </a:solidFill>
+                      <a:prstDash val="solid"/>
+                      <a:round/>
+                      <a:headEnd type="none" w="med" len="med"/>
+                      <a:tailEnd type="none" w="med" len="med"/>
+                    </a:lnR>
+                    <a:lnT w="9525" cap="flat" cmpd="sng" algn="ctr">
+                      <a:solidFill>
+                        <a:srgbClr val="DCE3EA"/>
+                      </a:solidFill>
+                      <a:prstDash val="solid"/>
+                      <a:round/>
+                      <a:headEnd type="none" w="med" len="med"/>
+                      <a:tailEnd type="none" w="med" len="med"/>
+                    </a:lnT>
+                    <a:lnB w="9525" cap="flat" cmpd="sng" algn="ctr">
+                      <a:solidFill>
+                        <a:srgbClr val="DCE3EA"/>
+                      </a:solidFill>
+                      <a:prstDash val="solid"/>
+                      <a:round/>
+                      <a:headEnd type="none" w="med" len="med"/>
+                      <a:tailEnd type="none" w="med" len="med"/>
+                    </a:lnB>
+                  </a:tcPr>
+                </a:tc>
+              </a:tr>
+              <a:tr h="502920">
+                <a:tc>
+                  <a:txBody>
+                    <a:bodyPr/>
+                    <a:lstStyle/>
+                    <a:p>
+                      <a:pPr indent="0" marL="0">
+                        <a:buNone/>
+                      </a:pPr>
+                      <a:r>
+                        <a:rPr lang="en-US" sz="1100" dirty="0">
+                          <a:solidFill>
+                            <a:srgbClr val="1B2B3A"/>
+                          </a:solidFill>
+                          <a:latin typeface="Calibri" pitchFamily="34" charset="0"/>
+                          <a:ea typeface="Calibri" pitchFamily="34" charset="-122"/>
+                          <a:cs typeface="Calibri" pitchFamily="34" charset="-120"/>
+                        </a:rPr>
+                        <a:t>Lỗi “meta tensor” khi chạy song song</a:t>
+                      </a:r>
+                      <a:endParaRPr lang="en-US" sz="1100" dirty="0">
+                        <a:latin typeface="Calibri" charset="0"/>
+                        <a:ea typeface="Calibri" charset="0"/>
+                        <a:cs typeface="Calibri" charset="0"/>
+                      </a:endParaRPr>
+                    </a:p>
+                  </a:txBody>
+                  <a:tcPr marL="91440" marR="91440" marT="45720" marB="45720" anchor="ctr">
+                    <a:lnL w="9525" cap="flat" cmpd="sng" algn="ctr">
+                      <a:solidFill>
+                        <a:srgbClr val="DCE3EA"/>
+                      </a:solidFill>
+                      <a:prstDash val="solid"/>
+                      <a:round/>
+                      <a:headEnd type="none" w="med" len="med"/>
+                      <a:tailEnd type="none" w="med" len="med"/>
+                    </a:lnL>
+                    <a:lnR w="9525" cap="flat" cmpd="sng" algn="ctr">
+                      <a:solidFill>
+                        <a:srgbClr val="DCE3EA"/>
+                      </a:solidFill>
+                      <a:prstDash val="solid"/>
+                      <a:round/>
+                      <a:headEnd type="none" w="med" len="med"/>
+                      <a:tailEnd type="none" w="med" len="med"/>
+                    </a:lnR>
+                    <a:lnT w="9525" cap="flat" cmpd="sng" algn="ctr">
+                      <a:solidFill>
+                        <a:srgbClr val="DCE3EA"/>
+                      </a:solidFill>
+                      <a:prstDash val="solid"/>
+                      <a:round/>
+                      <a:headEnd type="none" w="med" len="med"/>
+                      <a:tailEnd type="none" w="med" len="med"/>
+                    </a:lnT>
+                    <a:lnB w="9525" cap="flat" cmpd="sng" algn="ctr">
+                      <a:solidFill>
+                        <a:srgbClr val="DCE3EA"/>
+                      </a:solidFill>
+                      <a:prstDash val="solid"/>
+                      <a:round/>
+                      <a:headEnd type="none" w="med" len="med"/>
+                      <a:tailEnd type="none" w="med" len="med"/>
+                    </a:lnB>
+                  </a:tcPr>
+                </a:tc>
+                <a:tc>
+                  <a:txBody>
+                    <a:bodyPr/>
+                    <a:lstStyle/>
+                    <a:p>
+                      <a:pPr indent="0" marL="0">
+                        <a:buNone/>
+                      </a:pPr>
+                      <a:r>
+                        <a:rPr lang="en-US" sz="1100" dirty="0">
+                          <a:solidFill>
+                            <a:srgbClr val="1B2B3A"/>
+                          </a:solidFill>
+                          <a:latin typeface="Calibri" pitchFamily="34" charset="0"/>
+                          <a:ea typeface="Calibri" pitchFamily="34" charset="-122"/>
+                          <a:cs typeface="Calibri" pitchFamily="34" charset="-120"/>
+                        </a:rPr>
+                        <a:t>Nhiều luồng cùng nạp model, đụng nhau</a:t>
+                      </a:r>
+                      <a:endParaRPr lang="en-US" sz="1100" dirty="0">
+                        <a:latin typeface="Calibri" charset="0"/>
+                        <a:ea typeface="Calibri" charset="0"/>
+                        <a:cs typeface="Calibri" charset="0"/>
+                      </a:endParaRPr>
+                    </a:p>
+                  </a:txBody>
+                  <a:tcPr marL="91440" marR="91440" marT="45720" marB="45720" anchor="ctr">
+                    <a:lnL w="9525" cap="flat" cmpd="sng" algn="ctr">
+                      <a:solidFill>
+                        <a:srgbClr val="DCE3EA"/>
+                      </a:solidFill>
+                      <a:prstDash val="solid"/>
+                      <a:round/>
+                      <a:headEnd type="none" w="med" len="med"/>
+                      <a:tailEnd type="none" w="med" len="med"/>
+                    </a:lnL>
+                    <a:lnR w="9525" cap="flat" cmpd="sng" algn="ctr">
+                      <a:solidFill>
+                        <a:srgbClr val="DCE3EA"/>
+                      </a:solidFill>
+                      <a:prstDash val="solid"/>
+                      <a:round/>
+                      <a:headEnd type="none" w="med" len="med"/>
+                      <a:tailEnd type="none" w="med" len="med"/>
+                    </a:lnR>
+                    <a:lnT w="9525" cap="flat" cmpd="sng" algn="ctr">
+                      <a:solidFill>
+                        <a:srgbClr val="DCE3EA"/>
+                      </a:solidFill>
+                      <a:prstDash val="solid"/>
+                      <a:round/>
+                      <a:headEnd type="none" w="med" len="med"/>
+                      <a:tailEnd type="none" w="med" len="med"/>
+                    </a:lnT>
+                    <a:lnB w="9525" cap="flat" cmpd="sng" algn="ctr">
+                      <a:solidFill>
+                        <a:srgbClr val="DCE3EA"/>
+                      </a:solidFill>
+                      <a:prstDash val="solid"/>
+                      <a:round/>
+                      <a:headEnd type="none" w="med" len="med"/>
+                      <a:tailEnd type="none" w="med" len="med"/>
+                    </a:lnB>
+                  </a:tcPr>
+                </a:tc>
+                <a:tc>
+                  <a:txBody>
+                    <a:bodyPr/>
+                    <a:lstStyle/>
+                    <a:p>
+                      <a:pPr indent="0" marL="0">
+                        <a:buNone/>
+                      </a:pPr>
+                      <a:r>
+                        <a:rPr lang="en-US" sz="1100" dirty="0">
+                          <a:solidFill>
+                            <a:srgbClr val="1B2B3A"/>
+                          </a:solidFill>
+                          <a:latin typeface="Calibri" pitchFamily="34" charset="0"/>
+                          <a:ea typeface="Calibri" pitchFamily="34" charset="-122"/>
+                          <a:cs typeface="Calibri" pitchFamily="34" charset="-120"/>
+                        </a:rPr>
+                        <a:t>Khóa phần nạp model; mỗi luồng nạp một lần</a:t>
+                      </a:r>
+                      <a:endParaRPr lang="en-US" sz="1100" dirty="0">
+                        <a:latin typeface="Calibri" charset="0"/>
+                        <a:ea typeface="Calibri" charset="0"/>
+                        <a:cs typeface="Calibri" charset="0"/>
+                      </a:endParaRPr>
+                    </a:p>
+                  </a:txBody>
+                  <a:tcPr marL="91440" marR="91440" marT="45720" marB="45720" anchor="ctr">
+                    <a:lnL w="9525" cap="flat" cmpd="sng" algn="ctr">
+                      <a:solidFill>
+                        <a:srgbClr val="DCE3EA"/>
+                      </a:solidFill>
+                      <a:prstDash val="solid"/>
+                      <a:round/>
+                      <a:headEnd type="none" w="med" len="med"/>
+                      <a:tailEnd type="none" w="med" len="med"/>
+                    </a:lnL>
+                    <a:lnR w="9525" cap="flat" cmpd="sng" algn="ctr">
+                      <a:solidFill>
+                        <a:srgbClr val="DCE3EA"/>
+                      </a:solidFill>
+                      <a:prstDash val="solid"/>
+                      <a:round/>
+                      <a:headEnd type="none" w="med" len="med"/>
+                      <a:tailEnd type="none" w="med" len="med"/>
+                    </a:lnR>
+                    <a:lnT w="9525" cap="flat" cmpd="sng" algn="ctr">
+                      <a:solidFill>
+                        <a:srgbClr val="DCE3EA"/>
+                      </a:solidFill>
+                      <a:prstDash val="solid"/>
+                      <a:round/>
+                      <a:headEnd type="none" w="med" len="med"/>
+                      <a:tailEnd type="none" w="med" len="med"/>
+                    </a:lnT>
+                    <a:lnB w="9525" cap="flat" cmpd="sng" algn="ctr">
+                      <a:solidFill>
+                        <a:srgbClr val="DCE3EA"/>
+                      </a:solidFill>
+                      <a:prstDash val="solid"/>
+                      <a:round/>
+                      <a:headEnd type="none" w="med" len="med"/>
+                      <a:tailEnd type="none" w="med" len="med"/>
+                    </a:lnB>
+                  </a:tcPr>
+                </a:tc>
+              </a:tr>
+              <a:tr h="502920">
+                <a:tc>
+                  <a:txBody>
+                    <a:bodyPr/>
+                    <a:lstStyle/>
+                    <a:p>
+                      <a:pPr indent="0" marL="0">
+                        <a:buNone/>
+                      </a:pPr>
+                      <a:r>
+                        <a:rPr lang="en-US" sz="1100" dirty="0">
+                          <a:solidFill>
+                            <a:srgbClr val="1B2B3A"/>
+                          </a:solidFill>
+                          <a:latin typeface="Calibri" pitchFamily="34" charset="0"/>
+                          <a:ea typeface="Calibri" pitchFamily="34" charset="-122"/>
+                          <a:cs typeface="Calibri" pitchFamily="34" charset="-120"/>
+                        </a:rPr>
+                        <a:t>Cạn RAM (pagefile)</a:t>
+                      </a:r>
+                      <a:endParaRPr lang="en-US" sz="1100" dirty="0">
+                        <a:latin typeface="Calibri" charset="0"/>
+                        <a:ea typeface="Calibri" charset="0"/>
+                        <a:cs typeface="Calibri" charset="0"/>
+                      </a:endParaRPr>
+                    </a:p>
+                  </a:txBody>
+                  <a:tcPr marL="91440" marR="91440" marT="45720" marB="45720" anchor="ctr">
+                    <a:lnL w="9525" cap="flat" cmpd="sng" algn="ctr">
+                      <a:solidFill>
+                        <a:srgbClr val="DCE3EA"/>
+                      </a:solidFill>
+                      <a:prstDash val="solid"/>
+                      <a:round/>
+                      <a:headEnd type="none" w="med" len="med"/>
+                      <a:tailEnd type="none" w="med" len="med"/>
+                    </a:lnL>
+                    <a:lnR w="9525" cap="flat" cmpd="sng" algn="ctr">
+                      <a:solidFill>
+                        <a:srgbClr val="DCE3EA"/>
+                      </a:solidFill>
+                      <a:prstDash val="solid"/>
+                      <a:round/>
+                      <a:headEnd type="none" w="med" len="med"/>
+                      <a:tailEnd type="none" w="med" len="med"/>
+                    </a:lnR>
+                    <a:lnT w="9525" cap="flat" cmpd="sng" algn="ctr">
+                      <a:solidFill>
+                        <a:srgbClr val="DCE3EA"/>
+                      </a:solidFill>
+                      <a:prstDash val="solid"/>
+                      <a:round/>
+                      <a:headEnd type="none" w="med" len="med"/>
+                      <a:tailEnd type="none" w="med" len="med"/>
+                    </a:lnT>
+                    <a:lnB w="9525" cap="flat" cmpd="sng" algn="ctr">
+                      <a:solidFill>
+                        <a:srgbClr val="DCE3EA"/>
+                      </a:solidFill>
+                      <a:prstDash val="solid"/>
+                      <a:round/>
+                      <a:headEnd type="none" w="med" len="med"/>
+                      <a:tailEnd type="none" w="med" len="med"/>
+                    </a:lnB>
+                  </a:tcPr>
+                </a:tc>
+                <a:tc>
+                  <a:txBody>
+                    <a:bodyPr/>
+                    <a:lstStyle/>
+                    <a:p>
+                      <a:pPr indent="0" marL="0">
+                        <a:buNone/>
+                      </a:pPr>
+                      <a:r>
+                        <a:rPr lang="en-US" sz="1100" dirty="0">
+                          <a:solidFill>
+                            <a:srgbClr val="1B2B3A"/>
+                          </a:solidFill>
+                          <a:latin typeface="Calibri" pitchFamily="34" charset="0"/>
+                          <a:ea typeface="Calibri" pitchFamily="34" charset="-122"/>
+                          <a:cs typeface="Calibri" pitchFamily="34" charset="-120"/>
+                        </a:rPr>
+                        <a:t>Nạp lại model cho từng câu, không giải phóng kịp</a:t>
+                      </a:r>
+                      <a:endParaRPr lang="en-US" sz="1100" dirty="0">
+                        <a:latin typeface="Calibri" charset="0"/>
+                        <a:ea typeface="Calibri" charset="0"/>
+                        <a:cs typeface="Calibri" charset="0"/>
+                      </a:endParaRPr>
+                    </a:p>
+                  </a:txBody>
+                  <a:tcPr marL="91440" marR="91440" marT="45720" marB="45720" anchor="ctr">
+                    <a:lnL w="9525" cap="flat" cmpd="sng" algn="ctr">
+                      <a:solidFill>
+                        <a:srgbClr val="DCE3EA"/>
+                      </a:solidFill>
+                      <a:prstDash val="solid"/>
+                      <a:round/>
+                      <a:headEnd type="none" w="med" len="med"/>
+                      <a:tailEnd type="none" w="med" len="med"/>
+                    </a:lnL>
+                    <a:lnR w="9525" cap="flat" cmpd="sng" algn="ctr">
+                      <a:solidFill>
+                        <a:srgbClr val="DCE3EA"/>
+                      </a:solidFill>
+                      <a:prstDash val="solid"/>
+                      <a:round/>
+                      <a:headEnd type="none" w="med" len="med"/>
+                      <a:tailEnd type="none" w="med" len="med"/>
+                    </a:lnR>
+                    <a:lnT w="9525" cap="flat" cmpd="sng" algn="ctr">
+                      <a:solidFill>
+                        <a:srgbClr val="DCE3EA"/>
+                      </a:solidFill>
+                      <a:prstDash val="solid"/>
+                      <a:round/>
+                      <a:headEnd type="none" w="med" len="med"/>
+                      <a:tailEnd type="none" w="med" len="med"/>
+                    </a:lnT>
+                    <a:lnB w="9525" cap="flat" cmpd="sng" algn="ctr">
+                      <a:solidFill>
+                        <a:srgbClr val="DCE3EA"/>
+                      </a:solidFill>
+                      <a:prstDash val="solid"/>
+                      <a:round/>
+                      <a:headEnd type="none" w="med" len="med"/>
+                      <a:tailEnd type="none" w="med" len="med"/>
+                    </a:lnB>
+                  </a:tcPr>
+                </a:tc>
+                <a:tc>
+                  <a:txBody>
+                    <a:bodyPr/>
+                    <a:lstStyle/>
+                    <a:p>
+                      <a:pPr indent="0" marL="0">
+                        <a:buNone/>
+                      </a:pPr>
+                      <a:r>
+                        <a:rPr lang="en-US" sz="1100" dirty="0">
+                          <a:solidFill>
+                            <a:srgbClr val="1B2B3A"/>
+                          </a:solidFill>
+                          <a:latin typeface="Calibri" pitchFamily="34" charset="0"/>
+                          <a:ea typeface="Calibri" pitchFamily="34" charset="-122"/>
+                          <a:cs typeface="Calibri" pitchFamily="34" charset="-120"/>
+                        </a:rPr>
+                        <a:t>Cache model theo luồng, dọn bộ nhớ sau mỗi câu</a:t>
+                      </a:r>
+                      <a:endParaRPr lang="en-US" sz="1100" dirty="0">
+                        <a:latin typeface="Calibri" charset="0"/>
+                        <a:ea typeface="Calibri" charset="0"/>
+                        <a:cs typeface="Calibri" charset="0"/>
+                      </a:endParaRPr>
+                    </a:p>
+                  </a:txBody>
+                  <a:tcPr marL="91440" marR="91440" marT="45720" marB="45720" anchor="ctr">
+                    <a:lnL w="9525" cap="flat" cmpd="sng" algn="ctr">
+                      <a:solidFill>
+                        <a:srgbClr val="DCE3EA"/>
+                      </a:solidFill>
+                      <a:prstDash val="solid"/>
+                      <a:round/>
+                      <a:headEnd type="none" w="med" len="med"/>
+                      <a:tailEnd type="none" w="med" len="med"/>
+                    </a:lnL>
+                    <a:lnR w="9525" cap="flat" cmpd="sng" algn="ctr">
+                      <a:solidFill>
+                        <a:srgbClr val="DCE3EA"/>
+                      </a:solidFill>
+                      <a:prstDash val="solid"/>
+                      <a:round/>
+                      <a:headEnd type="none" w="med" len="med"/>
+                      <a:tailEnd type="none" w="med" len="med"/>
+                    </a:lnR>
+                    <a:lnT w="9525" cap="flat" cmpd="sng" algn="ctr">
+                      <a:solidFill>
+                        <a:srgbClr val="DCE3EA"/>
+                      </a:solidFill>
+                      <a:prstDash val="solid"/>
+                      <a:round/>
+                      <a:headEnd type="none" w="med" len="med"/>
+                      <a:tailEnd type="none" w="med" len="med"/>
+                    </a:lnT>
+                    <a:lnB w="9525" cap="flat" cmpd="sng" algn="ctr">
+                      <a:solidFill>
+                        <a:srgbClr val="DCE3EA"/>
+                      </a:solidFill>
+                      <a:prstDash val="solid"/>
+                      <a:round/>
+                      <a:headEnd type="none" w="med" len="med"/>
+                      <a:tailEnd type="none" w="med" len="med"/>
+                    </a:lnB>
+                  </a:tcPr>
+                </a:tc>
+              </a:tr>
+              <a:tr h="502920">
+                <a:tc>
+                  <a:txBody>
+                    <a:bodyPr/>
+                    <a:lstStyle/>
+                    <a:p>
+                      <a:pPr indent="0" marL="0">
+                        <a:buNone/>
+                      </a:pPr>
+                      <a:r>
+                        <a:rPr lang="en-US" sz="1100" dirty="0">
+                          <a:solidFill>
+                            <a:srgbClr val="1B2B3A"/>
+                          </a:solidFill>
+                          <a:latin typeface="Calibri" pitchFamily="34" charset="0"/>
+                          <a:ea typeface="Calibri" pitchFamily="34" charset="-122"/>
+                          <a:cs typeface="Calibri" pitchFamily="34" charset="-120"/>
+                        </a:rPr>
+                        <a:t>Windows chặn Python</a:t>
+                      </a:r>
+                      <a:endParaRPr lang="en-US" sz="1100" dirty="0">
+                        <a:latin typeface="Calibri" charset="0"/>
+                        <a:ea typeface="Calibri" charset="0"/>
+                        <a:cs typeface="Calibri" charset="0"/>
+                      </a:endParaRPr>
+                    </a:p>
+                  </a:txBody>
+                  <a:tcPr marL="91440" marR="91440" marT="45720" marB="45720" anchor="ctr">
+                    <a:lnL w="9525" cap="flat" cmpd="sng" algn="ctr">
+                      <a:solidFill>
+                        <a:srgbClr val="DCE3EA"/>
+                      </a:solidFill>
+                      <a:prstDash val="solid"/>
+                      <a:round/>
+                      <a:headEnd type="none" w="med" len="med"/>
+                      <a:tailEnd type="none" w="med" len="med"/>
+                    </a:lnL>
+                    <a:lnR w="9525" cap="flat" cmpd="sng" algn="ctr">
+                      <a:solidFill>
+                        <a:srgbClr val="DCE3EA"/>
+                      </a:solidFill>
+                      <a:prstDash val="solid"/>
+                      <a:round/>
+                      <a:headEnd type="none" w="med" len="med"/>
+                      <a:tailEnd type="none" w="med" len="med"/>
+                    </a:lnR>
+                    <a:lnT w="9525" cap="flat" cmpd="sng" algn="ctr">
+                      <a:solidFill>
+                        <a:srgbClr val="DCE3EA"/>
+                      </a:solidFill>
+                      <a:prstDash val="solid"/>
+                      <a:round/>
+                      <a:headEnd type="none" w="med" len="med"/>
+                      <a:tailEnd type="none" w="med" len="med"/>
+                    </a:lnT>
+                    <a:lnB w="9525" cap="flat" cmpd="sng" algn="ctr">
+                      <a:solidFill>
+                        <a:srgbClr val="DCE3EA"/>
+                      </a:solidFill>
+                      <a:prstDash val="solid"/>
+                      <a:round/>
+                      <a:headEnd type="none" w="med" len="med"/>
+                      <a:tailEnd type="none" w="med" len="med"/>
+                    </a:lnB>
+                  </a:tcPr>
+                </a:tc>
+                <a:tc>
+                  <a:txBody>
+                    <a:bodyPr/>
+                    <a:lstStyle/>
+                    <a:p>
+                      <a:pPr indent="0" marL="0">
+                        <a:buNone/>
+                      </a:pPr>
+                      <a:r>
+                        <a:rPr lang="en-US" sz="1100" dirty="0">
+                          <a:solidFill>
+                            <a:srgbClr val="1B2B3A"/>
+                          </a:solidFill>
+                          <a:latin typeface="Calibri" pitchFamily="34" charset="0"/>
+                          <a:ea typeface="Calibri" pitchFamily="34" charset="-122"/>
+                          <a:cs typeface="Calibri" pitchFamily="34" charset="-120"/>
+                        </a:rPr>
+                        <a:t>Smart App Control chặn file chưa ký</a:t>
+                      </a:r>
+                      <a:endParaRPr lang="en-US" sz="1100" dirty="0">
+                        <a:latin typeface="Calibri" charset="0"/>
+                        <a:ea typeface="Calibri" charset="0"/>
+                        <a:cs typeface="Calibri" charset="0"/>
+                      </a:endParaRPr>
+                    </a:p>
+                  </a:txBody>
+                  <a:tcPr marL="91440" marR="91440" marT="45720" marB="45720" anchor="ctr">
+                    <a:lnL w="9525" cap="flat" cmpd="sng" algn="ctr">
+                      <a:solidFill>
+                        <a:srgbClr val="DCE3EA"/>
+                      </a:solidFill>
+                      <a:prstDash val="solid"/>
+                      <a:round/>
+                      <a:headEnd type="none" w="med" len="med"/>
+                      <a:tailEnd type="none" w="med" len="med"/>
+                    </a:lnL>
+                    <a:lnR w="9525" cap="flat" cmpd="sng" algn="ctr">
+                      <a:solidFill>
+                        <a:srgbClr val="DCE3EA"/>
+                      </a:solidFill>
+                      <a:prstDash val="solid"/>
+                      <a:round/>
+                      <a:headEnd type="none" w="med" len="med"/>
+                      <a:tailEnd type="none" w="med" len="med"/>
+                    </a:lnR>
+                    <a:lnT w="9525" cap="flat" cmpd="sng" algn="ctr">
+                      <a:solidFill>
+                        <a:srgbClr val="DCE3EA"/>
+                      </a:solidFill>
+                      <a:prstDash val="solid"/>
+                      <a:round/>
+                      <a:headEnd type="none" w="med" len="med"/>
+                      <a:tailEnd type="none" w="med" len="med"/>
+                    </a:lnT>
+                    <a:lnB w="9525" cap="flat" cmpd="sng" algn="ctr">
+                      <a:solidFill>
+                        <a:srgbClr val="DCE3EA"/>
+                      </a:solidFill>
+                      <a:prstDash val="solid"/>
+                      <a:round/>
+                      <a:headEnd type="none" w="med" len="med"/>
+                      <a:tailEnd type="none" w="med" len="med"/>
+                    </a:lnB>
+                  </a:tcPr>
+                </a:tc>
+                <a:tc>
+                  <a:txBody>
+                    <a:bodyPr/>
+                    <a:lstStyle/>
+                    <a:p>
+                      <a:pPr indent="0" marL="0">
+                        <a:buNone/>
+                      </a:pPr>
+                      <a:r>
+                        <a:rPr lang="en-US" sz="1100" dirty="0">
+                          <a:solidFill>
+                            <a:srgbClr val="1B2B3A"/>
+                          </a:solidFill>
+                          <a:latin typeface="Calibri" pitchFamily="34" charset="0"/>
+                          <a:ea typeface="Calibri" pitchFamily="34" charset="-122"/>
+                          <a:cs typeface="Calibri" pitchFamily="34" charset="-120"/>
+                        </a:rPr>
+                        <a:t>Bật/tắt lại Smart App Control</a:t>
+                      </a:r>
+                      <a:endParaRPr lang="en-US" sz="1100" dirty="0">
+                        <a:latin typeface="Calibri" charset="0"/>
+                        <a:ea typeface="Calibri" charset="0"/>
+                        <a:cs typeface="Calibri" charset="0"/>
+                      </a:endParaRPr>
+                    </a:p>
+                  </a:txBody>
+                  <a:tcPr marL="91440" marR="91440" marT="45720" marB="45720" anchor="ctr">
+                    <a:lnL w="9525" cap="flat" cmpd="sng" algn="ctr">
+                      <a:solidFill>
+                        <a:srgbClr val="DCE3EA"/>
+                      </a:solidFill>
+                      <a:prstDash val="solid"/>
+                      <a:round/>
+                      <a:headEnd type="none" w="med" len="med"/>
+                      <a:tailEnd type="none" w="med" len="med"/>
+                    </a:lnL>
+                    <a:lnR w="9525" cap="flat" cmpd="sng" algn="ctr">
+                      <a:solidFill>
+                        <a:srgbClr val="DCE3EA"/>
+                      </a:solidFill>
+                      <a:prstDash val="solid"/>
+                      <a:round/>
+                      <a:headEnd type="none" w="med" len="med"/>
+                      <a:tailEnd type="none" w="med" len="med"/>
+                    </a:lnR>
+                    <a:lnT w="9525" cap="flat" cmpd="sng" algn="ctr">
+                      <a:solidFill>
+                        <a:srgbClr val="DCE3EA"/>
+                      </a:solidFill>
+                      <a:prstDash val="solid"/>
+                      <a:round/>
+                      <a:headEnd type="none" w="med" len="med"/>
+                      <a:tailEnd type="none" w="med" len="med"/>
+                    </a:lnT>
+                    <a:lnB w="9525" cap="flat" cmpd="sng" algn="ctr">
+                      <a:solidFill>
+                        <a:srgbClr val="DCE3EA"/>
+                      </a:solidFill>
+                      <a:prstDash val="solid"/>
+                      <a:round/>
+                      <a:headEnd type="none" w="med" len="med"/>
+                      <a:tailEnd type="none" w="med" len="med"/>
+                    </a:lnB>
+                  </a:tcPr>
+                </a:tc>
+              </a:tr>
+              <a:tr h="502920">
+                <a:tc>
+                  <a:txBody>
+                    <a:bodyPr/>
+                    <a:lstStyle/>
+                    <a:p>
+                      <a:pPr indent="0" marL="0">
+                        <a:buNone/>
+                      </a:pPr>
+                      <a:r>
+                        <a:rPr lang="en-US" sz="1100" dirty="0">
+                          <a:solidFill>
+                            <a:srgbClr val="1B2B3A"/>
+                          </a:solidFill>
+                          <a:latin typeface="Calibri" pitchFamily="34" charset="0"/>
+                          <a:ea typeface="Calibri" pitchFamily="34" charset="-122"/>
+                          <a:cs typeface="Calibri" pitchFamily="34" charset="-120"/>
+                        </a:rPr>
+                        <a:t>Lỗi 429 usage limit</a:t>
+                      </a:r>
+                      <a:endParaRPr lang="en-US" sz="1100" dirty="0">
+                        <a:latin typeface="Calibri" charset="0"/>
+                        <a:ea typeface="Calibri" charset="0"/>
+                        <a:cs typeface="Calibri" charset="0"/>
+                      </a:endParaRPr>
+                    </a:p>
+                  </a:txBody>
+                  <a:tcPr marL="91440" marR="91440" marT="45720" marB="45720" anchor="ctr">
+                    <a:lnL w="9525" cap="flat" cmpd="sng" algn="ctr">
+                      <a:solidFill>
+                        <a:srgbClr val="DCE3EA"/>
+                      </a:solidFill>
+                      <a:prstDash val="solid"/>
+                      <a:round/>
+                      <a:headEnd type="none" w="med" len="med"/>
+                      <a:tailEnd type="none" w="med" len="med"/>
+                    </a:lnL>
+                    <a:lnR w="9525" cap="flat" cmpd="sng" algn="ctr">
+                      <a:solidFill>
+                        <a:srgbClr val="DCE3EA"/>
+                      </a:solidFill>
+                      <a:prstDash val="solid"/>
+                      <a:round/>
+                      <a:headEnd type="none" w="med" len="med"/>
+                      <a:tailEnd type="none" w="med" len="med"/>
+                    </a:lnR>
+                    <a:lnT w="9525" cap="flat" cmpd="sng" algn="ctr">
+                      <a:solidFill>
+                        <a:srgbClr val="DCE3EA"/>
+                      </a:solidFill>
+                      <a:prstDash val="solid"/>
+                      <a:round/>
+                      <a:headEnd type="none" w="med" len="med"/>
+                      <a:tailEnd type="none" w="med" len="med"/>
+                    </a:lnT>
+                    <a:lnB w="9525" cap="flat" cmpd="sng" algn="ctr">
+                      <a:solidFill>
+                        <a:srgbClr val="DCE3EA"/>
+                      </a:solidFill>
+                      <a:prstDash val="solid"/>
+                      <a:round/>
+                      <a:headEnd type="none" w="med" len="med"/>
+                      <a:tailEnd type="none" w="med" len="med"/>
+                    </a:lnB>
+                  </a:tcPr>
+                </a:tc>
+                <a:tc>
+                  <a:txBody>
+                    <a:bodyPr/>
+                    <a:lstStyle/>
+                    <a:p>
+                      <a:pPr indent="0" marL="0">
+                        <a:buNone/>
+                      </a:pPr>
+                      <a:r>
+                        <a:rPr lang="en-US" sz="1100" dirty="0">
+                          <a:solidFill>
+                            <a:srgbClr val="1B2B3A"/>
+                          </a:solidFill>
+                          <a:latin typeface="Calibri" pitchFamily="34" charset="0"/>
+                          <a:ea typeface="Calibri" pitchFamily="34" charset="-122"/>
+                          <a:cs typeface="Calibri" pitchFamily="34" charset="-120"/>
+                        </a:rPr>
+                        <a:t>Hết hạn mức tài khoản ChatGPT</a:t>
+                      </a:r>
+                      <a:endParaRPr lang="en-US" sz="1100" dirty="0">
+                        <a:latin typeface="Calibri" charset="0"/>
+                        <a:ea typeface="Calibri" charset="0"/>
+                        <a:cs typeface="Calibri" charset="0"/>
+                      </a:endParaRPr>
+                    </a:p>
+                  </a:txBody>
+                  <a:tcPr marL="91440" marR="91440" marT="45720" marB="45720" anchor="ctr">
+                    <a:lnL w="9525" cap="flat" cmpd="sng" algn="ctr">
+                      <a:solidFill>
+                        <a:srgbClr val="DCE3EA"/>
+                      </a:solidFill>
+                      <a:prstDash val="solid"/>
+                      <a:round/>
+                      <a:headEnd type="none" w="med" len="med"/>
+                      <a:tailEnd type="none" w="med" len="med"/>
+                    </a:lnL>
+                    <a:lnR w="9525" cap="flat" cmpd="sng" algn="ctr">
+                      <a:solidFill>
+                        <a:srgbClr val="DCE3EA"/>
+                      </a:solidFill>
+                      <a:prstDash val="solid"/>
+                      <a:round/>
+                      <a:headEnd type="none" w="med" len="med"/>
+                      <a:tailEnd type="none" w="med" len="med"/>
+                    </a:lnR>
+                    <a:lnT w="9525" cap="flat" cmpd="sng" algn="ctr">
+                      <a:solidFill>
+                        <a:srgbClr val="DCE3EA"/>
+                      </a:solidFill>
+                      <a:prstDash val="solid"/>
+                      <a:round/>
+                      <a:headEnd type="none" w="med" len="med"/>
+                      <a:tailEnd type="none" w="med" len="med"/>
+                    </a:lnT>
+                    <a:lnB w="9525" cap="flat" cmpd="sng" algn="ctr">
+                      <a:solidFill>
+                        <a:srgbClr val="DCE3EA"/>
+                      </a:solidFill>
+                      <a:prstDash val="solid"/>
+                      <a:round/>
+                      <a:headEnd type="none" w="med" len="med"/>
+                      <a:tailEnd type="none" w="med" len="med"/>
+                    </a:lnB>
+                  </a:tcPr>
+                </a:tc>
+                <a:tc>
+                  <a:txBody>
+                    <a:bodyPr/>
+                    <a:lstStyle/>
+                    <a:p>
+                      <a:pPr indent="0" marL="0">
+                        <a:buNone/>
+                      </a:pPr>
+                      <a:r>
+                        <a:rPr lang="en-US" sz="1100" dirty="0">
+                          <a:solidFill>
+                            <a:srgbClr val="1B2B3A"/>
+                          </a:solidFill>
+                          <a:latin typeface="Calibri" pitchFamily="34" charset="0"/>
+                          <a:ea typeface="Calibri" pitchFamily="34" charset="-122"/>
+                          <a:cs typeface="Calibri" pitchFamily="34" charset="-120"/>
+                        </a:rPr>
+                        <a:t>Chờ mở lại hoặc thêm tài khoản</a:t>
+                      </a:r>
+                      <a:endParaRPr lang="en-US" sz="1100" dirty="0">
+                        <a:latin typeface="Calibri" charset="0"/>
+                        <a:ea typeface="Calibri" charset="0"/>
+                        <a:cs typeface="Calibri" charset="0"/>
+                      </a:endParaRPr>
+                    </a:p>
+                  </a:txBody>
+                  <a:tcPr marL="91440" marR="91440" marT="45720" marB="45720" anchor="ctr">
+                    <a:lnL w="9525" cap="flat" cmpd="sng" algn="ctr">
+                      <a:solidFill>
+                        <a:srgbClr val="DCE3EA"/>
+                      </a:solidFill>
+                      <a:prstDash val="solid"/>
+                      <a:round/>
+                      <a:headEnd type="none" w="med" len="med"/>
+                      <a:tailEnd type="none" w="med" len="med"/>
+                    </a:lnL>
+                    <a:lnR w="9525" cap="flat" cmpd="sng" algn="ctr">
+                      <a:solidFill>
+                        <a:srgbClr val="DCE3EA"/>
+                      </a:solidFill>
+                      <a:prstDash val="solid"/>
+                      <a:round/>
+                      <a:headEnd type="none" w="med" len="med"/>
+                      <a:tailEnd type="none" w="med" len="med"/>
+                    </a:lnR>
+                    <a:lnT w="9525" cap="flat" cmpd="sng" algn="ctr">
+                      <a:solidFill>
+                        <a:srgbClr val="DCE3EA"/>
+                      </a:solidFill>
+                      <a:prstDash val="solid"/>
+                      <a:round/>
+                      <a:headEnd type="none" w="med" len="med"/>
+                      <a:tailEnd type="none" w="med" len="med"/>
+                    </a:lnT>
+                    <a:lnB w="9525" cap="flat" cmpd="sng" algn="ctr">
+                      <a:solidFill>
+                        <a:srgbClr val="DCE3EA"/>
+                      </a:solidFill>
+                      <a:prstDash val="solid"/>
+                      <a:round/>
+                      <a:headEnd type="none" w="med" len="med"/>
+                      <a:tailEnd type="none" w="med" len="med"/>
+                    </a:lnB>
+                  </a:tcPr>
+                </a:tc>
+              </a:tr>
+            </a:tbl>
+          </a:graphicData>
+        </a:graphic>
+      </p:graphicFrame>
+    </p:spTree>
+  </p:cSld>
+  <p:clrMapOvr>
+    <a:masterClrMapping/>
+  </p:clrMapOvr>
+</p:sld>
+</file>
+
+<file path=ppt/slides/slide11.xml><?xml version="1.0" encoding="utf-8"?>
+<p:sld xmlns:a="http://schemas.openxmlformats.org/drawingml/2006/main" xmlns:r="http://schemas.openxmlformats.org/officeDocument/2006/relationships" xmlns:p="http://schemas.openxmlformats.org/presentationml/2006/main">
+  <p:cSld name="Slide 11">
+    <p:bg>
+      <p:bgPr>
+        <a:solidFill>
+          <a:srgbClr val="10243E"/>
+        </a:solidFill>
+      </p:bgPr>
+    </p:bg>
+    <p:spTree>
+      <p:nvGrpSpPr>
+        <p:cNvPr id="1" name=""/>
+        <p:cNvGrpSpPr/>
+        <p:nvPr/>
+      </p:nvGrpSpPr>
+      <p:grpSpPr>
+        <a:xfrm>
+          <a:off x="0" y="0"/>
+          <a:ext cx="0" cy="0"/>
+          <a:chOff x="0" y="0"/>
+          <a:chExt cx="0" cy="0"/>
+        </a:xfrm>
+      </p:grpSpPr>
+      <p:sp>
+        <p:nvSpPr>
+          <p:cNvPr id="2" name="Text 0"/>
+          <p:cNvSpPr txBox="1"/>
+          <p:nvPr/>
+        </p:nvSpPr>
+        <p:spPr>
+          <a:xfrm>
+            <a:off x="640080" y="411480"/>
+            <a:ext cx="7863840" cy="685800"/>
+          </a:xfrm>
+          <a:prstGeom prst="rect">
+            <a:avLst/>
+          </a:prstGeom>
+          <a:noFill/>
+          <a:ln/>
+        </p:spPr>
+        <p:txBody>
+          <a:bodyPr wrap="square" lIns="0" tIns="0" rIns="0" bIns="0" rtlCol="0" anchor="ctr"/>
+          <a:lstStyle/>
+          <a:p>
+            <a:pPr indent="0" marL="0">
+              <a:buNone/>
+            </a:pPr>
+            <a:r>
+              <a:rPr lang="en-US" sz="3000" b="1" dirty="0">
+                <a:solidFill>
+                  <a:srgbClr val="FFFFFF"/>
+                </a:solidFill>
+                <a:latin typeface="Cambria" pitchFamily="34" charset="0"/>
+                <a:ea typeface="Cambria" pitchFamily="34" charset="-122"/>
+                <a:cs typeface="Cambria" pitchFamily="34" charset="-120"/>
+              </a:rPr>
+              <a:t>Baseline chạy được, chưa đủ kết luận</a:t>
+            </a:r>
+            <a:endParaRPr lang="en-US" sz="3000" dirty="0"/>
+          </a:p>
+        </p:txBody>
+      </p:sp>
+      <p:sp>
+        <p:nvSpPr>
+          <p:cNvPr id="3" name="Text 1"/>
+          <p:cNvSpPr txBox="1"/>
+          <p:nvPr/>
+        </p:nvSpPr>
+        <p:spPr>
+          <a:xfrm>
+            <a:off x="640080" y="1097280"/>
+            <a:ext cx="7863840" cy="320040"/>
+          </a:xfrm>
+          <a:prstGeom prst="rect">
+            <a:avLst/>
+          </a:prstGeom>
+          <a:noFill/>
+          <a:ln/>
+        </p:spPr>
+        <p:txBody>
+          <a:bodyPr wrap="square" lIns="0" tIns="0" rIns="0" bIns="0" rtlCol="0" anchor="ctr"/>
+          <a:lstStyle/>
+          <a:p>
+            <a:pPr indent="0" marL="0">
+              <a:buNone/>
+            </a:pPr>
+            <a:r>
+              <a:rPr lang="en-US" sz="1400" b="1" dirty="0">
+                <a:solidFill>
+                  <a:srgbClr val="F2A541"/>
+                </a:solidFill>
+                <a:latin typeface="Calibri" pitchFamily="34" charset="0"/>
+                <a:ea typeface="Calibri" pitchFamily="34" charset="-122"/>
+                <a:cs typeface="Calibri" pitchFamily="34" charset="-120"/>
+              </a:rPr>
+              <a:t>Số liệu trên 125/150 câu dev</a:t>
+            </a:r>
+            <a:endParaRPr lang="en-US" sz="1400" dirty="0"/>
+          </a:p>
+        </p:txBody>
+      </p:sp>
+      <p:sp>
+        <p:nvSpPr>
+          <p:cNvPr id="4" name="Text 2"/>
+          <p:cNvSpPr txBox="1"/>
+          <p:nvPr/>
+        </p:nvSpPr>
+        <p:spPr>
+          <a:xfrm>
+            <a:off x="640080" y="1572768"/>
+            <a:ext cx="3931920" cy="2240280"/>
+          </a:xfrm>
+          <a:prstGeom prst="rect">
+            <a:avLst/>
+          </a:prstGeom>
+          <a:noFill/>
+          <a:ln/>
+        </p:spPr>
+        <p:txBody>
+          <a:bodyPr wrap="square" lIns="0" tIns="0" rIns="0" bIns="0" rtlCol="0" anchor="t"/>
+          <a:lstStyle/>
+          <a:p>
+            <a:pPr marL="342900" indent="-342900">
+              <a:spcAft>
+                <a:spcPts val="800"/>
+              </a:spcAft>
+              <a:buSzPct val="100000"/>
+              <a:buChar char="•"/>
+            </a:pPr>
+            <a:r>
+              <a:rPr lang="en-US" sz="1200" dirty="0">
+                <a:solidFill>
+                  <a:srgbClr val="E6EEF7"/>
+                </a:solidFill>
+                <a:latin typeface="Calibri" pitchFamily="34" charset="0"/>
+                <a:ea typeface="Calibri" pitchFamily="34" charset="-122"/>
+                <a:cs typeface="Calibri" pitchFamily="34" charset="-120"/>
+              </a:rPr>
+              <a:t>Cài đặt xong LightMem, chạy đầu-cuối được trên LongMemEval-S với cx/gpt-5.6-luna.</a:t>
+            </a:r>
+            <a:endParaRPr lang="en-US" sz="1200" dirty="0"/>
+          </a:p>
+          <a:p>
+            <a:pPr marL="342900" indent="-342900">
+              <a:spcAft>
+                <a:spcPts val="800"/>
+              </a:spcAft>
+              <a:buSzPct val="100000"/>
+              <a:buChar char="•"/>
+            </a:pPr>
+            <a:r>
+              <a:rPr lang="en-US" sz="1200" dirty="0">
+                <a:solidFill>
+                  <a:srgbClr val="E6EEF7"/>
+                </a:solidFill>
+                <a:latin typeface="Calibri" pitchFamily="34" charset="0"/>
+                <a:ea typeface="Calibri" pitchFamily="34" charset="-122"/>
+                <a:cs typeface="Calibri" pitchFamily="34" charset="-120"/>
+              </a:rPr>
+              <a:t>Chia dev/test khớp bản gốc của nhóm (150/350).</a:t>
+            </a:r>
+            <a:endParaRPr lang="en-US" sz="1200" dirty="0"/>
+          </a:p>
+          <a:p>
+            <a:pPr marL="342900" indent="-342900">
+              <a:spcAft>
+                <a:spcPts val="800"/>
+              </a:spcAft>
+              <a:buSzPct val="100000"/>
+              <a:buChar char="•"/>
+            </a:pPr>
+            <a:r>
+              <a:rPr lang="en-US" sz="1200" dirty="0">
+                <a:solidFill>
+                  <a:srgbClr val="E6EEF7"/>
+                </a:solidFill>
+                <a:latin typeface="Calibri" pitchFamily="34" charset="0"/>
+                <a:ea typeface="Calibri" pitchFamily="34" charset="-122"/>
+                <a:cs typeface="Calibri" pitchFamily="34" charset="-120"/>
+              </a:rPr>
+              <a:t>Sơ bộ: 79,0% macro trên 6/6 loại, 125/150 câu dev.</a:t>
+            </a:r>
+            <a:endParaRPr lang="en-US" sz="1200" dirty="0"/>
+          </a:p>
+          <a:p>
+            <a:pPr marL="342900" indent="-342900">
+              <a:spcAft>
+                <a:spcPts val="800"/>
+              </a:spcAft>
+              <a:buSzPct val="100000"/>
+              <a:buChar char="•"/>
+            </a:pPr>
+            <a:r>
+              <a:rPr lang="en-US" sz="1200" dirty="0">
+                <a:solidFill>
+                  <a:srgbClr val="E6EEF7"/>
+                </a:solidFill>
+                <a:latin typeface="Calibri" pitchFamily="34" charset="0"/>
+                <a:ea typeface="Calibri" pitchFamily="34" charset="-122"/>
+                <a:cs typeface="Calibri" pitchFamily="34" charset="-120"/>
+              </a:rPr>
+              <a:t>Điểm yếu rõ nhất: loại lượt trợ lý chỉ 33,3%, do cấu hình user_only không lưu lời trợ lý.</a:t>
+            </a:r>
+            <a:endParaRPr lang="en-US" sz="1200" dirty="0"/>
+          </a:p>
+          <a:p>
+            <a:pPr marL="342900" indent="-342900">
+              <a:spcAft>
+                <a:spcPts val="800"/>
+              </a:spcAft>
+              <a:buSzPct val="100000"/>
+              <a:buChar char="•"/>
+            </a:pPr>
+            <a:r>
+              <a:rPr lang="en-US" sz="1200" dirty="0">
+                <a:solidFill>
+                  <a:srgbClr val="E6EEF7"/>
+                </a:solidFill>
+                <a:latin typeface="Calibri" pitchFamily="34" charset="0"/>
+                <a:ea typeface="Calibri" pitchFamily="34" charset="-122"/>
+                <a:cs typeface="Calibri" pitchFamily="34" charset="-120"/>
+              </a:rPr>
+              <a:t>Truy xuất trúng bằng chứng 124/125 câu, nên lỗi nằm ở trích xuất và suy luận.</a:t>
+            </a:r>
+            <a:endParaRPr lang="en-US" sz="1200" dirty="0"/>
+          </a:p>
+          <a:p>
+            <a:pPr marL="342900" indent="-342900">
+              <a:spcAft>
+                <a:spcPts val="800"/>
+              </a:spcAft>
+              <a:buSzPct val="100000"/>
+              <a:buChar char="•"/>
+            </a:pPr>
+            <a:r>
+              <a:rPr lang="en-US" sz="1200" dirty="0">
+                <a:solidFill>
+                  <a:srgbClr val="E6EEF7"/>
+                </a:solidFill>
+                <a:latin typeface="Calibri" pitchFamily="34" charset="0"/>
+                <a:ea typeface="Calibri" pitchFamily="34" charset="-122"/>
+                <a:cs typeface="Calibri" pitchFamily="34" charset="-120"/>
+              </a:rPr>
+              <a:t>Thời gian là nút thắt: ~33 phút mỗi câu.</a:t>
+            </a:r>
+            <a:endParaRPr lang="en-US" sz="1200" dirty="0"/>
+          </a:p>
+        </p:txBody>
+      </p:sp>
+      <p:sp>
+        <p:nvSpPr>
+          <p:cNvPr id="5" name="Text 3"/>
+          <p:cNvSpPr txBox="1"/>
+          <p:nvPr/>
+        </p:nvSpPr>
+        <p:spPr>
+          <a:xfrm>
+            <a:off x="4846320" y="1600200"/>
+            <a:ext cx="3657600" cy="320040"/>
+          </a:xfrm>
+          <a:prstGeom prst="rect">
+            <a:avLst/>
+          </a:prstGeom>
+          <a:noFill/>
+          <a:ln/>
+        </p:spPr>
+        <p:txBody>
+          <a:bodyPr wrap="square" lIns="0" tIns="0" rIns="0" bIns="0" rtlCol="0" anchor="ctr"/>
+          <a:lstStyle/>
+          <a:p>
+            <a:pPr indent="0" marL="0">
+              <a:buNone/>
+            </a:pPr>
+            <a:r>
+              <a:rPr lang="en-US" sz="1600" b="1" dirty="0">
+                <a:solidFill>
+                  <a:srgbClr val="F2A541"/>
+                </a:solidFill>
+                <a:latin typeface="Cambria" pitchFamily="34" charset="0"/>
+                <a:ea typeface="Cambria" pitchFamily="34" charset="-122"/>
+                <a:cs typeface="Cambria" pitchFamily="34" charset="-120"/>
+              </a:rPr>
+              <a:t>Bước tiếp</a:t>
+            </a:r>
+            <a:endParaRPr lang="en-US" sz="1600" dirty="0"/>
+          </a:p>
+        </p:txBody>
+      </p:sp>
+      <p:sp>
+        <p:nvSpPr>
+          <p:cNvPr id="6" name="Text 4"/>
+          <p:cNvSpPr txBox="1"/>
+          <p:nvPr/>
+        </p:nvSpPr>
+        <p:spPr>
+          <a:xfrm>
+            <a:off x="4846320" y="1938528"/>
+            <a:ext cx="3657600" cy="1874520"/>
+          </a:xfrm>
+          <a:prstGeom prst="rect">
+            <a:avLst/>
+          </a:prstGeom>
+          <a:noFill/>
+          <a:ln/>
+        </p:spPr>
+        <p:txBody>
+          <a:bodyPr wrap="square" lIns="0" tIns="0" rIns="0" bIns="0" rtlCol="0" anchor="t"/>
+          <a:lstStyle/>
+          <a:p>
+            <a:pPr indent="0" marL="0">
+              <a:spcAft>
+                <a:spcPts val="800"/>
+              </a:spcAft>
+              <a:buNone/>
+            </a:pPr>
+            <a:r>
+              <a:rPr lang="en-US" sz="1150" dirty="0">
+                <a:solidFill>
+                  <a:srgbClr val="E6EEF7"/>
+                </a:solidFill>
+                <a:latin typeface="Calibri" pitchFamily="34" charset="0"/>
+                <a:ea typeface="Calibri" pitchFamily="34" charset="-122"/>
+                <a:cs typeface="Calibri" pitchFamily="34" charset="-120"/>
+              </a:rPr>
+              <a:t>1.  Chạy nốt 25 câu dev còn lại, nhất là nhóm _abs.</a:t>
+            </a:r>
+            <a:endParaRPr lang="en-US" sz="1150" dirty="0"/>
+          </a:p>
+          <a:p>
+            <a:pPr indent="0" marL="0">
+              <a:spcAft>
+                <a:spcPts val="800"/>
+              </a:spcAft>
+              <a:buNone/>
+            </a:pPr>
+            <a:r>
+              <a:rPr lang="en-US" sz="1150" dirty="0">
+                <a:solidFill>
+                  <a:srgbClr val="E6EEF7"/>
+                </a:solidFill>
+                <a:latin typeface="Calibri" pitchFamily="34" charset="0"/>
+                <a:ea typeface="Calibri" pitchFamily="34" charset="-122"/>
+                <a:cs typeface="Calibri" pitchFamily="34" charset="-120"/>
+              </a:rPr>
+              <a:t>2.  Chạy hệ APEX-MEM cùng model và cùng chấm để so công bằng.</a:t>
+            </a:r>
+            <a:endParaRPr lang="en-US" sz="1150" dirty="0"/>
+          </a:p>
+          <a:p>
+            <a:pPr indent="0" marL="0">
+              <a:spcAft>
+                <a:spcPts val="800"/>
+              </a:spcAft>
+              <a:buNone/>
+            </a:pPr>
+            <a:r>
+              <a:rPr lang="en-US" sz="1150" dirty="0">
+                <a:solidFill>
+                  <a:srgbClr val="E6EEF7"/>
+                </a:solidFill>
+                <a:latin typeface="Calibri" pitchFamily="34" charset="0"/>
+                <a:ea typeface="Calibri" pitchFamily="34" charset="-122"/>
+                <a:cs typeface="Calibri" pitchFamily="34" charset="-120"/>
+              </a:rPr>
+              <a:t>3.  Thử lại LightMem với messages_use = user_assistant, xem loại lượt trợ lý cải thiện bao nhiêu.</a:t>
+            </a:r>
+            <a:endParaRPr lang="en-US" sz="1150" dirty="0"/>
+          </a:p>
+          <a:p>
+            <a:pPr indent="0" marL="0">
+              <a:spcAft>
+                <a:spcPts val="800"/>
+              </a:spcAft>
+              <a:buNone/>
+            </a:pPr>
+            <a:r>
+              <a:rPr lang="en-US" sz="1150" dirty="0">
+                <a:solidFill>
+                  <a:srgbClr val="E6EEF7"/>
+                </a:solidFill>
+                <a:latin typeface="Calibri" pitchFamily="34" charset="0"/>
+                <a:ea typeface="Calibri" pitchFamily="34" charset="-122"/>
+                <a:cs typeface="Calibri" pitchFamily="34" charset="-120"/>
+              </a:rPr>
+              <a:t>4.  Chốt với anh: có chạy cả 350 câu test cho baseline không, vì hạn mức tài khoản.</a:t>
+            </a:r>
+            <a:endParaRPr lang="en-US" sz="1150" dirty="0"/>
+          </a:p>
+          <a:p>
+            <a:pPr indent="0" marL="0">
+              <a:spcAft>
+                <a:spcPts val="800"/>
+              </a:spcAft>
+              <a:buNone/>
+            </a:pPr>
+            <a:r>
+              <a:rPr lang="en-US" sz="1150" dirty="0">
+                <a:solidFill>
+                  <a:srgbClr val="E6EEF7"/>
+                </a:solidFill>
+                <a:latin typeface="Calibri" pitchFamily="34" charset="0"/>
+                <a:ea typeface="Calibri" pitchFamily="34" charset="-122"/>
+                <a:cs typeface="Calibri" pitchFamily="34" charset="-120"/>
+              </a:rPr>
+              <a:t>5.  Chấm 3 lần lấy trung bình, đúng kế hoạch đánh giá.</a:t>
+            </a:r>
+            <a:endParaRPr lang="en-US" sz="1150" dirty="0"/>
+          </a:p>
+        </p:txBody>
+      </p:sp>
+      <p:sp>
+        <p:nvSpPr>
+          <p:cNvPr id="7" name="Shape 5"/>
+          <p:cNvSpPr/>
+          <p:nvPr/>
+        </p:nvSpPr>
+        <p:spPr>
+          <a:xfrm>
+            <a:off x="640080" y="3886200"/>
+            <a:ext cx="3657600" cy="777240"/>
+          </a:xfrm>
+          <a:prstGeom prst="rect">
+            <a:avLst/>
+          </a:prstGeom>
+          <a:solidFill>
+            <a:srgbClr val="1B3457"/>
+          </a:solidFill>
+          <a:ln w="9525">
+            <a:solidFill>
+              <a:srgbClr val="2C4A73"/>
+            </a:solidFill>
+            <a:prstDash val="solid"/>
+          </a:ln>
+        </p:spPr>
+      </p:sp>
+      <p:sp>
+        <p:nvSpPr>
+          <p:cNvPr id="8" name="Text 6"/>
+          <p:cNvSpPr txBox="1"/>
+          <p:nvPr/>
+        </p:nvSpPr>
+        <p:spPr>
+          <a:xfrm>
+            <a:off x="822960" y="3977640"/>
+            <a:ext cx="1371600" cy="594360"/>
+          </a:xfrm>
+          <a:prstGeom prst="rect">
+            <a:avLst/>
+          </a:prstGeom>
+          <a:noFill/>
+          <a:ln/>
+        </p:spPr>
+        <p:txBody>
+          <a:bodyPr wrap="square" lIns="0" tIns="0" rIns="0" bIns="0" rtlCol="0" anchor="ctr"/>
+          <a:lstStyle/>
+          <a:p>
+            <a:pPr indent="0" marL="0">
+              <a:buNone/>
+            </a:pPr>
+            <a:r>
+              <a:rPr lang="en-US" sz="2600" b="1" dirty="0">
+                <a:solidFill>
+                  <a:srgbClr val="F2A541"/>
+                </a:solidFill>
+                <a:latin typeface="Cambria" pitchFamily="34" charset="0"/>
+                <a:ea typeface="Cambria" pitchFamily="34" charset="-122"/>
+                <a:cs typeface="Cambria" pitchFamily="34" charset="-120"/>
+              </a:rPr>
+              <a:t>79,0%</a:t>
+            </a:r>
+            <a:endParaRPr lang="en-US" sz="2600" dirty="0"/>
+          </a:p>
+        </p:txBody>
+      </p:sp>
+      <p:sp>
+        <p:nvSpPr>
+          <p:cNvPr id="9" name="Text 7"/>
+          <p:cNvSpPr txBox="1"/>
+          <p:nvPr/>
+        </p:nvSpPr>
+        <p:spPr>
+          <a:xfrm>
+            <a:off x="2194560" y="3977640"/>
+            <a:ext cx="1920240" cy="594360"/>
+          </a:xfrm>
+          <a:prstGeom prst="rect">
+            <a:avLst/>
+          </a:prstGeom>
+          <a:noFill/>
+          <a:ln/>
+        </p:spPr>
+        <p:txBody>
+          <a:bodyPr wrap="square" lIns="0" tIns="0" rIns="0" bIns="0" rtlCol="0" anchor="ctr"/>
+          <a:lstStyle/>
+          <a:p>
+            <a:pPr indent="0" marL="0">
+              <a:buNone/>
+            </a:pPr>
+            <a:r>
+              <a:rPr lang="en-US" sz="1150" dirty="0">
+                <a:solidFill>
+                  <a:srgbClr val="B9C9DD"/>
+                </a:solidFill>
+                <a:latin typeface="Calibri" pitchFamily="34" charset="0"/>
+                <a:ea typeface="Calibri" pitchFamily="34" charset="-122"/>
+                <a:cs typeface="Calibri" pitchFamily="34" charset="-120"/>
+              </a:rPr>
+              <a:t>macro-average, 6/6 loại đã chạy</a:t>
+            </a:r>
+            <a:endParaRPr lang="en-US" sz="1150" dirty="0"/>
+          </a:p>
+        </p:txBody>
+      </p:sp>
+      <p:sp>
+        <p:nvSpPr>
+          <p:cNvPr id="10" name="Shape 8"/>
+          <p:cNvSpPr/>
+          <p:nvPr/>
+        </p:nvSpPr>
+        <p:spPr>
+          <a:xfrm>
+            <a:off x="4846320" y="3886200"/>
+            <a:ext cx="3657600" cy="777240"/>
+          </a:xfrm>
+          <a:prstGeom prst="rect">
+            <a:avLst/>
+          </a:prstGeom>
+          <a:solidFill>
+            <a:srgbClr val="1B3457"/>
+          </a:solidFill>
+          <a:ln w="9525">
+            <a:solidFill>
+              <a:srgbClr val="2C4A73"/>
+            </a:solidFill>
+            <a:prstDash val="solid"/>
+          </a:ln>
+        </p:spPr>
+      </p:sp>
+      <p:sp>
+        <p:nvSpPr>
+          <p:cNvPr id="11" name="Text 9"/>
+          <p:cNvSpPr txBox="1"/>
+          <p:nvPr/>
+        </p:nvSpPr>
+        <p:spPr>
+          <a:xfrm>
+            <a:off x="5029200" y="3977640"/>
+            <a:ext cx="1371600" cy="594360"/>
+          </a:xfrm>
+          <a:prstGeom prst="rect">
+            <a:avLst/>
+          </a:prstGeom>
+          <a:noFill/>
+          <a:ln/>
+        </p:spPr>
+        <p:txBody>
+          <a:bodyPr wrap="square" lIns="0" tIns="0" rIns="0" bIns="0" rtlCol="0" anchor="ctr"/>
+          <a:lstStyle/>
+          <a:p>
+            <a:pPr indent="0" marL="0">
+              <a:buNone/>
+            </a:pPr>
+            <a:r>
+              <a:rPr lang="en-US" sz="2600" b="1" dirty="0">
+                <a:solidFill>
+                  <a:srgbClr val="F2A541"/>
+                </a:solidFill>
+                <a:latin typeface="Cambria" pitchFamily="34" charset="0"/>
+                <a:ea typeface="Cambria" pitchFamily="34" charset="-122"/>
+                <a:cs typeface="Cambria" pitchFamily="34" charset="-120"/>
+              </a:rPr>
+              <a:t>33 phút</a:t>
+            </a:r>
+            <a:endParaRPr lang="en-US" sz="2600" dirty="0"/>
+          </a:p>
+        </p:txBody>
+      </p:sp>
+      <p:sp>
+        <p:nvSpPr>
+          <p:cNvPr id="12" name="Text 10"/>
+          <p:cNvSpPr txBox="1"/>
+          <p:nvPr/>
+        </p:nvSpPr>
+        <p:spPr>
+          <a:xfrm>
+            <a:off x="6400800" y="3977640"/>
+            <a:ext cx="1920240" cy="594360"/>
+          </a:xfrm>
+          <a:prstGeom prst="rect">
+            <a:avLst/>
+          </a:prstGeom>
+          <a:noFill/>
+          <a:ln/>
+        </p:spPr>
+        <p:txBody>
+          <a:bodyPr wrap="square" lIns="0" tIns="0" rIns="0" bIns="0" rtlCol="0" anchor="ctr"/>
+          <a:lstStyle/>
+          <a:p>
+            <a:pPr indent="0" marL="0">
+              <a:buNone/>
+            </a:pPr>
+            <a:r>
+              <a:rPr lang="en-US" sz="1150" dirty="0">
+                <a:solidFill>
+                  <a:srgbClr val="B9C9DD"/>
+                </a:solidFill>
+                <a:latin typeface="Calibri" pitchFamily="34" charset="0"/>
+                <a:ea typeface="Calibri" pitchFamily="34" charset="-122"/>
+                <a:cs typeface="Calibri" pitchFamily="34" charset="-120"/>
+              </a:rPr>
+              <a:t>dựng bộ nhớ mỗi câu (trung vị)</a:t>
+            </a:r>
+            <a:endParaRPr lang="en-US" sz="1150" dirty="0"/>
+          </a:p>
+        </p:txBody>
+      </p:sp>
+    </p:spTree>
+  </p:cSld>
+  <p:clrMapOvr>
+    <a:masterClrMapping/>
+  </p:clrMapOvr>
+</p:sld>
+</file>
+
 <file path=ppt/slides/slide2.xml><?xml version="1.0" encoding="utf-8"?>
 <p:sld xmlns:a="http://schemas.openxmlformats.org/drawingml/2006/main" xmlns:r="http://schemas.openxmlformats.org/officeDocument/2006/relationships" xmlns:p="http://schemas.openxmlformats.org/presentationml/2006/main">
   <p:cSld name="Slide 2">
@@ -7119,7 +9293,7 @@
                 <a:ea typeface="Calibri" pitchFamily="34" charset="-122"/>
                 <a:cs typeface="Calibri" pitchFamily="34" charset="-120"/>
               </a:rPr>
-              <a:t>VẬN HÀNH</a:t>
+              <a:t>TÁCH NGUỒN LỖI</a:t>
             </a:r>
             <a:endParaRPr lang="en-US" sz="1100" dirty="0"/>
           </a:p>
@@ -7158,7 +9332,7 @@
                 <a:ea typeface="Cambria" pitchFamily="34" charset="-122"/>
                 <a:cs typeface="Cambria" pitchFamily="34" charset="-120"/>
               </a:rPr>
-              <a:t>Dựng bộ nhớ chiếm gần như toàn bộ thời gian</a:t>
+              <a:t>Lỗi không nằm ở khâu tìm kiếm</a:t>
             </a:r>
             <a:endParaRPr lang="en-US" sz="2600" dirty="0"/>
           </a:p>
@@ -7211,8 +9385,8 @@
         </p:nvSpPr>
         <p:spPr>
           <a:xfrm>
-            <a:off x="457200" y="1280160"/>
-            <a:ext cx="2651760" cy="1371600"/>
+            <a:off x="365760" y="1188720"/>
+            <a:ext cx="2651760" cy="2926080"/>
           </a:xfrm>
           <a:prstGeom prst="rect">
             <a:avLst/>
@@ -7236,7 +9410,7 @@
         </p:nvSpPr>
         <p:spPr>
           <a:xfrm>
-            <a:off x="457200" y="1371600"/>
+            <a:off x="365760" y="1325880"/>
             <a:ext cx="2651760" cy="731520"/>
           </a:xfrm>
           <a:prstGeom prst="rect">
@@ -7253,17 +9427,17 @@
               <a:buNone/>
             </a:pPr>
             <a:r>
-              <a:rPr lang="en-US" sz="3400" b="1" dirty="0">
-                <a:solidFill>
-                  <a:srgbClr val="C8553D"/>
+              <a:rPr lang="en-US" sz="4000" b="1" dirty="0">
+                <a:solidFill>
+                  <a:srgbClr val="1F6F8B"/>
                 </a:solidFill>
                 <a:latin typeface="Cambria" pitchFamily="34" charset="0"/>
                 <a:ea typeface="Cambria" pitchFamily="34" charset="-122"/>
                 <a:cs typeface="Cambria" pitchFamily="34" charset="-120"/>
               </a:rPr>
-              <a:t>33 phút</a:t>
-            </a:r>
-            <a:endParaRPr lang="en-US" sz="3400" dirty="0"/>
+              <a:t>99,2%</a:t>
+            </a:r>
+            <a:endParaRPr lang="en-US" sz="4000" dirty="0"/>
           </a:p>
         </p:txBody>
       </p:sp>
@@ -7275,8 +9449,8 @@
         </p:nvSpPr>
         <p:spPr>
           <a:xfrm>
-            <a:off x="457200" y="2103120"/>
-            <a:ext cx="2651760" cy="365760"/>
+            <a:off x="548640" y="2057400"/>
+            <a:ext cx="2286000" cy="548640"/>
           </a:xfrm>
           <a:prstGeom prst="rect">
             <a:avLst/>
@@ -7285,7 +9459,7 @@
           <a:ln/>
         </p:spPr>
         <p:txBody>
-          <a:bodyPr wrap="square" lIns="0" tIns="0" rIns="0" bIns="0" rtlCol="0" anchor="ctr"/>
+          <a:bodyPr wrap="square" lIns="0" tIns="0" rIns="0" bIns="0" rtlCol="0" anchor="t"/>
           <a:lstStyle/>
           <a:p>
             <a:pPr algn="ctr" indent="0" marL="0">
@@ -7300,7 +9474,7 @@
                 <a:ea typeface="Calibri" pitchFamily="34" charset="-122"/>
                 <a:cs typeface="Calibri" pitchFamily="34" charset="-120"/>
               </a:rPr>
-              <a:t>dựng bộ nhớ mỗi câu (trung vị)</a:t>
+              <a:t>truy xuất trúng phiên chứa bằng chứng (124/125 câu)</a:t>
             </a:r>
             <a:endParaRPr lang="en-US" sz="1200" dirty="0"/>
           </a:p>
@@ -7308,14 +9482,251 @@
       </p:sp>
       <p:sp>
         <p:nvSpPr>
-          <p:cNvPr id="9" name="Shape 6"/>
+          <p:cNvPr id="9" name="Text 6"/>
+          <p:cNvSpPr txBox="1"/>
+          <p:nvPr/>
+        </p:nvSpPr>
+        <p:spPr>
+          <a:xfrm>
+            <a:off x="548640" y="2697480"/>
+            <a:ext cx="2286000" cy="1325880"/>
+          </a:xfrm>
+          <a:prstGeom prst="rect">
+            <a:avLst/>
+          </a:prstGeom>
+          <a:noFill/>
+          <a:ln/>
+        </p:spPr>
+        <p:txBody>
+          <a:bodyPr wrap="square" lIns="0" tIns="0" rIns="0" bIns="0" rtlCol="0" anchor="t"/>
+          <a:lstStyle/>
+          <a:p>
+            <a:pPr indent="0" marL="0">
+              <a:buNone/>
+            </a:pPr>
+            <a:r>
+              <a:rPr lang="en-US" sz="1050" b="1" dirty="0">
+                <a:solidFill>
+                  <a:srgbClr val="10243E"/>
+                </a:solidFill>
+                <a:latin typeface="Calibri" pitchFamily="34" charset="0"/>
+                <a:ea typeface="Calibri" pitchFamily="34" charset="-122"/>
+                <a:cs typeface="Calibri" pitchFamily="34" charset="-120"/>
+              </a:rPr>
+              <a:t>Đo thế nào</a:t>
+            </a:r>
+            <a:endParaRPr lang="en-US" sz="1050" dirty="0"/>
+          </a:p>
+          <a:p>
+            <a:pPr indent="0" marL="0">
+              <a:buNone/>
+            </a:pPr>
+            <a:r>
+              <a:rPr lang="en-US" sz="1050" dirty="0">
+                <a:solidFill>
+                  <a:srgbClr val="1B2B3A"/>
+                </a:solidFill>
+                <a:latin typeface="Calibri" pitchFamily="34" charset="0"/>
+                <a:ea typeface="Calibri" pitchFamily="34" charset="-122"/>
+                <a:cs typeface="Calibri" pitchFamily="34" charset="-120"/>
+              </a:rPr>
+              <a:t>Mỗi ký ức LightMem trả về đều mở đầu bằng mốc thời gian của phiên. Khớp mốc đó với haystack_dates để biết ký ức đến từ phiên nào, rồi so với answer_session_ids của bộ dữ liệu.</a:t>
+            </a:r>
+            <a:endParaRPr lang="en-US" sz="1050" dirty="0"/>
+          </a:p>
+        </p:txBody>
+      </p:sp>
+      <p:sp>
+        <p:nvSpPr>
+          <p:cNvPr id="10" name="Text 7"/>
+          <p:cNvSpPr txBox="1"/>
+          <p:nvPr/>
+        </p:nvSpPr>
+        <p:spPr>
+          <a:xfrm>
+            <a:off x="3291840" y="1188720"/>
+            <a:ext cx="5394960" cy="274320"/>
+          </a:xfrm>
+          <a:prstGeom prst="rect">
+            <a:avLst/>
+          </a:prstGeom>
+          <a:noFill/>
+          <a:ln/>
+        </p:spPr>
+        <p:txBody>
+          <a:bodyPr wrap="square" lIns="0" tIns="0" rIns="0" bIns="0" rtlCol="0" anchor="ctr"/>
+          <a:lstStyle/>
+          <a:p>
+            <a:pPr indent="0" marL="0">
+              <a:buNone/>
+            </a:pPr>
+            <a:r>
+              <a:rPr lang="en-US" sz="1500" b="1" dirty="0">
+                <a:solidFill>
+                  <a:srgbClr val="10243E"/>
+                </a:solidFill>
+                <a:latin typeface="Cambria" pitchFamily="34" charset="0"/>
+                <a:ea typeface="Cambria" pitchFamily="34" charset="-122"/>
+                <a:cs typeface="Cambria" pitchFamily="34" charset="-120"/>
+              </a:rPr>
+              <a:t>Trong 20 câu sai</a:t>
+            </a:r>
+            <a:endParaRPr lang="en-US" sz="1500" dirty="0"/>
+          </a:p>
+        </p:txBody>
+      </p:sp>
+      <p:sp>
+        <p:nvSpPr>
+          <p:cNvPr id="11" name="Shape 8"/>
           <p:cNvSpPr/>
           <p:nvPr/>
         </p:nvSpPr>
         <p:spPr>
           <a:xfrm>
-            <a:off x="3246120" y="1280160"/>
-            <a:ext cx="2651760" cy="1371600"/>
+            <a:off x="3291840" y="1554480"/>
+            <a:ext cx="5394960" cy="1600200"/>
+          </a:xfrm>
+          <a:prstGeom prst="rect">
+            <a:avLst/>
+          </a:prstGeom>
+          <a:solidFill>
+            <a:srgbClr val="FBEAE5"/>
+          </a:solidFill>
+          <a:ln w="9525">
+            <a:solidFill>
+              <a:srgbClr val="DCE3EA"/>
+            </a:solidFill>
+            <a:prstDash val="solid"/>
+          </a:ln>
+        </p:spPr>
+      </p:sp>
+      <p:sp>
+        <p:nvSpPr>
+          <p:cNvPr id="12" name="Text 9"/>
+          <p:cNvSpPr txBox="1"/>
+          <p:nvPr/>
+        </p:nvSpPr>
+        <p:spPr>
+          <a:xfrm>
+            <a:off x="3429000" y="1691640"/>
+            <a:ext cx="868680" cy="731520"/>
+          </a:xfrm>
+          <a:prstGeom prst="rect">
+            <a:avLst/>
+          </a:prstGeom>
+          <a:noFill/>
+          <a:ln/>
+        </p:spPr>
+        <p:txBody>
+          <a:bodyPr wrap="square" lIns="0" tIns="0" rIns="0" bIns="0" rtlCol="0" anchor="ctr"/>
+          <a:lstStyle/>
+          <a:p>
+            <a:pPr algn="ctr" indent="0" marL="0">
+              <a:buNone/>
+            </a:pPr>
+            <a:r>
+              <a:rPr lang="en-US" sz="3800" b="1" dirty="0">
+                <a:solidFill>
+                  <a:srgbClr val="C8553D"/>
+                </a:solidFill>
+                <a:latin typeface="Cambria" pitchFamily="34" charset="0"/>
+                <a:ea typeface="Cambria" pitchFamily="34" charset="-122"/>
+                <a:cs typeface="Cambria" pitchFamily="34" charset="-120"/>
+              </a:rPr>
+              <a:t>19</a:t>
+            </a:r>
+            <a:endParaRPr lang="en-US" sz="3800" dirty="0"/>
+          </a:p>
+        </p:txBody>
+      </p:sp>
+      <p:sp>
+        <p:nvSpPr>
+          <p:cNvPr id="13" name="Text 10"/>
+          <p:cNvSpPr txBox="1"/>
+          <p:nvPr/>
+        </p:nvSpPr>
+        <p:spPr>
+          <a:xfrm>
+            <a:off x="4389120" y="1682496"/>
+            <a:ext cx="4160520" cy="384048"/>
+          </a:xfrm>
+          <a:prstGeom prst="rect">
+            <a:avLst/>
+          </a:prstGeom>
+          <a:noFill/>
+          <a:ln/>
+        </p:spPr>
+        <p:txBody>
+          <a:bodyPr wrap="square" lIns="0" tIns="0" rIns="0" bIns="0" rtlCol="0" anchor="ctr"/>
+          <a:lstStyle/>
+          <a:p>
+            <a:pPr indent="0" marL="0">
+              <a:buNone/>
+            </a:pPr>
+            <a:r>
+              <a:rPr lang="en-US" sz="1250" b="1" dirty="0">
+                <a:solidFill>
+                  <a:srgbClr val="10243E"/>
+                </a:solidFill>
+                <a:latin typeface="Calibri" pitchFamily="34" charset="0"/>
+                <a:ea typeface="Calibri" pitchFamily="34" charset="-122"/>
+                <a:cs typeface="Calibri" pitchFamily="34" charset="-120"/>
+              </a:rPr>
+              <a:t>đã có bằng chứng trong ký ức lấy về, vẫn trả lời sai</a:t>
+            </a:r>
+            <a:endParaRPr lang="en-US" sz="1250" dirty="0"/>
+          </a:p>
+        </p:txBody>
+      </p:sp>
+      <p:sp>
+        <p:nvSpPr>
+          <p:cNvPr id="14" name="Text 11"/>
+          <p:cNvSpPr txBox="1"/>
+          <p:nvPr/>
+        </p:nvSpPr>
+        <p:spPr>
+          <a:xfrm>
+            <a:off x="4389120" y="2066544"/>
+            <a:ext cx="4160520" cy="978408"/>
+          </a:xfrm>
+          <a:prstGeom prst="rect">
+            <a:avLst/>
+          </a:prstGeom>
+          <a:noFill/>
+          <a:ln/>
+        </p:spPr>
+        <p:txBody>
+          <a:bodyPr wrap="square" lIns="0" tIns="0" rIns="0" bIns="0" rtlCol="0" anchor="t"/>
+          <a:lstStyle/>
+          <a:p>
+            <a:pPr indent="0" marL="0">
+              <a:buNone/>
+            </a:pPr>
+            <a:r>
+              <a:rPr lang="en-US" sz="1100" dirty="0">
+                <a:solidFill>
+                  <a:srgbClr val="1B2B3A"/>
+                </a:solidFill>
+                <a:latin typeface="Calibri" pitchFamily="34" charset="0"/>
+                <a:ea typeface="Calibri" pitchFamily="34" charset="-122"/>
+                <a:cs typeface="Calibri" pitchFamily="34" charset="-120"/>
+              </a:rPr>
+              <a:t>Lỗi nằm ở tầng trích xuất (nén làm mất chi tiết) hoặc tầng suy luận, không phải tầng tìm kiếm. Ví dụ rõ nhất: một câu tính khoảng ngày, hệ nêu đúng cả hai mốc 22/03 và 15/04/2023 nhưng tính ra 18 ngày thay vì 24 — ký ức đúng, phép trừ sai.</a:t>
+            </a:r>
+            <a:endParaRPr lang="en-US" sz="1100" dirty="0"/>
+          </a:p>
+        </p:txBody>
+      </p:sp>
+      <p:sp>
+        <p:nvSpPr>
+          <p:cNvPr id="15" name="Shape 12"/>
+          <p:cNvSpPr/>
+          <p:nvPr/>
+        </p:nvSpPr>
+        <p:spPr>
+          <a:xfrm>
+            <a:off x="3291840" y="3291840"/>
+            <a:ext cx="5394960" cy="914400"/>
           </a:xfrm>
           <a:prstGeom prst="rect">
             <a:avLst/>
@@ -7333,14 +9744,14 @@
       </p:sp>
       <p:sp>
         <p:nvSpPr>
-          <p:cNvPr id="10" name="Text 7"/>
+          <p:cNvPr id="16" name="Text 13"/>
           <p:cNvSpPr txBox="1"/>
           <p:nvPr/>
         </p:nvSpPr>
         <p:spPr>
           <a:xfrm>
-            <a:off x="3246120" y="1371600"/>
-            <a:ext cx="2651760" cy="731520"/>
+            <a:off x="3429000" y="3429000"/>
+            <a:ext cx="868680" cy="731520"/>
           </a:xfrm>
           <a:prstGeom prst="rect">
             <a:avLst/>
@@ -7356,30 +9767,30 @@
               <a:buNone/>
             </a:pPr>
             <a:r>
-              <a:rPr lang="en-US" sz="3400" b="1" dirty="0">
-                <a:solidFill>
-                  <a:srgbClr val="1F6F8B"/>
+              <a:rPr lang="en-US" sz="3800" b="1" dirty="0">
+                <a:solidFill>
+                  <a:srgbClr val="5B6B7A"/>
                 </a:solidFill>
                 <a:latin typeface="Cambria" pitchFamily="34" charset="0"/>
                 <a:ea typeface="Cambria" pitchFamily="34" charset="-122"/>
                 <a:cs typeface="Cambria" pitchFamily="34" charset="-120"/>
               </a:rPr>
-              <a:t>0,18 s</a:t>
-            </a:r>
-            <a:endParaRPr lang="en-US" sz="3400" dirty="0"/>
-          </a:p>
-        </p:txBody>
-      </p:sp>
-      <p:sp>
-        <p:nvSpPr>
-          <p:cNvPr id="11" name="Text 8"/>
+              <a:t>1</a:t>
+            </a:r>
+            <a:endParaRPr lang="en-US" sz="3800" dirty="0"/>
+          </a:p>
+        </p:txBody>
+      </p:sp>
+      <p:sp>
+        <p:nvSpPr>
+          <p:cNvPr id="17" name="Text 14"/>
           <p:cNvSpPr txBox="1"/>
           <p:nvPr/>
         </p:nvSpPr>
         <p:spPr>
           <a:xfrm>
-            <a:off x="3246120" y="2103120"/>
-            <a:ext cx="2651760" cy="365760"/>
+            <a:off x="4389120" y="3419856"/>
+            <a:ext cx="4160520" cy="384048"/>
           </a:xfrm>
           <a:prstGeom prst="rect">
             <a:avLst/>
@@ -7391,40 +9802,79 @@
           <a:bodyPr wrap="square" lIns="0" tIns="0" rIns="0" bIns="0" rtlCol="0" anchor="ctr"/>
           <a:lstStyle/>
           <a:p>
-            <a:pPr algn="ctr" indent="0" marL="0">
-              <a:buNone/>
-            </a:pPr>
-            <a:r>
-              <a:rPr lang="en-US" sz="1200" dirty="0">
-                <a:solidFill>
-                  <a:srgbClr val="5B6B7A"/>
+            <a:pPr indent="0" marL="0">
+              <a:buNone/>
+            </a:pPr>
+            <a:r>
+              <a:rPr lang="en-US" sz="1250" b="1" dirty="0">
+                <a:solidFill>
+                  <a:srgbClr val="10243E"/>
                 </a:solidFill>
                 <a:latin typeface="Calibri" pitchFamily="34" charset="0"/>
                 <a:ea typeface="Calibri" pitchFamily="34" charset="-122"/>
                 <a:cs typeface="Calibri" pitchFamily="34" charset="-120"/>
               </a:rPr>
-              <a:t>truy xuất</a:t>
-            </a:r>
-            <a:endParaRPr lang="en-US" sz="1200" dirty="0"/>
-          </a:p>
-        </p:txBody>
-      </p:sp>
-      <p:sp>
-        <p:nvSpPr>
-          <p:cNvPr id="12" name="Shape 9"/>
+              <a:t>không truy xuất được bằng chứng</a:t>
+            </a:r>
+            <a:endParaRPr lang="en-US" sz="1250" dirty="0"/>
+          </a:p>
+        </p:txBody>
+      </p:sp>
+      <p:sp>
+        <p:nvSpPr>
+          <p:cNvPr id="18" name="Text 15"/>
+          <p:cNvSpPr txBox="1"/>
+          <p:nvPr/>
+        </p:nvSpPr>
+        <p:spPr>
+          <a:xfrm>
+            <a:off x="4389120" y="3803904"/>
+            <a:ext cx="4160520" cy="292608"/>
+          </a:xfrm>
+          <a:prstGeom prst="rect">
+            <a:avLst/>
+          </a:prstGeom>
+          <a:noFill/>
+          <a:ln/>
+        </p:spPr>
+        <p:txBody>
+          <a:bodyPr wrap="square" lIns="0" tIns="0" rIns="0" bIns="0" rtlCol="0" anchor="t"/>
+          <a:lstStyle/>
+          <a:p>
+            <a:pPr indent="0" marL="0">
+              <a:buNone/>
+            </a:pPr>
+            <a:r>
+              <a:rPr lang="en-US" sz="1100" dirty="0">
+                <a:solidFill>
+                  <a:srgbClr val="1B2B3A"/>
+                </a:solidFill>
+                <a:latin typeface="Calibri" pitchFamily="34" charset="0"/>
+                <a:ea typeface="Calibri" pitchFamily="34" charset="-122"/>
+                <a:cs typeface="Calibri" pitchFamily="34" charset="-120"/>
+              </a:rPr>
+              <a:t>Câu duy nhất thuộc loại lượt trợ lý, mà lời trợ lý thì không được lưu do cấu hình user_only.</a:t>
+            </a:r>
+            <a:endParaRPr lang="en-US" sz="1100" dirty="0"/>
+          </a:p>
+        </p:txBody>
+      </p:sp>
+      <p:sp>
+        <p:nvSpPr>
+          <p:cNvPr id="19" name="Shape 16"/>
           <p:cNvSpPr/>
           <p:nvPr/>
         </p:nvSpPr>
         <p:spPr>
           <a:xfrm>
-            <a:off x="6035040" y="1280160"/>
-            <a:ext cx="2651760" cy="1371600"/>
+            <a:off x="365760" y="4343400"/>
+            <a:ext cx="8321040" cy="548640"/>
           </a:xfrm>
           <a:prstGeom prst="rect">
             <a:avLst/>
           </a:prstGeom>
           <a:solidFill>
-            <a:srgbClr val="FFFFFF"/>
+            <a:srgbClr val="FDF3E1"/>
           </a:solidFill>
           <a:ln w="9525">
             <a:solidFill>
@@ -7436,14 +9886,14 @@
       </p:sp>
       <p:sp>
         <p:nvSpPr>
-          <p:cNvPr id="13" name="Text 10"/>
+          <p:cNvPr id="20" name="Text 17"/>
           <p:cNvSpPr txBox="1"/>
           <p:nvPr/>
         </p:nvSpPr>
         <p:spPr>
           <a:xfrm>
-            <a:off x="6035040" y="1371600"/>
-            <a:ext cx="2651760" cy="731520"/>
+            <a:off x="548640" y="4389120"/>
+            <a:ext cx="7955280" cy="457200"/>
           </a:xfrm>
           <a:prstGeom prst="rect">
             <a:avLst/>
@@ -7455,93 +9905,25 @@
           <a:bodyPr wrap="square" lIns="0" tIns="0" rIns="0" bIns="0" rtlCol="0" anchor="ctr"/>
           <a:lstStyle/>
           <a:p>
-            <a:pPr algn="ctr" indent="0" marL="0">
-              <a:buNone/>
-            </a:pPr>
-            <a:r>
-              <a:rPr lang="en-US" sz="3400" b="1" dirty="0">
-                <a:solidFill>
-                  <a:srgbClr val="1F6F8B"/>
-                </a:solidFill>
-                <a:latin typeface="Cambria" pitchFamily="34" charset="0"/>
-                <a:ea typeface="Cambria" pitchFamily="34" charset="-122"/>
-                <a:cs typeface="Cambria" pitchFamily="34" charset="-120"/>
-              </a:rPr>
-              <a:t>4,1 s</a:t>
-            </a:r>
-            <a:endParaRPr lang="en-US" sz="3400" dirty="0"/>
-          </a:p>
-        </p:txBody>
-      </p:sp>
-      <p:sp>
-        <p:nvSpPr>
-          <p:cNvPr id="14" name="Text 11"/>
-          <p:cNvSpPr txBox="1"/>
-          <p:nvPr/>
-        </p:nvSpPr>
-        <p:spPr>
-          <a:xfrm>
-            <a:off x="6035040" y="2103120"/>
-            <a:ext cx="2651760" cy="365760"/>
-          </a:xfrm>
-          <a:prstGeom prst="rect">
-            <a:avLst/>
-          </a:prstGeom>
-          <a:noFill/>
-          <a:ln/>
-        </p:spPr>
-        <p:txBody>
-          <a:bodyPr wrap="square" lIns="0" tIns="0" rIns="0" bIns="0" rtlCol="0" anchor="ctr"/>
-          <a:lstStyle/>
-          <a:p>
-            <a:pPr algn="ctr" indent="0" marL="0">
-              <a:buNone/>
-            </a:pPr>
-            <a:r>
-              <a:rPr lang="en-US" sz="1200" dirty="0">
-                <a:solidFill>
-                  <a:srgbClr val="5B6B7A"/>
+            <a:pPr indent="0" marL="0">
+              <a:buNone/>
+            </a:pPr>
+            <a:r>
+              <a:rPr lang="en-US" sz="1150" b="1" dirty="0">
+                <a:solidFill>
+                  <a:srgbClr val="10243E"/>
                 </a:solidFill>
                 <a:latin typeface="Calibri" pitchFamily="34" charset="0"/>
                 <a:ea typeface="Calibri" pitchFamily="34" charset="-122"/>
                 <a:cs typeface="Calibri" pitchFamily="34" charset="-120"/>
               </a:rPr>
-              <a:t>sinh câu trả lời</a:t>
-            </a:r>
-            <a:endParaRPr lang="en-US" sz="1200" dirty="0"/>
-          </a:p>
-        </p:txBody>
-      </p:sp>
-      <p:sp>
-        <p:nvSpPr>
-          <p:cNvPr id="15" name="Text 12"/>
-          <p:cNvSpPr txBox="1"/>
-          <p:nvPr/>
-        </p:nvSpPr>
-        <p:spPr>
-          <a:xfrm>
-            <a:off x="457200" y="2880360"/>
-            <a:ext cx="8229600" cy="1737360"/>
-          </a:xfrm>
-          <a:prstGeom prst="rect">
-            <a:avLst/>
-          </a:prstGeom>
-          <a:noFill/>
-          <a:ln/>
-        </p:spPr>
-        <p:txBody>
-          <a:bodyPr wrap="square" lIns="0" tIns="0" rIns="0" bIns="0" rtlCol="0" anchor="t"/>
-          <a:lstStyle/>
-          <a:p>
-            <a:pPr marL="342900" indent="-342900">
-              <a:spcAft>
-                <a:spcPts val="600"/>
-              </a:spcAft>
-              <a:buSzPct val="100000"/>
-              <a:buChar char="•"/>
-            </a:pPr>
-            <a:r>
-              <a:rPr lang="en-US" sz="1300" dirty="0">
+              <a:t>Ý nghĩa cho hệ của nhóm: </a:t>
+            </a:r>
+            <a:pPr indent="0" marL="0">
+              <a:buNone/>
+            </a:pPr>
+            <a:r>
+              <a:rPr lang="en-US" sz="1150" dirty="0">
                 <a:solidFill>
                   <a:srgbClr val="1B2B3A"/>
                 </a:solidFill>
@@ -7549,72 +9931,9 @@
                 <a:ea typeface="Calibri" pitchFamily="34" charset="-122"/>
                 <a:cs typeface="Calibri" pitchFamily="34" charset="-120"/>
               </a:rPr>
-              <a:t>Mỗi câu gọi LLM hàng trăm lần: hội thoại dài chia thành hàng trăm topic, mỗi topic trích fact và xử lý riêng.</a:t>
-            </a:r>
-            <a:endParaRPr lang="en-US" sz="1300" dirty="0"/>
-          </a:p>
-          <a:p>
-            <a:pPr marL="342900" indent="-342900">
-              <a:spcAft>
-                <a:spcPts val="600"/>
-              </a:spcAft>
-              <a:buSzPct val="100000"/>
-              <a:buChar char="•"/>
-            </a:pPr>
-            <a:r>
-              <a:rPr lang="en-US" sz="1300" dirty="0">
-                <a:solidFill>
-                  <a:srgbClr val="1B2B3A"/>
-                </a:solidFill>
-                <a:latin typeface="Calibri" pitchFamily="34" charset="0"/>
-                <a:ea typeface="Calibri" pitchFamily="34" charset="-122"/>
-                <a:cs typeface="Calibri" pitchFamily="34" charset="-120"/>
-              </a:rPr>
-              <a:t>Chạy 5–9 luồng song song, mỗi câu 33 phút (chậm nhất 61 phút); cả tập dev cần vài chục giờ.</a:t>
-            </a:r>
-            <a:endParaRPr lang="en-US" sz="1300" dirty="0"/>
-          </a:p>
-          <a:p>
-            <a:pPr marL="342900" indent="-342900">
-              <a:spcAft>
-                <a:spcPts val="600"/>
-              </a:spcAft>
-              <a:buSzPct val="100000"/>
-              <a:buChar char="•"/>
-            </a:pPr>
-            <a:r>
-              <a:rPr lang="en-US" sz="1300" dirty="0">
-                <a:solidFill>
-                  <a:srgbClr val="1B2B3A"/>
-                </a:solidFill>
-                <a:latin typeface="Calibri" pitchFamily="34" charset="0"/>
-                <a:ea typeface="Calibri" pitchFamily="34" charset="-122"/>
-                <a:cs typeface="Calibri" pitchFamily="34" charset="-120"/>
-              </a:rPr>
-              <a:t>9router chèn ~2,5 nghìn token system prompt mỗi lời gọi: khi báo cáo token phải tách phần này ra.</a:t>
-            </a:r>
-            <a:endParaRPr lang="en-US" sz="1300" dirty="0"/>
-          </a:p>
-          <a:p>
-            <a:pPr marL="342900" indent="-342900">
-              <a:spcAft>
-                <a:spcPts val="600"/>
-              </a:spcAft>
-              <a:buSzPct val="100000"/>
-              <a:buChar char="•"/>
-            </a:pPr>
-            <a:r>
-              <a:rPr lang="en-US" sz="1300" dirty="0">
-                <a:solidFill>
-                  <a:srgbClr val="1B2B3A"/>
-                </a:solidFill>
-                <a:latin typeface="Calibri" pitchFamily="34" charset="0"/>
-                <a:ea typeface="Calibri" pitchFamily="34" charset="-122"/>
-                <a:cs typeface="Calibri" pitchFamily="34" charset="-120"/>
-              </a:rPr>
-              <a:t>Tài khoản ChatGPT có trần sử dụng: đã chạm giới hạn (429), phải chờ hoặc thêm tài khoản.</a:t>
-            </a:r>
-            <a:endParaRPr lang="en-US" sz="1300" dirty="0"/>
+              <a:t>trên bộ dữ liệu này, cải thiện khâu tìm kiếm gần như không còn dư địa; điểm số phụ thuộc vào việc trích xuất giữ được bao nhiêu chi tiết và mô hình suy luận ra sao.</a:t>
+            </a:r>
+            <a:endParaRPr lang="en-US" sz="1150" dirty="0"/>
           </a:p>
         </p:txBody>
       </p:sp>
@@ -7683,7 +10002,7 @@
                 <a:ea typeface="Calibri" pitchFamily="34" charset="-122"/>
                 <a:cs typeface="Calibri" pitchFamily="34" charset="-120"/>
               </a:rPr>
-              <a:t>SỰ CỐ KỸ THUẬT</a:t>
+              <a:t>ĐỘ TIN CẬY CỦA PHÉP ĐO</a:t>
             </a:r>
             <a:endParaRPr lang="en-US" sz="1100" dirty="0"/>
           </a:p>
@@ -7722,7 +10041,7 @@
                 <a:ea typeface="Cambria" pitchFamily="34" charset="-122"/>
                 <a:cs typeface="Cambria" pitchFamily="34" charset="-120"/>
               </a:rPr>
-              <a:t>Sự cố gặp phải và cách xử lý</a:t>
+              <a:t>Model chấm đáng tin, nhưng hơi khắt khe</a:t>
             </a:r>
             <a:endParaRPr lang="en-US" sz="2600" dirty="0"/>
           </a:p>
@@ -7764,6 +10083,290 @@
               <a:t>Số liệu sơ bộ: 125/150 câu dev</a:t>
             </a:r>
             <a:endParaRPr lang="en-US" sz="1000" dirty="0"/>
+          </a:p>
+        </p:txBody>
+      </p:sp>
+      <p:sp>
+        <p:nvSpPr>
+          <p:cNvPr id="6" name="Shape 3"/>
+          <p:cNvSpPr/>
+          <p:nvPr/>
+        </p:nvSpPr>
+        <p:spPr>
+          <a:xfrm>
+            <a:off x="365760" y="1188720"/>
+            <a:ext cx="4069080" cy="1188720"/>
+          </a:xfrm>
+          <a:prstGeom prst="rect">
+            <a:avLst/>
+          </a:prstGeom>
+          <a:solidFill>
+            <a:srgbClr val="FFFFFF"/>
+          </a:solidFill>
+          <a:ln w="9525">
+            <a:solidFill>
+              <a:srgbClr val="DCE3EA"/>
+            </a:solidFill>
+            <a:prstDash val="solid"/>
+          </a:ln>
+        </p:spPr>
+      </p:sp>
+      <p:sp>
+        <p:nvSpPr>
+          <p:cNvPr id="7" name="Text 4"/>
+          <p:cNvSpPr txBox="1"/>
+          <p:nvPr/>
+        </p:nvSpPr>
+        <p:spPr>
+          <a:xfrm>
+            <a:off x="502920" y="1325880"/>
+            <a:ext cx="1234440" cy="685800"/>
+          </a:xfrm>
+          <a:prstGeom prst="rect">
+            <a:avLst/>
+          </a:prstGeom>
+          <a:noFill/>
+          <a:ln/>
+        </p:spPr>
+        <p:txBody>
+          <a:bodyPr wrap="square" lIns="0" tIns="0" rIns="0" bIns="0" rtlCol="0" anchor="ctr"/>
+          <a:lstStyle/>
+          <a:p>
+            <a:pPr algn="ctr" indent="0" marL="0">
+              <a:buNone/>
+            </a:pPr>
+            <a:r>
+              <a:rPr lang="en-US" sz="3000" b="1" dirty="0">
+                <a:solidFill>
+                  <a:srgbClr val="1F6F8B"/>
+                </a:solidFill>
+                <a:latin typeface="Cambria" pitchFamily="34" charset="0"/>
+                <a:ea typeface="Cambria" pitchFamily="34" charset="-122"/>
+                <a:cs typeface="Cambria" pitchFamily="34" charset="-120"/>
+              </a:rPr>
+              <a:t>0/12</a:t>
+            </a:r>
+            <a:endParaRPr lang="en-US" sz="3000" dirty="0"/>
+          </a:p>
+        </p:txBody>
+      </p:sp>
+      <p:sp>
+        <p:nvSpPr>
+          <p:cNvPr id="8" name="Text 5"/>
+          <p:cNvSpPr txBox="1"/>
+          <p:nvPr/>
+        </p:nvSpPr>
+        <p:spPr>
+          <a:xfrm>
+            <a:off x="1828800" y="1298448"/>
+            <a:ext cx="2468880" cy="365760"/>
+          </a:xfrm>
+          <a:prstGeom prst="rect">
+            <a:avLst/>
+          </a:prstGeom>
+          <a:noFill/>
+          <a:ln/>
+        </p:spPr>
+        <p:txBody>
+          <a:bodyPr wrap="square" lIns="0" tIns="0" rIns="0" bIns="0" rtlCol="0" anchor="ctr"/>
+          <a:lstStyle/>
+          <a:p>
+            <a:pPr indent="0" marL="0">
+              <a:buNone/>
+            </a:pPr>
+            <a:r>
+              <a:rPr lang="en-US" sz="1250" b="1" dirty="0">
+                <a:solidFill>
+                  <a:srgbClr val="10243E"/>
+                </a:solidFill>
+                <a:latin typeface="Calibri" pitchFamily="34" charset="0"/>
+                <a:ea typeface="Calibri" pitchFamily="34" charset="-122"/>
+                <a:cs typeface="Calibri" pitchFamily="34" charset="-120"/>
+              </a:rPr>
+              <a:t>câu chấm đúng bị sai</a:t>
+            </a:r>
+            <a:endParaRPr lang="en-US" sz="1250" dirty="0"/>
+          </a:p>
+        </p:txBody>
+      </p:sp>
+      <p:sp>
+        <p:nvSpPr>
+          <p:cNvPr id="9" name="Text 6"/>
+          <p:cNvSpPr txBox="1"/>
+          <p:nvPr/>
+        </p:nvSpPr>
+        <p:spPr>
+          <a:xfrm>
+            <a:off x="1828800" y="1664208"/>
+            <a:ext cx="2468880" cy="777240"/>
+          </a:xfrm>
+          <a:prstGeom prst="rect">
+            <a:avLst/>
+          </a:prstGeom>
+          <a:noFill/>
+          <a:ln/>
+        </p:spPr>
+        <p:txBody>
+          <a:bodyPr wrap="square" lIns="0" tIns="0" rIns="0" bIns="0" rtlCol="0" anchor="t"/>
+          <a:lstStyle/>
+          <a:p>
+            <a:pPr indent="0" marL="0">
+              <a:buNone/>
+            </a:pPr>
+            <a:r>
+              <a:rPr lang="en-US" sz="1050" dirty="0">
+                <a:solidFill>
+                  <a:srgbClr val="1B2B3A"/>
+                </a:solidFill>
+                <a:latin typeface="Calibri" pitchFamily="34" charset="0"/>
+                <a:ea typeface="Calibri" pitchFamily="34" charset="-122"/>
+                <a:cs typeface="Calibri" pitchFamily="34" charset="-120"/>
+              </a:rPr>
+              <a:t>Soi ngẫu nhiên trong nhóm được chấm đúng. Không có câu nào được cho điểm oan.</a:t>
+            </a:r>
+            <a:endParaRPr lang="en-US" sz="1050" dirty="0"/>
+          </a:p>
+        </p:txBody>
+      </p:sp>
+      <p:sp>
+        <p:nvSpPr>
+          <p:cNvPr id="10" name="Shape 7"/>
+          <p:cNvSpPr/>
+          <p:nvPr/>
+        </p:nvSpPr>
+        <p:spPr>
+          <a:xfrm>
+            <a:off x="4617720" y="1188720"/>
+            <a:ext cx="4069080" cy="1188720"/>
+          </a:xfrm>
+          <a:prstGeom prst="rect">
+            <a:avLst/>
+          </a:prstGeom>
+          <a:solidFill>
+            <a:srgbClr val="FFFFFF"/>
+          </a:solidFill>
+          <a:ln w="9525">
+            <a:solidFill>
+              <a:srgbClr val="DCE3EA"/>
+            </a:solidFill>
+            <a:prstDash val="solid"/>
+          </a:ln>
+        </p:spPr>
+      </p:sp>
+      <p:sp>
+        <p:nvSpPr>
+          <p:cNvPr id="11" name="Text 8"/>
+          <p:cNvSpPr txBox="1"/>
+          <p:nvPr/>
+        </p:nvSpPr>
+        <p:spPr>
+          <a:xfrm>
+            <a:off x="4754880" y="1325880"/>
+            <a:ext cx="1234440" cy="685800"/>
+          </a:xfrm>
+          <a:prstGeom prst="rect">
+            <a:avLst/>
+          </a:prstGeom>
+          <a:noFill/>
+          <a:ln/>
+        </p:spPr>
+        <p:txBody>
+          <a:bodyPr wrap="square" lIns="0" tIns="0" rIns="0" bIns="0" rtlCol="0" anchor="ctr"/>
+          <a:lstStyle/>
+          <a:p>
+            <a:pPr algn="ctr" indent="0" marL="0">
+              <a:buNone/>
+            </a:pPr>
+            <a:r>
+              <a:rPr lang="en-US" sz="3000" b="1" dirty="0">
+                <a:solidFill>
+                  <a:srgbClr val="F2A541"/>
+                </a:solidFill>
+                <a:latin typeface="Cambria" pitchFamily="34" charset="0"/>
+                <a:ea typeface="Cambria" pitchFamily="34" charset="-122"/>
+                <a:cs typeface="Cambria" pitchFamily="34" charset="-120"/>
+              </a:rPr>
+              <a:t>2/20</a:t>
+            </a:r>
+            <a:endParaRPr lang="en-US" sz="3000" dirty="0"/>
+          </a:p>
+        </p:txBody>
+      </p:sp>
+      <p:sp>
+        <p:nvSpPr>
+          <p:cNvPr id="12" name="Text 9"/>
+          <p:cNvSpPr txBox="1"/>
+          <p:nvPr/>
+        </p:nvSpPr>
+        <p:spPr>
+          <a:xfrm>
+            <a:off x="6080760" y="1298448"/>
+            <a:ext cx="2468880" cy="365760"/>
+          </a:xfrm>
+          <a:prstGeom prst="rect">
+            <a:avLst/>
+          </a:prstGeom>
+          <a:noFill/>
+          <a:ln/>
+        </p:spPr>
+        <p:txBody>
+          <a:bodyPr wrap="square" lIns="0" tIns="0" rIns="0" bIns="0" rtlCol="0" anchor="ctr"/>
+          <a:lstStyle/>
+          <a:p>
+            <a:pPr indent="0" marL="0">
+              <a:buNone/>
+            </a:pPr>
+            <a:r>
+              <a:rPr lang="en-US" sz="1250" b="1" dirty="0">
+                <a:solidFill>
+                  <a:srgbClr val="10243E"/>
+                </a:solidFill>
+                <a:latin typeface="Calibri" pitchFamily="34" charset="0"/>
+                <a:ea typeface="Calibri" pitchFamily="34" charset="-122"/>
+                <a:cs typeface="Calibri" pitchFamily="34" charset="-120"/>
+              </a:rPr>
+              <a:t>câu chấm sai đáng ngờ</a:t>
+            </a:r>
+            <a:endParaRPr lang="en-US" sz="1250" dirty="0"/>
+          </a:p>
+        </p:txBody>
+      </p:sp>
+      <p:sp>
+        <p:nvSpPr>
+          <p:cNvPr id="13" name="Text 10"/>
+          <p:cNvSpPr txBox="1"/>
+          <p:nvPr/>
+        </p:nvSpPr>
+        <p:spPr>
+          <a:xfrm>
+            <a:off x="6080760" y="1664208"/>
+            <a:ext cx="2468880" cy="777240"/>
+          </a:xfrm>
+          <a:prstGeom prst="rect">
+            <a:avLst/>
+          </a:prstGeom>
+          <a:noFill/>
+          <a:ln/>
+        </p:spPr>
+        <p:txBody>
+          <a:bodyPr wrap="square" lIns="0" tIns="0" rIns="0" bIns="0" rtlCol="0" anchor="t"/>
+          <a:lstStyle/>
+          <a:p>
+            <a:pPr indent="0" marL="0">
+              <a:buNone/>
+            </a:pPr>
+            <a:r>
+              <a:rPr lang="en-US" sz="1050" dirty="0">
+                <a:solidFill>
+                  <a:srgbClr val="1B2B3A"/>
+                </a:solidFill>
+                <a:latin typeface="Calibri" pitchFamily="34" charset="0"/>
+                <a:ea typeface="Calibri" pitchFamily="34" charset="-122"/>
+                <a:cs typeface="Calibri" pitchFamily="34" charset="-120"/>
+              </a:rPr>
+              <a:t>Soi toàn bộ nhóm bị chấm sai. Hai câu dưới đây nhóm thấy nên tính đúng.</a:t>
+            </a:r>
+            <a:endParaRPr lang="en-US" sz="1050" dirty="0"/>
           </a:p>
         </p:txBody>
       </p:sp>
@@ -7782,19 +10385,19 @@
           </p:nvPr>
         </p:nvGraphicFramePr>
         <p:xfrm>
-          <a:off x="457200" y="1280160"/>
-          <a:ext cx="8229600" cy="914400"/>
+          <a:off x="365760" y="2514600"/>
+          <a:ext cx="8321040" cy="914400"/>
         </p:xfrm>
         <a:graphic>
           <a:graphicData uri="http://schemas.openxmlformats.org/drawingml/2006/table">
             <a:tbl>
               <a:tblPr/>
               <a:tblGrid>
-                <a:gridCol w="2286000"/>
+                <a:gridCol w="2468880"/>
+                <a:gridCol w="2743200"/>
                 <a:gridCol w="3108960"/>
-                <a:gridCol w="2834640"/>
               </a:tblGrid>
-              <a:tr h="502920">
+              <a:tr h="658368">
                 <a:tc>
                   <a:txBody>
                     <a:bodyPr/>
@@ -7804,7 +10407,7 @@
                         <a:buNone/>
                       </a:pPr>
                       <a:r>
-                        <a:rPr lang="en-US" sz="1100" b="1" dirty="0">
+                        <a:rPr lang="en-US" sz="900" b="1" dirty="0">
                           <a:solidFill>
                             <a:srgbClr val="FFFFFF"/>
                           </a:solidFill>
@@ -7812,9 +10415,9 @@
                           <a:ea typeface="Calibri" pitchFamily="34" charset="-122"/>
                           <a:cs typeface="Calibri" pitchFamily="34" charset="-120"/>
                         </a:rPr>
-                        <a:t>Sự cố</a:t>
+                        <a:t>Đáp án gốc</a:t>
                       </a:r>
-                      <a:endParaRPr lang="en-US" sz="1100" dirty="0">
+                      <a:endParaRPr lang="en-US" sz="900" dirty="0">
                         <a:latin typeface="Calibri" charset="0"/>
                         <a:ea typeface="Calibri" charset="0"/>
                         <a:cs typeface="Calibri" charset="0"/>
@@ -7872,7 +10475,7 @@
                         <a:buNone/>
                       </a:pPr>
                       <a:r>
-                        <a:rPr lang="en-US" sz="1100" b="1" dirty="0">
+                        <a:rPr lang="en-US" sz="900" b="1" dirty="0">
                           <a:solidFill>
                             <a:srgbClr val="FFFFFF"/>
                           </a:solidFill>
@@ -7880,9 +10483,9 @@
                           <a:ea typeface="Calibri" pitchFamily="34" charset="-122"/>
                           <a:cs typeface="Calibri" pitchFamily="34" charset="-120"/>
                         </a:rPr>
-                        <a:t>Nguyên nhân</a:t>
+                        <a:t>Hệ trả lời</a:t>
                       </a:r>
-                      <a:endParaRPr lang="en-US" sz="1100" dirty="0">
+                      <a:endParaRPr lang="en-US" sz="900" dirty="0">
                         <a:latin typeface="Calibri" charset="0"/>
                         <a:ea typeface="Calibri" charset="0"/>
                         <a:cs typeface="Calibri" charset="0"/>
@@ -7940,7 +10543,7 @@
                         <a:buNone/>
                       </a:pPr>
                       <a:r>
-                        <a:rPr lang="en-US" sz="1100" b="1" dirty="0">
+                        <a:rPr lang="en-US" sz="900" b="1" dirty="0">
                           <a:solidFill>
                             <a:srgbClr val="FFFFFF"/>
                           </a:solidFill>
@@ -7948,9 +10551,9 @@
                           <a:ea typeface="Calibri" pitchFamily="34" charset="-122"/>
                           <a:cs typeface="Calibri" pitchFamily="34" charset="-120"/>
                         </a:rPr>
-                        <a:t>Cách xử lý</a:t>
+                        <a:t>Vì sao nhóm thấy đáng ngờ</a:t>
                       </a:r>
-                      <a:endParaRPr lang="en-US" sz="1100" dirty="0">
+                      <a:endParaRPr lang="en-US" sz="900" dirty="0">
                         <a:latin typeface="Calibri" charset="0"/>
                         <a:ea typeface="Calibri" charset="0"/>
                         <a:cs typeface="Calibri" charset="0"/>
@@ -8000,7 +10603,7 @@
                   </a:tcPr>
                 </a:tc>
               </a:tr>
-              <a:tr h="502920">
+              <a:tr h="658368">
                 <a:tc>
                   <a:txBody>
                     <a:bodyPr/>
@@ -8010,7 +10613,7 @@
                         <a:buNone/>
                       </a:pPr>
                       <a:r>
-                        <a:rPr lang="en-US" sz="1100" dirty="0">
+                        <a:rPr lang="en-US" sz="900" dirty="0">
                           <a:solidFill>
                             <a:srgbClr val="1B2B3A"/>
                           </a:solidFill>
@@ -8018,9 +10621,9 @@
                           <a:ea typeface="Calibri" pitchFamily="34" charset="-122"/>
                           <a:cs typeface="Calibri" pitchFamily="34" charset="-120"/>
                         </a:rPr>
-                        <a:t>Script gốc không chạy</a:t>
+                        <a:t>Đáp án là một rubric: câu trả lời cần xét tới ảnh hưởng của con mèo Luna và việc nó rụng lông.</a:t>
                       </a:r>
-                      <a:endParaRPr lang="en-US" sz="1100" dirty="0">
+                      <a:endParaRPr lang="en-US" sz="900" dirty="0">
                         <a:latin typeface="Calibri" charset="0"/>
                         <a:ea typeface="Calibri" charset="0"/>
                         <a:cs typeface="Calibri" charset="0"/>
@@ -8075,7 +10678,7 @@
                         <a:buNone/>
                       </a:pPr>
                       <a:r>
-                        <a:rPr lang="en-US" sz="1100" dirty="0">
+                        <a:rPr lang="en-US" sz="900" dirty="0">
                           <a:solidFill>
                             <a:srgbClr val="1B2B3A"/>
                           </a:solidFill>
@@ -8083,9 +10686,9 @@
                           <a:ea typeface="Calibri" pitchFamily="34" charset="-122"/>
                           <a:cs typeface="Calibri" pitchFamily="34" charset="-120"/>
                         </a:rPr>
-                        <a:t>Dùng f-string kiểu Python 3.12, môi trường là 3.11</a:t>
+                        <a:t>Yes, it could be. Your cat sheds heavily, so the living room may contain cat hair and dander…</a:t>
                       </a:r>
-                      <a:endParaRPr lang="en-US" sz="1100" dirty="0">
+                      <a:endParaRPr lang="en-US" sz="900" dirty="0">
                         <a:latin typeface="Calibri" charset="0"/>
                         <a:ea typeface="Calibri" charset="0"/>
                         <a:cs typeface="Calibri" charset="0"/>
@@ -8140,7 +10743,7 @@
                         <a:buNone/>
                       </a:pPr>
                       <a:r>
-                        <a:rPr lang="en-US" sz="1100" dirty="0">
+                        <a:rPr lang="en-US" sz="900" dirty="0">
                           <a:solidFill>
                             <a:srgbClr val="1B2B3A"/>
                           </a:solidFill>
@@ -8148,9 +10751,9 @@
                           <a:ea typeface="Calibri" pitchFamily="34" charset="-122"/>
                           <a:cs typeface="Calibri" pitchFamily="34" charset="-120"/>
                         </a:rPr>
-                        <a:t>Viết script bọc ngoài, không sửa mã gốc</a:t>
+                        <a:t>Câu trả lời đã nhắc đúng việc mèo rụng lông, tức là đáp ứng rubric, nhưng vẫn bị chấm sai.</a:t>
                       </a:r>
-                      <a:endParaRPr lang="en-US" sz="1100" dirty="0">
+                      <a:endParaRPr lang="en-US" sz="900" dirty="0">
                         <a:latin typeface="Calibri" charset="0"/>
                         <a:ea typeface="Calibri" charset="0"/>
                         <a:cs typeface="Calibri" charset="0"/>
@@ -8197,7 +10800,7 @@
                   </a:tcPr>
                 </a:tc>
               </a:tr>
-              <a:tr h="502920">
+              <a:tr h="658368">
                 <a:tc>
                   <a:txBody>
                     <a:bodyPr/>
@@ -8207,7 +10810,7 @@
                         <a:buNone/>
                       </a:pPr>
                       <a:r>
-                        <a:rPr lang="en-US" sz="1100" dirty="0">
+                        <a:rPr lang="en-US" sz="900" dirty="0">
                           <a:solidFill>
                             <a:srgbClr val="1B2B3A"/>
                           </a:solidFill>
@@ -8215,9 +10818,9 @@
                           <a:ea typeface="Calibri" pitchFamily="34" charset="-122"/>
                           <a:cs typeface="Calibri" pitchFamily="34" charset="-120"/>
                         </a:rPr>
-                        <a:t>Lỗi “meta tensor” khi chạy song song</a:t>
+                        <a:t>19 days ago. 20 days (including the last day) is also acceptable.</a:t>
                       </a:r>
-                      <a:endParaRPr lang="en-US" sz="1100" dirty="0">
+                      <a:endParaRPr lang="en-US" sz="900" dirty="0">
                         <a:latin typeface="Calibri" charset="0"/>
                         <a:ea typeface="Calibri" charset="0"/>
                         <a:cs typeface="Calibri" charset="0"/>
@@ -8272,7 +10875,7 @@
                         <a:buNone/>
                       </a:pPr>
                       <a:r>
-                        <a:rPr lang="en-US" sz="1100" dirty="0">
+                        <a:rPr lang="en-US" sz="900" dirty="0">
                           <a:solidFill>
                             <a:srgbClr val="1B2B3A"/>
                           </a:solidFill>
@@ -8280,9 +10883,9 @@
                           <a:ea typeface="Calibri" pitchFamily="34" charset="-122"/>
                           <a:cs typeface="Calibri" pitchFamily="34" charset="-120"/>
                         </a:rPr>
-                        <a:t>Nhiều luồng cùng nạp model, đụng nhau</a:t>
+                        <a:t>You launched your website 19 days before signing your first-client contract (February 10 to March 1, 2023). As of March 25, 2023, that…</a:t>
                       </a:r>
-                      <a:endParaRPr lang="en-US" sz="1100" dirty="0">
+                      <a:endParaRPr lang="en-US" sz="900" dirty="0">
                         <a:latin typeface="Calibri" charset="0"/>
                         <a:ea typeface="Calibri" charset="0"/>
                         <a:cs typeface="Calibri" charset="0"/>
@@ -8337,7 +10940,7 @@
                         <a:buNone/>
                       </a:pPr>
                       <a:r>
-                        <a:rPr lang="en-US" sz="1100" dirty="0">
+                        <a:rPr lang="en-US" sz="900" dirty="0">
                           <a:solidFill>
                             <a:srgbClr val="1B2B3A"/>
                           </a:solidFill>
@@ -8345,9 +10948,9 @@
                           <a:ea typeface="Calibri" pitchFamily="34" charset="-122"/>
                           <a:cs typeface="Calibri" pitchFamily="34" charset="-120"/>
                         </a:rPr>
-                        <a:t>Khóa phần nạp model; mỗi luồng nạp một lần</a:t>
+                        <a:t>Câu trả lời có nêu đúng con số 19 ngày. Nhưng nó nói thêm '43 days ago' ở cuối, nên có thể bị hiểu là đáp án cuối cùng là 43. Trường hợp này thật sự mập mờ.</a:t>
                       </a:r>
-                      <a:endParaRPr lang="en-US" sz="1100" dirty="0">
+                      <a:endParaRPr lang="en-US" sz="900" dirty="0">
                         <a:latin typeface="Calibri" charset="0"/>
                         <a:ea typeface="Calibri" charset="0"/>
                         <a:cs typeface="Calibri" charset="0"/>
@@ -8394,601 +10997,88 @@
                   </a:tcPr>
                 </a:tc>
               </a:tr>
-              <a:tr h="502920">
-                <a:tc>
-                  <a:txBody>
-                    <a:bodyPr/>
-                    <a:lstStyle/>
-                    <a:p>
-                      <a:pPr indent="0" marL="0">
-                        <a:buNone/>
-                      </a:pPr>
-                      <a:r>
-                        <a:rPr lang="en-US" sz="1100" dirty="0">
-                          <a:solidFill>
-                            <a:srgbClr val="1B2B3A"/>
-                          </a:solidFill>
-                          <a:latin typeface="Calibri" pitchFamily="34" charset="0"/>
-                          <a:ea typeface="Calibri" pitchFamily="34" charset="-122"/>
-                          <a:cs typeface="Calibri" pitchFamily="34" charset="-120"/>
-                        </a:rPr>
-                        <a:t>Cạn RAM (pagefile)</a:t>
-                      </a:r>
-                      <a:endParaRPr lang="en-US" sz="1100" dirty="0">
-                        <a:latin typeface="Calibri" charset="0"/>
-                        <a:ea typeface="Calibri" charset="0"/>
-                        <a:cs typeface="Calibri" charset="0"/>
-                      </a:endParaRPr>
-                    </a:p>
-                  </a:txBody>
-                  <a:tcPr marL="91440" marR="91440" marT="45720" marB="45720" anchor="ctr">
-                    <a:lnL w="9525" cap="flat" cmpd="sng" algn="ctr">
-                      <a:solidFill>
-                        <a:srgbClr val="DCE3EA"/>
-                      </a:solidFill>
-                      <a:prstDash val="solid"/>
-                      <a:round/>
-                      <a:headEnd type="none" w="med" len="med"/>
-                      <a:tailEnd type="none" w="med" len="med"/>
-                    </a:lnL>
-                    <a:lnR w="9525" cap="flat" cmpd="sng" algn="ctr">
-                      <a:solidFill>
-                        <a:srgbClr val="DCE3EA"/>
-                      </a:solidFill>
-                      <a:prstDash val="solid"/>
-                      <a:round/>
-                      <a:headEnd type="none" w="med" len="med"/>
-                      <a:tailEnd type="none" w="med" len="med"/>
-                    </a:lnR>
-                    <a:lnT w="9525" cap="flat" cmpd="sng" algn="ctr">
-                      <a:solidFill>
-                        <a:srgbClr val="DCE3EA"/>
-                      </a:solidFill>
-                      <a:prstDash val="solid"/>
-                      <a:round/>
-                      <a:headEnd type="none" w="med" len="med"/>
-                      <a:tailEnd type="none" w="med" len="med"/>
-                    </a:lnT>
-                    <a:lnB w="9525" cap="flat" cmpd="sng" algn="ctr">
-                      <a:solidFill>
-                        <a:srgbClr val="DCE3EA"/>
-                      </a:solidFill>
-                      <a:prstDash val="solid"/>
-                      <a:round/>
-                      <a:headEnd type="none" w="med" len="med"/>
-                      <a:tailEnd type="none" w="med" len="med"/>
-                    </a:lnB>
-                  </a:tcPr>
-                </a:tc>
-                <a:tc>
-                  <a:txBody>
-                    <a:bodyPr/>
-                    <a:lstStyle/>
-                    <a:p>
-                      <a:pPr indent="0" marL="0">
-                        <a:buNone/>
-                      </a:pPr>
-                      <a:r>
-                        <a:rPr lang="en-US" sz="1100" dirty="0">
-                          <a:solidFill>
-                            <a:srgbClr val="1B2B3A"/>
-                          </a:solidFill>
-                          <a:latin typeface="Calibri" pitchFamily="34" charset="0"/>
-                          <a:ea typeface="Calibri" pitchFamily="34" charset="-122"/>
-                          <a:cs typeface="Calibri" pitchFamily="34" charset="-120"/>
-                        </a:rPr>
-                        <a:t>Nạp lại model cho từng câu, không giải phóng kịp</a:t>
-                      </a:r>
-                      <a:endParaRPr lang="en-US" sz="1100" dirty="0">
-                        <a:latin typeface="Calibri" charset="0"/>
-                        <a:ea typeface="Calibri" charset="0"/>
-                        <a:cs typeface="Calibri" charset="0"/>
-                      </a:endParaRPr>
-                    </a:p>
-                  </a:txBody>
-                  <a:tcPr marL="91440" marR="91440" marT="45720" marB="45720" anchor="ctr">
-                    <a:lnL w="9525" cap="flat" cmpd="sng" algn="ctr">
-                      <a:solidFill>
-                        <a:srgbClr val="DCE3EA"/>
-                      </a:solidFill>
-                      <a:prstDash val="solid"/>
-                      <a:round/>
-                      <a:headEnd type="none" w="med" len="med"/>
-                      <a:tailEnd type="none" w="med" len="med"/>
-                    </a:lnL>
-                    <a:lnR w="9525" cap="flat" cmpd="sng" algn="ctr">
-                      <a:solidFill>
-                        <a:srgbClr val="DCE3EA"/>
-                      </a:solidFill>
-                      <a:prstDash val="solid"/>
-                      <a:round/>
-                      <a:headEnd type="none" w="med" len="med"/>
-                      <a:tailEnd type="none" w="med" len="med"/>
-                    </a:lnR>
-                    <a:lnT w="9525" cap="flat" cmpd="sng" algn="ctr">
-                      <a:solidFill>
-                        <a:srgbClr val="DCE3EA"/>
-                      </a:solidFill>
-                      <a:prstDash val="solid"/>
-                      <a:round/>
-                      <a:headEnd type="none" w="med" len="med"/>
-                      <a:tailEnd type="none" w="med" len="med"/>
-                    </a:lnT>
-                    <a:lnB w="9525" cap="flat" cmpd="sng" algn="ctr">
-                      <a:solidFill>
-                        <a:srgbClr val="DCE3EA"/>
-                      </a:solidFill>
-                      <a:prstDash val="solid"/>
-                      <a:round/>
-                      <a:headEnd type="none" w="med" len="med"/>
-                      <a:tailEnd type="none" w="med" len="med"/>
-                    </a:lnB>
-                  </a:tcPr>
-                </a:tc>
-                <a:tc>
-                  <a:txBody>
-                    <a:bodyPr/>
-                    <a:lstStyle/>
-                    <a:p>
-                      <a:pPr indent="0" marL="0">
-                        <a:buNone/>
-                      </a:pPr>
-                      <a:r>
-                        <a:rPr lang="en-US" sz="1100" dirty="0">
-                          <a:solidFill>
-                            <a:srgbClr val="1B2B3A"/>
-                          </a:solidFill>
-                          <a:latin typeface="Calibri" pitchFamily="34" charset="0"/>
-                          <a:ea typeface="Calibri" pitchFamily="34" charset="-122"/>
-                          <a:cs typeface="Calibri" pitchFamily="34" charset="-120"/>
-                        </a:rPr>
-                        <a:t>Cache model theo luồng, dọn bộ nhớ sau mỗi câu</a:t>
-                      </a:r>
-                      <a:endParaRPr lang="en-US" sz="1100" dirty="0">
-                        <a:latin typeface="Calibri" charset="0"/>
-                        <a:ea typeface="Calibri" charset="0"/>
-                        <a:cs typeface="Calibri" charset="0"/>
-                      </a:endParaRPr>
-                    </a:p>
-                  </a:txBody>
-                  <a:tcPr marL="91440" marR="91440" marT="45720" marB="45720" anchor="ctr">
-                    <a:lnL w="9525" cap="flat" cmpd="sng" algn="ctr">
-                      <a:solidFill>
-                        <a:srgbClr val="DCE3EA"/>
-                      </a:solidFill>
-                      <a:prstDash val="solid"/>
-                      <a:round/>
-                      <a:headEnd type="none" w="med" len="med"/>
-                      <a:tailEnd type="none" w="med" len="med"/>
-                    </a:lnL>
-                    <a:lnR w="9525" cap="flat" cmpd="sng" algn="ctr">
-                      <a:solidFill>
-                        <a:srgbClr val="DCE3EA"/>
-                      </a:solidFill>
-                      <a:prstDash val="solid"/>
-                      <a:round/>
-                      <a:headEnd type="none" w="med" len="med"/>
-                      <a:tailEnd type="none" w="med" len="med"/>
-                    </a:lnR>
-                    <a:lnT w="9525" cap="flat" cmpd="sng" algn="ctr">
-                      <a:solidFill>
-                        <a:srgbClr val="DCE3EA"/>
-                      </a:solidFill>
-                      <a:prstDash val="solid"/>
-                      <a:round/>
-                      <a:headEnd type="none" w="med" len="med"/>
-                      <a:tailEnd type="none" w="med" len="med"/>
-                    </a:lnT>
-                    <a:lnB w="9525" cap="flat" cmpd="sng" algn="ctr">
-                      <a:solidFill>
-                        <a:srgbClr val="DCE3EA"/>
-                      </a:solidFill>
-                      <a:prstDash val="solid"/>
-                      <a:round/>
-                      <a:headEnd type="none" w="med" len="med"/>
-                      <a:tailEnd type="none" w="med" len="med"/>
-                    </a:lnB>
-                  </a:tcPr>
-                </a:tc>
-              </a:tr>
-              <a:tr h="502920">
-                <a:tc>
-                  <a:txBody>
-                    <a:bodyPr/>
-                    <a:lstStyle/>
-                    <a:p>
-                      <a:pPr indent="0" marL="0">
-                        <a:buNone/>
-                      </a:pPr>
-                      <a:r>
-                        <a:rPr lang="en-US" sz="1100" dirty="0">
-                          <a:solidFill>
-                            <a:srgbClr val="1B2B3A"/>
-                          </a:solidFill>
-                          <a:latin typeface="Calibri" pitchFamily="34" charset="0"/>
-                          <a:ea typeface="Calibri" pitchFamily="34" charset="-122"/>
-                          <a:cs typeface="Calibri" pitchFamily="34" charset="-120"/>
-                        </a:rPr>
-                        <a:t>Windows chặn Python</a:t>
-                      </a:r>
-                      <a:endParaRPr lang="en-US" sz="1100" dirty="0">
-                        <a:latin typeface="Calibri" charset="0"/>
-                        <a:ea typeface="Calibri" charset="0"/>
-                        <a:cs typeface="Calibri" charset="0"/>
-                      </a:endParaRPr>
-                    </a:p>
-                  </a:txBody>
-                  <a:tcPr marL="91440" marR="91440" marT="45720" marB="45720" anchor="ctr">
-                    <a:lnL w="9525" cap="flat" cmpd="sng" algn="ctr">
-                      <a:solidFill>
-                        <a:srgbClr val="DCE3EA"/>
-                      </a:solidFill>
-                      <a:prstDash val="solid"/>
-                      <a:round/>
-                      <a:headEnd type="none" w="med" len="med"/>
-                      <a:tailEnd type="none" w="med" len="med"/>
-                    </a:lnL>
-                    <a:lnR w="9525" cap="flat" cmpd="sng" algn="ctr">
-                      <a:solidFill>
-                        <a:srgbClr val="DCE3EA"/>
-                      </a:solidFill>
-                      <a:prstDash val="solid"/>
-                      <a:round/>
-                      <a:headEnd type="none" w="med" len="med"/>
-                      <a:tailEnd type="none" w="med" len="med"/>
-                    </a:lnR>
-                    <a:lnT w="9525" cap="flat" cmpd="sng" algn="ctr">
-                      <a:solidFill>
-                        <a:srgbClr val="DCE3EA"/>
-                      </a:solidFill>
-                      <a:prstDash val="solid"/>
-                      <a:round/>
-                      <a:headEnd type="none" w="med" len="med"/>
-                      <a:tailEnd type="none" w="med" len="med"/>
-                    </a:lnT>
-                    <a:lnB w="9525" cap="flat" cmpd="sng" algn="ctr">
-                      <a:solidFill>
-                        <a:srgbClr val="DCE3EA"/>
-                      </a:solidFill>
-                      <a:prstDash val="solid"/>
-                      <a:round/>
-                      <a:headEnd type="none" w="med" len="med"/>
-                      <a:tailEnd type="none" w="med" len="med"/>
-                    </a:lnB>
-                  </a:tcPr>
-                </a:tc>
-                <a:tc>
-                  <a:txBody>
-                    <a:bodyPr/>
-                    <a:lstStyle/>
-                    <a:p>
-                      <a:pPr indent="0" marL="0">
-                        <a:buNone/>
-                      </a:pPr>
-                      <a:r>
-                        <a:rPr lang="en-US" sz="1100" dirty="0">
-                          <a:solidFill>
-                            <a:srgbClr val="1B2B3A"/>
-                          </a:solidFill>
-                          <a:latin typeface="Calibri" pitchFamily="34" charset="0"/>
-                          <a:ea typeface="Calibri" pitchFamily="34" charset="-122"/>
-                          <a:cs typeface="Calibri" pitchFamily="34" charset="-120"/>
-                        </a:rPr>
-                        <a:t>Smart App Control chặn file chưa ký</a:t>
-                      </a:r>
-                      <a:endParaRPr lang="en-US" sz="1100" dirty="0">
-                        <a:latin typeface="Calibri" charset="0"/>
-                        <a:ea typeface="Calibri" charset="0"/>
-                        <a:cs typeface="Calibri" charset="0"/>
-                      </a:endParaRPr>
-                    </a:p>
-                  </a:txBody>
-                  <a:tcPr marL="91440" marR="91440" marT="45720" marB="45720" anchor="ctr">
-                    <a:lnL w="9525" cap="flat" cmpd="sng" algn="ctr">
-                      <a:solidFill>
-                        <a:srgbClr val="DCE3EA"/>
-                      </a:solidFill>
-                      <a:prstDash val="solid"/>
-                      <a:round/>
-                      <a:headEnd type="none" w="med" len="med"/>
-                      <a:tailEnd type="none" w="med" len="med"/>
-                    </a:lnL>
-                    <a:lnR w="9525" cap="flat" cmpd="sng" algn="ctr">
-                      <a:solidFill>
-                        <a:srgbClr val="DCE3EA"/>
-                      </a:solidFill>
-                      <a:prstDash val="solid"/>
-                      <a:round/>
-                      <a:headEnd type="none" w="med" len="med"/>
-                      <a:tailEnd type="none" w="med" len="med"/>
-                    </a:lnR>
-                    <a:lnT w="9525" cap="flat" cmpd="sng" algn="ctr">
-                      <a:solidFill>
-                        <a:srgbClr val="DCE3EA"/>
-                      </a:solidFill>
-                      <a:prstDash val="solid"/>
-                      <a:round/>
-                      <a:headEnd type="none" w="med" len="med"/>
-                      <a:tailEnd type="none" w="med" len="med"/>
-                    </a:lnT>
-                    <a:lnB w="9525" cap="flat" cmpd="sng" algn="ctr">
-                      <a:solidFill>
-                        <a:srgbClr val="DCE3EA"/>
-                      </a:solidFill>
-                      <a:prstDash val="solid"/>
-                      <a:round/>
-                      <a:headEnd type="none" w="med" len="med"/>
-                      <a:tailEnd type="none" w="med" len="med"/>
-                    </a:lnB>
-                  </a:tcPr>
-                </a:tc>
-                <a:tc>
-                  <a:txBody>
-                    <a:bodyPr/>
-                    <a:lstStyle/>
-                    <a:p>
-                      <a:pPr indent="0" marL="0">
-                        <a:buNone/>
-                      </a:pPr>
-                      <a:r>
-                        <a:rPr lang="en-US" sz="1100" dirty="0">
-                          <a:solidFill>
-                            <a:srgbClr val="1B2B3A"/>
-                          </a:solidFill>
-                          <a:latin typeface="Calibri" pitchFamily="34" charset="0"/>
-                          <a:ea typeface="Calibri" pitchFamily="34" charset="-122"/>
-                          <a:cs typeface="Calibri" pitchFamily="34" charset="-120"/>
-                        </a:rPr>
-                        <a:t>Bật/tắt lại Smart App Control</a:t>
-                      </a:r>
-                      <a:endParaRPr lang="en-US" sz="1100" dirty="0">
-                        <a:latin typeface="Calibri" charset="0"/>
-                        <a:ea typeface="Calibri" charset="0"/>
-                        <a:cs typeface="Calibri" charset="0"/>
-                      </a:endParaRPr>
-                    </a:p>
-                  </a:txBody>
-                  <a:tcPr marL="91440" marR="91440" marT="45720" marB="45720" anchor="ctr">
-                    <a:lnL w="9525" cap="flat" cmpd="sng" algn="ctr">
-                      <a:solidFill>
-                        <a:srgbClr val="DCE3EA"/>
-                      </a:solidFill>
-                      <a:prstDash val="solid"/>
-                      <a:round/>
-                      <a:headEnd type="none" w="med" len="med"/>
-                      <a:tailEnd type="none" w="med" len="med"/>
-                    </a:lnL>
-                    <a:lnR w="9525" cap="flat" cmpd="sng" algn="ctr">
-                      <a:solidFill>
-                        <a:srgbClr val="DCE3EA"/>
-                      </a:solidFill>
-                      <a:prstDash val="solid"/>
-                      <a:round/>
-                      <a:headEnd type="none" w="med" len="med"/>
-                      <a:tailEnd type="none" w="med" len="med"/>
-                    </a:lnR>
-                    <a:lnT w="9525" cap="flat" cmpd="sng" algn="ctr">
-                      <a:solidFill>
-                        <a:srgbClr val="DCE3EA"/>
-                      </a:solidFill>
-                      <a:prstDash val="solid"/>
-                      <a:round/>
-                      <a:headEnd type="none" w="med" len="med"/>
-                      <a:tailEnd type="none" w="med" len="med"/>
-                    </a:lnT>
-                    <a:lnB w="9525" cap="flat" cmpd="sng" algn="ctr">
-                      <a:solidFill>
-                        <a:srgbClr val="DCE3EA"/>
-                      </a:solidFill>
-                      <a:prstDash val="solid"/>
-                      <a:round/>
-                      <a:headEnd type="none" w="med" len="med"/>
-                      <a:tailEnd type="none" w="med" len="med"/>
-                    </a:lnB>
-                  </a:tcPr>
-                </a:tc>
-              </a:tr>
-              <a:tr h="502920">
-                <a:tc>
-                  <a:txBody>
-                    <a:bodyPr/>
-                    <a:lstStyle/>
-                    <a:p>
-                      <a:pPr indent="0" marL="0">
-                        <a:buNone/>
-                      </a:pPr>
-                      <a:r>
-                        <a:rPr lang="en-US" sz="1100" dirty="0">
-                          <a:solidFill>
-                            <a:srgbClr val="1B2B3A"/>
-                          </a:solidFill>
-                          <a:latin typeface="Calibri" pitchFamily="34" charset="0"/>
-                          <a:ea typeface="Calibri" pitchFamily="34" charset="-122"/>
-                          <a:cs typeface="Calibri" pitchFamily="34" charset="-120"/>
-                        </a:rPr>
-                        <a:t>Lỗi 429 usage limit</a:t>
-                      </a:r>
-                      <a:endParaRPr lang="en-US" sz="1100" dirty="0">
-                        <a:latin typeface="Calibri" charset="0"/>
-                        <a:ea typeface="Calibri" charset="0"/>
-                        <a:cs typeface="Calibri" charset="0"/>
-                      </a:endParaRPr>
-                    </a:p>
-                  </a:txBody>
-                  <a:tcPr marL="91440" marR="91440" marT="45720" marB="45720" anchor="ctr">
-                    <a:lnL w="9525" cap="flat" cmpd="sng" algn="ctr">
-                      <a:solidFill>
-                        <a:srgbClr val="DCE3EA"/>
-                      </a:solidFill>
-                      <a:prstDash val="solid"/>
-                      <a:round/>
-                      <a:headEnd type="none" w="med" len="med"/>
-                      <a:tailEnd type="none" w="med" len="med"/>
-                    </a:lnL>
-                    <a:lnR w="9525" cap="flat" cmpd="sng" algn="ctr">
-                      <a:solidFill>
-                        <a:srgbClr val="DCE3EA"/>
-                      </a:solidFill>
-                      <a:prstDash val="solid"/>
-                      <a:round/>
-                      <a:headEnd type="none" w="med" len="med"/>
-                      <a:tailEnd type="none" w="med" len="med"/>
-                    </a:lnR>
-                    <a:lnT w="9525" cap="flat" cmpd="sng" algn="ctr">
-                      <a:solidFill>
-                        <a:srgbClr val="DCE3EA"/>
-                      </a:solidFill>
-                      <a:prstDash val="solid"/>
-                      <a:round/>
-                      <a:headEnd type="none" w="med" len="med"/>
-                      <a:tailEnd type="none" w="med" len="med"/>
-                    </a:lnT>
-                    <a:lnB w="9525" cap="flat" cmpd="sng" algn="ctr">
-                      <a:solidFill>
-                        <a:srgbClr val="DCE3EA"/>
-                      </a:solidFill>
-                      <a:prstDash val="solid"/>
-                      <a:round/>
-                      <a:headEnd type="none" w="med" len="med"/>
-                      <a:tailEnd type="none" w="med" len="med"/>
-                    </a:lnB>
-                  </a:tcPr>
-                </a:tc>
-                <a:tc>
-                  <a:txBody>
-                    <a:bodyPr/>
-                    <a:lstStyle/>
-                    <a:p>
-                      <a:pPr indent="0" marL="0">
-                        <a:buNone/>
-                      </a:pPr>
-                      <a:r>
-                        <a:rPr lang="en-US" sz="1100" dirty="0">
-                          <a:solidFill>
-                            <a:srgbClr val="1B2B3A"/>
-                          </a:solidFill>
-                          <a:latin typeface="Calibri" pitchFamily="34" charset="0"/>
-                          <a:ea typeface="Calibri" pitchFamily="34" charset="-122"/>
-                          <a:cs typeface="Calibri" pitchFamily="34" charset="-120"/>
-                        </a:rPr>
-                        <a:t>Hết hạn mức tài khoản ChatGPT</a:t>
-                      </a:r>
-                      <a:endParaRPr lang="en-US" sz="1100" dirty="0">
-                        <a:latin typeface="Calibri" charset="0"/>
-                        <a:ea typeface="Calibri" charset="0"/>
-                        <a:cs typeface="Calibri" charset="0"/>
-                      </a:endParaRPr>
-                    </a:p>
-                  </a:txBody>
-                  <a:tcPr marL="91440" marR="91440" marT="45720" marB="45720" anchor="ctr">
-                    <a:lnL w="9525" cap="flat" cmpd="sng" algn="ctr">
-                      <a:solidFill>
-                        <a:srgbClr val="DCE3EA"/>
-                      </a:solidFill>
-                      <a:prstDash val="solid"/>
-                      <a:round/>
-                      <a:headEnd type="none" w="med" len="med"/>
-                      <a:tailEnd type="none" w="med" len="med"/>
-                    </a:lnL>
-                    <a:lnR w="9525" cap="flat" cmpd="sng" algn="ctr">
-                      <a:solidFill>
-                        <a:srgbClr val="DCE3EA"/>
-                      </a:solidFill>
-                      <a:prstDash val="solid"/>
-                      <a:round/>
-                      <a:headEnd type="none" w="med" len="med"/>
-                      <a:tailEnd type="none" w="med" len="med"/>
-                    </a:lnR>
-                    <a:lnT w="9525" cap="flat" cmpd="sng" algn="ctr">
-                      <a:solidFill>
-                        <a:srgbClr val="DCE3EA"/>
-                      </a:solidFill>
-                      <a:prstDash val="solid"/>
-                      <a:round/>
-                      <a:headEnd type="none" w="med" len="med"/>
-                      <a:tailEnd type="none" w="med" len="med"/>
-                    </a:lnT>
-                    <a:lnB w="9525" cap="flat" cmpd="sng" algn="ctr">
-                      <a:solidFill>
-                        <a:srgbClr val="DCE3EA"/>
-                      </a:solidFill>
-                      <a:prstDash val="solid"/>
-                      <a:round/>
-                      <a:headEnd type="none" w="med" len="med"/>
-                      <a:tailEnd type="none" w="med" len="med"/>
-                    </a:lnB>
-                  </a:tcPr>
-                </a:tc>
-                <a:tc>
-                  <a:txBody>
-                    <a:bodyPr/>
-                    <a:lstStyle/>
-                    <a:p>
-                      <a:pPr indent="0" marL="0">
-                        <a:buNone/>
-                      </a:pPr>
-                      <a:r>
-                        <a:rPr lang="en-US" sz="1100" dirty="0">
-                          <a:solidFill>
-                            <a:srgbClr val="1B2B3A"/>
-                          </a:solidFill>
-                          <a:latin typeface="Calibri" pitchFamily="34" charset="0"/>
-                          <a:ea typeface="Calibri" pitchFamily="34" charset="-122"/>
-                          <a:cs typeface="Calibri" pitchFamily="34" charset="-120"/>
-                        </a:rPr>
-                        <a:t>Chờ mở lại hoặc thêm tài khoản</a:t>
-                      </a:r>
-                      <a:endParaRPr lang="en-US" sz="1100" dirty="0">
-                        <a:latin typeface="Calibri" charset="0"/>
-                        <a:ea typeface="Calibri" charset="0"/>
-                        <a:cs typeface="Calibri" charset="0"/>
-                      </a:endParaRPr>
-                    </a:p>
-                  </a:txBody>
-                  <a:tcPr marL="91440" marR="91440" marT="45720" marB="45720" anchor="ctr">
-                    <a:lnL w="9525" cap="flat" cmpd="sng" algn="ctr">
-                      <a:solidFill>
-                        <a:srgbClr val="DCE3EA"/>
-                      </a:solidFill>
-                      <a:prstDash val="solid"/>
-                      <a:round/>
-                      <a:headEnd type="none" w="med" len="med"/>
-                      <a:tailEnd type="none" w="med" len="med"/>
-                    </a:lnL>
-                    <a:lnR w="9525" cap="flat" cmpd="sng" algn="ctr">
-                      <a:solidFill>
-                        <a:srgbClr val="DCE3EA"/>
-                      </a:solidFill>
-                      <a:prstDash val="solid"/>
-                      <a:round/>
-                      <a:headEnd type="none" w="med" len="med"/>
-                      <a:tailEnd type="none" w="med" len="med"/>
-                    </a:lnR>
-                    <a:lnT w="9525" cap="flat" cmpd="sng" algn="ctr">
-                      <a:solidFill>
-                        <a:srgbClr val="DCE3EA"/>
-                      </a:solidFill>
-                      <a:prstDash val="solid"/>
-                      <a:round/>
-                      <a:headEnd type="none" w="med" len="med"/>
-                      <a:tailEnd type="none" w="med" len="med"/>
-                    </a:lnT>
-                    <a:lnB w="9525" cap="flat" cmpd="sng" algn="ctr">
-                      <a:solidFill>
-                        <a:srgbClr val="DCE3EA"/>
-                      </a:solidFill>
-                      <a:prstDash val="solid"/>
-                      <a:round/>
-                      <a:headEnd type="none" w="med" len="med"/>
-                      <a:tailEnd type="none" w="med" len="med"/>
-                    </a:lnB>
-                  </a:tcPr>
-                </a:tc>
-              </a:tr>
             </a:tbl>
           </a:graphicData>
         </a:graphic>
       </p:graphicFrame>
+      <p:sp>
+        <p:nvSpPr>
+          <p:cNvPr id="15" name="Shape 11"/>
+          <p:cNvSpPr/>
+          <p:nvPr/>
+        </p:nvSpPr>
+        <p:spPr>
+          <a:xfrm>
+            <a:off x="365760" y="4590288"/>
+            <a:ext cx="8321040" cy="438912"/>
+          </a:xfrm>
+          <a:prstGeom prst="rect">
+            <a:avLst/>
+          </a:prstGeom>
+          <a:solidFill>
+            <a:srgbClr val="E7F0F4"/>
+          </a:solidFill>
+          <a:ln w="9525">
+            <a:solidFill>
+              <a:srgbClr val="DCE3EA"/>
+            </a:solidFill>
+            <a:prstDash val="solid"/>
+          </a:ln>
+        </p:spPr>
+      </p:sp>
+      <p:sp>
+        <p:nvSpPr>
+          <p:cNvPr id="16" name="Text 12"/>
+          <p:cNvSpPr txBox="1"/>
+          <p:nvPr/>
+        </p:nvSpPr>
+        <p:spPr>
+          <a:xfrm>
+            <a:off x="548640" y="4608576"/>
+            <a:ext cx="7955280" cy="402336"/>
+          </a:xfrm>
+          <a:prstGeom prst="rect">
+            <a:avLst/>
+          </a:prstGeom>
+          <a:noFill/>
+          <a:ln/>
+        </p:spPr>
+        <p:txBody>
+          <a:bodyPr wrap="square" lIns="0" tIns="0" rIns="0" bIns="0" rtlCol="0" anchor="ctr"/>
+          <a:lstStyle/>
+          <a:p>
+            <a:pPr indent="0" marL="0">
+              <a:buNone/>
+            </a:pPr>
+            <a:r>
+              <a:rPr lang="en-US" sz="1050" b="1" dirty="0">
+                <a:solidFill>
+                  <a:srgbClr val="10243E"/>
+                </a:solidFill>
+                <a:latin typeface="Calibri" pitchFamily="34" charset="0"/>
+                <a:ea typeface="Calibri" pitchFamily="34" charset="-122"/>
+                <a:cs typeface="Calibri" pitchFamily="34" charset="-120"/>
+              </a:rPr>
+              <a:t>Vì vậy: </a:t>
+            </a:r>
+            <a:pPr indent="0" marL="0">
+              <a:buNone/>
+            </a:pPr>
+            <a:r>
+              <a:rPr lang="en-US" sz="1050" dirty="0">
+                <a:solidFill>
+                  <a:srgbClr val="1B2B3A"/>
+                </a:solidFill>
+                <a:latin typeface="Calibri" pitchFamily="34" charset="0"/>
+                <a:ea typeface="Calibri" pitchFamily="34" charset="-122"/>
+                <a:cs typeface="Calibri" pitchFamily="34" charset="-120"/>
+              </a:rPr>
+              <a:t>giữ nguyên kế hoạch chấm 3 lần lấy trung bình, và dùng đúng một model chấm cho cả LightMem lẫn APEX-MEM để sai lệch này triệt tiêu khi so sánh.</a:t>
+            </a:r>
+            <a:endParaRPr lang="en-US" sz="1050" dirty="0"/>
+          </a:p>
+        </p:txBody>
+      </p:sp>
     </p:spTree>
   </p:cSld>
   <p:clrMapOvr>
@@ -9003,7 +11093,7 @@
     <p:bg>
       <p:bgPr>
         <a:solidFill>
-          <a:srgbClr val="10243E"/>
+          <a:srgbClr val="F7F9FB"/>
         </a:solidFill>
       </p:bgPr>
     </p:bg>
@@ -9029,8 +11119,8 @@
         </p:nvSpPr>
         <p:spPr>
           <a:xfrm>
-            <a:off x="640080" y="411480"/>
-            <a:ext cx="7863840" cy="685800"/>
+            <a:off x="457200" y="274320"/>
+            <a:ext cx="8229600" cy="274320"/>
           </a:xfrm>
           <a:prstGeom prst="rect">
             <a:avLst/>
@@ -9046,30 +11136,69 @@
               <a:buNone/>
             </a:pPr>
             <a:r>
-              <a:rPr lang="en-US" sz="3000" b="1" dirty="0">
-                <a:solidFill>
-                  <a:srgbClr val="FFFFFF"/>
+              <a:rPr lang="en-US" sz="1100" b="1" dirty="0">
+                <a:solidFill>
+                  <a:srgbClr val="1F6F8B"/>
+                </a:solidFill>
+                <a:latin typeface="Calibri" pitchFamily="34" charset="0"/>
+                <a:ea typeface="Calibri" pitchFamily="34" charset="-122"/>
+                <a:cs typeface="Calibri" pitchFamily="34" charset="-120"/>
+              </a:rPr>
+              <a:t>VẬN HÀNH</a:t>
+            </a:r>
+            <a:endParaRPr lang="en-US" sz="1100" dirty="0"/>
+          </a:p>
+        </p:txBody>
+      </p:sp>
+      <p:sp>
+        <p:nvSpPr>
+          <p:cNvPr id="3" name="Text 1"/>
+          <p:cNvSpPr txBox="1"/>
+          <p:nvPr/>
+        </p:nvSpPr>
+        <p:spPr>
+          <a:xfrm>
+            <a:off x="457200" y="502920"/>
+            <a:ext cx="8229600" cy="548640"/>
+          </a:xfrm>
+          <a:prstGeom prst="rect">
+            <a:avLst/>
+          </a:prstGeom>
+          <a:noFill/>
+          <a:ln/>
+        </p:spPr>
+        <p:txBody>
+          <a:bodyPr wrap="square" lIns="0" tIns="0" rIns="0" bIns="0" rtlCol="0" anchor="ctr"/>
+          <a:lstStyle/>
+          <a:p>
+            <a:pPr indent="0" marL="0">
+              <a:buNone/>
+            </a:pPr>
+            <a:r>
+              <a:rPr lang="en-US" sz="2600" b="1" dirty="0">
+                <a:solidFill>
+                  <a:srgbClr val="10243E"/>
                 </a:solidFill>
                 <a:latin typeface="Cambria" pitchFamily="34" charset="0"/>
                 <a:ea typeface="Cambria" pitchFamily="34" charset="-122"/>
                 <a:cs typeface="Cambria" pitchFamily="34" charset="-120"/>
               </a:rPr>
-              <a:t>Baseline chạy được, chưa đủ kết luận</a:t>
-            </a:r>
-            <a:endParaRPr lang="en-US" sz="3000" dirty="0"/>
-          </a:p>
-        </p:txBody>
-      </p:sp>
-      <p:sp>
-        <p:nvSpPr>
-          <p:cNvPr id="3" name="Text 1"/>
+              <a:t>Dựng bộ nhớ chiếm gần như toàn bộ thời gian</a:t>
+            </a:r>
+            <a:endParaRPr lang="en-US" sz="2600" dirty="0"/>
+          </a:p>
+        </p:txBody>
+      </p:sp>
+      <p:sp>
+        <p:nvSpPr>
+          <p:cNvPr id="4" name="Text 2"/>
           <p:cNvSpPr txBox="1"/>
           <p:nvPr/>
         </p:nvSpPr>
         <p:spPr>
           <a:xfrm>
-            <a:off x="640080" y="1097280"/>
-            <a:ext cx="7863840" cy="320040"/>
+            <a:off x="6309360" y="274320"/>
+            <a:ext cx="2377440" cy="274320"/>
           </a:xfrm>
           <a:prstGeom prst="rect">
             <a:avLst/>
@@ -9081,34 +11210,59 @@
           <a:bodyPr wrap="square" lIns="0" tIns="0" rIns="0" bIns="0" rtlCol="0" anchor="ctr"/>
           <a:lstStyle/>
           <a:p>
-            <a:pPr indent="0" marL="0">
-              <a:buNone/>
-            </a:pPr>
-            <a:r>
-              <a:rPr lang="en-US" sz="1400" b="1" dirty="0">
-                <a:solidFill>
-                  <a:srgbClr val="F2A541"/>
+            <a:pPr algn="r" indent="0" marL="0">
+              <a:buNone/>
+            </a:pPr>
+            <a:r>
+              <a:rPr lang="en-US" sz="1000" b="1" dirty="0">
+                <a:solidFill>
+                  <a:srgbClr val="C8553D"/>
                 </a:solidFill>
                 <a:latin typeface="Calibri" pitchFamily="34" charset="0"/>
                 <a:ea typeface="Calibri" pitchFamily="34" charset="-122"/>
                 <a:cs typeface="Calibri" pitchFamily="34" charset="-120"/>
               </a:rPr>
-              <a:t>Số liệu trên 125/150 câu dev</a:t>
-            </a:r>
-            <a:endParaRPr lang="en-US" sz="1400" dirty="0"/>
-          </a:p>
-        </p:txBody>
-      </p:sp>
-      <p:sp>
-        <p:nvSpPr>
-          <p:cNvPr id="4" name="Text 2"/>
+              <a:t>Số liệu sơ bộ: 125/150 câu dev</a:t>
+            </a:r>
+            <a:endParaRPr lang="en-US" sz="1000" dirty="0"/>
+          </a:p>
+        </p:txBody>
+      </p:sp>
+      <p:sp>
+        <p:nvSpPr>
+          <p:cNvPr id="6" name="Shape 3"/>
+          <p:cNvSpPr/>
+          <p:nvPr/>
+        </p:nvSpPr>
+        <p:spPr>
+          <a:xfrm>
+            <a:off x="457200" y="1280160"/>
+            <a:ext cx="2651760" cy="1371600"/>
+          </a:xfrm>
+          <a:prstGeom prst="rect">
+            <a:avLst/>
+          </a:prstGeom>
+          <a:solidFill>
+            <a:srgbClr val="FFFFFF"/>
+          </a:solidFill>
+          <a:ln w="9525">
+            <a:solidFill>
+              <a:srgbClr val="DCE3EA"/>
+            </a:solidFill>
+            <a:prstDash val="solid"/>
+          </a:ln>
+        </p:spPr>
+      </p:sp>
+      <p:sp>
+        <p:nvSpPr>
+          <p:cNvPr id="7" name="Text 4"/>
           <p:cNvSpPr txBox="1"/>
           <p:nvPr/>
         </p:nvSpPr>
         <p:spPr>
           <a:xfrm>
-            <a:off x="640080" y="1572768"/>
-            <a:ext cx="3931920" cy="2240280"/>
+            <a:off x="457200" y="1371600"/>
+            <a:ext cx="2651760" cy="731520"/>
           </a:xfrm>
           <a:prstGeom prst="rect">
             <a:avLst/>
@@ -9117,479 +11271,375 @@
           <a:ln/>
         </p:spPr>
         <p:txBody>
+          <a:bodyPr wrap="square" lIns="0" tIns="0" rIns="0" bIns="0" rtlCol="0" anchor="ctr"/>
+          <a:lstStyle/>
+          <a:p>
+            <a:pPr algn="ctr" indent="0" marL="0">
+              <a:buNone/>
+            </a:pPr>
+            <a:r>
+              <a:rPr lang="en-US" sz="3400" b="1" dirty="0">
+                <a:solidFill>
+                  <a:srgbClr val="C8553D"/>
+                </a:solidFill>
+                <a:latin typeface="Cambria" pitchFamily="34" charset="0"/>
+                <a:ea typeface="Cambria" pitchFamily="34" charset="-122"/>
+                <a:cs typeface="Cambria" pitchFamily="34" charset="-120"/>
+              </a:rPr>
+              <a:t>33 phút</a:t>
+            </a:r>
+            <a:endParaRPr lang="en-US" sz="3400" dirty="0"/>
+          </a:p>
+        </p:txBody>
+      </p:sp>
+      <p:sp>
+        <p:nvSpPr>
+          <p:cNvPr id="8" name="Text 5"/>
+          <p:cNvSpPr txBox="1"/>
+          <p:nvPr/>
+        </p:nvSpPr>
+        <p:spPr>
+          <a:xfrm>
+            <a:off x="457200" y="2103120"/>
+            <a:ext cx="2651760" cy="365760"/>
+          </a:xfrm>
+          <a:prstGeom prst="rect">
+            <a:avLst/>
+          </a:prstGeom>
+          <a:noFill/>
+          <a:ln/>
+        </p:spPr>
+        <p:txBody>
+          <a:bodyPr wrap="square" lIns="0" tIns="0" rIns="0" bIns="0" rtlCol="0" anchor="ctr"/>
+          <a:lstStyle/>
+          <a:p>
+            <a:pPr algn="ctr" indent="0" marL="0">
+              <a:buNone/>
+            </a:pPr>
+            <a:r>
+              <a:rPr lang="en-US" sz="1200" dirty="0">
+                <a:solidFill>
+                  <a:srgbClr val="5B6B7A"/>
+                </a:solidFill>
+                <a:latin typeface="Calibri" pitchFamily="34" charset="0"/>
+                <a:ea typeface="Calibri" pitchFamily="34" charset="-122"/>
+                <a:cs typeface="Calibri" pitchFamily="34" charset="-120"/>
+              </a:rPr>
+              <a:t>dựng bộ nhớ mỗi câu (trung vị)</a:t>
+            </a:r>
+            <a:endParaRPr lang="en-US" sz="1200" dirty="0"/>
+          </a:p>
+        </p:txBody>
+      </p:sp>
+      <p:sp>
+        <p:nvSpPr>
+          <p:cNvPr id="9" name="Shape 6"/>
+          <p:cNvSpPr/>
+          <p:nvPr/>
+        </p:nvSpPr>
+        <p:spPr>
+          <a:xfrm>
+            <a:off x="3246120" y="1280160"/>
+            <a:ext cx="2651760" cy="1371600"/>
+          </a:xfrm>
+          <a:prstGeom prst="rect">
+            <a:avLst/>
+          </a:prstGeom>
+          <a:solidFill>
+            <a:srgbClr val="FFFFFF"/>
+          </a:solidFill>
+          <a:ln w="9525">
+            <a:solidFill>
+              <a:srgbClr val="DCE3EA"/>
+            </a:solidFill>
+            <a:prstDash val="solid"/>
+          </a:ln>
+        </p:spPr>
+      </p:sp>
+      <p:sp>
+        <p:nvSpPr>
+          <p:cNvPr id="10" name="Text 7"/>
+          <p:cNvSpPr txBox="1"/>
+          <p:nvPr/>
+        </p:nvSpPr>
+        <p:spPr>
+          <a:xfrm>
+            <a:off x="3246120" y="1371600"/>
+            <a:ext cx="2651760" cy="731520"/>
+          </a:xfrm>
+          <a:prstGeom prst="rect">
+            <a:avLst/>
+          </a:prstGeom>
+          <a:noFill/>
+          <a:ln/>
+        </p:spPr>
+        <p:txBody>
+          <a:bodyPr wrap="square" lIns="0" tIns="0" rIns="0" bIns="0" rtlCol="0" anchor="ctr"/>
+          <a:lstStyle/>
+          <a:p>
+            <a:pPr algn="ctr" indent="0" marL="0">
+              <a:buNone/>
+            </a:pPr>
+            <a:r>
+              <a:rPr lang="en-US" sz="3400" b="1" dirty="0">
+                <a:solidFill>
+                  <a:srgbClr val="1F6F8B"/>
+                </a:solidFill>
+                <a:latin typeface="Cambria" pitchFamily="34" charset="0"/>
+                <a:ea typeface="Cambria" pitchFamily="34" charset="-122"/>
+                <a:cs typeface="Cambria" pitchFamily="34" charset="-120"/>
+              </a:rPr>
+              <a:t>0,18 s</a:t>
+            </a:r>
+            <a:endParaRPr lang="en-US" sz="3400" dirty="0"/>
+          </a:p>
+        </p:txBody>
+      </p:sp>
+      <p:sp>
+        <p:nvSpPr>
+          <p:cNvPr id="11" name="Text 8"/>
+          <p:cNvSpPr txBox="1"/>
+          <p:nvPr/>
+        </p:nvSpPr>
+        <p:spPr>
+          <a:xfrm>
+            <a:off x="3246120" y="2103120"/>
+            <a:ext cx="2651760" cy="365760"/>
+          </a:xfrm>
+          <a:prstGeom prst="rect">
+            <a:avLst/>
+          </a:prstGeom>
+          <a:noFill/>
+          <a:ln/>
+        </p:spPr>
+        <p:txBody>
+          <a:bodyPr wrap="square" lIns="0" tIns="0" rIns="0" bIns="0" rtlCol="0" anchor="ctr"/>
+          <a:lstStyle/>
+          <a:p>
+            <a:pPr algn="ctr" indent="0" marL="0">
+              <a:buNone/>
+            </a:pPr>
+            <a:r>
+              <a:rPr lang="en-US" sz="1200" dirty="0">
+                <a:solidFill>
+                  <a:srgbClr val="5B6B7A"/>
+                </a:solidFill>
+                <a:latin typeface="Calibri" pitchFamily="34" charset="0"/>
+                <a:ea typeface="Calibri" pitchFamily="34" charset="-122"/>
+                <a:cs typeface="Calibri" pitchFamily="34" charset="-120"/>
+              </a:rPr>
+              <a:t>truy xuất</a:t>
+            </a:r>
+            <a:endParaRPr lang="en-US" sz="1200" dirty="0"/>
+          </a:p>
+        </p:txBody>
+      </p:sp>
+      <p:sp>
+        <p:nvSpPr>
+          <p:cNvPr id="12" name="Shape 9"/>
+          <p:cNvSpPr/>
+          <p:nvPr/>
+        </p:nvSpPr>
+        <p:spPr>
+          <a:xfrm>
+            <a:off x="6035040" y="1280160"/>
+            <a:ext cx="2651760" cy="1371600"/>
+          </a:xfrm>
+          <a:prstGeom prst="rect">
+            <a:avLst/>
+          </a:prstGeom>
+          <a:solidFill>
+            <a:srgbClr val="FFFFFF"/>
+          </a:solidFill>
+          <a:ln w="9525">
+            <a:solidFill>
+              <a:srgbClr val="DCE3EA"/>
+            </a:solidFill>
+            <a:prstDash val="solid"/>
+          </a:ln>
+        </p:spPr>
+      </p:sp>
+      <p:sp>
+        <p:nvSpPr>
+          <p:cNvPr id="13" name="Text 10"/>
+          <p:cNvSpPr txBox="1"/>
+          <p:nvPr/>
+        </p:nvSpPr>
+        <p:spPr>
+          <a:xfrm>
+            <a:off x="6035040" y="1371600"/>
+            <a:ext cx="2651760" cy="731520"/>
+          </a:xfrm>
+          <a:prstGeom prst="rect">
+            <a:avLst/>
+          </a:prstGeom>
+          <a:noFill/>
+          <a:ln/>
+        </p:spPr>
+        <p:txBody>
+          <a:bodyPr wrap="square" lIns="0" tIns="0" rIns="0" bIns="0" rtlCol="0" anchor="ctr"/>
+          <a:lstStyle/>
+          <a:p>
+            <a:pPr algn="ctr" indent="0" marL="0">
+              <a:buNone/>
+            </a:pPr>
+            <a:r>
+              <a:rPr lang="en-US" sz="3400" b="1" dirty="0">
+                <a:solidFill>
+                  <a:srgbClr val="1F6F8B"/>
+                </a:solidFill>
+                <a:latin typeface="Cambria" pitchFamily="34" charset="0"/>
+                <a:ea typeface="Cambria" pitchFamily="34" charset="-122"/>
+                <a:cs typeface="Cambria" pitchFamily="34" charset="-120"/>
+              </a:rPr>
+              <a:t>4,1 s</a:t>
+            </a:r>
+            <a:endParaRPr lang="en-US" sz="3400" dirty="0"/>
+          </a:p>
+        </p:txBody>
+      </p:sp>
+      <p:sp>
+        <p:nvSpPr>
+          <p:cNvPr id="14" name="Text 11"/>
+          <p:cNvSpPr txBox="1"/>
+          <p:nvPr/>
+        </p:nvSpPr>
+        <p:spPr>
+          <a:xfrm>
+            <a:off x="6035040" y="2103120"/>
+            <a:ext cx="2651760" cy="365760"/>
+          </a:xfrm>
+          <a:prstGeom prst="rect">
+            <a:avLst/>
+          </a:prstGeom>
+          <a:noFill/>
+          <a:ln/>
+        </p:spPr>
+        <p:txBody>
+          <a:bodyPr wrap="square" lIns="0" tIns="0" rIns="0" bIns="0" rtlCol="0" anchor="ctr"/>
+          <a:lstStyle/>
+          <a:p>
+            <a:pPr algn="ctr" indent="0" marL="0">
+              <a:buNone/>
+            </a:pPr>
+            <a:r>
+              <a:rPr lang="en-US" sz="1200" dirty="0">
+                <a:solidFill>
+                  <a:srgbClr val="5B6B7A"/>
+                </a:solidFill>
+                <a:latin typeface="Calibri" pitchFamily="34" charset="0"/>
+                <a:ea typeface="Calibri" pitchFamily="34" charset="-122"/>
+                <a:cs typeface="Calibri" pitchFamily="34" charset="-120"/>
+              </a:rPr>
+              <a:t>sinh câu trả lời</a:t>
+            </a:r>
+            <a:endParaRPr lang="en-US" sz="1200" dirty="0"/>
+          </a:p>
+        </p:txBody>
+      </p:sp>
+      <p:sp>
+        <p:nvSpPr>
+          <p:cNvPr id="15" name="Text 12"/>
+          <p:cNvSpPr txBox="1"/>
+          <p:nvPr/>
+        </p:nvSpPr>
+        <p:spPr>
+          <a:xfrm>
+            <a:off x="457200" y="2880360"/>
+            <a:ext cx="8229600" cy="1737360"/>
+          </a:xfrm>
+          <a:prstGeom prst="rect">
+            <a:avLst/>
+          </a:prstGeom>
+          <a:noFill/>
+          <a:ln/>
+        </p:spPr>
+        <p:txBody>
           <a:bodyPr wrap="square" lIns="0" tIns="0" rIns="0" bIns="0" rtlCol="0" anchor="t"/>
           <a:lstStyle/>
           <a:p>
             <a:pPr marL="342900" indent="-342900">
               <a:spcAft>
-                <a:spcPts val="800"/>
+                <a:spcPts val="600"/>
               </a:spcAft>
               <a:buSzPct val="100000"/>
               <a:buChar char="•"/>
             </a:pPr>
             <a:r>
-              <a:rPr lang="en-US" sz="1200" dirty="0">
-                <a:solidFill>
-                  <a:srgbClr val="E6EEF7"/>
+              <a:rPr lang="en-US" sz="1300" dirty="0">
+                <a:solidFill>
+                  <a:srgbClr val="1B2B3A"/>
                 </a:solidFill>
                 <a:latin typeface="Calibri" pitchFamily="34" charset="0"/>
                 <a:ea typeface="Calibri" pitchFamily="34" charset="-122"/>
                 <a:cs typeface="Calibri" pitchFamily="34" charset="-120"/>
               </a:rPr>
-              <a:t>Cài đặt xong LightMem, chạy đầu-cuối được trên LongMemEval-S với cx/gpt-5.6-luna.</a:t>
-            </a:r>
-            <a:endParaRPr lang="en-US" sz="1200" dirty="0"/>
+              <a:t>Mỗi câu gọi LLM hàng trăm lần: hội thoại dài chia thành hàng trăm topic, mỗi topic trích fact và xử lý riêng.</a:t>
+            </a:r>
+            <a:endParaRPr lang="en-US" sz="1300" dirty="0"/>
           </a:p>
           <a:p>
             <a:pPr marL="342900" indent="-342900">
               <a:spcAft>
-                <a:spcPts val="800"/>
+                <a:spcPts val="600"/>
               </a:spcAft>
               <a:buSzPct val="100000"/>
               <a:buChar char="•"/>
             </a:pPr>
             <a:r>
-              <a:rPr lang="en-US" sz="1200" dirty="0">
-                <a:solidFill>
-                  <a:srgbClr val="E6EEF7"/>
+              <a:rPr lang="en-US" sz="1300" dirty="0">
+                <a:solidFill>
+                  <a:srgbClr val="1B2B3A"/>
                 </a:solidFill>
                 <a:latin typeface="Calibri" pitchFamily="34" charset="0"/>
                 <a:ea typeface="Calibri" pitchFamily="34" charset="-122"/>
                 <a:cs typeface="Calibri" pitchFamily="34" charset="-120"/>
               </a:rPr>
-              <a:t>Chia dev/test khớp bản gốc của nhóm (150/350).</a:t>
-            </a:r>
-            <a:endParaRPr lang="en-US" sz="1200" dirty="0"/>
+              <a:t>Chạy 5–9 luồng song song, mỗi câu 33 phút (chậm nhất 61 phút); cả tập dev cần vài chục giờ.</a:t>
+            </a:r>
+            <a:endParaRPr lang="en-US" sz="1300" dirty="0"/>
           </a:p>
           <a:p>
             <a:pPr marL="342900" indent="-342900">
               <a:spcAft>
-                <a:spcPts val="800"/>
+                <a:spcPts val="600"/>
               </a:spcAft>
               <a:buSzPct val="100000"/>
               <a:buChar char="•"/>
             </a:pPr>
             <a:r>
-              <a:rPr lang="en-US" sz="1200" dirty="0">
-                <a:solidFill>
-                  <a:srgbClr val="E6EEF7"/>
+              <a:rPr lang="en-US" sz="1300" dirty="0">
+                <a:solidFill>
+                  <a:srgbClr val="1B2B3A"/>
                 </a:solidFill>
                 <a:latin typeface="Calibri" pitchFamily="34" charset="0"/>
                 <a:ea typeface="Calibri" pitchFamily="34" charset="-122"/>
                 <a:cs typeface="Calibri" pitchFamily="34" charset="-120"/>
               </a:rPr>
-              <a:t>Sơ bộ: 79,0% macro trên 6/6 loại, 125/150 câu dev.</a:t>
-            </a:r>
-            <a:endParaRPr lang="en-US" sz="1200" dirty="0"/>
+              <a:t>9router chèn ~2,5 nghìn token system prompt mỗi lời gọi: khi báo cáo token phải tách phần này ra.</a:t>
+            </a:r>
+            <a:endParaRPr lang="en-US" sz="1300" dirty="0"/>
           </a:p>
           <a:p>
             <a:pPr marL="342900" indent="-342900">
               <a:spcAft>
-                <a:spcPts val="800"/>
+                <a:spcPts val="600"/>
               </a:spcAft>
               <a:buSzPct val="100000"/>
               <a:buChar char="•"/>
             </a:pPr>
             <a:r>
-              <a:rPr lang="en-US" sz="1200" dirty="0">
-                <a:solidFill>
-                  <a:srgbClr val="E6EEF7"/>
+              <a:rPr lang="en-US" sz="1300" dirty="0">
+                <a:solidFill>
+                  <a:srgbClr val="1B2B3A"/>
                 </a:solidFill>
                 <a:latin typeface="Calibri" pitchFamily="34" charset="0"/>
                 <a:ea typeface="Calibri" pitchFamily="34" charset="-122"/>
                 <a:cs typeface="Calibri" pitchFamily="34" charset="-120"/>
               </a:rPr>
-              <a:t>Điểm yếu rõ nhất: loại lượt trợ lý chỉ 33,3%, do cấu hình user_only không lưu lời trợ lý.</a:t>
-            </a:r>
-            <a:endParaRPr lang="en-US" sz="1200" dirty="0"/>
-          </a:p>
-          <a:p>
-            <a:pPr marL="342900" indent="-342900">
-              <a:spcAft>
-                <a:spcPts val="800"/>
-              </a:spcAft>
-              <a:buSzPct val="100000"/>
-              <a:buChar char="•"/>
-            </a:pPr>
-            <a:r>
-              <a:rPr lang="en-US" sz="1200" dirty="0">
-                <a:solidFill>
-                  <a:srgbClr val="E6EEF7"/>
-                </a:solidFill>
-                <a:latin typeface="Calibri" pitchFamily="34" charset="0"/>
-                <a:ea typeface="Calibri" pitchFamily="34" charset="-122"/>
-                <a:cs typeface="Calibri" pitchFamily="34" charset="-120"/>
-              </a:rPr>
-              <a:t>Thời gian là nút thắt: ~33 phút mỗi câu.</a:t>
-            </a:r>
-            <a:endParaRPr lang="en-US" sz="1200" dirty="0"/>
-          </a:p>
-        </p:txBody>
-      </p:sp>
-      <p:sp>
-        <p:nvSpPr>
-          <p:cNvPr id="5" name="Text 3"/>
-          <p:cNvSpPr txBox="1"/>
-          <p:nvPr/>
-        </p:nvSpPr>
-        <p:spPr>
-          <a:xfrm>
-            <a:off x="4846320" y="1600200"/>
-            <a:ext cx="3657600" cy="320040"/>
-          </a:xfrm>
-          <a:prstGeom prst="rect">
-            <a:avLst/>
-          </a:prstGeom>
-          <a:noFill/>
-          <a:ln/>
-        </p:spPr>
-        <p:txBody>
-          <a:bodyPr wrap="square" lIns="0" tIns="0" rIns="0" bIns="0" rtlCol="0" anchor="ctr"/>
-          <a:lstStyle/>
-          <a:p>
-            <a:pPr indent="0" marL="0">
-              <a:buNone/>
-            </a:pPr>
-            <a:r>
-              <a:rPr lang="en-US" sz="1600" b="1" dirty="0">
-                <a:solidFill>
-                  <a:srgbClr val="F2A541"/>
-                </a:solidFill>
-                <a:latin typeface="Cambria" pitchFamily="34" charset="0"/>
-                <a:ea typeface="Cambria" pitchFamily="34" charset="-122"/>
-                <a:cs typeface="Cambria" pitchFamily="34" charset="-120"/>
-              </a:rPr>
-              <a:t>Bước tiếp</a:t>
-            </a:r>
-            <a:endParaRPr lang="en-US" sz="1600" dirty="0"/>
-          </a:p>
-        </p:txBody>
-      </p:sp>
-      <p:sp>
-        <p:nvSpPr>
-          <p:cNvPr id="6" name="Text 4"/>
-          <p:cNvSpPr txBox="1"/>
-          <p:nvPr/>
-        </p:nvSpPr>
-        <p:spPr>
-          <a:xfrm>
-            <a:off x="4846320" y="1938528"/>
-            <a:ext cx="3657600" cy="1874520"/>
-          </a:xfrm>
-          <a:prstGeom prst="rect">
-            <a:avLst/>
-          </a:prstGeom>
-          <a:noFill/>
-          <a:ln/>
-        </p:spPr>
-        <p:txBody>
-          <a:bodyPr wrap="square" lIns="0" tIns="0" rIns="0" bIns="0" rtlCol="0" anchor="t"/>
-          <a:lstStyle/>
-          <a:p>
-            <a:pPr indent="0" marL="0">
-              <a:spcAft>
-                <a:spcPts val="800"/>
-              </a:spcAft>
-              <a:buNone/>
-            </a:pPr>
-            <a:r>
-              <a:rPr lang="en-US" sz="1150" dirty="0">
-                <a:solidFill>
-                  <a:srgbClr val="E6EEF7"/>
-                </a:solidFill>
-                <a:latin typeface="Calibri" pitchFamily="34" charset="0"/>
-                <a:ea typeface="Calibri" pitchFamily="34" charset="-122"/>
-                <a:cs typeface="Calibri" pitchFamily="34" charset="-120"/>
-              </a:rPr>
-              <a:t>1.  Chạy nốt 25 câu dev còn lại, nhất là nhóm _abs.</a:t>
-            </a:r>
-            <a:endParaRPr lang="en-US" sz="1150" dirty="0"/>
-          </a:p>
-          <a:p>
-            <a:pPr indent="0" marL="0">
-              <a:spcAft>
-                <a:spcPts val="800"/>
-              </a:spcAft>
-              <a:buNone/>
-            </a:pPr>
-            <a:r>
-              <a:rPr lang="en-US" sz="1150" dirty="0">
-                <a:solidFill>
-                  <a:srgbClr val="E6EEF7"/>
-                </a:solidFill>
-                <a:latin typeface="Calibri" pitchFamily="34" charset="0"/>
-                <a:ea typeface="Calibri" pitchFamily="34" charset="-122"/>
-                <a:cs typeface="Calibri" pitchFamily="34" charset="-120"/>
-              </a:rPr>
-              <a:t>2.  Chạy hệ APEX-MEM cùng model và cùng chấm để so công bằng.</a:t>
-            </a:r>
-            <a:endParaRPr lang="en-US" sz="1150" dirty="0"/>
-          </a:p>
-          <a:p>
-            <a:pPr indent="0" marL="0">
-              <a:spcAft>
-                <a:spcPts val="800"/>
-              </a:spcAft>
-              <a:buNone/>
-            </a:pPr>
-            <a:r>
-              <a:rPr lang="en-US" sz="1150" dirty="0">
-                <a:solidFill>
-                  <a:srgbClr val="E6EEF7"/>
-                </a:solidFill>
-                <a:latin typeface="Calibri" pitchFamily="34" charset="0"/>
-                <a:ea typeface="Calibri" pitchFamily="34" charset="-122"/>
-                <a:cs typeface="Calibri" pitchFamily="34" charset="-120"/>
-              </a:rPr>
-              <a:t>3.  Thử lại LightMem với messages_use = user_assistant, xem loại lượt trợ lý cải thiện bao nhiêu.</a:t>
-            </a:r>
-            <a:endParaRPr lang="en-US" sz="1150" dirty="0"/>
-          </a:p>
-          <a:p>
-            <a:pPr indent="0" marL="0">
-              <a:spcAft>
-                <a:spcPts val="800"/>
-              </a:spcAft>
-              <a:buNone/>
-            </a:pPr>
-            <a:r>
-              <a:rPr lang="en-US" sz="1150" dirty="0">
-                <a:solidFill>
-                  <a:srgbClr val="E6EEF7"/>
-                </a:solidFill>
-                <a:latin typeface="Calibri" pitchFamily="34" charset="0"/>
-                <a:ea typeface="Calibri" pitchFamily="34" charset="-122"/>
-                <a:cs typeface="Calibri" pitchFamily="34" charset="-120"/>
-              </a:rPr>
-              <a:t>4.  Chốt với anh: có chạy cả 350 câu test cho baseline không, vì hạn mức tài khoản.</a:t>
-            </a:r>
-            <a:endParaRPr lang="en-US" sz="1150" dirty="0"/>
-          </a:p>
-          <a:p>
-            <a:pPr indent="0" marL="0">
-              <a:spcAft>
-                <a:spcPts val="800"/>
-              </a:spcAft>
-              <a:buNone/>
-            </a:pPr>
-            <a:r>
-              <a:rPr lang="en-US" sz="1150" dirty="0">
-                <a:solidFill>
-                  <a:srgbClr val="E6EEF7"/>
-                </a:solidFill>
-                <a:latin typeface="Calibri" pitchFamily="34" charset="0"/>
-                <a:ea typeface="Calibri" pitchFamily="34" charset="-122"/>
-                <a:cs typeface="Calibri" pitchFamily="34" charset="-120"/>
-              </a:rPr>
-              <a:t>5.  Chấm 3 lần lấy trung bình, đúng kế hoạch đánh giá.</a:t>
-            </a:r>
-            <a:endParaRPr lang="en-US" sz="1150" dirty="0"/>
-          </a:p>
-        </p:txBody>
-      </p:sp>
-      <p:sp>
-        <p:nvSpPr>
-          <p:cNvPr id="7" name="Shape 5"/>
-          <p:cNvSpPr/>
-          <p:nvPr/>
-        </p:nvSpPr>
-        <p:spPr>
-          <a:xfrm>
-            <a:off x="640080" y="3886200"/>
-            <a:ext cx="3657600" cy="777240"/>
-          </a:xfrm>
-          <a:prstGeom prst="rect">
-            <a:avLst/>
-          </a:prstGeom>
-          <a:solidFill>
-            <a:srgbClr val="1B3457"/>
-          </a:solidFill>
-          <a:ln w="9525">
-            <a:solidFill>
-              <a:srgbClr val="2C4A73"/>
-            </a:solidFill>
-            <a:prstDash val="solid"/>
-          </a:ln>
-        </p:spPr>
-      </p:sp>
-      <p:sp>
-        <p:nvSpPr>
-          <p:cNvPr id="8" name="Text 6"/>
-          <p:cNvSpPr txBox="1"/>
-          <p:nvPr/>
-        </p:nvSpPr>
-        <p:spPr>
-          <a:xfrm>
-            <a:off x="822960" y="3977640"/>
-            <a:ext cx="1371600" cy="594360"/>
-          </a:xfrm>
-          <a:prstGeom prst="rect">
-            <a:avLst/>
-          </a:prstGeom>
-          <a:noFill/>
-          <a:ln/>
-        </p:spPr>
-        <p:txBody>
-          <a:bodyPr wrap="square" lIns="0" tIns="0" rIns="0" bIns="0" rtlCol="0" anchor="ctr"/>
-          <a:lstStyle/>
-          <a:p>
-            <a:pPr indent="0" marL="0">
-              <a:buNone/>
-            </a:pPr>
-            <a:r>
-              <a:rPr lang="en-US" sz="2600" b="1" dirty="0">
-                <a:solidFill>
-                  <a:srgbClr val="F2A541"/>
-                </a:solidFill>
-                <a:latin typeface="Cambria" pitchFamily="34" charset="0"/>
-                <a:ea typeface="Cambria" pitchFamily="34" charset="-122"/>
-                <a:cs typeface="Cambria" pitchFamily="34" charset="-120"/>
-              </a:rPr>
-              <a:t>79,0%</a:t>
-            </a:r>
-            <a:endParaRPr lang="en-US" sz="2600" dirty="0"/>
-          </a:p>
-        </p:txBody>
-      </p:sp>
-      <p:sp>
-        <p:nvSpPr>
-          <p:cNvPr id="9" name="Text 7"/>
-          <p:cNvSpPr txBox="1"/>
-          <p:nvPr/>
-        </p:nvSpPr>
-        <p:spPr>
-          <a:xfrm>
-            <a:off x="2194560" y="3977640"/>
-            <a:ext cx="1920240" cy="594360"/>
-          </a:xfrm>
-          <a:prstGeom prst="rect">
-            <a:avLst/>
-          </a:prstGeom>
-          <a:noFill/>
-          <a:ln/>
-        </p:spPr>
-        <p:txBody>
-          <a:bodyPr wrap="square" lIns="0" tIns="0" rIns="0" bIns="0" rtlCol="0" anchor="ctr"/>
-          <a:lstStyle/>
-          <a:p>
-            <a:pPr indent="0" marL="0">
-              <a:buNone/>
-            </a:pPr>
-            <a:r>
-              <a:rPr lang="en-US" sz="1150" dirty="0">
-                <a:solidFill>
-                  <a:srgbClr val="B9C9DD"/>
-                </a:solidFill>
-                <a:latin typeface="Calibri" pitchFamily="34" charset="0"/>
-                <a:ea typeface="Calibri" pitchFamily="34" charset="-122"/>
-                <a:cs typeface="Calibri" pitchFamily="34" charset="-120"/>
-              </a:rPr>
-              <a:t>macro-average, 6/6 loại đã chạy</a:t>
-            </a:r>
-            <a:endParaRPr lang="en-US" sz="1150" dirty="0"/>
-          </a:p>
-        </p:txBody>
-      </p:sp>
-      <p:sp>
-        <p:nvSpPr>
-          <p:cNvPr id="10" name="Shape 8"/>
-          <p:cNvSpPr/>
-          <p:nvPr/>
-        </p:nvSpPr>
-        <p:spPr>
-          <a:xfrm>
-            <a:off x="4846320" y="3886200"/>
-            <a:ext cx="3657600" cy="777240"/>
-          </a:xfrm>
-          <a:prstGeom prst="rect">
-            <a:avLst/>
-          </a:prstGeom>
-          <a:solidFill>
-            <a:srgbClr val="1B3457"/>
-          </a:solidFill>
-          <a:ln w="9525">
-            <a:solidFill>
-              <a:srgbClr val="2C4A73"/>
-            </a:solidFill>
-            <a:prstDash val="solid"/>
-          </a:ln>
-        </p:spPr>
-      </p:sp>
-      <p:sp>
-        <p:nvSpPr>
-          <p:cNvPr id="11" name="Text 9"/>
-          <p:cNvSpPr txBox="1"/>
-          <p:nvPr/>
-        </p:nvSpPr>
-        <p:spPr>
-          <a:xfrm>
-            <a:off x="5029200" y="3977640"/>
-            <a:ext cx="1371600" cy="594360"/>
-          </a:xfrm>
-          <a:prstGeom prst="rect">
-            <a:avLst/>
-          </a:prstGeom>
-          <a:noFill/>
-          <a:ln/>
-        </p:spPr>
-        <p:txBody>
-          <a:bodyPr wrap="square" lIns="0" tIns="0" rIns="0" bIns="0" rtlCol="0" anchor="ctr"/>
-          <a:lstStyle/>
-          <a:p>
-            <a:pPr indent="0" marL="0">
-              <a:buNone/>
-            </a:pPr>
-            <a:r>
-              <a:rPr lang="en-US" sz="2600" b="1" dirty="0">
-                <a:solidFill>
-                  <a:srgbClr val="F2A541"/>
-                </a:solidFill>
-                <a:latin typeface="Cambria" pitchFamily="34" charset="0"/>
-                <a:ea typeface="Cambria" pitchFamily="34" charset="-122"/>
-                <a:cs typeface="Cambria" pitchFamily="34" charset="-120"/>
-              </a:rPr>
-              <a:t>33 phút</a:t>
-            </a:r>
-            <a:endParaRPr lang="en-US" sz="2600" dirty="0"/>
-          </a:p>
-        </p:txBody>
-      </p:sp>
-      <p:sp>
-        <p:nvSpPr>
-          <p:cNvPr id="12" name="Text 10"/>
-          <p:cNvSpPr txBox="1"/>
-          <p:nvPr/>
-        </p:nvSpPr>
-        <p:spPr>
-          <a:xfrm>
-            <a:off x="6400800" y="3977640"/>
-            <a:ext cx="1920240" cy="594360"/>
-          </a:xfrm>
-          <a:prstGeom prst="rect">
-            <a:avLst/>
-          </a:prstGeom>
-          <a:noFill/>
-          <a:ln/>
-        </p:spPr>
-        <p:txBody>
-          <a:bodyPr wrap="square" lIns="0" tIns="0" rIns="0" bIns="0" rtlCol="0" anchor="ctr"/>
-          <a:lstStyle/>
-          <a:p>
-            <a:pPr indent="0" marL="0">
-              <a:buNone/>
-            </a:pPr>
-            <a:r>
-              <a:rPr lang="en-US" sz="1150" dirty="0">
-                <a:solidFill>
-                  <a:srgbClr val="B9C9DD"/>
-                </a:solidFill>
-                <a:latin typeface="Calibri" pitchFamily="34" charset="0"/>
-                <a:ea typeface="Calibri" pitchFamily="34" charset="-122"/>
-                <a:cs typeface="Calibri" pitchFamily="34" charset="-120"/>
-              </a:rPr>
-              <a:t>dựng bộ nhớ mỗi câu (trung vị)</a:t>
-            </a:r>
-            <a:endParaRPr lang="en-US" sz="1150" dirty="0"/>
+              <a:t>Tài khoản ChatGPT có trần sử dụng: đã chạm giới hạn (429), phải chờ hoặc thêm tài khoản.</a:t>
+            </a:r>
+            <a:endParaRPr lang="en-US" sz="1300" dirty="0"/>
           </a:p>
         </p:txBody>
       </p:sp>

--- a/baselines/bao-cao-lightmem-baseline.pptx
+++ b/baselines/bao-cao-lightmem-baseline.pptx
@@ -16,9 +16,10 @@
     <p:sldId id="264" r:id="rId10"/>
     <p:sldId id="265" r:id="rId11"/>
     <p:sldId id="266" r:id="rId12"/>
+    <p:sldId id="267" r:id="rId13"/>
   </p:sldIdLst>
   <p:notesMasterIdLst>
-    <p:notesMasterId r:id="rId13"/>
+    <p:notesMasterId r:id="rId14"/>
   </p:notesMasterIdLst>
   <p:sldSz cx="9144000" cy="5143500"/>
   <p:notesSz cx="5143500" cy="9144000"/>
@@ -126,8 +127,8 @@
     <c:plotArea>
       <c:layout/>
       <c:barChart>
-        <c:barDir val="bar"/>
-        <c:grouping val="stacked"/>
+        <c:barDir val="col"/>
+        <c:grouping val="clustered"/>
         <c:varyColors val="0"/>
         <c:ser>
           <c:idx val="0"/>
@@ -138,7 +139,7 @@
               <c:strCache>
                 <c:ptCount val="1"/>
                 <c:pt idx="0">
-                  <c:v>Đã chạy</c:v>
+                  <c:v>APEX-MEM</c:v>
                 </c:pt>
               </c:strCache>
             </c:strRef>
@@ -151,22 +152,21 @@
           </c:spPr>
           <c:invertIfNegative val="0"/>
           <c:dLbls>
-            <c:numFmt formatCode="0;;;" sourceLinked="0"/>
+            <c:numFmt formatCode="0&quot;%&quot;" sourceLinked="0"/>
             <c:txPr>
               <a:bodyPr/>
               <a:lstStyle/>
               <a:p>
                 <a:pPr>
-                  <a:defRPr b="0" i="0" strike="noStrike" sz="1100" u="none">
+                  <a:defRPr b="0" i="0" strike="noStrike" sz="900" u="none">
                     <a:solidFill>
-                      <a:srgbClr val="FFFFFF"/>
+                      <a:srgbClr val="10243E"/>
                     </a:solidFill>
                     <a:latin typeface="Arial"/>
                   </a:defRPr>
                 </a:pPr>
               </a:p>
             </c:txPr>
-            <c:dLblPos val="ctr"/>
             <c:showLegendKey val="0"/>
             <c:showVal val="1"/>
             <c:showCatName val="0"/>
@@ -182,22 +182,22 @@
                 <c:ptCount val="6"/>
                 <c:lvl>
                   <c:pt idx="0">
-                    <c:v>Đơn phiên · người dùng</c:v>
+                    <c:v>Đơn phiên · người dùng (n=21)</c:v>
                   </c:pt>
                   <c:pt idx="1">
-                    <c:v>Đơn phiên · trợ lý</c:v>
+                    <c:v>Đơn phiên · trợ lý (n=17)</c:v>
                   </c:pt>
                   <c:pt idx="2">
-                    <c:v>Đơn phiên · sở thích</c:v>
+                    <c:v>Đơn phiên · sở thích (n=9)</c:v>
                   </c:pt>
                   <c:pt idx="3">
-                    <c:v>Đa phiên</c:v>
+                    <c:v>Đa phiên (n=40)</c:v>
                   </c:pt>
                   <c:pt idx="4">
-                    <c:v>Suy luận thời gian</c:v>
+                    <c:v>Suy luận thời gian (n=40)</c:v>
                   </c:pt>
                   <c:pt idx="5">
-                    <c:v>Cập nhật kiến thức</c:v>
+                    <c:v>Cập nhật kiến thức (n=23)</c:v>
                   </c:pt>
                 </c:lvl>
               </c:multiLvlStrCache>
@@ -210,22 +210,22 @@
                 <c:formatCode>General</c:formatCode>
                 <c:ptCount val="6"/>
                 <c:pt idx="0">
-                  <c:v>21</c:v>
+                  <c:v>95.2</c:v>
                 </c:pt>
                 <c:pt idx="1">
-                  <c:v>9</c:v>
+                  <c:v>82.4</c:v>
                 </c:pt>
                 <c:pt idx="2">
-                  <c:v>9</c:v>
+                  <c:v>77.8</c:v>
                 </c:pt>
                 <c:pt idx="3">
-                  <c:v>40</c:v>
+                  <c:v>80</c:v>
                 </c:pt>
                 <c:pt idx="4">
-                  <c:v>30</c:v>
+                  <c:v>85</c:v>
                 </c:pt>
                 <c:pt idx="5">
-                  <c:v>16</c:v>
+                  <c:v>87</c:v>
                 </c:pt>
               </c:numCache>
             </c:numRef>
@@ -240,35 +240,34 @@
               <c:strCache>
                 <c:ptCount val="1"/>
                 <c:pt idx="0">
-                  <c:v>Còn lại</c:v>
+                  <c:v>LightMem</c:v>
                 </c:pt>
               </c:strCache>
             </c:strRef>
           </c:tx>
           <c:spPr>
             <a:solidFill>
-              <a:srgbClr val="C9D5DF"/>
+              <a:srgbClr val="F2A541"/>
             </a:solidFill>
             <a:effectLst/>
           </c:spPr>
           <c:invertIfNegative val="0"/>
           <c:dLbls>
-            <c:numFmt formatCode="0;;;" sourceLinked="0"/>
+            <c:numFmt formatCode="0&quot;%&quot;" sourceLinked="0"/>
             <c:txPr>
               <a:bodyPr/>
               <a:lstStyle/>
               <a:p>
                 <a:pPr>
-                  <a:defRPr b="0" i="0" strike="noStrike" sz="1100" u="none">
+                  <a:defRPr b="0" i="0" strike="noStrike" sz="900" u="none">
                     <a:solidFill>
-                      <a:srgbClr val="FFFFFF"/>
+                      <a:srgbClr val="10243E"/>
                     </a:solidFill>
                     <a:latin typeface="Arial"/>
                   </a:defRPr>
                 </a:pPr>
               </a:p>
             </c:txPr>
-            <c:dLblPos val="ctr"/>
             <c:showLegendKey val="0"/>
             <c:showVal val="1"/>
             <c:showCatName val="0"/>
@@ -284,22 +283,22 @@
                 <c:ptCount val="6"/>
                 <c:lvl>
                   <c:pt idx="0">
-                    <c:v>Đơn phiên · người dùng</c:v>
+                    <c:v>Đơn phiên · người dùng (n=21)</c:v>
                   </c:pt>
                   <c:pt idx="1">
-                    <c:v>Đơn phiên · trợ lý</c:v>
+                    <c:v>Đơn phiên · trợ lý (n=17)</c:v>
                   </c:pt>
                   <c:pt idx="2">
-                    <c:v>Đơn phiên · sở thích</c:v>
+                    <c:v>Đơn phiên · sở thích (n=9)</c:v>
                   </c:pt>
                   <c:pt idx="3">
-                    <c:v>Đa phiên</c:v>
+                    <c:v>Đa phiên (n=40)</c:v>
                   </c:pt>
                   <c:pt idx="4">
-                    <c:v>Suy luận thời gian</c:v>
+                    <c:v>Suy luận thời gian (n=40)</c:v>
                   </c:pt>
                   <c:pt idx="5">
-                    <c:v>Cập nhật kiến thức</c:v>
+                    <c:v>Cập nhật kiến thức (n=23)</c:v>
                   </c:pt>
                 </c:lvl>
               </c:multiLvlStrCache>
@@ -312,44 +311,43 @@
                 <c:formatCode>General</c:formatCode>
                 <c:ptCount val="6"/>
                 <c:pt idx="0">
-                  <c:v>0</c:v>
+                  <c:v>100</c:v>
                 </c:pt>
                 <c:pt idx="1">
-                  <c:v>8</c:v>
+                  <c:v>41.2</c:v>
                 </c:pt>
                 <c:pt idx="2">
-                  <c:v>0</c:v>
+                  <c:v>77.8</c:v>
                 </c:pt>
                 <c:pt idx="3">
-                  <c:v>0</c:v>
+                  <c:v>82.5</c:v>
                 </c:pt>
                 <c:pt idx="4">
-                  <c:v>10</c:v>
+                  <c:v>85</c:v>
                 </c:pt>
                 <c:pt idx="5">
-                  <c:v>7</c:v>
+                  <c:v>87</c:v>
                 </c:pt>
               </c:numCache>
             </c:numRef>
           </c:val>
         </c:ser>
         <c:dLbls>
-          <c:numFmt formatCode="0;;;" sourceLinked="0"/>
+          <c:numFmt formatCode="0&quot;%&quot;" sourceLinked="0"/>
           <c:txPr>
             <a:bodyPr/>
             <a:lstStyle/>
             <a:p>
               <a:pPr>
-                <a:defRPr b="0" i="0" strike="noStrike" sz="1100" u="none">
+                <a:defRPr b="0" i="0" strike="noStrike" sz="900" u="none">
                   <a:solidFill>
-                    <a:srgbClr val="FFFFFF"/>
+                    <a:srgbClr val="10243E"/>
                   </a:solidFill>
                   <a:latin typeface="Arial"/>
                 </a:defRPr>
               </a:pPr>
             </a:p>
           </c:txPr>
-          <c:dLblPos val="ctr"/>
           <c:showLegendKey val="0"/>
           <c:showVal val="1"/>
           <c:showCatName val="0"/>
@@ -358,8 +356,8 @@
           <c:showBubbleSize val="0"/>
           <c:showLeaderLines val="0"/>
         </c:dLbls>
-        <c:gapWidth val="50"/>
-        <c:overlap val="100"/>
+        <c:gapWidth val="150"/>
+        <c:overlap val="0"/>
         <c:axId val="2094734554"/>
         <c:axId val="2094734552"/>
         <c:axId val="2094734556"/>
@@ -367,11 +365,54 @@
       <c:catAx>
         <c:axId val="2094734554"/>
         <c:scaling>
-          <c:orientation val="maxMin"/>
+          <c:orientation val="minMax"/>
         </c:scaling>
         <c:delete val="0"/>
+        <c:axPos val="b"/>
+        <c:numFmt formatCode="General" sourceLinked="1"/>
+        <c:majorTickMark val="out"/>
+        <c:minorTickMark val="none"/>
+        <c:tickLblPos val="low"/>
+        <c:spPr>
+          <a:ln w="12700" cap="flat">
+            <a:solidFill>
+              <a:srgbClr val="888888"/>
+            </a:solidFill>
+            <a:prstDash val="solid"/>
+            <a:round/>
+          </a:ln>
+        </c:spPr>
+        <c:txPr>
+          <a:bodyPr/>
+          <a:lstStyle/>
+          <a:p>
+            <a:pPr>
+              <a:defRPr sz="850" b="0" i="0" u="none" strike="noStrike">
+                <a:solidFill>
+                  <a:srgbClr val="1B2B3A"/>
+                </a:solidFill>
+                <a:latin typeface="Arial"/>
+              </a:defRPr>
+            </a:pPr>
+            <a:endParaRPr lang="en-US"/>
+          </a:p>
+        </c:txPr>
+        <c:crossAx val="2094734552"/>
+        <c:crosses val="autoZero"/>
+        <c:auto val="1"/>
+        <c:lblAlgn val="ctr"/>
+        <c:noMultiLvlLbl val="1"/>
+      </c:catAx>
+      <c:valAx>
+        <c:axId val="2094734552"/>
+        <c:scaling>
+          <c:orientation val="minMax"/>
+          <c:max val="110"/>
+          <c:min val="0"/>
+        </c:scaling>
+        <c:delete val="1"/>
         <c:axPos val="l"/>
-        <c:numFmt formatCode="General" sourceLinked="1"/>
+        <c:numFmt formatCode="General" sourceLinked="0"/>
         <c:majorTickMark val="out"/>
         <c:minorTickMark val="none"/>
         <c:tickLblPos val="nextTo"/>
@@ -389,61 +430,9 @@
           <a:lstStyle/>
           <a:p>
             <a:pPr>
-              <a:defRPr sz="1100" b="0" i="0" u="none" strike="noStrike">
+              <a:defRPr sz="1200" b="0" i="0" u="none" strike="noStrike">
                 <a:solidFill>
-                  <a:srgbClr val="1B2B3A"/>
-                </a:solidFill>
-                <a:latin typeface="Arial"/>
-              </a:defRPr>
-            </a:pPr>
-            <a:endParaRPr lang="en-US"/>
-          </a:p>
-        </c:txPr>
-        <c:crossAx val="2094734552"/>
-        <c:crosses val="autoZero"/>
-        <c:auto val="1"/>
-        <c:lblAlgn val="ctr"/>
-        <c:noMultiLvlLbl val="1"/>
-      </c:catAx>
-      <c:valAx>
-        <c:axId val="2094734552"/>
-        <c:scaling>
-          <c:orientation val="minMax"/>
-        </c:scaling>
-        <c:delete val="0"/>
-        <c:axPos val="b"/>
-        <c:majorGridlines>
-          <c:spPr>
-            <a:ln w="6350" cap="flat">
-              <a:solidFill>
-                <a:srgbClr val="DCE3EA"/>
-              </a:solidFill>
-              <a:prstDash val="solid"/>
-              <a:round/>
-            </a:ln>
-          </c:spPr>
-        </c:majorGridlines>
-        <c:numFmt formatCode="General" sourceLinked="0"/>
-        <c:majorTickMark val="out"/>
-        <c:minorTickMark val="none"/>
-        <c:tickLblPos val="low"/>
-        <c:spPr>
-          <a:ln w="12700" cap="flat">
-            <a:solidFill>
-              <a:srgbClr val="888888"/>
-            </a:solidFill>
-            <a:prstDash val="solid"/>
-            <a:round/>
-          </a:ln>
-        </c:spPr>
-        <c:txPr>
-          <a:bodyPr/>
-          <a:lstStyle/>
-          <a:p>
-            <a:pPr>
-              <a:defRPr sz="1000" b="0" i="0" u="none" strike="noStrike">
-                <a:solidFill>
-                  <a:srgbClr val="5B6B7A"/>
+                  <a:srgbClr val="000000"/>
                 </a:solidFill>
                 <a:latin typeface="Arial"/>
               </a:defRPr>
@@ -464,7 +453,7 @@
       </c:spPr>
     </c:plotArea>
     <c:legend>
-      <c:legendPos val="b"/>
+      <c:legendPos val="t"/>
       <c:overlay val="0"/>
       <c:txPr>
         <a:bodyPr/>
@@ -564,7 +553,7 @@
                     <c:v>Đơn phiên · người dùng (n=21)</c:v>
                   </c:pt>
                   <c:pt idx="1">
-                    <c:v>Đơn phiên · trợ lý (n=9)</c:v>
+                    <c:v>Đơn phiên · trợ lý (n=17)</c:v>
                   </c:pt>
                   <c:pt idx="2">
                     <c:v>Đơn phiên · sở thích (n=9)</c:v>
@@ -573,10 +562,10 @@
                     <c:v>Đa phiên (n=40)</c:v>
                   </c:pt>
                   <c:pt idx="4">
-                    <c:v>Suy luận thời gian (n=30)</c:v>
+                    <c:v>Suy luận thời gian (n=40)</c:v>
                   </c:pt>
                   <c:pt idx="5">
-                    <c:v>Cập nhật kiến thức (n=16)</c:v>
+                    <c:v>Cập nhật kiến thức (n=23)</c:v>
                   </c:pt>
                 </c:lvl>
               </c:multiLvlStrCache>
@@ -592,7 +581,7 @@
                   <c:v>100</c:v>
                 </c:pt>
                 <c:pt idx="1">
-                  <c:v>33.3</c:v>
+                  <c:v>41.2</c:v>
                 </c:pt>
                 <c:pt idx="2">
                   <c:v>77.8</c:v>
@@ -601,10 +590,10 @@
                   <c:v>82.5</c:v>
                 </c:pt>
                 <c:pt idx="4">
-                  <c:v>86.7</c:v>
+                  <c:v>85</c:v>
                 </c:pt>
                 <c:pt idx="5">
-                  <c:v>93.8</c:v>
+                  <c:v>87</c:v>
                 </c:pt>
               </c:numCache>
             </c:numRef>
@@ -1152,7 +1141,7 @@
           <a:p>
             <a:r>
               <a:rPr lang="en-US" dirty="0"/>
-              <a:t>Deck tổng hợp phần cài đặt và chạy baseline LightMem. Số liệu sinh tự động từ thư mục kết quả; chạy lại gen_stats.py và build_deck.js khi có thêm câu.</a:t>
+              <a:t>Deck tổng hợp baseline LightMem và so sánh với APEX-MEM. Số liệu sinh tự động từ thư mục kết quả; chạy lại gen_stats.py, compare_apex.py và build_deck.js khi có thêm câu.</a:t>
             </a:r>
             <a:endParaRPr lang="en-US" dirty="0"/>
           </a:p>
@@ -1240,7 +1229,7 @@
           <a:p>
             <a:r>
               <a:rPr lang="en-US" dirty="0"/>
-              <a:t>Các lỗi này đều nằm ở môi trường chạy, không phải ở thiết kế baseline.</a:t>
+              <a:t>LightMem: thời gian dựng trung vị 33 phút, trả lời 3 giây. APEX-MEM: 88% token nằm ở bước dựng. Thời gian đo trong điều kiện chạy song song khác nhau nên không dùng để kết luận hệ nào nhanh hơn. Chưa có số token của LightMem.</a:t>
             </a:r>
             <a:endParaRPr lang="en-US" dirty="0"/>
           </a:p>
@@ -1328,7 +1317,7 @@
           <a:p>
             <a:r>
               <a:rPr lang="en-US" dirty="0"/>
-              <a:t>Slide tổng kết tự cập nhật theo stats.json. Khi chạy xong 150 câu, chạy lại gen_stats.py và build_deck.js.</a:t>
+              <a:t>Các lỗi này đều nằm ở môi trường chạy, không phải ở thiết kế baseline.</a:t>
             </a:r>
             <a:endParaRPr lang="en-US" dirty="0"/>
           </a:p>
@@ -1352,6 +1341,94 @@
             <a:fld id="{F7021451-1387-4CA6-816F-3879F97B5CBC}" type="slidenum">
               <a:rPr lang="en-US"/>
               <a:t>11</a:t>
+            </a:fld>
+            <a:endParaRPr lang="en-US"/>
+          </a:p>
+        </p:txBody>
+      </p:sp>
+    </p:spTree>
+    <p:extLst>
+      <p:ext uri="{BB962C8B-B14F-4D97-AF65-F5344CB8AC3E}">
+        <p14:creationId xmlns:p14="http://schemas.microsoft.com/office/powerpoint/2010/main" val="1024086991"/>
+      </p:ext>
+    </p:extLst>
+  </p:cSld>
+  <p:clrMapOvr>
+    <a:masterClrMapping/>
+  </p:clrMapOvr>
+</p:notes>
+</file>
+
+<file path=ppt/notesSlides/notesSlide12.xml><?xml version="1.0" encoding="utf-8"?>
+<p:notes xmlns:a="http://schemas.openxmlformats.org/drawingml/2006/main" xmlns:r="http://schemas.openxmlformats.org/officeDocument/2006/relationships" xmlns:p="http://schemas.openxmlformats.org/presentationml/2006/main">
+  <p:cSld>
+    <p:spTree>
+      <p:nvGrpSpPr>
+        <p:cNvPr id="1" name=""/>
+        <p:cNvGrpSpPr/>
+        <p:nvPr/>
+      </p:nvGrpSpPr>
+      <p:grpSpPr>
+        <a:xfrm>
+          <a:off x="0" y="0"/>
+          <a:ext cx="0" cy="0"/>
+          <a:chOff x="0" y="0"/>
+          <a:chExt cx="0" cy="0"/>
+        </a:xfrm>
+      </p:grpSpPr>
+      <p:sp>
+        <p:nvSpPr>
+          <p:cNvPr id="2" name="Slide Image Placeholder 1"/>
+          <p:cNvSpPr>
+            <a:spLocks noGrp="1" noRot="1" noChangeAspect="1"/>
+          </p:cNvSpPr>
+          <p:nvPr>
+            <p:ph type="sldImg"/>
+          </p:nvPr>
+        </p:nvSpPr>
+        <p:spPr/>
+      </p:sp>
+      <p:sp>
+        <p:nvSpPr>
+          <p:cNvPr id="3" name="Notes Placeholder 2"/>
+          <p:cNvSpPr>
+            <a:spLocks noGrp="1"/>
+          </p:cNvSpPr>
+          <p:nvPr>
+            <p:ph type="body" idx="1"/>
+          </p:nvPr>
+        </p:nvSpPr>
+        <p:spPr/>
+        <p:txBody>
+          <a:bodyPr/>
+          <a:lstStyle/>
+          <a:p>
+            <a:r>
+              <a:rPr lang="en-US" dirty="0"/>
+              <a:t>Slide tổng kết tự cập nhật theo stats.json. Khi chạy xong 150 câu, chạy lại gen_stats.py và build_deck.js.</a:t>
+            </a:r>
+            <a:endParaRPr lang="en-US" dirty="0"/>
+          </a:p>
+        </p:txBody>
+      </p:sp>
+      <p:sp>
+        <p:nvSpPr>
+          <p:cNvPr id="4" name="Slide Number Placeholder 3"/>
+          <p:cNvSpPr>
+            <a:spLocks noGrp="1"/>
+          </p:cNvSpPr>
+          <p:nvPr>
+            <p:ph type="sldNum" sz="quarter" idx="10"/>
+          </p:nvPr>
+        </p:nvSpPr>
+        <p:spPr/>
+        <p:txBody>
+          <a:bodyPr/>
+          <a:lstStyle/>
+          <a:p>
+            <a:fld id="{F7021451-1387-4CA6-816F-3879F97B5CBC}" type="slidenum">
+              <a:rPr lang="en-US"/>
+              <a:t>12</a:t>
             </a:fld>
             <a:endParaRPr lang="en-US"/>
           </a:p>
@@ -1592,7 +1669,7 @@
           <a:p>
             <a:r>
               <a:rPr lang="en-US" dirty="0"/>
-              <a:t>Các câu chạy theo thứ tự trong tập dev nên chưa phủ đều 6 loại; loại chưa chạy sẽ chạy ở lượt sau.</a:t>
+              <a:t>Cùng 150 câu dev, cùng model trả lời (luna), cùng model chấm (terra). Gộp chung APEX-MEM 127/150, LightMem 122/150. Hai khoảng tin cậy 95% chồng lên nhau gần hết.</a:t>
             </a:r>
             <a:endParaRPr lang="en-US" dirty="0"/>
           </a:p>
@@ -1680,7 +1757,7 @@
           <a:p>
             <a:r>
               <a:rPr lang="en-US" dirty="0"/>
-              <a:t>Micro 84,0% trên 125 câu, macro 79,0% trên 6 loại. Điểm đáng chú ý nhất: loại đơn phiên · trợ lý thấp hẳn, và nguyên nhân nằm ở cấu hình user_only của LightMem chứ không phải ngẫu nhiên.</a:t>
+              <a:t>Kiểm định McNemar trên cặp câu hỏi: APEX-MEM đúng riêng 20 câu, LightMem đúng riêng 15 câu, p = 0,50. Tách theo loại: loại lượt trợ lý APEX-MEM hơn 7 câu, năm loại còn lại LightMem hơn 2 câu.</a:t>
             </a:r>
             <a:endParaRPr lang="en-US" dirty="0"/>
           </a:p>
@@ -1768,7 +1845,7 @@
           <a:p>
             <a:r>
               <a:rPr lang="en-US" dirty="0"/>
-              <a:t>Kiểu 1: câu đếm qua nhiều phiên, hệ đếm thiếu hoặc thừa. Kiểu 2: câu hỏi về lời trợ lý, hệ không có dữ liệu vì cấu hình user_only. Kiểu 2 là lỗi cấu hình, sửa được; kiểu 1 là hạn chế thật của cách lưu ký ức.</a:t>
+              <a:t>Micro 81,3% trên 150 câu, macro 78,9% trên 6 loại. Điểm đáng chú ý nhất: loại đơn phiên · trợ lý thấp hẳn, và nguyên nhân nằm ở cấu hình user_only của LightMem chứ không phải ngẫu nhiên.</a:t>
             </a:r>
             <a:endParaRPr lang="en-US" dirty="0"/>
           </a:p>
@@ -1856,7 +1933,7 @@
           <a:p>
             <a:r>
               <a:rPr lang="en-US" dirty="0"/>
-              <a:t>Truy xuất trúng phiên chứa bằng chứng ở 124/125 câu. Trong 20 câu sai, 19 câu đã có bằng chứng trong 20 ký ức lấy về mà vẫn trả lời sai. Lưu ý: "trúng phiên" chưa chắc là "giữ được chi tiết cần thiết", vì LightMem nén và tóm tắt trước khi lưu.</a:t>
+              <a:t>Kiểu 1: câu đếm qua nhiều phiên, hệ đếm thiếu hoặc thừa. Kiểu 2: câu hỏi về lời trợ lý, hệ không có dữ liệu vì cấu hình user_only. Kiểu 2 là lỗi cấu hình, sửa được; kiểu 1 là hạn chế thật của cách lưu ký ức.</a:t>
             </a:r>
             <a:endParaRPr lang="en-US" dirty="0"/>
           </a:p>
@@ -1944,7 +2021,7 @@
           <a:p>
             <a:r>
               <a:rPr lang="en-US" dirty="0"/>
-              <a:t>Soi tay 12 câu được chấm đúng và toàn bộ 20 câu bị chấm sai. Không có câu nào được chấm đúng oan; có 2 câu nhóm cho rằng đáng lẽ nên tính đúng, nên accuracy thật có thể cao hơn khoảng 1,6 điểm.</a:t>
+              <a:t>Truy xuất trúng phiên chứa bằng chứng ở 149/150 câu. Trong 28 câu sai, 27 câu đã có bằng chứng trong 20 ký ức lấy về mà vẫn trả lời sai. Lưu ý: "trúng phiên" chưa chắc là "giữ được chi tiết cần thiết", vì LightMem nén và tóm tắt trước khi lưu.</a:t>
             </a:r>
             <a:endParaRPr lang="en-US" dirty="0"/>
           </a:p>
@@ -2032,7 +2109,7 @@
           <a:p>
             <a:r>
               <a:rPr lang="en-US" dirty="0"/>
-              <a:t>Thời gian dựng bộ nhớ chiếm gần như toàn bộ; truy xuất và trả lời rất nhanh. 9router chèn thêm khoảng 2.500 token system prompt vào mỗi lời gọi, nên số token đo qua router bị phình.</a:t>
+              <a:t>Soi tay 20 câu được chấm đúng và toàn bộ 28 câu bị chấm sai. Không có câu nào được chấm đúng oan; có 2 câu nhóm cho rằng đáng lẽ nên tính đúng, nên accuracy thật có thể cao hơn khoảng 1,3 điểm.</a:t>
             </a:r>
             <a:endParaRPr lang="en-US" dirty="0"/>
           </a:p>
@@ -2438,7 +2515,7 @@
                 <a:ea typeface="Calibri" pitchFamily="34" charset="-122"/>
                 <a:cs typeface="Calibri" pitchFamily="34" charset="-120"/>
               </a:rPr>
-              <a:t>BASELINE LIGHTMEM</a:t>
+              <a:t>BASELINE LIGHTMEM · SO SÁNH VỚI APEX-MEM</a:t>
             </a:r>
             <a:endParaRPr lang="en-US" sz="1400" dirty="0"/>
           </a:p>
@@ -2469,7 +2546,7 @@
               <a:buNone/>
             </a:pPr>
             <a:r>
-              <a:rPr lang="en-US" sz="4000" b="1" dirty="0">
+              <a:rPr lang="en-US" sz="3400" b="1" dirty="0">
                 <a:solidFill>
                   <a:srgbClr val="FFFFFF"/>
                 </a:solidFill>
@@ -2477,9 +2554,9 @@
                 <a:ea typeface="Cambria" pitchFamily="34" charset="-122"/>
                 <a:cs typeface="Cambria" pitchFamily="34" charset="-120"/>
               </a:rPr>
-              <a:t>LightMem trên LongMemEval-S</a:t>
-            </a:r>
-            <a:endParaRPr lang="en-US" sz="4000" dirty="0"/>
+              <a:t>LightMem và APEX-MEM trên LongMemEval-S</a:t>
+            </a:r>
+            <a:endParaRPr lang="en-US" sz="3400" dirty="0"/>
           </a:p>
         </p:txBody>
       </p:sp>
@@ -2516,7 +2593,7 @@
                 <a:ea typeface="Calibri" pitchFamily="34" charset="-122"/>
                 <a:cs typeface="Calibri" pitchFamily="34" charset="-120"/>
               </a:rPr>
-              <a:t>Đường cơ sở để so sánh với hệ thống của nhóm (APEX-MEM tái hiện)</a:t>
+              <a:t>Đường cơ sở LightMem và phép so sánh đầu tiên với hệ của nhóm, trên 150 câu dev</a:t>
             </a:r>
             <a:endParaRPr lang="en-US" sz="1800" dirty="0"/>
           </a:p>
@@ -2555,7 +2632,7 @@
                 <a:ea typeface="Calibri" pitchFamily="34" charset="-122"/>
                 <a:cs typeface="Calibri" pitchFamily="34" charset="-120"/>
               </a:rPr>
-              <a:t>Tuần 3 · số liệu sơ bộ 125/150 câu dev · nhóm 2 thành viên · 09/2026</a:t>
+              <a:t>Tuần 3 · đủ 150 câu dev · nhóm 2 thành viên · 09/2026</a:t>
             </a:r>
             <a:endParaRPr lang="en-US" sz="1300" dirty="0"/>
           </a:p>
@@ -2626,6 +2703,1620 @@
                 <a:ea typeface="Calibri" pitchFamily="34" charset="-122"/>
                 <a:cs typeface="Calibri" pitchFamily="34" charset="-120"/>
               </a:rPr>
+              <a:t>CHI PHÍ VÀ THỜI GIAN</a:t>
+            </a:r>
+            <a:endParaRPr lang="en-US" sz="1100" dirty="0"/>
+          </a:p>
+        </p:txBody>
+      </p:sp>
+      <p:sp>
+        <p:nvSpPr>
+          <p:cNvPr id="3" name="Text 1"/>
+          <p:cNvSpPr txBox="1"/>
+          <p:nvPr/>
+        </p:nvSpPr>
+        <p:spPr>
+          <a:xfrm>
+            <a:off x="457200" y="502920"/>
+            <a:ext cx="8229600" cy="548640"/>
+          </a:xfrm>
+          <a:prstGeom prst="rect">
+            <a:avLst/>
+          </a:prstGeom>
+          <a:noFill/>
+          <a:ln/>
+        </p:spPr>
+        <p:txBody>
+          <a:bodyPr wrap="square" lIns="0" tIns="0" rIns="0" bIns="0" rtlCol="0" anchor="ctr"/>
+          <a:lstStyle/>
+          <a:p>
+            <a:pPr indent="0" marL="0">
+              <a:buNone/>
+            </a:pPr>
+            <a:r>
+              <a:rPr lang="en-US" sz="2600" b="1" dirty="0">
+                <a:solidFill>
+                  <a:srgbClr val="10243E"/>
+                </a:solidFill>
+                <a:latin typeface="Cambria" pitchFamily="34" charset="0"/>
+                <a:ea typeface="Cambria" pitchFamily="34" charset="-122"/>
+                <a:cs typeface="Cambria" pitchFamily="34" charset="-120"/>
+              </a:rPr>
+              <a:t>Cả hai hệ đều tốn nhất ở bước dựng bộ nhớ</a:t>
+            </a:r>
+            <a:endParaRPr lang="en-US" sz="2600" dirty="0"/>
+          </a:p>
+        </p:txBody>
+      </p:sp>
+      <p:graphicFrame>
+        <p:nvGraphicFramePr>
+          <p:cNvPr id="11" name="Table 0"/>
+          <p:cNvGraphicFramePr>
+            <a:graphicFrameLocks noGrp="1"/>
+          </p:cNvGraphicFramePr>
+          <p:nvPr>
+            <p:extLst>
+              <p:ext uri="{D42A27DB-BD31-4B8C-83A1-F6EECF244321}">
+                <p14:modId xmlns:p14="http://schemas.microsoft.com/office/powerpoint/2010/main" val="1579011935"/>
+              </p:ext>
+            </p:extLst>
+          </p:nvPr>
+        </p:nvGraphicFramePr>
+        <p:xfrm>
+          <a:off x="457200" y="1188720"/>
+          <a:ext cx="8229600" cy="914400"/>
+        </p:xfrm>
+        <a:graphic>
+          <a:graphicData uri="http://schemas.openxmlformats.org/drawingml/2006/table">
+            <a:tbl>
+              <a:tblPr/>
+              <a:tblGrid>
+                <a:gridCol w="3108960"/>
+                <a:gridCol w="2377440"/>
+                <a:gridCol w="2743200"/>
+              </a:tblGrid>
+              <a:tr h="384048">
+                <a:tc>
+                  <a:txBody>
+                    <a:bodyPr/>
+                    <a:lstStyle/>
+                    <a:p>
+                      <a:pPr indent="0" marL="0">
+                        <a:buNone/>
+                      </a:pPr>
+                      <a:r>
+                        <a:rPr lang="en-US" sz="1200" b="1" dirty="0">
+                          <a:solidFill>
+                            <a:srgbClr val="FFFFFF"/>
+                          </a:solidFill>
+                          <a:latin typeface="Calibri" pitchFamily="34" charset="0"/>
+                          <a:ea typeface="Calibri" pitchFamily="34" charset="-122"/>
+                          <a:cs typeface="Calibri" pitchFamily="34" charset="-120"/>
+                        </a:rPr>
+                        <a:t>Mỗi câu hỏi</a:t>
+                      </a:r>
+                      <a:endParaRPr lang="en-US" sz="1200" dirty="0">
+                        <a:latin typeface="Calibri" charset="0"/>
+                        <a:ea typeface="Calibri" charset="0"/>
+                        <a:cs typeface="Calibri" charset="0"/>
+                      </a:endParaRPr>
+                    </a:p>
+                  </a:txBody>
+                  <a:tcPr marL="91440" marR="91440" marT="45720" marB="45720" anchor="ctr">
+                    <a:lnL w="9525" cap="flat" cmpd="sng" algn="ctr">
+                      <a:solidFill>
+                        <a:srgbClr val="DCE3EA"/>
+                      </a:solidFill>
+                      <a:prstDash val="solid"/>
+                      <a:round/>
+                      <a:headEnd type="none" w="med" len="med"/>
+                      <a:tailEnd type="none" w="med" len="med"/>
+                    </a:lnL>
+                    <a:lnR w="9525" cap="flat" cmpd="sng" algn="ctr">
+                      <a:solidFill>
+                        <a:srgbClr val="DCE3EA"/>
+                      </a:solidFill>
+                      <a:prstDash val="solid"/>
+                      <a:round/>
+                      <a:headEnd type="none" w="med" len="med"/>
+                      <a:tailEnd type="none" w="med" len="med"/>
+                    </a:lnR>
+                    <a:lnT w="9525" cap="flat" cmpd="sng" algn="ctr">
+                      <a:solidFill>
+                        <a:srgbClr val="DCE3EA"/>
+                      </a:solidFill>
+                      <a:prstDash val="solid"/>
+                      <a:round/>
+                      <a:headEnd type="none" w="med" len="med"/>
+                      <a:tailEnd type="none" w="med" len="med"/>
+                    </a:lnT>
+                    <a:lnB w="9525" cap="flat" cmpd="sng" algn="ctr">
+                      <a:solidFill>
+                        <a:srgbClr val="DCE3EA"/>
+                      </a:solidFill>
+                      <a:prstDash val="solid"/>
+                      <a:round/>
+                      <a:headEnd type="none" w="med" len="med"/>
+                      <a:tailEnd type="none" w="med" len="med"/>
+                    </a:lnB>
+                    <a:solidFill>
+                      <a:srgbClr val="1F6F8B"/>
+                    </a:solidFill>
+                  </a:tcPr>
+                </a:tc>
+                <a:tc>
+                  <a:txBody>
+                    <a:bodyPr/>
+                    <a:lstStyle/>
+                    <a:p>
+                      <a:pPr algn="ctr" indent="0" marL="0">
+                        <a:buNone/>
+                      </a:pPr>
+                      <a:r>
+                        <a:rPr lang="en-US" sz="1200" b="1" dirty="0">
+                          <a:solidFill>
+                            <a:srgbClr val="FFFFFF"/>
+                          </a:solidFill>
+                          <a:latin typeface="Calibri" pitchFamily="34" charset="0"/>
+                          <a:ea typeface="Calibri" pitchFamily="34" charset="-122"/>
+                          <a:cs typeface="Calibri" pitchFamily="34" charset="-120"/>
+                        </a:rPr>
+                        <a:t>LightMem</a:t>
+                      </a:r>
+                      <a:endParaRPr lang="en-US" sz="1200" dirty="0">
+                        <a:latin typeface="Calibri" charset="0"/>
+                        <a:ea typeface="Calibri" charset="0"/>
+                        <a:cs typeface="Calibri" charset="0"/>
+                      </a:endParaRPr>
+                    </a:p>
+                  </a:txBody>
+                  <a:tcPr marL="91440" marR="91440" marT="45720" marB="45720" anchor="ctr">
+                    <a:lnL w="9525" cap="flat" cmpd="sng" algn="ctr">
+                      <a:solidFill>
+                        <a:srgbClr val="DCE3EA"/>
+                      </a:solidFill>
+                      <a:prstDash val="solid"/>
+                      <a:round/>
+                      <a:headEnd type="none" w="med" len="med"/>
+                      <a:tailEnd type="none" w="med" len="med"/>
+                    </a:lnL>
+                    <a:lnR w="9525" cap="flat" cmpd="sng" algn="ctr">
+                      <a:solidFill>
+                        <a:srgbClr val="DCE3EA"/>
+                      </a:solidFill>
+                      <a:prstDash val="solid"/>
+                      <a:round/>
+                      <a:headEnd type="none" w="med" len="med"/>
+                      <a:tailEnd type="none" w="med" len="med"/>
+                    </a:lnR>
+                    <a:lnT w="9525" cap="flat" cmpd="sng" algn="ctr">
+                      <a:solidFill>
+                        <a:srgbClr val="DCE3EA"/>
+                      </a:solidFill>
+                      <a:prstDash val="solid"/>
+                      <a:round/>
+                      <a:headEnd type="none" w="med" len="med"/>
+                      <a:tailEnd type="none" w="med" len="med"/>
+                    </a:lnT>
+                    <a:lnB w="9525" cap="flat" cmpd="sng" algn="ctr">
+                      <a:solidFill>
+                        <a:srgbClr val="DCE3EA"/>
+                      </a:solidFill>
+                      <a:prstDash val="solid"/>
+                      <a:round/>
+                      <a:headEnd type="none" w="med" len="med"/>
+                      <a:tailEnd type="none" w="med" len="med"/>
+                    </a:lnB>
+                    <a:solidFill>
+                      <a:srgbClr val="1F6F8B"/>
+                    </a:solidFill>
+                  </a:tcPr>
+                </a:tc>
+                <a:tc>
+                  <a:txBody>
+                    <a:bodyPr/>
+                    <a:lstStyle/>
+                    <a:p>
+                      <a:pPr algn="ctr" indent="0" marL="0">
+                        <a:buNone/>
+                      </a:pPr>
+                      <a:r>
+                        <a:rPr lang="en-US" sz="1200" b="1" dirty="0">
+                          <a:solidFill>
+                            <a:srgbClr val="FFFFFF"/>
+                          </a:solidFill>
+                          <a:latin typeface="Calibri" pitchFamily="34" charset="0"/>
+                          <a:ea typeface="Calibri" pitchFamily="34" charset="-122"/>
+                          <a:cs typeface="Calibri" pitchFamily="34" charset="-120"/>
+                        </a:rPr>
+                        <a:t>APEX-MEM</a:t>
+                      </a:r>
+                      <a:endParaRPr lang="en-US" sz="1200" dirty="0">
+                        <a:latin typeface="Calibri" charset="0"/>
+                        <a:ea typeface="Calibri" charset="0"/>
+                        <a:cs typeface="Calibri" charset="0"/>
+                      </a:endParaRPr>
+                    </a:p>
+                  </a:txBody>
+                  <a:tcPr marL="91440" marR="91440" marT="45720" marB="45720" anchor="ctr">
+                    <a:lnL w="9525" cap="flat" cmpd="sng" algn="ctr">
+                      <a:solidFill>
+                        <a:srgbClr val="DCE3EA"/>
+                      </a:solidFill>
+                      <a:prstDash val="solid"/>
+                      <a:round/>
+                      <a:headEnd type="none" w="med" len="med"/>
+                      <a:tailEnd type="none" w="med" len="med"/>
+                    </a:lnL>
+                    <a:lnR w="9525" cap="flat" cmpd="sng" algn="ctr">
+                      <a:solidFill>
+                        <a:srgbClr val="DCE3EA"/>
+                      </a:solidFill>
+                      <a:prstDash val="solid"/>
+                      <a:round/>
+                      <a:headEnd type="none" w="med" len="med"/>
+                      <a:tailEnd type="none" w="med" len="med"/>
+                    </a:lnR>
+                    <a:lnT w="9525" cap="flat" cmpd="sng" algn="ctr">
+                      <a:solidFill>
+                        <a:srgbClr val="DCE3EA"/>
+                      </a:solidFill>
+                      <a:prstDash val="solid"/>
+                      <a:round/>
+                      <a:headEnd type="none" w="med" len="med"/>
+                      <a:tailEnd type="none" w="med" len="med"/>
+                    </a:lnT>
+                    <a:lnB w="9525" cap="flat" cmpd="sng" algn="ctr">
+                      <a:solidFill>
+                        <a:srgbClr val="DCE3EA"/>
+                      </a:solidFill>
+                      <a:prstDash val="solid"/>
+                      <a:round/>
+                      <a:headEnd type="none" w="med" len="med"/>
+                      <a:tailEnd type="none" w="med" len="med"/>
+                    </a:lnB>
+                    <a:solidFill>
+                      <a:srgbClr val="1F6F8B"/>
+                    </a:solidFill>
+                  </a:tcPr>
+                </a:tc>
+              </a:tr>
+              <a:tr h="384048">
+                <a:tc>
+                  <a:txBody>
+                    <a:bodyPr/>
+                    <a:lstStyle/>
+                    <a:p>
+                      <a:pPr indent="0" marL="0">
+                        <a:buNone/>
+                      </a:pPr>
+                      <a:r>
+                        <a:rPr lang="en-US" sz="1200" dirty="0">
+                          <a:solidFill>
+                            <a:srgbClr val="1B2B3A"/>
+                          </a:solidFill>
+                          <a:latin typeface="Calibri" pitchFamily="34" charset="0"/>
+                          <a:ea typeface="Calibri" pitchFamily="34" charset="-122"/>
+                          <a:cs typeface="Calibri" pitchFamily="34" charset="-120"/>
+                        </a:rPr>
+                        <a:t>Dựng bộ nhớ, trung vị</a:t>
+                      </a:r>
+                      <a:endParaRPr lang="en-US" sz="1200" dirty="0">
+                        <a:latin typeface="Calibri" charset="0"/>
+                        <a:ea typeface="Calibri" charset="0"/>
+                        <a:cs typeface="Calibri" charset="0"/>
+                      </a:endParaRPr>
+                    </a:p>
+                  </a:txBody>
+                  <a:tcPr marL="91440" marR="91440" marT="45720" marB="45720" anchor="ctr">
+                    <a:lnL w="9525" cap="flat" cmpd="sng" algn="ctr">
+                      <a:solidFill>
+                        <a:srgbClr val="DCE3EA"/>
+                      </a:solidFill>
+                      <a:prstDash val="solid"/>
+                      <a:round/>
+                      <a:headEnd type="none" w="med" len="med"/>
+                      <a:tailEnd type="none" w="med" len="med"/>
+                    </a:lnL>
+                    <a:lnR w="9525" cap="flat" cmpd="sng" algn="ctr">
+                      <a:solidFill>
+                        <a:srgbClr val="DCE3EA"/>
+                      </a:solidFill>
+                      <a:prstDash val="solid"/>
+                      <a:round/>
+                      <a:headEnd type="none" w="med" len="med"/>
+                      <a:tailEnd type="none" w="med" len="med"/>
+                    </a:lnR>
+                    <a:lnT w="9525" cap="flat" cmpd="sng" algn="ctr">
+                      <a:solidFill>
+                        <a:srgbClr val="DCE3EA"/>
+                      </a:solidFill>
+                      <a:prstDash val="solid"/>
+                      <a:round/>
+                      <a:headEnd type="none" w="med" len="med"/>
+                      <a:tailEnd type="none" w="med" len="med"/>
+                    </a:lnT>
+                    <a:lnB w="9525" cap="flat" cmpd="sng" algn="ctr">
+                      <a:solidFill>
+                        <a:srgbClr val="DCE3EA"/>
+                      </a:solidFill>
+                      <a:prstDash val="solid"/>
+                      <a:round/>
+                      <a:headEnd type="none" w="med" len="med"/>
+                      <a:tailEnd type="none" w="med" len="med"/>
+                    </a:lnB>
+                  </a:tcPr>
+                </a:tc>
+                <a:tc>
+                  <a:txBody>
+                    <a:bodyPr/>
+                    <a:lstStyle/>
+                    <a:p>
+                      <a:pPr algn="ctr" indent="0" marL="0">
+                        <a:buNone/>
+                      </a:pPr>
+                      <a:r>
+                        <a:rPr lang="en-US" sz="1200" dirty="0">
+                          <a:solidFill>
+                            <a:srgbClr val="1B2B3A"/>
+                          </a:solidFill>
+                          <a:latin typeface="Calibri" pitchFamily="34" charset="0"/>
+                          <a:ea typeface="Calibri" pitchFamily="34" charset="-122"/>
+                          <a:cs typeface="Calibri" pitchFamily="34" charset="-120"/>
+                        </a:rPr>
+                        <a:t>33 phút</a:t>
+                      </a:r>
+                      <a:endParaRPr lang="en-US" sz="1200" dirty="0">
+                        <a:latin typeface="Calibri" charset="0"/>
+                        <a:ea typeface="Calibri" charset="0"/>
+                        <a:cs typeface="Calibri" charset="0"/>
+                      </a:endParaRPr>
+                    </a:p>
+                  </a:txBody>
+                  <a:tcPr marL="91440" marR="91440" marT="45720" marB="45720" anchor="ctr">
+                    <a:lnL w="9525" cap="flat" cmpd="sng" algn="ctr">
+                      <a:solidFill>
+                        <a:srgbClr val="DCE3EA"/>
+                      </a:solidFill>
+                      <a:prstDash val="solid"/>
+                      <a:round/>
+                      <a:headEnd type="none" w="med" len="med"/>
+                      <a:tailEnd type="none" w="med" len="med"/>
+                    </a:lnL>
+                    <a:lnR w="9525" cap="flat" cmpd="sng" algn="ctr">
+                      <a:solidFill>
+                        <a:srgbClr val="DCE3EA"/>
+                      </a:solidFill>
+                      <a:prstDash val="solid"/>
+                      <a:round/>
+                      <a:headEnd type="none" w="med" len="med"/>
+                      <a:tailEnd type="none" w="med" len="med"/>
+                    </a:lnR>
+                    <a:lnT w="9525" cap="flat" cmpd="sng" algn="ctr">
+                      <a:solidFill>
+                        <a:srgbClr val="DCE3EA"/>
+                      </a:solidFill>
+                      <a:prstDash val="solid"/>
+                      <a:round/>
+                      <a:headEnd type="none" w="med" len="med"/>
+                      <a:tailEnd type="none" w="med" len="med"/>
+                    </a:lnT>
+                    <a:lnB w="9525" cap="flat" cmpd="sng" algn="ctr">
+                      <a:solidFill>
+                        <a:srgbClr val="DCE3EA"/>
+                      </a:solidFill>
+                      <a:prstDash val="solid"/>
+                      <a:round/>
+                      <a:headEnd type="none" w="med" len="med"/>
+                      <a:tailEnd type="none" w="med" len="med"/>
+                    </a:lnB>
+                  </a:tcPr>
+                </a:tc>
+                <a:tc>
+                  <a:txBody>
+                    <a:bodyPr/>
+                    <a:lstStyle/>
+                    <a:p>
+                      <a:pPr algn="ctr" indent="0" marL="0">
+                        <a:buNone/>
+                      </a:pPr>
+                      <a:r>
+                        <a:rPr lang="en-US" sz="1200" dirty="0">
+                          <a:solidFill>
+                            <a:srgbClr val="1B2B3A"/>
+                          </a:solidFill>
+                          <a:latin typeface="Calibri" pitchFamily="34" charset="0"/>
+                          <a:ea typeface="Calibri" pitchFamily="34" charset="-122"/>
+                          <a:cs typeface="Calibri" pitchFamily="34" charset="-120"/>
+                        </a:rPr>
+                        <a:t>7,1 phút</a:t>
+                      </a:r>
+                      <a:endParaRPr lang="en-US" sz="1200" dirty="0">
+                        <a:latin typeface="Calibri" charset="0"/>
+                        <a:ea typeface="Calibri" charset="0"/>
+                        <a:cs typeface="Calibri" charset="0"/>
+                      </a:endParaRPr>
+                    </a:p>
+                  </a:txBody>
+                  <a:tcPr marL="91440" marR="91440" marT="45720" marB="45720" anchor="ctr">
+                    <a:lnL w="9525" cap="flat" cmpd="sng" algn="ctr">
+                      <a:solidFill>
+                        <a:srgbClr val="DCE3EA"/>
+                      </a:solidFill>
+                      <a:prstDash val="solid"/>
+                      <a:round/>
+                      <a:headEnd type="none" w="med" len="med"/>
+                      <a:tailEnd type="none" w="med" len="med"/>
+                    </a:lnL>
+                    <a:lnR w="9525" cap="flat" cmpd="sng" algn="ctr">
+                      <a:solidFill>
+                        <a:srgbClr val="DCE3EA"/>
+                      </a:solidFill>
+                      <a:prstDash val="solid"/>
+                      <a:round/>
+                      <a:headEnd type="none" w="med" len="med"/>
+                      <a:tailEnd type="none" w="med" len="med"/>
+                    </a:lnR>
+                    <a:lnT w="9525" cap="flat" cmpd="sng" algn="ctr">
+                      <a:solidFill>
+                        <a:srgbClr val="DCE3EA"/>
+                      </a:solidFill>
+                      <a:prstDash val="solid"/>
+                      <a:round/>
+                      <a:headEnd type="none" w="med" len="med"/>
+                      <a:tailEnd type="none" w="med" len="med"/>
+                    </a:lnT>
+                    <a:lnB w="9525" cap="flat" cmpd="sng" algn="ctr">
+                      <a:solidFill>
+                        <a:srgbClr val="DCE3EA"/>
+                      </a:solidFill>
+                      <a:prstDash val="solid"/>
+                      <a:round/>
+                      <a:headEnd type="none" w="med" len="med"/>
+                      <a:tailEnd type="none" w="med" len="med"/>
+                    </a:lnB>
+                  </a:tcPr>
+                </a:tc>
+              </a:tr>
+              <a:tr h="384048">
+                <a:tc>
+                  <a:txBody>
+                    <a:bodyPr/>
+                    <a:lstStyle/>
+                    <a:p>
+                      <a:pPr indent="0" marL="0">
+                        <a:buNone/>
+                      </a:pPr>
+                      <a:r>
+                        <a:rPr lang="en-US" sz="1200" dirty="0">
+                          <a:solidFill>
+                            <a:srgbClr val="1B2B3A"/>
+                          </a:solidFill>
+                          <a:latin typeface="Calibri" pitchFamily="34" charset="0"/>
+                          <a:ea typeface="Calibri" pitchFamily="34" charset="-122"/>
+                          <a:cs typeface="Calibri" pitchFamily="34" charset="-120"/>
+                        </a:rPr>
+                        <a:t>Dựng bộ nhớ, p95</a:t>
+                      </a:r>
+                      <a:endParaRPr lang="en-US" sz="1200" dirty="0">
+                        <a:latin typeface="Calibri" charset="0"/>
+                        <a:ea typeface="Calibri" charset="0"/>
+                        <a:cs typeface="Calibri" charset="0"/>
+                      </a:endParaRPr>
+                    </a:p>
+                  </a:txBody>
+                  <a:tcPr marL="91440" marR="91440" marT="45720" marB="45720" anchor="ctr">
+                    <a:lnL w="9525" cap="flat" cmpd="sng" algn="ctr">
+                      <a:solidFill>
+                        <a:srgbClr val="DCE3EA"/>
+                      </a:solidFill>
+                      <a:prstDash val="solid"/>
+                      <a:round/>
+                      <a:headEnd type="none" w="med" len="med"/>
+                      <a:tailEnd type="none" w="med" len="med"/>
+                    </a:lnL>
+                    <a:lnR w="9525" cap="flat" cmpd="sng" algn="ctr">
+                      <a:solidFill>
+                        <a:srgbClr val="DCE3EA"/>
+                      </a:solidFill>
+                      <a:prstDash val="solid"/>
+                      <a:round/>
+                      <a:headEnd type="none" w="med" len="med"/>
+                      <a:tailEnd type="none" w="med" len="med"/>
+                    </a:lnR>
+                    <a:lnT w="9525" cap="flat" cmpd="sng" algn="ctr">
+                      <a:solidFill>
+                        <a:srgbClr val="DCE3EA"/>
+                      </a:solidFill>
+                      <a:prstDash val="solid"/>
+                      <a:round/>
+                      <a:headEnd type="none" w="med" len="med"/>
+                      <a:tailEnd type="none" w="med" len="med"/>
+                    </a:lnT>
+                    <a:lnB w="9525" cap="flat" cmpd="sng" algn="ctr">
+                      <a:solidFill>
+                        <a:srgbClr val="DCE3EA"/>
+                      </a:solidFill>
+                      <a:prstDash val="solid"/>
+                      <a:round/>
+                      <a:headEnd type="none" w="med" len="med"/>
+                      <a:tailEnd type="none" w="med" len="med"/>
+                    </a:lnB>
+                  </a:tcPr>
+                </a:tc>
+                <a:tc>
+                  <a:txBody>
+                    <a:bodyPr/>
+                    <a:lstStyle/>
+                    <a:p>
+                      <a:pPr algn="ctr" indent="0" marL="0">
+                        <a:buNone/>
+                      </a:pPr>
+                      <a:r>
+                        <a:rPr lang="en-US" sz="1200" dirty="0">
+                          <a:solidFill>
+                            <a:srgbClr val="1B2B3A"/>
+                          </a:solidFill>
+                          <a:latin typeface="Calibri" pitchFamily="34" charset="0"/>
+                          <a:ea typeface="Calibri" pitchFamily="34" charset="-122"/>
+                          <a:cs typeface="Calibri" pitchFamily="34" charset="-120"/>
+                        </a:rPr>
+                        <a:t>57 phút</a:t>
+                      </a:r>
+                      <a:endParaRPr lang="en-US" sz="1200" dirty="0">
+                        <a:latin typeface="Calibri" charset="0"/>
+                        <a:ea typeface="Calibri" charset="0"/>
+                        <a:cs typeface="Calibri" charset="0"/>
+                      </a:endParaRPr>
+                    </a:p>
+                  </a:txBody>
+                  <a:tcPr marL="91440" marR="91440" marT="45720" marB="45720" anchor="ctr">
+                    <a:lnL w="9525" cap="flat" cmpd="sng" algn="ctr">
+                      <a:solidFill>
+                        <a:srgbClr val="DCE3EA"/>
+                      </a:solidFill>
+                      <a:prstDash val="solid"/>
+                      <a:round/>
+                      <a:headEnd type="none" w="med" len="med"/>
+                      <a:tailEnd type="none" w="med" len="med"/>
+                    </a:lnL>
+                    <a:lnR w="9525" cap="flat" cmpd="sng" algn="ctr">
+                      <a:solidFill>
+                        <a:srgbClr val="DCE3EA"/>
+                      </a:solidFill>
+                      <a:prstDash val="solid"/>
+                      <a:round/>
+                      <a:headEnd type="none" w="med" len="med"/>
+                      <a:tailEnd type="none" w="med" len="med"/>
+                    </a:lnR>
+                    <a:lnT w="9525" cap="flat" cmpd="sng" algn="ctr">
+                      <a:solidFill>
+                        <a:srgbClr val="DCE3EA"/>
+                      </a:solidFill>
+                      <a:prstDash val="solid"/>
+                      <a:round/>
+                      <a:headEnd type="none" w="med" len="med"/>
+                      <a:tailEnd type="none" w="med" len="med"/>
+                    </a:lnT>
+                    <a:lnB w="9525" cap="flat" cmpd="sng" algn="ctr">
+                      <a:solidFill>
+                        <a:srgbClr val="DCE3EA"/>
+                      </a:solidFill>
+                      <a:prstDash val="solid"/>
+                      <a:round/>
+                      <a:headEnd type="none" w="med" len="med"/>
+                      <a:tailEnd type="none" w="med" len="med"/>
+                    </a:lnB>
+                  </a:tcPr>
+                </a:tc>
+                <a:tc>
+                  <a:txBody>
+                    <a:bodyPr/>
+                    <a:lstStyle/>
+                    <a:p>
+                      <a:pPr algn="ctr" indent="0" marL="0">
+                        <a:buNone/>
+                      </a:pPr>
+                      <a:r>
+                        <a:rPr lang="en-US" sz="1200" dirty="0">
+                          <a:solidFill>
+                            <a:srgbClr val="1B2B3A"/>
+                          </a:solidFill>
+                          <a:latin typeface="Calibri" pitchFamily="34" charset="0"/>
+                          <a:ea typeface="Calibri" pitchFamily="34" charset="-122"/>
+                          <a:cs typeface="Calibri" pitchFamily="34" charset="-120"/>
+                        </a:rPr>
+                        <a:t>23,1 phút</a:t>
+                      </a:r>
+                      <a:endParaRPr lang="en-US" sz="1200" dirty="0">
+                        <a:latin typeface="Calibri" charset="0"/>
+                        <a:ea typeface="Calibri" charset="0"/>
+                        <a:cs typeface="Calibri" charset="0"/>
+                      </a:endParaRPr>
+                    </a:p>
+                  </a:txBody>
+                  <a:tcPr marL="91440" marR="91440" marT="45720" marB="45720" anchor="ctr">
+                    <a:lnL w="9525" cap="flat" cmpd="sng" algn="ctr">
+                      <a:solidFill>
+                        <a:srgbClr val="DCE3EA"/>
+                      </a:solidFill>
+                      <a:prstDash val="solid"/>
+                      <a:round/>
+                      <a:headEnd type="none" w="med" len="med"/>
+                      <a:tailEnd type="none" w="med" len="med"/>
+                    </a:lnL>
+                    <a:lnR w="9525" cap="flat" cmpd="sng" algn="ctr">
+                      <a:solidFill>
+                        <a:srgbClr val="DCE3EA"/>
+                      </a:solidFill>
+                      <a:prstDash val="solid"/>
+                      <a:round/>
+                      <a:headEnd type="none" w="med" len="med"/>
+                      <a:tailEnd type="none" w="med" len="med"/>
+                    </a:lnR>
+                    <a:lnT w="9525" cap="flat" cmpd="sng" algn="ctr">
+                      <a:solidFill>
+                        <a:srgbClr val="DCE3EA"/>
+                      </a:solidFill>
+                      <a:prstDash val="solid"/>
+                      <a:round/>
+                      <a:headEnd type="none" w="med" len="med"/>
+                      <a:tailEnd type="none" w="med" len="med"/>
+                    </a:lnT>
+                    <a:lnB w="9525" cap="flat" cmpd="sng" algn="ctr">
+                      <a:solidFill>
+                        <a:srgbClr val="DCE3EA"/>
+                      </a:solidFill>
+                      <a:prstDash val="solid"/>
+                      <a:round/>
+                      <a:headEnd type="none" w="med" len="med"/>
+                      <a:tailEnd type="none" w="med" len="med"/>
+                    </a:lnB>
+                  </a:tcPr>
+                </a:tc>
+              </a:tr>
+              <a:tr h="384048">
+                <a:tc>
+                  <a:txBody>
+                    <a:bodyPr/>
+                    <a:lstStyle/>
+                    <a:p>
+                      <a:pPr indent="0" marL="0">
+                        <a:buNone/>
+                      </a:pPr>
+                      <a:r>
+                        <a:rPr lang="en-US" sz="1200" dirty="0">
+                          <a:solidFill>
+                            <a:srgbClr val="1B2B3A"/>
+                          </a:solidFill>
+                          <a:latin typeface="Calibri" pitchFamily="34" charset="0"/>
+                          <a:ea typeface="Calibri" pitchFamily="34" charset="-122"/>
+                          <a:cs typeface="Calibri" pitchFamily="34" charset="-120"/>
+                        </a:rPr>
+                        <a:t>Trả lời, trung vị</a:t>
+                      </a:r>
+                      <a:endParaRPr lang="en-US" sz="1200" dirty="0">
+                        <a:latin typeface="Calibri" charset="0"/>
+                        <a:ea typeface="Calibri" charset="0"/>
+                        <a:cs typeface="Calibri" charset="0"/>
+                      </a:endParaRPr>
+                    </a:p>
+                  </a:txBody>
+                  <a:tcPr marL="91440" marR="91440" marT="45720" marB="45720" anchor="ctr">
+                    <a:lnL w="9525" cap="flat" cmpd="sng" algn="ctr">
+                      <a:solidFill>
+                        <a:srgbClr val="DCE3EA"/>
+                      </a:solidFill>
+                      <a:prstDash val="solid"/>
+                      <a:round/>
+                      <a:headEnd type="none" w="med" len="med"/>
+                      <a:tailEnd type="none" w="med" len="med"/>
+                    </a:lnL>
+                    <a:lnR w="9525" cap="flat" cmpd="sng" algn="ctr">
+                      <a:solidFill>
+                        <a:srgbClr val="DCE3EA"/>
+                      </a:solidFill>
+                      <a:prstDash val="solid"/>
+                      <a:round/>
+                      <a:headEnd type="none" w="med" len="med"/>
+                      <a:tailEnd type="none" w="med" len="med"/>
+                    </a:lnR>
+                    <a:lnT w="9525" cap="flat" cmpd="sng" algn="ctr">
+                      <a:solidFill>
+                        <a:srgbClr val="DCE3EA"/>
+                      </a:solidFill>
+                      <a:prstDash val="solid"/>
+                      <a:round/>
+                      <a:headEnd type="none" w="med" len="med"/>
+                      <a:tailEnd type="none" w="med" len="med"/>
+                    </a:lnT>
+                    <a:lnB w="9525" cap="flat" cmpd="sng" algn="ctr">
+                      <a:solidFill>
+                        <a:srgbClr val="DCE3EA"/>
+                      </a:solidFill>
+                      <a:prstDash val="solid"/>
+                      <a:round/>
+                      <a:headEnd type="none" w="med" len="med"/>
+                      <a:tailEnd type="none" w="med" len="med"/>
+                    </a:lnB>
+                  </a:tcPr>
+                </a:tc>
+                <a:tc>
+                  <a:txBody>
+                    <a:bodyPr/>
+                    <a:lstStyle/>
+                    <a:p>
+                      <a:pPr algn="ctr" indent="0" marL="0">
+                        <a:buNone/>
+                      </a:pPr>
+                      <a:r>
+                        <a:rPr lang="en-US" sz="1200" dirty="0">
+                          <a:solidFill>
+                            <a:srgbClr val="1B2B3A"/>
+                          </a:solidFill>
+                          <a:latin typeface="Calibri" pitchFamily="34" charset="0"/>
+                          <a:ea typeface="Calibri" pitchFamily="34" charset="-122"/>
+                          <a:cs typeface="Calibri" pitchFamily="34" charset="-120"/>
+                        </a:rPr>
+                        <a:t>3,3 giây</a:t>
+                      </a:r>
+                      <a:endParaRPr lang="en-US" sz="1200" dirty="0">
+                        <a:latin typeface="Calibri" charset="0"/>
+                        <a:ea typeface="Calibri" charset="0"/>
+                        <a:cs typeface="Calibri" charset="0"/>
+                      </a:endParaRPr>
+                    </a:p>
+                  </a:txBody>
+                  <a:tcPr marL="91440" marR="91440" marT="45720" marB="45720" anchor="ctr">
+                    <a:lnL w="9525" cap="flat" cmpd="sng" algn="ctr">
+                      <a:solidFill>
+                        <a:srgbClr val="DCE3EA"/>
+                      </a:solidFill>
+                      <a:prstDash val="solid"/>
+                      <a:round/>
+                      <a:headEnd type="none" w="med" len="med"/>
+                      <a:tailEnd type="none" w="med" len="med"/>
+                    </a:lnL>
+                    <a:lnR w="9525" cap="flat" cmpd="sng" algn="ctr">
+                      <a:solidFill>
+                        <a:srgbClr val="DCE3EA"/>
+                      </a:solidFill>
+                      <a:prstDash val="solid"/>
+                      <a:round/>
+                      <a:headEnd type="none" w="med" len="med"/>
+                      <a:tailEnd type="none" w="med" len="med"/>
+                    </a:lnR>
+                    <a:lnT w="9525" cap="flat" cmpd="sng" algn="ctr">
+                      <a:solidFill>
+                        <a:srgbClr val="DCE3EA"/>
+                      </a:solidFill>
+                      <a:prstDash val="solid"/>
+                      <a:round/>
+                      <a:headEnd type="none" w="med" len="med"/>
+                      <a:tailEnd type="none" w="med" len="med"/>
+                    </a:lnT>
+                    <a:lnB w="9525" cap="flat" cmpd="sng" algn="ctr">
+                      <a:solidFill>
+                        <a:srgbClr val="DCE3EA"/>
+                      </a:solidFill>
+                      <a:prstDash val="solid"/>
+                      <a:round/>
+                      <a:headEnd type="none" w="med" len="med"/>
+                      <a:tailEnd type="none" w="med" len="med"/>
+                    </a:lnB>
+                  </a:tcPr>
+                </a:tc>
+                <a:tc>
+                  <a:txBody>
+                    <a:bodyPr/>
+                    <a:lstStyle/>
+                    <a:p>
+                      <a:pPr algn="ctr" indent="0" marL="0">
+                        <a:buNone/>
+                      </a:pPr>
+                      <a:r>
+                        <a:rPr lang="en-US" sz="1200" dirty="0">
+                          <a:solidFill>
+                            <a:srgbClr val="1B2B3A"/>
+                          </a:solidFill>
+                          <a:latin typeface="Calibri" pitchFamily="34" charset="0"/>
+                          <a:ea typeface="Calibri" pitchFamily="34" charset="-122"/>
+                          <a:cs typeface="Calibri" pitchFamily="34" charset="-120"/>
+                        </a:rPr>
+                        <a:t>33,2 giây</a:t>
+                      </a:r>
+                      <a:endParaRPr lang="en-US" sz="1200" dirty="0">
+                        <a:latin typeface="Calibri" charset="0"/>
+                        <a:ea typeface="Calibri" charset="0"/>
+                        <a:cs typeface="Calibri" charset="0"/>
+                      </a:endParaRPr>
+                    </a:p>
+                  </a:txBody>
+                  <a:tcPr marL="91440" marR="91440" marT="45720" marB="45720" anchor="ctr">
+                    <a:lnL w="9525" cap="flat" cmpd="sng" algn="ctr">
+                      <a:solidFill>
+                        <a:srgbClr val="DCE3EA"/>
+                      </a:solidFill>
+                      <a:prstDash val="solid"/>
+                      <a:round/>
+                      <a:headEnd type="none" w="med" len="med"/>
+                      <a:tailEnd type="none" w="med" len="med"/>
+                    </a:lnL>
+                    <a:lnR w="9525" cap="flat" cmpd="sng" algn="ctr">
+                      <a:solidFill>
+                        <a:srgbClr val="DCE3EA"/>
+                      </a:solidFill>
+                      <a:prstDash val="solid"/>
+                      <a:round/>
+                      <a:headEnd type="none" w="med" len="med"/>
+                      <a:tailEnd type="none" w="med" len="med"/>
+                    </a:lnR>
+                    <a:lnT w="9525" cap="flat" cmpd="sng" algn="ctr">
+                      <a:solidFill>
+                        <a:srgbClr val="DCE3EA"/>
+                      </a:solidFill>
+                      <a:prstDash val="solid"/>
+                      <a:round/>
+                      <a:headEnd type="none" w="med" len="med"/>
+                      <a:tailEnd type="none" w="med" len="med"/>
+                    </a:lnT>
+                    <a:lnB w="9525" cap="flat" cmpd="sng" algn="ctr">
+                      <a:solidFill>
+                        <a:srgbClr val="DCE3EA"/>
+                      </a:solidFill>
+                      <a:prstDash val="solid"/>
+                      <a:round/>
+                      <a:headEnd type="none" w="med" len="med"/>
+                      <a:tailEnd type="none" w="med" len="med"/>
+                    </a:lnB>
+                  </a:tcPr>
+                </a:tc>
+              </a:tr>
+              <a:tr h="384048">
+                <a:tc>
+                  <a:txBody>
+                    <a:bodyPr/>
+                    <a:lstStyle/>
+                    <a:p>
+                      <a:pPr indent="0" marL="0">
+                        <a:buNone/>
+                      </a:pPr>
+                      <a:r>
+                        <a:rPr lang="en-US" sz="1200" dirty="0">
+                          <a:solidFill>
+                            <a:srgbClr val="1B2B3A"/>
+                          </a:solidFill>
+                          <a:latin typeface="Calibri" pitchFamily="34" charset="0"/>
+                          <a:ea typeface="Calibri" pitchFamily="34" charset="-122"/>
+                          <a:cs typeface="Calibri" pitchFamily="34" charset="-120"/>
+                        </a:rPr>
+                        <a:t>Lời gọi LLM khi dựng</a:t>
+                      </a:r>
+                      <a:endParaRPr lang="en-US" sz="1200" dirty="0">
+                        <a:latin typeface="Calibri" charset="0"/>
+                        <a:ea typeface="Calibri" charset="0"/>
+                        <a:cs typeface="Calibri" charset="0"/>
+                      </a:endParaRPr>
+                    </a:p>
+                  </a:txBody>
+                  <a:tcPr marL="91440" marR="91440" marT="45720" marB="45720" anchor="ctr">
+                    <a:lnL w="9525" cap="flat" cmpd="sng" algn="ctr">
+                      <a:solidFill>
+                        <a:srgbClr val="DCE3EA"/>
+                      </a:solidFill>
+                      <a:prstDash val="solid"/>
+                      <a:round/>
+                      <a:headEnd type="none" w="med" len="med"/>
+                      <a:tailEnd type="none" w="med" len="med"/>
+                    </a:lnL>
+                    <a:lnR w="9525" cap="flat" cmpd="sng" algn="ctr">
+                      <a:solidFill>
+                        <a:srgbClr val="DCE3EA"/>
+                      </a:solidFill>
+                      <a:prstDash val="solid"/>
+                      <a:round/>
+                      <a:headEnd type="none" w="med" len="med"/>
+                      <a:tailEnd type="none" w="med" len="med"/>
+                    </a:lnR>
+                    <a:lnT w="9525" cap="flat" cmpd="sng" algn="ctr">
+                      <a:solidFill>
+                        <a:srgbClr val="DCE3EA"/>
+                      </a:solidFill>
+                      <a:prstDash val="solid"/>
+                      <a:round/>
+                      <a:headEnd type="none" w="med" len="med"/>
+                      <a:tailEnd type="none" w="med" len="med"/>
+                    </a:lnT>
+                    <a:lnB w="9525" cap="flat" cmpd="sng" algn="ctr">
+                      <a:solidFill>
+                        <a:srgbClr val="DCE3EA"/>
+                      </a:solidFill>
+                      <a:prstDash val="solid"/>
+                      <a:round/>
+                      <a:headEnd type="none" w="med" len="med"/>
+                      <a:tailEnd type="none" w="med" len="med"/>
+                    </a:lnB>
+                  </a:tcPr>
+                </a:tc>
+                <a:tc>
+                  <a:txBody>
+                    <a:bodyPr/>
+                    <a:lstStyle/>
+                    <a:p>
+                      <a:pPr algn="ctr" indent="0" marL="0">
+                        <a:buNone/>
+                      </a:pPr>
+                      <a:r>
+                        <a:rPr lang="en-US" sz="1200" dirty="0">
+                          <a:solidFill>
+                            <a:srgbClr val="5B6B7A"/>
+                          </a:solidFill>
+                          <a:latin typeface="Calibri" pitchFamily="34" charset="0"/>
+                          <a:ea typeface="Calibri" pitchFamily="34" charset="-122"/>
+                          <a:cs typeface="Calibri" pitchFamily="34" charset="-120"/>
+                        </a:rPr>
+                        <a:t>chưa ghi</a:t>
+                      </a:r>
+                      <a:endParaRPr lang="en-US" sz="1200" dirty="0">
+                        <a:latin typeface="Calibri" charset="0"/>
+                        <a:ea typeface="Calibri" charset="0"/>
+                        <a:cs typeface="Calibri" charset="0"/>
+                      </a:endParaRPr>
+                    </a:p>
+                  </a:txBody>
+                  <a:tcPr marL="91440" marR="91440" marT="45720" marB="45720" anchor="ctr">
+                    <a:lnL w="9525" cap="flat" cmpd="sng" algn="ctr">
+                      <a:solidFill>
+                        <a:srgbClr val="DCE3EA"/>
+                      </a:solidFill>
+                      <a:prstDash val="solid"/>
+                      <a:round/>
+                      <a:headEnd type="none" w="med" len="med"/>
+                      <a:tailEnd type="none" w="med" len="med"/>
+                    </a:lnL>
+                    <a:lnR w="9525" cap="flat" cmpd="sng" algn="ctr">
+                      <a:solidFill>
+                        <a:srgbClr val="DCE3EA"/>
+                      </a:solidFill>
+                      <a:prstDash val="solid"/>
+                      <a:round/>
+                      <a:headEnd type="none" w="med" len="med"/>
+                      <a:tailEnd type="none" w="med" len="med"/>
+                    </a:lnR>
+                    <a:lnT w="9525" cap="flat" cmpd="sng" algn="ctr">
+                      <a:solidFill>
+                        <a:srgbClr val="DCE3EA"/>
+                      </a:solidFill>
+                      <a:prstDash val="solid"/>
+                      <a:round/>
+                      <a:headEnd type="none" w="med" len="med"/>
+                      <a:tailEnd type="none" w="med" len="med"/>
+                    </a:lnT>
+                    <a:lnB w="9525" cap="flat" cmpd="sng" algn="ctr">
+                      <a:solidFill>
+                        <a:srgbClr val="DCE3EA"/>
+                      </a:solidFill>
+                      <a:prstDash val="solid"/>
+                      <a:round/>
+                      <a:headEnd type="none" w="med" len="med"/>
+                      <a:tailEnd type="none" w="med" len="med"/>
+                    </a:lnB>
+                  </a:tcPr>
+                </a:tc>
+                <a:tc>
+                  <a:txBody>
+                    <a:bodyPr/>
+                    <a:lstStyle/>
+                    <a:p>
+                      <a:pPr algn="ctr" indent="0" marL="0">
+                        <a:buNone/>
+                      </a:pPr>
+                      <a:r>
+                        <a:rPr lang="en-US" sz="1200" dirty="0">
+                          <a:solidFill>
+                            <a:srgbClr val="1B2B3A"/>
+                          </a:solidFill>
+                          <a:latin typeface="Calibri" pitchFamily="34" charset="0"/>
+                          <a:ea typeface="Calibri" pitchFamily="34" charset="-122"/>
+                          <a:cs typeface="Calibri" pitchFamily="34" charset="-120"/>
+                        </a:rPr>
+                        <a:t>22,4</a:t>
+                      </a:r>
+                      <a:endParaRPr lang="en-US" sz="1200" dirty="0">
+                        <a:latin typeface="Calibri" charset="0"/>
+                        <a:ea typeface="Calibri" charset="0"/>
+                        <a:cs typeface="Calibri" charset="0"/>
+                      </a:endParaRPr>
+                    </a:p>
+                  </a:txBody>
+                  <a:tcPr marL="91440" marR="91440" marT="45720" marB="45720" anchor="ctr">
+                    <a:lnL w="9525" cap="flat" cmpd="sng" algn="ctr">
+                      <a:solidFill>
+                        <a:srgbClr val="DCE3EA"/>
+                      </a:solidFill>
+                      <a:prstDash val="solid"/>
+                      <a:round/>
+                      <a:headEnd type="none" w="med" len="med"/>
+                      <a:tailEnd type="none" w="med" len="med"/>
+                    </a:lnL>
+                    <a:lnR w="9525" cap="flat" cmpd="sng" algn="ctr">
+                      <a:solidFill>
+                        <a:srgbClr val="DCE3EA"/>
+                      </a:solidFill>
+                      <a:prstDash val="solid"/>
+                      <a:round/>
+                      <a:headEnd type="none" w="med" len="med"/>
+                      <a:tailEnd type="none" w="med" len="med"/>
+                    </a:lnR>
+                    <a:lnT w="9525" cap="flat" cmpd="sng" algn="ctr">
+                      <a:solidFill>
+                        <a:srgbClr val="DCE3EA"/>
+                      </a:solidFill>
+                      <a:prstDash val="solid"/>
+                      <a:round/>
+                      <a:headEnd type="none" w="med" len="med"/>
+                      <a:tailEnd type="none" w="med" len="med"/>
+                    </a:lnT>
+                    <a:lnB w="9525" cap="flat" cmpd="sng" algn="ctr">
+                      <a:solidFill>
+                        <a:srgbClr val="DCE3EA"/>
+                      </a:solidFill>
+                      <a:prstDash val="solid"/>
+                      <a:round/>
+                      <a:headEnd type="none" w="med" len="med"/>
+                      <a:tailEnd type="none" w="med" len="med"/>
+                    </a:lnB>
+                  </a:tcPr>
+                </a:tc>
+              </a:tr>
+              <a:tr h="384048">
+                <a:tc>
+                  <a:txBody>
+                    <a:bodyPr/>
+                    <a:lstStyle/>
+                    <a:p>
+                      <a:pPr indent="0" marL="0">
+                        <a:buNone/>
+                      </a:pPr>
+                      <a:r>
+                        <a:rPr lang="en-US" sz="1200" dirty="0">
+                          <a:solidFill>
+                            <a:srgbClr val="1B2B3A"/>
+                          </a:solidFill>
+                          <a:latin typeface="Calibri" pitchFamily="34" charset="0"/>
+                          <a:ea typeface="Calibri" pitchFamily="34" charset="-122"/>
+                          <a:cs typeface="Calibri" pitchFamily="34" charset="-120"/>
+                        </a:rPr>
+                        <a:t>Token khi dựng</a:t>
+                      </a:r>
+                      <a:endParaRPr lang="en-US" sz="1200" dirty="0">
+                        <a:latin typeface="Calibri" charset="0"/>
+                        <a:ea typeface="Calibri" charset="0"/>
+                        <a:cs typeface="Calibri" charset="0"/>
+                      </a:endParaRPr>
+                    </a:p>
+                  </a:txBody>
+                  <a:tcPr marL="91440" marR="91440" marT="45720" marB="45720" anchor="ctr">
+                    <a:lnL w="9525" cap="flat" cmpd="sng" algn="ctr">
+                      <a:solidFill>
+                        <a:srgbClr val="DCE3EA"/>
+                      </a:solidFill>
+                      <a:prstDash val="solid"/>
+                      <a:round/>
+                      <a:headEnd type="none" w="med" len="med"/>
+                      <a:tailEnd type="none" w="med" len="med"/>
+                    </a:lnL>
+                    <a:lnR w="9525" cap="flat" cmpd="sng" algn="ctr">
+                      <a:solidFill>
+                        <a:srgbClr val="DCE3EA"/>
+                      </a:solidFill>
+                      <a:prstDash val="solid"/>
+                      <a:round/>
+                      <a:headEnd type="none" w="med" len="med"/>
+                      <a:tailEnd type="none" w="med" len="med"/>
+                    </a:lnR>
+                    <a:lnT w="9525" cap="flat" cmpd="sng" algn="ctr">
+                      <a:solidFill>
+                        <a:srgbClr val="DCE3EA"/>
+                      </a:solidFill>
+                      <a:prstDash val="solid"/>
+                      <a:round/>
+                      <a:headEnd type="none" w="med" len="med"/>
+                      <a:tailEnd type="none" w="med" len="med"/>
+                    </a:lnT>
+                    <a:lnB w="9525" cap="flat" cmpd="sng" algn="ctr">
+                      <a:solidFill>
+                        <a:srgbClr val="DCE3EA"/>
+                      </a:solidFill>
+                      <a:prstDash val="solid"/>
+                      <a:round/>
+                      <a:headEnd type="none" w="med" len="med"/>
+                      <a:tailEnd type="none" w="med" len="med"/>
+                    </a:lnB>
+                  </a:tcPr>
+                </a:tc>
+                <a:tc>
+                  <a:txBody>
+                    <a:bodyPr/>
+                    <a:lstStyle/>
+                    <a:p>
+                      <a:pPr algn="ctr" indent="0" marL="0">
+                        <a:buNone/>
+                      </a:pPr>
+                      <a:r>
+                        <a:rPr lang="en-US" sz="1200" dirty="0">
+                          <a:solidFill>
+                            <a:srgbClr val="5B6B7A"/>
+                          </a:solidFill>
+                          <a:latin typeface="Calibri" pitchFamily="34" charset="0"/>
+                          <a:ea typeface="Calibri" pitchFamily="34" charset="-122"/>
+                          <a:cs typeface="Calibri" pitchFamily="34" charset="-120"/>
+                        </a:rPr>
+                        <a:t>chưa ghi</a:t>
+                      </a:r>
+                      <a:endParaRPr lang="en-US" sz="1200" dirty="0">
+                        <a:latin typeface="Calibri" charset="0"/>
+                        <a:ea typeface="Calibri" charset="0"/>
+                        <a:cs typeface="Calibri" charset="0"/>
+                      </a:endParaRPr>
+                    </a:p>
+                  </a:txBody>
+                  <a:tcPr marL="91440" marR="91440" marT="45720" marB="45720" anchor="ctr">
+                    <a:lnL w="9525" cap="flat" cmpd="sng" algn="ctr">
+                      <a:solidFill>
+                        <a:srgbClr val="DCE3EA"/>
+                      </a:solidFill>
+                      <a:prstDash val="solid"/>
+                      <a:round/>
+                      <a:headEnd type="none" w="med" len="med"/>
+                      <a:tailEnd type="none" w="med" len="med"/>
+                    </a:lnL>
+                    <a:lnR w="9525" cap="flat" cmpd="sng" algn="ctr">
+                      <a:solidFill>
+                        <a:srgbClr val="DCE3EA"/>
+                      </a:solidFill>
+                      <a:prstDash val="solid"/>
+                      <a:round/>
+                      <a:headEnd type="none" w="med" len="med"/>
+                      <a:tailEnd type="none" w="med" len="med"/>
+                    </a:lnR>
+                    <a:lnT w="9525" cap="flat" cmpd="sng" algn="ctr">
+                      <a:solidFill>
+                        <a:srgbClr val="DCE3EA"/>
+                      </a:solidFill>
+                      <a:prstDash val="solid"/>
+                      <a:round/>
+                      <a:headEnd type="none" w="med" len="med"/>
+                      <a:tailEnd type="none" w="med" len="med"/>
+                    </a:lnT>
+                    <a:lnB w="9525" cap="flat" cmpd="sng" algn="ctr">
+                      <a:solidFill>
+                        <a:srgbClr val="DCE3EA"/>
+                      </a:solidFill>
+                      <a:prstDash val="solid"/>
+                      <a:round/>
+                      <a:headEnd type="none" w="med" len="med"/>
+                      <a:tailEnd type="none" w="med" len="med"/>
+                    </a:lnB>
+                  </a:tcPr>
+                </a:tc>
+                <a:tc>
+                  <a:txBody>
+                    <a:bodyPr/>
+                    <a:lstStyle/>
+                    <a:p>
+                      <a:pPr algn="ctr" indent="0" marL="0">
+                        <a:buNone/>
+                      </a:pPr>
+                      <a:r>
+                        <a:rPr lang="en-US" sz="1200" dirty="0">
+                          <a:solidFill>
+                            <a:srgbClr val="1B2B3A"/>
+                          </a:solidFill>
+                          <a:latin typeface="Calibri" pitchFamily="34" charset="0"/>
+                          <a:ea typeface="Calibri" pitchFamily="34" charset="-122"/>
+                          <a:cs typeface="Calibri" pitchFamily="34" charset="-120"/>
+                        </a:rPr>
+                        <a:t>89.172 (88,1% tổng)</a:t>
+                      </a:r>
+                      <a:endParaRPr lang="en-US" sz="1200" dirty="0">
+                        <a:latin typeface="Calibri" charset="0"/>
+                        <a:ea typeface="Calibri" charset="0"/>
+                        <a:cs typeface="Calibri" charset="0"/>
+                      </a:endParaRPr>
+                    </a:p>
+                  </a:txBody>
+                  <a:tcPr marL="91440" marR="91440" marT="45720" marB="45720" anchor="ctr">
+                    <a:lnL w="9525" cap="flat" cmpd="sng" algn="ctr">
+                      <a:solidFill>
+                        <a:srgbClr val="DCE3EA"/>
+                      </a:solidFill>
+                      <a:prstDash val="solid"/>
+                      <a:round/>
+                      <a:headEnd type="none" w="med" len="med"/>
+                      <a:tailEnd type="none" w="med" len="med"/>
+                    </a:lnL>
+                    <a:lnR w="9525" cap="flat" cmpd="sng" algn="ctr">
+                      <a:solidFill>
+                        <a:srgbClr val="DCE3EA"/>
+                      </a:solidFill>
+                      <a:prstDash val="solid"/>
+                      <a:round/>
+                      <a:headEnd type="none" w="med" len="med"/>
+                      <a:tailEnd type="none" w="med" len="med"/>
+                    </a:lnR>
+                    <a:lnT w="9525" cap="flat" cmpd="sng" algn="ctr">
+                      <a:solidFill>
+                        <a:srgbClr val="DCE3EA"/>
+                      </a:solidFill>
+                      <a:prstDash val="solid"/>
+                      <a:round/>
+                      <a:headEnd type="none" w="med" len="med"/>
+                      <a:tailEnd type="none" w="med" len="med"/>
+                    </a:lnT>
+                    <a:lnB w="9525" cap="flat" cmpd="sng" algn="ctr">
+                      <a:solidFill>
+                        <a:srgbClr val="DCE3EA"/>
+                      </a:solidFill>
+                      <a:prstDash val="solid"/>
+                      <a:round/>
+                      <a:headEnd type="none" w="med" len="med"/>
+                      <a:tailEnd type="none" w="med" len="med"/>
+                    </a:lnB>
+                  </a:tcPr>
+                </a:tc>
+              </a:tr>
+              <a:tr h="384048">
+                <a:tc>
+                  <a:txBody>
+                    <a:bodyPr/>
+                    <a:lstStyle/>
+                    <a:p>
+                      <a:pPr indent="0" marL="0">
+                        <a:buNone/>
+                      </a:pPr>
+                      <a:r>
+                        <a:rPr lang="en-US" sz="1200" dirty="0">
+                          <a:solidFill>
+                            <a:srgbClr val="1B2B3A"/>
+                          </a:solidFill>
+                          <a:latin typeface="Calibri" pitchFamily="34" charset="0"/>
+                          <a:ea typeface="Calibri" pitchFamily="34" charset="-122"/>
+                          <a:cs typeface="Calibri" pitchFamily="34" charset="-120"/>
+                        </a:rPr>
+                        <a:t>Token khi trả lời</a:t>
+                      </a:r>
+                      <a:endParaRPr lang="en-US" sz="1200" dirty="0">
+                        <a:latin typeface="Calibri" charset="0"/>
+                        <a:ea typeface="Calibri" charset="0"/>
+                        <a:cs typeface="Calibri" charset="0"/>
+                      </a:endParaRPr>
+                    </a:p>
+                  </a:txBody>
+                  <a:tcPr marL="91440" marR="91440" marT="45720" marB="45720" anchor="ctr">
+                    <a:lnL w="9525" cap="flat" cmpd="sng" algn="ctr">
+                      <a:solidFill>
+                        <a:srgbClr val="DCE3EA"/>
+                      </a:solidFill>
+                      <a:prstDash val="solid"/>
+                      <a:round/>
+                      <a:headEnd type="none" w="med" len="med"/>
+                      <a:tailEnd type="none" w="med" len="med"/>
+                    </a:lnL>
+                    <a:lnR w="9525" cap="flat" cmpd="sng" algn="ctr">
+                      <a:solidFill>
+                        <a:srgbClr val="DCE3EA"/>
+                      </a:solidFill>
+                      <a:prstDash val="solid"/>
+                      <a:round/>
+                      <a:headEnd type="none" w="med" len="med"/>
+                      <a:tailEnd type="none" w="med" len="med"/>
+                    </a:lnR>
+                    <a:lnT w="9525" cap="flat" cmpd="sng" algn="ctr">
+                      <a:solidFill>
+                        <a:srgbClr val="DCE3EA"/>
+                      </a:solidFill>
+                      <a:prstDash val="solid"/>
+                      <a:round/>
+                      <a:headEnd type="none" w="med" len="med"/>
+                      <a:tailEnd type="none" w="med" len="med"/>
+                    </a:lnT>
+                    <a:lnB w="9525" cap="flat" cmpd="sng" algn="ctr">
+                      <a:solidFill>
+                        <a:srgbClr val="DCE3EA"/>
+                      </a:solidFill>
+                      <a:prstDash val="solid"/>
+                      <a:round/>
+                      <a:headEnd type="none" w="med" len="med"/>
+                      <a:tailEnd type="none" w="med" len="med"/>
+                    </a:lnB>
+                  </a:tcPr>
+                </a:tc>
+                <a:tc>
+                  <a:txBody>
+                    <a:bodyPr/>
+                    <a:lstStyle/>
+                    <a:p>
+                      <a:pPr algn="ctr" indent="0" marL="0">
+                        <a:buNone/>
+                      </a:pPr>
+                      <a:r>
+                        <a:rPr lang="en-US" sz="1200" dirty="0">
+                          <a:solidFill>
+                            <a:srgbClr val="5B6B7A"/>
+                          </a:solidFill>
+                          <a:latin typeface="Calibri" pitchFamily="34" charset="0"/>
+                          <a:ea typeface="Calibri" pitchFamily="34" charset="-122"/>
+                          <a:cs typeface="Calibri" pitchFamily="34" charset="-120"/>
+                        </a:rPr>
+                        <a:t>chưa ghi</a:t>
+                      </a:r>
+                      <a:endParaRPr lang="en-US" sz="1200" dirty="0">
+                        <a:latin typeface="Calibri" charset="0"/>
+                        <a:ea typeface="Calibri" charset="0"/>
+                        <a:cs typeface="Calibri" charset="0"/>
+                      </a:endParaRPr>
+                    </a:p>
+                  </a:txBody>
+                  <a:tcPr marL="91440" marR="91440" marT="45720" marB="45720" anchor="ctr">
+                    <a:lnL w="9525" cap="flat" cmpd="sng" algn="ctr">
+                      <a:solidFill>
+                        <a:srgbClr val="DCE3EA"/>
+                      </a:solidFill>
+                      <a:prstDash val="solid"/>
+                      <a:round/>
+                      <a:headEnd type="none" w="med" len="med"/>
+                      <a:tailEnd type="none" w="med" len="med"/>
+                    </a:lnL>
+                    <a:lnR w="9525" cap="flat" cmpd="sng" algn="ctr">
+                      <a:solidFill>
+                        <a:srgbClr val="DCE3EA"/>
+                      </a:solidFill>
+                      <a:prstDash val="solid"/>
+                      <a:round/>
+                      <a:headEnd type="none" w="med" len="med"/>
+                      <a:tailEnd type="none" w="med" len="med"/>
+                    </a:lnR>
+                    <a:lnT w="9525" cap="flat" cmpd="sng" algn="ctr">
+                      <a:solidFill>
+                        <a:srgbClr val="DCE3EA"/>
+                      </a:solidFill>
+                      <a:prstDash val="solid"/>
+                      <a:round/>
+                      <a:headEnd type="none" w="med" len="med"/>
+                      <a:tailEnd type="none" w="med" len="med"/>
+                    </a:lnT>
+                    <a:lnB w="9525" cap="flat" cmpd="sng" algn="ctr">
+                      <a:solidFill>
+                        <a:srgbClr val="DCE3EA"/>
+                      </a:solidFill>
+                      <a:prstDash val="solid"/>
+                      <a:round/>
+                      <a:headEnd type="none" w="med" len="med"/>
+                      <a:tailEnd type="none" w="med" len="med"/>
+                    </a:lnB>
+                  </a:tcPr>
+                </a:tc>
+                <a:tc>
+                  <a:txBody>
+                    <a:bodyPr/>
+                    <a:lstStyle/>
+                    <a:p>
+                      <a:pPr algn="ctr" indent="0" marL="0">
+                        <a:buNone/>
+                      </a:pPr>
+                      <a:r>
+                        <a:rPr lang="en-US" sz="1200" dirty="0">
+                          <a:solidFill>
+                            <a:srgbClr val="1B2B3A"/>
+                          </a:solidFill>
+                          <a:latin typeface="Calibri" pitchFamily="34" charset="0"/>
+                          <a:ea typeface="Calibri" pitchFamily="34" charset="-122"/>
+                          <a:cs typeface="Calibri" pitchFamily="34" charset="-120"/>
+                        </a:rPr>
+                        <a:t>12.036</a:t>
+                      </a:r>
+                      <a:endParaRPr lang="en-US" sz="1200" dirty="0">
+                        <a:latin typeface="Calibri" charset="0"/>
+                        <a:ea typeface="Calibri" charset="0"/>
+                        <a:cs typeface="Calibri" charset="0"/>
+                      </a:endParaRPr>
+                    </a:p>
+                  </a:txBody>
+                  <a:tcPr marL="91440" marR="91440" marT="45720" marB="45720" anchor="ctr">
+                    <a:lnL w="9525" cap="flat" cmpd="sng" algn="ctr">
+                      <a:solidFill>
+                        <a:srgbClr val="DCE3EA"/>
+                      </a:solidFill>
+                      <a:prstDash val="solid"/>
+                      <a:round/>
+                      <a:headEnd type="none" w="med" len="med"/>
+                      <a:tailEnd type="none" w="med" len="med"/>
+                    </a:lnL>
+                    <a:lnR w="9525" cap="flat" cmpd="sng" algn="ctr">
+                      <a:solidFill>
+                        <a:srgbClr val="DCE3EA"/>
+                      </a:solidFill>
+                      <a:prstDash val="solid"/>
+                      <a:round/>
+                      <a:headEnd type="none" w="med" len="med"/>
+                      <a:tailEnd type="none" w="med" len="med"/>
+                    </a:lnR>
+                    <a:lnT w="9525" cap="flat" cmpd="sng" algn="ctr">
+                      <a:solidFill>
+                        <a:srgbClr val="DCE3EA"/>
+                      </a:solidFill>
+                      <a:prstDash val="solid"/>
+                      <a:round/>
+                      <a:headEnd type="none" w="med" len="med"/>
+                      <a:tailEnd type="none" w="med" len="med"/>
+                    </a:lnT>
+                    <a:lnB w="9525" cap="flat" cmpd="sng" algn="ctr">
+                      <a:solidFill>
+                        <a:srgbClr val="DCE3EA"/>
+                      </a:solidFill>
+                      <a:prstDash val="solid"/>
+                      <a:round/>
+                      <a:headEnd type="none" w="med" len="med"/>
+                      <a:tailEnd type="none" w="med" len="med"/>
+                    </a:lnB>
+                  </a:tcPr>
+                </a:tc>
+              </a:tr>
+            </a:tbl>
+          </a:graphicData>
+        </a:graphic>
+      </p:graphicFrame>
+      <p:sp>
+        <p:nvSpPr>
+          <p:cNvPr id="6" name="Text 2"/>
+          <p:cNvSpPr txBox="1"/>
+          <p:nvPr/>
+        </p:nvSpPr>
+        <p:spPr>
+          <a:xfrm>
+            <a:off x="457200" y="3977640"/>
+            <a:ext cx="8229600" cy="1005840"/>
+          </a:xfrm>
+          <a:prstGeom prst="rect">
+            <a:avLst/>
+          </a:prstGeom>
+          <a:noFill/>
+          <a:ln/>
+        </p:spPr>
+        <p:txBody>
+          <a:bodyPr wrap="square" lIns="0" tIns="0" rIns="0" bIns="0" rtlCol="0" anchor="t"/>
+          <a:lstStyle/>
+          <a:p>
+            <a:pPr marL="342900" indent="-342900">
+              <a:spcAft>
+                <a:spcPts val="500"/>
+              </a:spcAft>
+              <a:buSzPct val="100000"/>
+              <a:buChar char="•"/>
+            </a:pPr>
+            <a:r>
+              <a:rPr lang="en-US" sz="1050" dirty="0">
+                <a:solidFill>
+                  <a:srgbClr val="1B2B3A"/>
+                </a:solidFill>
+                <a:latin typeface="Calibri" pitchFamily="34" charset="0"/>
+                <a:ea typeface="Calibri" pitchFamily="34" charset="-122"/>
+                <a:cs typeface="Calibri" pitchFamily="34" charset="-120"/>
+              </a:rPr>
+              <a:t>Thời gian đo khi chạy song song khác nhau (LightMem 5–9 luồng, APEX-MEM 2–8 luồng) và bị hạn mức tài khoản làm chậm: chỉ để tham khảo, không dùng để nói hệ nào nhanh hơn.</a:t>
+            </a:r>
+            <a:endParaRPr lang="en-US" sz="1050" dirty="0"/>
+          </a:p>
+          <a:p>
+            <a:pPr marL="342900" indent="-342900">
+              <a:spcAft>
+                <a:spcPts val="500"/>
+              </a:spcAft>
+              <a:buSzPct val="100000"/>
+              <a:buChar char="•"/>
+            </a:pPr>
+            <a:r>
+              <a:rPr lang="en-US" sz="1050" dirty="0">
+                <a:solidFill>
+                  <a:srgbClr val="1B2B3A"/>
+                </a:solidFill>
+                <a:latin typeface="Calibri" pitchFamily="34" charset="0"/>
+                <a:ea typeface="Calibri" pitchFamily="34" charset="-122"/>
+                <a:cs typeface="Calibri" pitchFamily="34" charset="-120"/>
+              </a:rPr>
+              <a:t>LightMem chưa có số token: script không ghi lại, và 9router chèn thêm khoảng 2.500 token vào mỗi lời gọi nên số đếm qua router bị phình.</a:t>
+            </a:r>
+            <a:endParaRPr lang="en-US" sz="1050" dirty="0"/>
+          </a:p>
+          <a:p>
+            <a:pPr marL="342900" indent="-342900">
+              <a:spcAft>
+                <a:spcPts val="500"/>
+              </a:spcAft>
+              <a:buSzPct val="100000"/>
+              <a:buChar char="•"/>
+            </a:pPr>
+            <a:r>
+              <a:rPr lang="en-US" sz="1050" dirty="0">
+                <a:solidFill>
+                  <a:srgbClr val="1B2B3A"/>
+                </a:solidFill>
+                <a:latin typeface="Calibri" pitchFamily="34" charset="0"/>
+                <a:ea typeface="Calibri" pitchFamily="34" charset="-122"/>
+                <a:cs typeface="Calibri" pitchFamily="34" charset="-120"/>
+              </a:rPr>
+              <a:t>APEX-MEM phục vụ đúng model: 3.998 lời gọi luna và 150 lời gọi terra (chấm), không có model nào bị đổi lén.</a:t>
+            </a:r>
+            <a:endParaRPr lang="en-US" sz="1050" dirty="0"/>
+          </a:p>
+        </p:txBody>
+      </p:sp>
+    </p:spTree>
+  </p:cSld>
+  <p:clrMapOvr>
+    <a:masterClrMapping/>
+  </p:clrMapOvr>
+</p:sld>
+</file>
+
+<file path=ppt/slides/slide11.xml><?xml version="1.0" encoding="utf-8"?>
+<p:sld xmlns:a="http://schemas.openxmlformats.org/drawingml/2006/main" xmlns:r="http://schemas.openxmlformats.org/officeDocument/2006/relationships" xmlns:p="http://schemas.openxmlformats.org/presentationml/2006/main">
+  <p:cSld name="Slide 11">
+    <p:bg>
+      <p:bgPr>
+        <a:solidFill>
+          <a:srgbClr val="F7F9FB"/>
+        </a:solidFill>
+      </p:bgPr>
+    </p:bg>
+    <p:spTree>
+      <p:nvGrpSpPr>
+        <p:cNvPr id="1" name=""/>
+        <p:cNvGrpSpPr/>
+        <p:nvPr/>
+      </p:nvGrpSpPr>
+      <p:grpSpPr>
+        <a:xfrm>
+          <a:off x="0" y="0"/>
+          <a:ext cx="0" cy="0"/>
+          <a:chOff x="0" y="0"/>
+          <a:chExt cx="0" cy="0"/>
+        </a:xfrm>
+      </p:grpSpPr>
+      <p:sp>
+        <p:nvSpPr>
+          <p:cNvPr id="2" name="Text 0"/>
+          <p:cNvSpPr txBox="1"/>
+          <p:nvPr/>
+        </p:nvSpPr>
+        <p:spPr>
+          <a:xfrm>
+            <a:off x="457200" y="274320"/>
+            <a:ext cx="8229600" cy="274320"/>
+          </a:xfrm>
+          <a:prstGeom prst="rect">
+            <a:avLst/>
+          </a:prstGeom>
+          <a:noFill/>
+          <a:ln/>
+        </p:spPr>
+        <p:txBody>
+          <a:bodyPr wrap="square" lIns="0" tIns="0" rIns="0" bIns="0" rtlCol="0" anchor="ctr"/>
+          <a:lstStyle/>
+          <a:p>
+            <a:pPr indent="0" marL="0">
+              <a:buNone/>
+            </a:pPr>
+            <a:r>
+              <a:rPr lang="en-US" sz="1100" b="1" dirty="0">
+                <a:solidFill>
+                  <a:srgbClr val="1F6F8B"/>
+                </a:solidFill>
+                <a:latin typeface="Calibri" pitchFamily="34" charset="0"/>
+                <a:ea typeface="Calibri" pitchFamily="34" charset="-122"/>
+                <a:cs typeface="Calibri" pitchFamily="34" charset="-120"/>
+              </a:rPr>
               <a:t>SỰ CỐ KỸ THUẬT</a:t>
             </a:r>
             <a:endParaRPr lang="en-US" sz="1100" dirty="0"/>
@@ -2671,48 +4362,9 @@
           </a:p>
         </p:txBody>
       </p:sp>
-      <p:sp>
-        <p:nvSpPr>
-          <p:cNvPr id="4" name="Text 2"/>
-          <p:cNvSpPr txBox="1"/>
-          <p:nvPr/>
-        </p:nvSpPr>
-        <p:spPr>
-          <a:xfrm>
-            <a:off x="6309360" y="274320"/>
-            <a:ext cx="2377440" cy="274320"/>
-          </a:xfrm>
-          <a:prstGeom prst="rect">
-            <a:avLst/>
-          </a:prstGeom>
-          <a:noFill/>
-          <a:ln/>
-        </p:spPr>
-        <p:txBody>
-          <a:bodyPr wrap="square" lIns="0" tIns="0" rIns="0" bIns="0" rtlCol="0" anchor="ctr"/>
-          <a:lstStyle/>
-          <a:p>
-            <a:pPr algn="r" indent="0" marL="0">
-              <a:buNone/>
-            </a:pPr>
-            <a:r>
-              <a:rPr lang="en-US" sz="1000" b="1" dirty="0">
-                <a:solidFill>
-                  <a:srgbClr val="C8553D"/>
-                </a:solidFill>
-                <a:latin typeface="Calibri" pitchFamily="34" charset="0"/>
-                <a:ea typeface="Calibri" pitchFamily="34" charset="-122"/>
-                <a:cs typeface="Calibri" pitchFamily="34" charset="-120"/>
-              </a:rPr>
-              <a:t>Số liệu sơ bộ: 125/150 câu dev</a:t>
-            </a:r>
-            <a:endParaRPr lang="en-US" sz="1000" dirty="0"/>
-          </a:p>
-        </p:txBody>
-      </p:sp>
       <p:graphicFrame>
         <p:nvGraphicFramePr>
-          <p:cNvPr id="11" name="Table 0"/>
+          <p:cNvPr id="12" name="Table 0"/>
           <p:cNvGraphicFramePr>
             <a:graphicFrameLocks noGrp="1"/>
           </p:cNvGraphicFramePr>
@@ -3749,7 +5401,7 @@
                           <a:ea typeface="Calibri" pitchFamily="34" charset="-122"/>
                           <a:cs typeface="Calibri" pitchFamily="34" charset="-120"/>
                         </a:rPr>
-                        <a:t>Lỗi 429 usage limit</a:t>
+                        <a:t>Hết hạn mức (429), rồi token bị thu hồi (401)</a:t>
                       </a:r>
                       <a:endParaRPr lang="en-US" sz="1100" dirty="0">
                         <a:latin typeface="Calibri" charset="0"/>
@@ -3814,7 +5466,7 @@
                           <a:ea typeface="Calibri" pitchFamily="34" charset="-122"/>
                           <a:cs typeface="Calibri" pitchFamily="34" charset="-120"/>
                         </a:rPr>
-                        <a:t>Hết hạn mức tài khoản ChatGPT</a:t>
+                        <a:t>Tài khoản gói free; chạy 8 luồng cạn nhanh, sau đó 2 token OAuth bị vô hiệu</a:t>
                       </a:r>
                       <a:endParaRPr lang="en-US" sz="1100" dirty="0">
                         <a:latin typeface="Calibri" charset="0"/>
@@ -3879,7 +5531,204 @@
                           <a:ea typeface="Calibri" pitchFamily="34" charset="-122"/>
                           <a:cs typeface="Calibri" pitchFamily="34" charset="-120"/>
                         </a:rPr>
-                        <a:t>Chờ mở lại hoặc thêm tài khoản</a:t>
+                        <a:t>Giảm số luồng; đăng nhập lại từ đầu; chờ hạn mức mở lại</a:t>
+                      </a:r>
+                      <a:endParaRPr lang="en-US" sz="1100" dirty="0">
+                        <a:latin typeface="Calibri" charset="0"/>
+                        <a:ea typeface="Calibri" charset="0"/>
+                        <a:cs typeface="Calibri" charset="0"/>
+                      </a:endParaRPr>
+                    </a:p>
+                  </a:txBody>
+                  <a:tcPr marL="91440" marR="91440" marT="45720" marB="45720" anchor="ctr">
+                    <a:lnL w="9525" cap="flat" cmpd="sng" algn="ctr">
+                      <a:solidFill>
+                        <a:srgbClr val="DCE3EA"/>
+                      </a:solidFill>
+                      <a:prstDash val="solid"/>
+                      <a:round/>
+                      <a:headEnd type="none" w="med" len="med"/>
+                      <a:tailEnd type="none" w="med" len="med"/>
+                    </a:lnL>
+                    <a:lnR w="9525" cap="flat" cmpd="sng" algn="ctr">
+                      <a:solidFill>
+                        <a:srgbClr val="DCE3EA"/>
+                      </a:solidFill>
+                      <a:prstDash val="solid"/>
+                      <a:round/>
+                      <a:headEnd type="none" w="med" len="med"/>
+                      <a:tailEnd type="none" w="med" len="med"/>
+                    </a:lnR>
+                    <a:lnT w="9525" cap="flat" cmpd="sng" algn="ctr">
+                      <a:solidFill>
+                        <a:srgbClr val="DCE3EA"/>
+                      </a:solidFill>
+                      <a:prstDash val="solid"/>
+                      <a:round/>
+                      <a:headEnd type="none" w="med" len="med"/>
+                      <a:tailEnd type="none" w="med" len="med"/>
+                    </a:lnT>
+                    <a:lnB w="9525" cap="flat" cmpd="sng" algn="ctr">
+                      <a:solidFill>
+                        <a:srgbClr val="DCE3EA"/>
+                      </a:solidFill>
+                      <a:prstDash val="solid"/>
+                      <a:round/>
+                      <a:headEnd type="none" w="med" len="med"/>
+                      <a:tailEnd type="none" w="med" len="med"/>
+                    </a:lnB>
+                  </a:tcPr>
+                </a:tc>
+              </a:tr>
+              <a:tr h="502920">
+                <a:tc>
+                  <a:txBody>
+                    <a:bodyPr/>
+                    <a:lstStyle/>
+                    <a:p>
+                      <a:pPr indent="0" marL="0">
+                        <a:buNone/>
+                      </a:pPr>
+                      <a:r>
+                        <a:rPr lang="en-US" sz="1100" dirty="0">
+                          <a:solidFill>
+                            <a:srgbClr val="1B2B3A"/>
+                          </a:solidFill>
+                          <a:latin typeface="Calibri" pitchFamily="34" charset="0"/>
+                          <a:ea typeface="Calibri" pitchFamily="34" charset="-122"/>
+                          <a:cs typeface="Calibri" pitchFamily="34" charset="-120"/>
+                        </a:rPr>
+                        <a:t>9router tắt giữa chừng</a:t>
+                      </a:r>
+                      <a:endParaRPr lang="en-US" sz="1100" dirty="0">
+                        <a:latin typeface="Calibri" charset="0"/>
+                        <a:ea typeface="Calibri" charset="0"/>
+                        <a:cs typeface="Calibri" charset="0"/>
+                      </a:endParaRPr>
+                    </a:p>
+                  </a:txBody>
+                  <a:tcPr marL="91440" marR="91440" marT="45720" marB="45720" anchor="ctr">
+                    <a:lnL w="9525" cap="flat" cmpd="sng" algn="ctr">
+                      <a:solidFill>
+                        <a:srgbClr val="DCE3EA"/>
+                      </a:solidFill>
+                      <a:prstDash val="solid"/>
+                      <a:round/>
+                      <a:headEnd type="none" w="med" len="med"/>
+                      <a:tailEnd type="none" w="med" len="med"/>
+                    </a:lnL>
+                    <a:lnR w="9525" cap="flat" cmpd="sng" algn="ctr">
+                      <a:solidFill>
+                        <a:srgbClr val="DCE3EA"/>
+                      </a:solidFill>
+                      <a:prstDash val="solid"/>
+                      <a:round/>
+                      <a:headEnd type="none" w="med" len="med"/>
+                      <a:tailEnd type="none" w="med" len="med"/>
+                    </a:lnR>
+                    <a:lnT w="9525" cap="flat" cmpd="sng" algn="ctr">
+                      <a:solidFill>
+                        <a:srgbClr val="DCE3EA"/>
+                      </a:solidFill>
+                      <a:prstDash val="solid"/>
+                      <a:round/>
+                      <a:headEnd type="none" w="med" len="med"/>
+                      <a:tailEnd type="none" w="med" len="med"/>
+                    </a:lnT>
+                    <a:lnB w="9525" cap="flat" cmpd="sng" algn="ctr">
+                      <a:solidFill>
+                        <a:srgbClr val="DCE3EA"/>
+                      </a:solidFill>
+                      <a:prstDash val="solid"/>
+                      <a:round/>
+                      <a:headEnd type="none" w="med" len="med"/>
+                      <a:tailEnd type="none" w="med" len="med"/>
+                    </a:lnB>
+                  </a:tcPr>
+                </a:tc>
+                <a:tc>
+                  <a:txBody>
+                    <a:bodyPr/>
+                    <a:lstStyle/>
+                    <a:p>
+                      <a:pPr indent="0" marL="0">
+                        <a:buNone/>
+                      </a:pPr>
+                      <a:r>
+                        <a:rPr lang="en-US" sz="1100" dirty="0">
+                          <a:solidFill>
+                            <a:srgbClr val="1B2B3A"/>
+                          </a:solidFill>
+                          <a:latin typeface="Calibri" pitchFamily="34" charset="0"/>
+                          <a:ea typeface="Calibri" pitchFamily="34" charset="-122"/>
+                          <a:cs typeface="Calibri" pitchFamily="34" charset="-120"/>
+                        </a:rPr>
+                        <a:t>Chưa xác định chắc; nghi máy ngủ hoặc tiến trình bị đóng</a:t>
+                      </a:r>
+                      <a:endParaRPr lang="en-US" sz="1100" dirty="0">
+                        <a:latin typeface="Calibri" charset="0"/>
+                        <a:ea typeface="Calibri" charset="0"/>
+                        <a:cs typeface="Calibri" charset="0"/>
+                      </a:endParaRPr>
+                    </a:p>
+                  </a:txBody>
+                  <a:tcPr marL="91440" marR="91440" marT="45720" marB="45720" anchor="ctr">
+                    <a:lnL w="9525" cap="flat" cmpd="sng" algn="ctr">
+                      <a:solidFill>
+                        <a:srgbClr val="DCE3EA"/>
+                      </a:solidFill>
+                      <a:prstDash val="solid"/>
+                      <a:round/>
+                      <a:headEnd type="none" w="med" len="med"/>
+                      <a:tailEnd type="none" w="med" len="med"/>
+                    </a:lnL>
+                    <a:lnR w="9525" cap="flat" cmpd="sng" algn="ctr">
+                      <a:solidFill>
+                        <a:srgbClr val="DCE3EA"/>
+                      </a:solidFill>
+                      <a:prstDash val="solid"/>
+                      <a:round/>
+                      <a:headEnd type="none" w="med" len="med"/>
+                      <a:tailEnd type="none" w="med" len="med"/>
+                    </a:lnR>
+                    <a:lnT w="9525" cap="flat" cmpd="sng" algn="ctr">
+                      <a:solidFill>
+                        <a:srgbClr val="DCE3EA"/>
+                      </a:solidFill>
+                      <a:prstDash val="solid"/>
+                      <a:round/>
+                      <a:headEnd type="none" w="med" len="med"/>
+                      <a:tailEnd type="none" w="med" len="med"/>
+                    </a:lnT>
+                    <a:lnB w="9525" cap="flat" cmpd="sng" algn="ctr">
+                      <a:solidFill>
+                        <a:srgbClr val="DCE3EA"/>
+                      </a:solidFill>
+                      <a:prstDash val="solid"/>
+                      <a:round/>
+                      <a:headEnd type="none" w="med" len="med"/>
+                      <a:tailEnd type="none" w="med" len="med"/>
+                    </a:lnB>
+                  </a:tcPr>
+                </a:tc>
+                <a:tc>
+                  <a:txBody>
+                    <a:bodyPr/>
+                    <a:lstStyle/>
+                    <a:p>
+                      <a:pPr indent="0" marL="0">
+                        <a:buNone/>
+                      </a:pPr>
+                      <a:r>
+                        <a:rPr lang="en-US" sz="1100" dirty="0">
+                          <a:solidFill>
+                            <a:srgbClr val="1B2B3A"/>
+                          </a:solidFill>
+                          <a:latin typeface="Calibri" pitchFamily="34" charset="0"/>
+                          <a:ea typeface="Calibri" pitchFamily="34" charset="-122"/>
+                          <a:cs typeface="Calibri" pitchFamily="34" charset="-120"/>
+                        </a:rPr>
+                        <a:t>Chạy 9router trong terminal riêng; chạy lại lệnh cũ để tiếp tục</a:t>
                       </a:r>
                       <a:endParaRPr lang="en-US" sz="1100" dirty="0">
                         <a:latin typeface="Calibri" charset="0"/>
@@ -3940,9 +5789,9 @@
 </p:sld>
 </file>
 
-<file path=ppt/slides/slide11.xml><?xml version="1.0" encoding="utf-8"?>
+<file path=ppt/slides/slide12.xml><?xml version="1.0" encoding="utf-8"?>
 <p:sld xmlns:a="http://schemas.openxmlformats.org/drawingml/2006/main" xmlns:r="http://schemas.openxmlformats.org/officeDocument/2006/relationships" xmlns:p="http://schemas.openxmlformats.org/presentationml/2006/main">
-  <p:cSld name="Slide 11">
+  <p:cSld name="Slide 12">
     <p:bg>
       <p:bgPr>
         <a:solidFill>
@@ -3989,7 +5838,7 @@
               <a:buNone/>
             </a:pPr>
             <a:r>
-              <a:rPr lang="en-US" sz="3000" b="1" dirty="0">
+              <a:rPr lang="en-US" sz="2800" b="1" dirty="0">
                 <a:solidFill>
                   <a:srgbClr val="FFFFFF"/>
                 </a:solidFill>
@@ -3997,9 +5846,9 @@
                 <a:ea typeface="Cambria" pitchFamily="34" charset="-122"/>
                 <a:cs typeface="Cambria" pitchFamily="34" charset="-120"/>
               </a:rPr>
-              <a:t>Baseline chạy được, chưa đủ kết luận</a:t>
-            </a:r>
-            <a:endParaRPr lang="en-US" sz="3000" dirty="0"/>
+              <a:t>Chưa có bằng chứng APEX-MEM hơn LightMem</a:t>
+            </a:r>
+            <a:endParaRPr lang="en-US" sz="2800" dirty="0"/>
           </a:p>
         </p:txBody>
       </p:sp>
@@ -4036,7 +5885,7 @@
                 <a:ea typeface="Calibri" pitchFamily="34" charset="-122"/>
                 <a:cs typeface="Calibri" pitchFamily="34" charset="-120"/>
               </a:rPr>
-              <a:t>Số liệu trên 125/150 câu dev</a:t>
+              <a:t>Đã chạy đủ 150 câu dev</a:t>
             </a:r>
             <a:endParaRPr lang="en-US" sz="1400" dirty="0"/>
           </a:p>
@@ -4079,7 +5928,7 @@
                 <a:ea typeface="Calibri" pitchFamily="34" charset="-122"/>
                 <a:cs typeface="Calibri" pitchFamily="34" charset="-120"/>
               </a:rPr>
-              <a:t>Cài đặt xong LightMem, chạy đầu-cuối được trên LongMemEval-S với cx/gpt-5.6-luna.</a:t>
+              <a:t>Cả hai hệ chạy đủ 150 câu dev, cùng model trả lời, cùng model chấm, cùng prompt chấm.</a:t>
             </a:r>
             <a:endParaRPr lang="en-US" sz="1200" dirty="0"/>
           </a:p>
@@ -4100,7 +5949,7 @@
                 <a:ea typeface="Calibri" pitchFamily="34" charset="-122"/>
                 <a:cs typeface="Calibri" pitchFamily="34" charset="-120"/>
               </a:rPr>
-              <a:t>Chia dev/test khớp bản gốc của nhóm (150/350).</a:t>
+              <a:t>APEX-MEM 84,7%, LightMem 81,3%; McNemar p = 0,50, chưa khác biệt.</a:t>
             </a:r>
             <a:endParaRPr lang="en-US" sz="1200" dirty="0"/>
           </a:p>
@@ -4121,7 +5970,7 @@
                 <a:ea typeface="Calibri" pitchFamily="34" charset="-122"/>
                 <a:cs typeface="Calibri" pitchFamily="34" charset="-120"/>
               </a:rPr>
-              <a:t>Sơ bộ: 79,0% macro trên 6/6 loại, 125/150 câu dev.</a:t>
+              <a:t>Chênh lệch nằm ở loại lượt trợ lý (+7); năm loại còn lại LightMem hơn nhẹ.</a:t>
             </a:r>
             <a:endParaRPr lang="en-US" sz="1200" dirty="0"/>
           </a:p>
@@ -4142,7 +5991,7 @@
                 <a:ea typeface="Calibri" pitchFamily="34" charset="-122"/>
                 <a:cs typeface="Calibri" pitchFamily="34" charset="-120"/>
               </a:rPr>
-              <a:t>Điểm yếu rõ nhất: loại lượt trợ lý chỉ 33,3%, do cấu hình user_only không lưu lời trợ lý.</a:t>
+              <a:t>Nguyên nhân nghi là cấu hình: LightMem chỉ lưu lượt người dùng, APEX-MEM lưu cả hai.</a:t>
             </a:r>
             <a:endParaRPr lang="en-US" sz="1200" dirty="0"/>
           </a:p>
@@ -4163,28 +6012,7 @@
                 <a:ea typeface="Calibri" pitchFamily="34" charset="-122"/>
                 <a:cs typeface="Calibri" pitchFamily="34" charset="-120"/>
               </a:rPr>
-              <a:t>Truy xuất trúng bằng chứng 124/125 câu, nên lỗi nằm ở trích xuất và suy luận.</a:t>
-            </a:r>
-            <a:endParaRPr lang="en-US" sz="1200" dirty="0"/>
-          </a:p>
-          <a:p>
-            <a:pPr marL="342900" indent="-342900">
-              <a:spcAft>
-                <a:spcPts val="800"/>
-              </a:spcAft>
-              <a:buSzPct val="100000"/>
-              <a:buChar char="•"/>
-            </a:pPr>
-            <a:r>
-              <a:rPr lang="en-US" sz="1200" dirty="0">
-                <a:solidFill>
-                  <a:srgbClr val="E6EEF7"/>
-                </a:solidFill>
-                <a:latin typeface="Calibri" pitchFamily="34" charset="0"/>
-                <a:ea typeface="Calibri" pitchFamily="34" charset="-122"/>
-                <a:cs typeface="Calibri" pitchFamily="34" charset="-120"/>
-              </a:rPr>
-              <a:t>Thời gian là nút thắt: ~33 phút mỗi câu.</a:t>
+              <a:t>Cả hai hệ truy xuất gần như không sai; lỗi nằm ở trích xuất và suy luận.</a:t>
             </a:r>
             <a:endParaRPr lang="en-US" sz="1200" dirty="0"/>
           </a:p>
@@ -4265,7 +6093,7 @@
                 <a:ea typeface="Calibri" pitchFamily="34" charset="-122"/>
                 <a:cs typeface="Calibri" pitchFamily="34" charset="-120"/>
               </a:rPr>
-              <a:t>1.  Chạy nốt 25 câu dev còn lại, nhất là nhóm _abs.</a:t>
+              <a:t>1.  Chạy lại LightMem loại lượt trợ lý (17 câu) với messages_use = user_assistant để so công bằng.</a:t>
             </a:r>
             <a:endParaRPr lang="en-US" sz="1150" dirty="0"/>
           </a:p>
@@ -4285,7 +6113,7 @@
                 <a:ea typeface="Calibri" pitchFamily="34" charset="-122"/>
                 <a:cs typeface="Calibri" pitchFamily="34" charset="-120"/>
               </a:rPr>
-              <a:t>2.  Chạy hệ APEX-MEM cùng model và cùng chấm để so công bằng.</a:t>
+              <a:t>2.  Chấm 3 lần lấy trung bình cho cả hai hệ, đúng kế hoạch đánh giá.</a:t>
             </a:r>
             <a:endParaRPr lang="en-US" sz="1150" dirty="0"/>
           </a:p>
@@ -4305,7 +6133,7 @@
                 <a:ea typeface="Calibri" pitchFamily="34" charset="-122"/>
                 <a:cs typeface="Calibri" pitchFamily="34" charset="-120"/>
               </a:rPr>
-              <a:t>3.  Thử lại LightMem với messages_use = user_assistant, xem loại lượt trợ lý cải thiện bao nhiêu.</a:t>
+              <a:t>3.  Soi 35 câu hai hệ trả lời khác nhau để biết mỗi hệ mạnh ở đâu.</a:t>
             </a:r>
             <a:endParaRPr lang="en-US" sz="1150" dirty="0"/>
           </a:p>
@@ -4325,27 +6153,7 @@
                 <a:ea typeface="Calibri" pitchFamily="34" charset="-122"/>
                 <a:cs typeface="Calibri" pitchFamily="34" charset="-120"/>
               </a:rPr>
-              <a:t>4.  Chốt với anh: có chạy cả 350 câu test cho baseline không, vì hạn mức tài khoản.</a:t>
-            </a:r>
-            <a:endParaRPr lang="en-US" sz="1150" dirty="0"/>
-          </a:p>
-          <a:p>
-            <a:pPr indent="0" marL="0">
-              <a:spcAft>
-                <a:spcPts val="800"/>
-              </a:spcAft>
-              <a:buNone/>
-            </a:pPr>
-            <a:r>
-              <a:rPr lang="en-US" sz="1150" dirty="0">
-                <a:solidFill>
-                  <a:srgbClr val="E6EEF7"/>
-                </a:solidFill>
-                <a:latin typeface="Calibri" pitchFamily="34" charset="0"/>
-                <a:ea typeface="Calibri" pitchFamily="34" charset="-122"/>
-                <a:cs typeface="Calibri" pitchFamily="34" charset="-120"/>
-              </a:rPr>
-              <a:t>5.  Chấm 3 lần lấy trung bình, đúng kế hoạch đánh giá.</a:t>
+              <a:t>4.  Chốt với anh: chạy cả 350 câu test hay một mẫu con có phân tầng, vì hạn mức tài khoản.</a:t>
             </a:r>
             <a:endParaRPr lang="en-US" sz="1150" dirty="0"/>
           </a:p>
@@ -4384,8 +6192,8 @@
         </p:nvSpPr>
         <p:spPr>
           <a:xfrm>
-            <a:off x="822960" y="3977640"/>
-            <a:ext cx="1371600" cy="594360"/>
+            <a:off x="777240" y="3977640"/>
+            <a:ext cx="2011680" cy="594360"/>
           </a:xfrm>
           <a:prstGeom prst="rect">
             <a:avLst/>
@@ -4401,7 +6209,7 @@
               <a:buNone/>
             </a:pPr>
             <a:r>
-              <a:rPr lang="en-US" sz="2600" b="1" dirty="0">
+              <a:rPr lang="en-US" sz="2100" b="1" dirty="0">
                 <a:solidFill>
                   <a:srgbClr val="F2A541"/>
                 </a:solidFill>
@@ -4409,9 +6217,9 @@
                 <a:ea typeface="Cambria" pitchFamily="34" charset="-122"/>
                 <a:cs typeface="Cambria" pitchFamily="34" charset="-120"/>
               </a:rPr>
-              <a:t>79,0%</a:t>
-            </a:r>
-            <a:endParaRPr lang="en-US" sz="2600" dirty="0"/>
+              <a:t>84,7% · 81,3%</a:t>
+            </a:r>
+            <a:endParaRPr lang="en-US" sz="2100" dirty="0"/>
           </a:p>
         </p:txBody>
       </p:sp>
@@ -4423,8 +6231,8 @@
         </p:nvSpPr>
         <p:spPr>
           <a:xfrm>
-            <a:off x="2194560" y="3977640"/>
-            <a:ext cx="1920240" cy="594360"/>
+            <a:off x="2834640" y="3977640"/>
+            <a:ext cx="1371600" cy="594360"/>
           </a:xfrm>
           <a:prstGeom prst="rect">
             <a:avLst/>
@@ -4448,7 +6256,7 @@
                 <a:ea typeface="Calibri" pitchFamily="34" charset="-122"/>
                 <a:cs typeface="Calibri" pitchFamily="34" charset="-120"/>
               </a:rPr>
-              <a:t>macro-average, 6/6 loại đã chạy</a:t>
+              <a:t>APEX-MEM · LightMem, gộp chung</a:t>
             </a:r>
             <a:endParaRPr lang="en-US" sz="1150" dirty="0"/>
           </a:p>
@@ -4487,8 +6295,8 @@
         </p:nvSpPr>
         <p:spPr>
           <a:xfrm>
-            <a:off x="5029200" y="3977640"/>
-            <a:ext cx="1371600" cy="594360"/>
+            <a:off x="4983480" y="3977640"/>
+            <a:ext cx="2011680" cy="594360"/>
           </a:xfrm>
           <a:prstGeom prst="rect">
             <a:avLst/>
@@ -4504,7 +6312,7 @@
               <a:buNone/>
             </a:pPr>
             <a:r>
-              <a:rPr lang="en-US" sz="2600" b="1" dirty="0">
+              <a:rPr lang="en-US" sz="2100" b="1" dirty="0">
                 <a:solidFill>
                   <a:srgbClr val="F2A541"/>
                 </a:solidFill>
@@ -4512,9 +6320,9 @@
                 <a:ea typeface="Cambria" pitchFamily="34" charset="-122"/>
                 <a:cs typeface="Cambria" pitchFamily="34" charset="-120"/>
               </a:rPr>
-              <a:t>33 phút</a:t>
-            </a:r>
-            <a:endParaRPr lang="en-US" sz="2600" dirty="0"/>
+              <a:t>p = 0,50</a:t>
+            </a:r>
+            <a:endParaRPr lang="en-US" sz="2100" dirty="0"/>
           </a:p>
         </p:txBody>
       </p:sp>
@@ -4526,8 +6334,8 @@
         </p:nvSpPr>
         <p:spPr>
           <a:xfrm>
-            <a:off x="6400800" y="3977640"/>
-            <a:ext cx="1920240" cy="594360"/>
+            <a:off x="7040880" y="3977640"/>
+            <a:ext cx="1371600" cy="594360"/>
           </a:xfrm>
           <a:prstGeom prst="rect">
             <a:avLst/>
@@ -4551,7 +6359,7 @@
                 <a:ea typeface="Calibri" pitchFamily="34" charset="-122"/>
                 <a:cs typeface="Calibri" pitchFamily="34" charset="-120"/>
               </a:rPr>
-              <a:t>dựng bộ nhớ mỗi câu (trung vị)</a:t>
+              <a:t>McNemar, chưa khác biệt</a:t>
             </a:r>
             <a:endParaRPr lang="en-US" sz="1150" dirty="0"/>
           </a:p>
@@ -4669,46 +6477,7 @@
       </p:sp>
       <p:sp>
         <p:nvSpPr>
-          <p:cNvPr id="4" name="Text 2"/>
-          <p:cNvSpPr txBox="1"/>
-          <p:nvPr/>
-        </p:nvSpPr>
-        <p:spPr>
-          <a:xfrm>
-            <a:off x="6309360" y="274320"/>
-            <a:ext cx="2377440" cy="274320"/>
-          </a:xfrm>
-          <a:prstGeom prst="rect">
-            <a:avLst/>
-          </a:prstGeom>
-          <a:noFill/>
-          <a:ln/>
-        </p:spPr>
-        <p:txBody>
-          <a:bodyPr wrap="square" lIns="0" tIns="0" rIns="0" bIns="0" rtlCol="0" anchor="ctr"/>
-          <a:lstStyle/>
-          <a:p>
-            <a:pPr algn="r" indent="0" marL="0">
-              <a:buNone/>
-            </a:pPr>
-            <a:r>
-              <a:rPr lang="en-US" sz="1000" b="1" dirty="0">
-                <a:solidFill>
-                  <a:srgbClr val="C8553D"/>
-                </a:solidFill>
-                <a:latin typeface="Calibri" pitchFamily="34" charset="0"/>
-                <a:ea typeface="Calibri" pitchFamily="34" charset="-122"/>
-                <a:cs typeface="Calibri" pitchFamily="34" charset="-120"/>
-              </a:rPr>
-              <a:t>Số liệu sơ bộ: 125/150 câu dev</a:t>
-            </a:r>
-            <a:endParaRPr lang="en-US" sz="1000" dirty="0"/>
-          </a:p>
-        </p:txBody>
-      </p:sp>
-      <p:sp>
-        <p:nvSpPr>
-          <p:cNvPr id="6" name="Shape 3"/>
+          <p:cNvPr id="5" name="Shape 2"/>
           <p:cNvSpPr/>
           <p:nvPr/>
         </p:nvSpPr>
@@ -4733,7 +6502,7 @@
       </p:sp>
       <p:sp>
         <p:nvSpPr>
-          <p:cNvPr id="7" name="Shape 4"/>
+          <p:cNvPr id="6" name="Shape 3"/>
           <p:cNvSpPr/>
           <p:nvPr/>
         </p:nvSpPr>
@@ -4758,7 +6527,7 @@
       </p:sp>
       <p:sp>
         <p:nvSpPr>
-          <p:cNvPr id="8" name="Text 5"/>
+          <p:cNvPr id="7" name="Text 4"/>
           <p:cNvSpPr txBox="1"/>
           <p:nvPr/>
         </p:nvSpPr>
@@ -4797,7 +6566,7 @@
       </p:sp>
       <p:sp>
         <p:nvSpPr>
-          <p:cNvPr id="9" name="Text 6"/>
+          <p:cNvPr id="8" name="Text 5"/>
           <p:cNvSpPr txBox="1"/>
           <p:nvPr/>
         </p:nvSpPr>
@@ -4836,7 +6605,7 @@
       </p:sp>
       <p:sp>
         <p:nvSpPr>
-          <p:cNvPr id="10" name="Text 7"/>
+          <p:cNvPr id="9" name="Text 6"/>
           <p:cNvSpPr txBox="1"/>
           <p:nvPr/>
         </p:nvSpPr>
@@ -4875,7 +6644,7 @@
       </p:sp>
       <p:sp>
         <p:nvSpPr>
-          <p:cNvPr id="11" name="Shape 8"/>
+          <p:cNvPr id="10" name="Shape 7"/>
           <p:cNvSpPr/>
           <p:nvPr/>
         </p:nvSpPr>
@@ -4900,7 +6669,7 @@
       </p:sp>
       <p:sp>
         <p:nvSpPr>
-          <p:cNvPr id="12" name="Shape 9"/>
+          <p:cNvPr id="11" name="Shape 8"/>
           <p:cNvSpPr/>
           <p:nvPr/>
         </p:nvSpPr>
@@ -4925,7 +6694,7 @@
       </p:sp>
       <p:sp>
         <p:nvSpPr>
-          <p:cNvPr id="13" name="Text 10"/>
+          <p:cNvPr id="12" name="Text 9"/>
           <p:cNvSpPr txBox="1"/>
           <p:nvPr/>
         </p:nvSpPr>
@@ -4964,7 +6733,7 @@
       </p:sp>
       <p:sp>
         <p:nvSpPr>
-          <p:cNvPr id="14" name="Text 11"/>
+          <p:cNvPr id="13" name="Text 10"/>
           <p:cNvSpPr txBox="1"/>
           <p:nvPr/>
         </p:nvSpPr>
@@ -5003,7 +6772,7 @@
       </p:sp>
       <p:sp>
         <p:nvSpPr>
-          <p:cNvPr id="15" name="Text 12"/>
+          <p:cNvPr id="14" name="Text 11"/>
           <p:cNvSpPr txBox="1"/>
           <p:nvPr/>
         </p:nvSpPr>
@@ -5042,7 +6811,7 @@
       </p:sp>
       <p:sp>
         <p:nvSpPr>
-          <p:cNvPr id="16" name="Shape 13"/>
+          <p:cNvPr id="15" name="Shape 12"/>
           <p:cNvSpPr/>
           <p:nvPr/>
         </p:nvSpPr>
@@ -5067,7 +6836,7 @@
       </p:sp>
       <p:sp>
         <p:nvSpPr>
-          <p:cNvPr id="17" name="Shape 14"/>
+          <p:cNvPr id="16" name="Shape 13"/>
           <p:cNvSpPr/>
           <p:nvPr/>
         </p:nvSpPr>
@@ -5092,7 +6861,7 @@
       </p:sp>
       <p:sp>
         <p:nvSpPr>
-          <p:cNvPr id="18" name="Text 15"/>
+          <p:cNvPr id="17" name="Text 14"/>
           <p:cNvSpPr txBox="1"/>
           <p:nvPr/>
         </p:nvSpPr>
@@ -5131,7 +6900,7 @@
       </p:sp>
       <p:sp>
         <p:nvSpPr>
-          <p:cNvPr id="19" name="Text 16"/>
+          <p:cNvPr id="18" name="Text 15"/>
           <p:cNvSpPr txBox="1"/>
           <p:nvPr/>
         </p:nvSpPr>
@@ -5170,7 +6939,7 @@
       </p:sp>
       <p:sp>
         <p:nvSpPr>
-          <p:cNvPr id="20" name="Text 17"/>
+          <p:cNvPr id="19" name="Text 16"/>
           <p:cNvSpPr txBox="1"/>
           <p:nvPr/>
         </p:nvSpPr>
@@ -5209,7 +6978,7 @@
       </p:sp>
       <p:sp>
         <p:nvSpPr>
-          <p:cNvPr id="21" name="Shape 18"/>
+          <p:cNvPr id="20" name="Shape 17"/>
           <p:cNvSpPr/>
           <p:nvPr/>
         </p:nvSpPr>
@@ -5234,7 +7003,7 @@
       </p:sp>
       <p:sp>
         <p:nvSpPr>
-          <p:cNvPr id="22" name="Shape 19"/>
+          <p:cNvPr id="21" name="Shape 18"/>
           <p:cNvSpPr/>
           <p:nvPr/>
         </p:nvSpPr>
@@ -5259,7 +7028,7 @@
       </p:sp>
       <p:sp>
         <p:nvSpPr>
-          <p:cNvPr id="23" name="Text 20"/>
+          <p:cNvPr id="22" name="Text 19"/>
           <p:cNvSpPr txBox="1"/>
           <p:nvPr/>
         </p:nvSpPr>
@@ -5298,7 +7067,7 @@
       </p:sp>
       <p:sp>
         <p:nvSpPr>
-          <p:cNvPr id="24" name="Text 21"/>
+          <p:cNvPr id="23" name="Text 20"/>
           <p:cNvSpPr txBox="1"/>
           <p:nvPr/>
         </p:nvSpPr>
@@ -5337,7 +7106,7 @@
       </p:sp>
       <p:sp>
         <p:nvSpPr>
-          <p:cNvPr id="25" name="Text 22"/>
+          <p:cNvPr id="24" name="Text 21"/>
           <p:cNvSpPr txBox="1"/>
           <p:nvPr/>
         </p:nvSpPr>
@@ -5376,7 +7145,7 @@
       </p:sp>
       <p:sp>
         <p:nvSpPr>
-          <p:cNvPr id="26" name="Shape 23"/>
+          <p:cNvPr id="25" name="Shape 22"/>
           <p:cNvSpPr/>
           <p:nvPr/>
         </p:nvSpPr>
@@ -5401,7 +7170,7 @@
       </p:sp>
       <p:sp>
         <p:nvSpPr>
-          <p:cNvPr id="27" name="Shape 24"/>
+          <p:cNvPr id="26" name="Shape 23"/>
           <p:cNvSpPr/>
           <p:nvPr/>
         </p:nvSpPr>
@@ -5426,7 +7195,7 @@
       </p:sp>
       <p:sp>
         <p:nvSpPr>
-          <p:cNvPr id="28" name="Text 25"/>
+          <p:cNvPr id="27" name="Text 24"/>
           <p:cNvSpPr txBox="1"/>
           <p:nvPr/>
         </p:nvSpPr>
@@ -5465,7 +7234,7 @@
       </p:sp>
       <p:sp>
         <p:nvSpPr>
-          <p:cNvPr id="29" name="Text 26"/>
+          <p:cNvPr id="28" name="Text 25"/>
           <p:cNvSpPr txBox="1"/>
           <p:nvPr/>
         </p:nvSpPr>
@@ -5504,7 +7273,7 @@
       </p:sp>
       <p:sp>
         <p:nvSpPr>
-          <p:cNvPr id="30" name="Text 27"/>
+          <p:cNvPr id="29" name="Text 26"/>
           <p:cNvSpPr txBox="1"/>
           <p:nvPr/>
         </p:nvSpPr>
@@ -5543,7 +7312,7 @@
       </p:sp>
       <p:sp>
         <p:nvSpPr>
-          <p:cNvPr id="31" name="Shape 28"/>
+          <p:cNvPr id="30" name="Shape 27"/>
           <p:cNvSpPr/>
           <p:nvPr/>
         </p:nvSpPr>
@@ -5568,7 +7337,7 @@
       </p:sp>
       <p:sp>
         <p:nvSpPr>
-          <p:cNvPr id="32" name="Text 29"/>
+          <p:cNvPr id="31" name="Text 28"/>
           <p:cNvSpPr txBox="1"/>
           <p:nvPr/>
         </p:nvSpPr>
@@ -5624,7 +7393,7 @@
       </p:sp>
       <p:sp>
         <p:nvSpPr>
-          <p:cNvPr id="33" name="Shape 30"/>
+          <p:cNvPr id="32" name="Shape 29"/>
           <p:cNvSpPr/>
           <p:nvPr/>
         </p:nvSpPr>
@@ -5649,7 +7418,7 @@
       </p:sp>
       <p:sp>
         <p:nvSpPr>
-          <p:cNvPr id="34" name="Text 31"/>
+          <p:cNvPr id="33" name="Text 30"/>
           <p:cNvSpPr txBox="1"/>
           <p:nvPr/>
         </p:nvSpPr>
@@ -5815,53 +7584,14 @@
       </p:sp>
       <p:sp>
         <p:nvSpPr>
-          <p:cNvPr id="4" name="Text 2"/>
+          <p:cNvPr id="5" name="Text 2"/>
           <p:cNvSpPr txBox="1"/>
           <p:nvPr/>
         </p:nvSpPr>
         <p:spPr>
           <a:xfrm>
-            <a:off x="6309360" y="274320"/>
-            <a:ext cx="2377440" cy="274320"/>
-          </a:xfrm>
-          <a:prstGeom prst="rect">
-            <a:avLst/>
-          </a:prstGeom>
-          <a:noFill/>
-          <a:ln/>
-        </p:spPr>
-        <p:txBody>
-          <a:bodyPr wrap="square" lIns="0" tIns="0" rIns="0" bIns="0" rtlCol="0" anchor="ctr"/>
-          <a:lstStyle/>
-          <a:p>
-            <a:pPr algn="r" indent="0" marL="0">
-              <a:buNone/>
-            </a:pPr>
-            <a:r>
-              <a:rPr lang="en-US" sz="1000" b="1" dirty="0">
-                <a:solidFill>
-                  <a:srgbClr val="C8553D"/>
-                </a:solidFill>
-                <a:latin typeface="Calibri" pitchFamily="34" charset="0"/>
-                <a:ea typeface="Calibri" pitchFamily="34" charset="-122"/>
-                <a:cs typeface="Calibri" pitchFamily="34" charset="-120"/>
-              </a:rPr>
-              <a:t>Số liệu sơ bộ: 125/150 câu dev</a:t>
-            </a:r>
-            <a:endParaRPr lang="en-US" sz="1000" dirty="0"/>
-          </a:p>
-        </p:txBody>
-      </p:sp>
-      <p:sp>
-        <p:nvSpPr>
-          <p:cNvPr id="6" name="Text 3"/>
-          <p:cNvSpPr txBox="1"/>
-          <p:nvPr/>
-        </p:nvSpPr>
-        <p:spPr>
-          <a:xfrm>
-            <a:off x="457200" y="1280160"/>
-            <a:ext cx="2011680" cy="457200"/>
+            <a:off x="457200" y="1188720"/>
+            <a:ext cx="2103120" cy="457200"/>
           </a:xfrm>
           <a:prstGeom prst="rect">
             <a:avLst/>
@@ -5877,7 +7607,7 @@
               <a:buNone/>
             </a:pPr>
             <a:r>
-              <a:rPr lang="en-US" sz="1250" b="1" dirty="0">
+              <a:rPr lang="en-US" sz="1200" b="1" dirty="0">
                 <a:solidFill>
                   <a:srgbClr val="1F6F8B"/>
                 </a:solidFill>
@@ -5887,19 +7617,19 @@
               </a:rPr>
               <a:t>Dữ liệu</a:t>
             </a:r>
-            <a:endParaRPr lang="en-US" sz="1250" dirty="0"/>
-          </a:p>
-        </p:txBody>
-      </p:sp>
-      <p:sp>
-        <p:nvSpPr>
-          <p:cNvPr id="7" name="Text 4"/>
+            <a:endParaRPr lang="en-US" sz="1200" dirty="0"/>
+          </a:p>
+        </p:txBody>
+      </p:sp>
+      <p:sp>
+        <p:nvSpPr>
+          <p:cNvPr id="6" name="Text 3"/>
           <p:cNvSpPr txBox="1"/>
           <p:nvPr/>
         </p:nvSpPr>
         <p:spPr>
           <a:xfrm>
-            <a:off x="2468880" y="1280160"/>
+            <a:off x="2560320" y="1188720"/>
             <a:ext cx="3749040" cy="457200"/>
           </a:xfrm>
           <a:prstGeom prst="rect">
@@ -5916,7 +7646,7 @@
               <a:buNone/>
             </a:pPr>
             <a:r>
-              <a:rPr lang="en-US" sz="1250" dirty="0">
+              <a:rPr lang="en-US" sz="1150" dirty="0">
                 <a:solidFill>
                   <a:srgbClr val="1B2B3A"/>
                 </a:solidFill>
@@ -5926,20 +7656,20 @@
               </a:rPr>
               <a:t>LongMemEval-S, 500 câu, mỗi câu một haystack ~115K token</a:t>
             </a:r>
-            <a:endParaRPr lang="en-US" sz="1250" dirty="0"/>
-          </a:p>
-        </p:txBody>
-      </p:sp>
-      <p:sp>
-        <p:nvSpPr>
-          <p:cNvPr id="8" name="Text 5"/>
+            <a:endParaRPr lang="en-US" sz="1150" dirty="0"/>
+          </a:p>
+        </p:txBody>
+      </p:sp>
+      <p:sp>
+        <p:nvSpPr>
+          <p:cNvPr id="7" name="Text 4"/>
           <p:cNvSpPr txBox="1"/>
           <p:nvPr/>
         </p:nvSpPr>
         <p:spPr>
           <a:xfrm>
-            <a:off x="457200" y="1828800"/>
-            <a:ext cx="2011680" cy="457200"/>
+            <a:off x="457200" y="1691640"/>
+            <a:ext cx="2103120" cy="457200"/>
           </a:xfrm>
           <a:prstGeom prst="rect">
             <a:avLst/>
@@ -5955,7 +7685,7 @@
               <a:buNone/>
             </a:pPr>
             <a:r>
-              <a:rPr lang="en-US" sz="1250" b="1" dirty="0">
+              <a:rPr lang="en-US" sz="1200" b="1" dirty="0">
                 <a:solidFill>
                   <a:srgbClr val="1F6F8B"/>
                 </a:solidFill>
@@ -5965,19 +7695,19 @@
               </a:rPr>
               <a:t>Chia tập</a:t>
             </a:r>
-            <a:endParaRPr lang="en-US" sz="1250" dirty="0"/>
-          </a:p>
-        </p:txBody>
-      </p:sp>
-      <p:sp>
-        <p:nvSpPr>
-          <p:cNvPr id="9" name="Text 6"/>
+            <a:endParaRPr lang="en-US" sz="1200" dirty="0"/>
+          </a:p>
+        </p:txBody>
+      </p:sp>
+      <p:sp>
+        <p:nvSpPr>
+          <p:cNvPr id="8" name="Text 5"/>
           <p:cNvSpPr txBox="1"/>
           <p:nvPr/>
         </p:nvSpPr>
         <p:spPr>
           <a:xfrm>
-            <a:off x="2468880" y="1828800"/>
+            <a:off x="2560320" y="1691640"/>
             <a:ext cx="3749040" cy="457200"/>
           </a:xfrm>
           <a:prstGeom prst="rect">
@@ -5994,7 +7724,7 @@
               <a:buNone/>
             </a:pPr>
             <a:r>
-              <a:rPr lang="en-US" sz="1250" dirty="0">
+              <a:rPr lang="en-US" sz="1150" dirty="0">
                 <a:solidFill>
                   <a:srgbClr val="1B2B3A"/>
                 </a:solidFill>
@@ -6004,20 +7734,20 @@
               </a:rPr>
               <a:t>Dev 150 / test 350, phân tầng theo loại, seed 42 (khớp split.json của nhóm)</a:t>
             </a:r>
-            <a:endParaRPr lang="en-US" sz="1250" dirty="0"/>
-          </a:p>
-        </p:txBody>
-      </p:sp>
-      <p:sp>
-        <p:nvSpPr>
-          <p:cNvPr id="10" name="Text 7"/>
+            <a:endParaRPr lang="en-US" sz="1150" dirty="0"/>
+          </a:p>
+        </p:txBody>
+      </p:sp>
+      <p:sp>
+        <p:nvSpPr>
+          <p:cNvPr id="9" name="Text 6"/>
           <p:cNvSpPr txBox="1"/>
           <p:nvPr/>
         </p:nvSpPr>
         <p:spPr>
           <a:xfrm>
-            <a:off x="457200" y="2377440"/>
-            <a:ext cx="2011680" cy="457200"/>
+            <a:off x="457200" y="2194560"/>
+            <a:ext cx="2103120" cy="457200"/>
           </a:xfrm>
           <a:prstGeom prst="rect">
             <a:avLst/>
@@ -6033,7 +7763,7 @@
               <a:buNone/>
             </a:pPr>
             <a:r>
-              <a:rPr lang="en-US" sz="1250" b="1" dirty="0">
+              <a:rPr lang="en-US" sz="1200" b="1" dirty="0">
                 <a:solidFill>
                   <a:srgbClr val="1F6F8B"/>
                 </a:solidFill>
@@ -6041,21 +7771,21 @@
                 <a:ea typeface="Calibri" pitchFamily="34" charset="-122"/>
                 <a:cs typeface="Calibri" pitchFamily="34" charset="-120"/>
               </a:rPr>
-              <a:t>LLM trích xuất + trả lời</a:t>
-            </a:r>
-            <a:endParaRPr lang="en-US" sz="1250" dirty="0"/>
-          </a:p>
-        </p:txBody>
-      </p:sp>
-      <p:sp>
-        <p:nvSpPr>
-          <p:cNvPr id="11" name="Text 8"/>
+              <a:t>Model trả lời (cả hai hệ)</a:t>
+            </a:r>
+            <a:endParaRPr lang="en-US" sz="1200" dirty="0"/>
+          </a:p>
+        </p:txBody>
+      </p:sp>
+      <p:sp>
+        <p:nvSpPr>
+          <p:cNvPr id="10" name="Text 7"/>
           <p:cNvSpPr txBox="1"/>
           <p:nvPr/>
         </p:nvSpPr>
         <p:spPr>
           <a:xfrm>
-            <a:off x="2468880" y="2377440"/>
+            <a:off x="2560320" y="2194560"/>
             <a:ext cx="3749040" cy="457200"/>
           </a:xfrm>
           <a:prstGeom prst="rect">
@@ -6072,7 +7802,7 @@
               <a:buNone/>
             </a:pPr>
             <a:r>
-              <a:rPr lang="en-US" sz="1250" dirty="0">
+              <a:rPr lang="en-US" sz="1150" dirty="0">
                 <a:solidFill>
                   <a:srgbClr val="1B2B3A"/>
                 </a:solidFill>
@@ -6082,20 +7812,20 @@
               </a:rPr>
               <a:t>cx/gpt-5.6-luna</a:t>
             </a:r>
-            <a:endParaRPr lang="en-US" sz="1250" dirty="0"/>
-          </a:p>
-        </p:txBody>
-      </p:sp>
-      <p:sp>
-        <p:nvSpPr>
-          <p:cNvPr id="12" name="Text 9"/>
+            <a:endParaRPr lang="en-US" sz="1150" dirty="0"/>
+          </a:p>
+        </p:txBody>
+      </p:sp>
+      <p:sp>
+        <p:nvSpPr>
+          <p:cNvPr id="11" name="Text 8"/>
           <p:cNvSpPr txBox="1"/>
           <p:nvPr/>
         </p:nvSpPr>
         <p:spPr>
           <a:xfrm>
-            <a:off x="457200" y="2926080"/>
-            <a:ext cx="2011680" cy="457200"/>
+            <a:off x="457200" y="2697480"/>
+            <a:ext cx="2103120" cy="457200"/>
           </a:xfrm>
           <a:prstGeom prst="rect">
             <a:avLst/>
@@ -6111,7 +7841,7 @@
               <a:buNone/>
             </a:pPr>
             <a:r>
-              <a:rPr lang="en-US" sz="1250" b="1" dirty="0">
+              <a:rPr lang="en-US" sz="1200" b="1" dirty="0">
                 <a:solidFill>
                   <a:srgbClr val="1F6F8B"/>
                 </a:solidFill>
@@ -6119,21 +7849,21 @@
                 <a:ea typeface="Calibri" pitchFamily="34" charset="-122"/>
                 <a:cs typeface="Calibri" pitchFamily="34" charset="-120"/>
               </a:rPr>
-              <a:t>Model chấm</a:t>
-            </a:r>
-            <a:endParaRPr lang="en-US" sz="1250" dirty="0"/>
-          </a:p>
-        </p:txBody>
-      </p:sp>
-      <p:sp>
-        <p:nvSpPr>
-          <p:cNvPr id="13" name="Text 10"/>
+              <a:t>Model chấm (cả hai hệ)</a:t>
+            </a:r>
+            <a:endParaRPr lang="en-US" sz="1200" dirty="0"/>
+          </a:p>
+        </p:txBody>
+      </p:sp>
+      <p:sp>
+        <p:nvSpPr>
+          <p:cNvPr id="12" name="Text 9"/>
           <p:cNvSpPr txBox="1"/>
           <p:nvPr/>
         </p:nvSpPr>
         <p:spPr>
           <a:xfrm>
-            <a:off x="2468880" y="2926080"/>
+            <a:off x="2560320" y="2697480"/>
             <a:ext cx="3749040" cy="457200"/>
           </a:xfrm>
           <a:prstGeom prst="rect">
@@ -6150,7 +7880,7 @@
               <a:buNone/>
             </a:pPr>
             <a:r>
-              <a:rPr lang="en-US" sz="1250" dirty="0">
+              <a:rPr lang="en-US" sz="1150" dirty="0">
                 <a:solidFill>
                   <a:srgbClr val="1B2B3A"/>
                 </a:solidFill>
@@ -6160,20 +7890,20 @@
               </a:rPr>
               <a:t>cx/gpt-5.6-terra — khác model trả lời</a:t>
             </a:r>
-            <a:endParaRPr lang="en-US" sz="1250" dirty="0"/>
-          </a:p>
-        </p:txBody>
-      </p:sp>
-      <p:sp>
-        <p:nvSpPr>
-          <p:cNvPr id="14" name="Text 11"/>
+            <a:endParaRPr lang="en-US" sz="1150" dirty="0"/>
+          </a:p>
+        </p:txBody>
+      </p:sp>
+      <p:sp>
+        <p:nvSpPr>
+          <p:cNvPr id="13" name="Text 10"/>
           <p:cNvSpPr txBox="1"/>
           <p:nvPr/>
         </p:nvSpPr>
         <p:spPr>
           <a:xfrm>
-            <a:off x="457200" y="3474720"/>
-            <a:ext cx="2011680" cy="457200"/>
+            <a:off x="457200" y="3200400"/>
+            <a:ext cx="2103120" cy="457200"/>
           </a:xfrm>
           <a:prstGeom prst="rect">
             <a:avLst/>
@@ -6189,7 +7919,7 @@
               <a:buNone/>
             </a:pPr>
             <a:r>
-              <a:rPr lang="en-US" sz="1250" b="1" dirty="0">
+              <a:rPr lang="en-US" sz="1200" b="1" dirty="0">
                 <a:solidFill>
                   <a:srgbClr val="1F6F8B"/>
                 </a:solidFill>
@@ -6199,19 +7929,19 @@
               </a:rPr>
               <a:t>Prompt chấm</a:t>
             </a:r>
-            <a:endParaRPr lang="en-US" sz="1250" dirty="0"/>
-          </a:p>
-        </p:txBody>
-      </p:sp>
-      <p:sp>
-        <p:nvSpPr>
-          <p:cNvPr id="15" name="Text 12"/>
+            <a:endParaRPr lang="en-US" sz="1200" dirty="0"/>
+          </a:p>
+        </p:txBody>
+      </p:sp>
+      <p:sp>
+        <p:nvSpPr>
+          <p:cNvPr id="14" name="Text 11"/>
           <p:cNvSpPr txBox="1"/>
           <p:nvPr/>
         </p:nvSpPr>
         <p:spPr>
           <a:xfrm>
-            <a:off x="2468880" y="3474720"/>
+            <a:off x="2560320" y="3200400"/>
             <a:ext cx="3749040" cy="457200"/>
           </a:xfrm>
           <a:prstGeom prst="rect">
@@ -6228,7 +7958,7 @@
               <a:buNone/>
             </a:pPr>
             <a:r>
-              <a:rPr lang="en-US" sz="1250" dirty="0">
+              <a:rPr lang="en-US" sz="1150" dirty="0">
                 <a:solidFill>
                   <a:srgbClr val="1B2B3A"/>
                 </a:solidFill>
@@ -6238,20 +7968,20 @@
               </a:rPr>
               <a:t>Prompt chính thức của LongMemEval, theo từng loại câu hỏi</a:t>
             </a:r>
-            <a:endParaRPr lang="en-US" sz="1250" dirty="0"/>
-          </a:p>
-        </p:txBody>
-      </p:sp>
-      <p:sp>
-        <p:nvSpPr>
-          <p:cNvPr id="16" name="Text 13"/>
+            <a:endParaRPr lang="en-US" sz="1150" dirty="0"/>
+          </a:p>
+        </p:txBody>
+      </p:sp>
+      <p:sp>
+        <p:nvSpPr>
+          <p:cNvPr id="15" name="Text 12"/>
           <p:cNvSpPr txBox="1"/>
           <p:nvPr/>
         </p:nvSpPr>
         <p:spPr>
           <a:xfrm>
-            <a:off x="457200" y="4023360"/>
-            <a:ext cx="2011680" cy="457200"/>
+            <a:off x="457200" y="3703320"/>
+            <a:ext cx="2103120" cy="457200"/>
           </a:xfrm>
           <a:prstGeom prst="rect">
             <a:avLst/>
@@ -6267,29 +7997,29 @@
               <a:buNone/>
             </a:pPr>
             <a:r>
-              <a:rPr lang="en-US" sz="1250" b="1" dirty="0">
+              <a:rPr lang="en-US" sz="1200" b="1" dirty="0">
                 <a:solidFill>
-                  <a:srgbClr val="1F6F8B"/>
+                  <a:srgbClr val="F2A541"/>
                 </a:solidFill>
                 <a:latin typeface="Calibri" pitchFamily="34" charset="0"/>
                 <a:ea typeface="Calibri" pitchFamily="34" charset="-122"/>
                 <a:cs typeface="Calibri" pitchFamily="34" charset="-120"/>
               </a:rPr>
-              <a:t>Truy xuất</a:t>
-            </a:r>
-            <a:endParaRPr lang="en-US" sz="1250" dirty="0"/>
-          </a:p>
-        </p:txBody>
-      </p:sp>
-      <p:sp>
-        <p:nvSpPr>
-          <p:cNvPr id="17" name="Text 14"/>
+              <a:t>LightMem</a:t>
+            </a:r>
+            <a:endParaRPr lang="en-US" sz="1200" dirty="0"/>
+          </a:p>
+        </p:txBody>
+      </p:sp>
+      <p:sp>
+        <p:nvSpPr>
+          <p:cNvPr id="16" name="Text 13"/>
           <p:cNvSpPr txBox="1"/>
           <p:nvPr/>
         </p:nvSpPr>
         <p:spPr>
           <a:xfrm>
-            <a:off x="2468880" y="4023360"/>
+            <a:off x="2560320" y="3703320"/>
             <a:ext cx="3749040" cy="457200"/>
           </a:xfrm>
           <a:prstGeom prst="rect">
@@ -6306,7 +8036,7 @@
               <a:buNone/>
             </a:pPr>
             <a:r>
-              <a:rPr lang="en-US" sz="1250" dirty="0">
+              <a:rPr lang="en-US" sz="1150" dirty="0">
                 <a:solidFill>
                   <a:srgbClr val="1B2B3A"/>
                 </a:solidFill>
@@ -6314,15 +8044,93 @@
                 <a:ea typeface="Calibri" pitchFamily="34" charset="-122"/>
                 <a:cs typeface="Calibri" pitchFamily="34" charset="-120"/>
               </a:rPr>
-              <a:t>Top-20 ký ức, embedding all-MiniLM-L6-v2</a:t>
-            </a:r>
-            <a:endParaRPr lang="en-US" sz="1250" dirty="0"/>
-          </a:p>
-        </p:txBody>
-      </p:sp>
-      <p:sp>
-        <p:nvSpPr>
-          <p:cNvPr id="18" name="Shape 15"/>
+              <a:t>Top-20 ký ức, MiniLM. Chỉ lưu lượt của người dùng</a:t>
+            </a:r>
+            <a:endParaRPr lang="en-US" sz="1150" dirty="0"/>
+          </a:p>
+        </p:txBody>
+      </p:sp>
+      <p:sp>
+        <p:nvSpPr>
+          <p:cNvPr id="17" name="Text 14"/>
+          <p:cNvSpPr txBox="1"/>
+          <p:nvPr/>
+        </p:nvSpPr>
+        <p:spPr>
+          <a:xfrm>
+            <a:off x="457200" y="4206240"/>
+            <a:ext cx="2103120" cy="457200"/>
+          </a:xfrm>
+          <a:prstGeom prst="rect">
+            <a:avLst/>
+          </a:prstGeom>
+          <a:noFill/>
+          <a:ln/>
+        </p:spPr>
+        <p:txBody>
+          <a:bodyPr wrap="square" lIns="0" tIns="0" rIns="0" bIns="0" rtlCol="0" anchor="ctr"/>
+          <a:lstStyle/>
+          <a:p>
+            <a:pPr indent="0" marL="0">
+              <a:buNone/>
+            </a:pPr>
+            <a:r>
+              <a:rPr lang="en-US" sz="1200" b="1" dirty="0">
+                <a:solidFill>
+                  <a:srgbClr val="F2A541"/>
+                </a:solidFill>
+                <a:latin typeface="Calibri" pitchFamily="34" charset="0"/>
+                <a:ea typeface="Calibri" pitchFamily="34" charset="-122"/>
+                <a:cs typeface="Calibri" pitchFamily="34" charset="-120"/>
+              </a:rPr>
+              <a:t>APEX-MEM</a:t>
+            </a:r>
+            <a:endParaRPr lang="en-US" sz="1200" dirty="0"/>
+          </a:p>
+        </p:txBody>
+      </p:sp>
+      <p:sp>
+        <p:nvSpPr>
+          <p:cNvPr id="18" name="Text 15"/>
+          <p:cNvSpPr txBox="1"/>
+          <p:nvPr/>
+        </p:nvSpPr>
+        <p:spPr>
+          <a:xfrm>
+            <a:off x="2560320" y="4206240"/>
+            <a:ext cx="3749040" cy="457200"/>
+          </a:xfrm>
+          <a:prstGeom prst="rect">
+            <a:avLst/>
+          </a:prstGeom>
+          <a:noFill/>
+          <a:ln/>
+        </p:spPr>
+        <p:txBody>
+          <a:bodyPr wrap="square" lIns="0" tIns="0" rIns="0" bIns="0" rtlCol="0" anchor="ctr"/>
+          <a:lstStyle/>
+          <a:p>
+            <a:pPr indent="0" marL="0">
+              <a:buNone/>
+            </a:pPr>
+            <a:r>
+              <a:rPr lang="en-US" sz="1150" dirty="0">
+                <a:solidFill>
+                  <a:srgbClr val="1B2B3A"/>
+                </a:solidFill>
+                <a:latin typeface="Calibri" pitchFamily="34" charset="0"/>
+                <a:ea typeface="Calibri" pitchFamily="34" charset="-122"/>
+                <a:cs typeface="Calibri" pitchFamily="34" charset="-120"/>
+              </a:rPr>
+              <a:t>Đồ thị SQLite, agent ReAct ≤ 20 bước, BGE-M3. Lưu cả lượt trợ lý</a:t>
+            </a:r>
+            <a:endParaRPr lang="en-US" sz="1150" dirty="0"/>
+          </a:p>
+        </p:txBody>
+      </p:sp>
+      <p:sp>
+        <p:nvSpPr>
+          <p:cNvPr id="19" name="Shape 16"/>
           <p:cNvSpPr/>
           <p:nvPr/>
         </p:nvSpPr>
@@ -6347,7 +8155,7 @@
       </p:sp>
       <p:sp>
         <p:nvSpPr>
-          <p:cNvPr id="19" name="Text 16"/>
+          <p:cNvPr id="20" name="Text 17"/>
           <p:cNvSpPr txBox="1"/>
           <p:nvPr/>
         </p:nvSpPr>
@@ -6386,7 +8194,7 @@
       </p:sp>
       <p:sp>
         <p:nvSpPr>
-          <p:cNvPr id="20" name="Text 17"/>
+          <p:cNvPr id="21" name="Text 18"/>
           <p:cNvSpPr txBox="1"/>
           <p:nvPr/>
         </p:nvSpPr>
@@ -6425,7 +8233,7 @@
       </p:sp>
       <p:sp>
         <p:nvSpPr>
-          <p:cNvPr id="21" name="Text 18"/>
+          <p:cNvPr id="22" name="Text 19"/>
           <p:cNvSpPr txBox="1"/>
           <p:nvPr/>
         </p:nvSpPr>
@@ -6464,7 +8272,7 @@
       </p:sp>
       <p:sp>
         <p:nvSpPr>
-          <p:cNvPr id="22" name="Text 19"/>
+          <p:cNvPr id="23" name="Text 20"/>
           <p:cNvSpPr txBox="1"/>
           <p:nvPr/>
         </p:nvSpPr>
@@ -6566,7 +8374,7 @@
                 <a:ea typeface="Calibri" pitchFamily="34" charset="-122"/>
                 <a:cs typeface="Calibri" pitchFamily="34" charset="-120"/>
               </a:rPr>
-              <a:t>TIẾN ĐỘ</a:t>
+              <a:t>SO SÁNH TRỰC TIẾP</a:t>
             </a:r>
             <a:endParaRPr lang="en-US" sz="1100" dirty="0"/>
           </a:p>
@@ -6605,21 +8413,62 @@
                 <a:ea typeface="Cambria" pitchFamily="34" charset="-122"/>
                 <a:cs typeface="Cambria" pitchFamily="34" charset="-120"/>
               </a:rPr>
-              <a:t>Tiến độ chạy tập dev theo loại câu hỏi</a:t>
+              <a:t>APEX-MEM 84,7%, LightMem 81,3%: chưa khác biệt</a:t>
             </a:r>
             <a:endParaRPr lang="en-US" sz="2600" dirty="0"/>
           </a:p>
         </p:txBody>
       </p:sp>
-      <p:sp>
-        <p:nvSpPr>
-          <p:cNvPr id="4" name="Text 2"/>
+      <p:graphicFrame>
+        <p:nvGraphicFramePr>
+          <p:cNvPr id="5" name="Chart 0" descr=""/>
+          <p:cNvGraphicFramePr/>
+          <p:nvPr/>
+        </p:nvGraphicFramePr>
+        <p:xfrm>
+          <a:off x="365760" y="1097280"/>
+          <a:ext cx="5760720" cy="3154680"/>
+        </p:xfrm>
+        <a:graphic xmlns:a="http://schemas.openxmlformats.org/drawingml/2006/main">
+          <a:graphicData uri="http://schemas.openxmlformats.org/drawingml/2006/chart">
+            <c:chart xmlns:c="http://schemas.openxmlformats.org/drawingml/2006/chart" r:id="rId1"/>
+          </a:graphicData>
+        </a:graphic>
+      </p:graphicFrame>
+      <p:sp>
+        <p:nvSpPr>
+          <p:cNvPr id="6" name="Shape 2"/>
+          <p:cNvSpPr/>
+          <p:nvPr/>
+        </p:nvSpPr>
+        <p:spPr>
+          <a:xfrm>
+            <a:off x="6309360" y="1188720"/>
+            <a:ext cx="2377440" cy="1417320"/>
+          </a:xfrm>
+          <a:prstGeom prst="rect">
+            <a:avLst/>
+          </a:prstGeom>
+          <a:solidFill>
+            <a:srgbClr val="FFFFFF"/>
+          </a:solidFill>
+          <a:ln w="9525">
+            <a:solidFill>
+              <a:srgbClr val="DCE3EA"/>
+            </a:solidFill>
+            <a:prstDash val="solid"/>
+          </a:ln>
+        </p:spPr>
+      </p:sp>
+      <p:sp>
+        <p:nvSpPr>
+          <p:cNvPr id="7" name="Text 3"/>
           <p:cNvSpPr txBox="1"/>
           <p:nvPr/>
         </p:nvSpPr>
         <p:spPr>
           <a:xfrm>
-            <a:off x="6309360" y="274320"/>
+            <a:off x="6309360" y="1261872"/>
             <a:ext cx="2377440" cy="274320"/>
           </a:xfrm>
           <a:prstGeom prst="rect">
@@ -6632,11 +8481,373 @@
           <a:bodyPr wrap="square" lIns="0" tIns="0" rIns="0" bIns="0" rtlCol="0" anchor="ctr"/>
           <a:lstStyle/>
           <a:p>
-            <a:pPr algn="r" indent="0" marL="0">
+            <a:pPr algn="ctr" indent="0" marL="0">
               <a:buNone/>
             </a:pPr>
             <a:r>
-              <a:rPr lang="en-US" sz="1000" b="1" dirty="0">
+              <a:rPr lang="en-US" sz="1200" b="1" dirty="0">
+                <a:solidFill>
+                  <a:srgbClr val="1F6F8B"/>
+                </a:solidFill>
+                <a:latin typeface="Calibri" pitchFamily="34" charset="0"/>
+                <a:ea typeface="Calibri" pitchFamily="34" charset="-122"/>
+                <a:cs typeface="Calibri" pitchFamily="34" charset="-120"/>
+              </a:rPr>
+              <a:t>APEX-MEM</a:t>
+            </a:r>
+            <a:endParaRPr lang="en-US" sz="1200" dirty="0"/>
+          </a:p>
+        </p:txBody>
+      </p:sp>
+      <p:sp>
+        <p:nvSpPr>
+          <p:cNvPr id="8" name="Text 4"/>
+          <p:cNvSpPr txBox="1"/>
+          <p:nvPr/>
+        </p:nvSpPr>
+        <p:spPr>
+          <a:xfrm>
+            <a:off x="6309360" y="1536192"/>
+            <a:ext cx="2377440" cy="594360"/>
+          </a:xfrm>
+          <a:prstGeom prst="rect">
+            <a:avLst/>
+          </a:prstGeom>
+          <a:noFill/>
+          <a:ln/>
+        </p:spPr>
+        <p:txBody>
+          <a:bodyPr wrap="square" lIns="0" tIns="0" rIns="0" bIns="0" rtlCol="0" anchor="ctr"/>
+          <a:lstStyle/>
+          <a:p>
+            <a:pPr algn="ctr" indent="0" marL="0">
+              <a:buNone/>
+            </a:pPr>
+            <a:r>
+              <a:rPr lang="en-US" sz="3200" b="1" dirty="0">
+                <a:solidFill>
+                  <a:srgbClr val="10243E"/>
+                </a:solidFill>
+                <a:latin typeface="Cambria" pitchFamily="34" charset="0"/>
+                <a:ea typeface="Cambria" pitchFamily="34" charset="-122"/>
+                <a:cs typeface="Cambria" pitchFamily="34" charset="-120"/>
+              </a:rPr>
+              <a:t>84,7%</a:t>
+            </a:r>
+            <a:endParaRPr lang="en-US" sz="3200" dirty="0"/>
+          </a:p>
+        </p:txBody>
+      </p:sp>
+      <p:sp>
+        <p:nvSpPr>
+          <p:cNvPr id="9" name="Text 5"/>
+          <p:cNvSpPr txBox="1"/>
+          <p:nvPr/>
+        </p:nvSpPr>
+        <p:spPr>
+          <a:xfrm>
+            <a:off x="6309360" y="2103120"/>
+            <a:ext cx="2377440" cy="228600"/>
+          </a:xfrm>
+          <a:prstGeom prst="rect">
+            <a:avLst/>
+          </a:prstGeom>
+          <a:noFill/>
+          <a:ln/>
+        </p:spPr>
+        <p:txBody>
+          <a:bodyPr wrap="square" lIns="0" tIns="0" rIns="0" bIns="0" rtlCol="0" anchor="ctr"/>
+          <a:lstStyle/>
+          <a:p>
+            <a:pPr algn="ctr" indent="0" marL="0">
+              <a:buNone/>
+            </a:pPr>
+            <a:r>
+              <a:rPr lang="en-US" sz="950" dirty="0">
+                <a:solidFill>
+                  <a:srgbClr val="5B6B7A"/>
+                </a:solidFill>
+                <a:latin typeface="Calibri" pitchFamily="34" charset="0"/>
+                <a:ea typeface="Calibri" pitchFamily="34" charset="-122"/>
+                <a:cs typeface="Calibri" pitchFamily="34" charset="-120"/>
+              </a:rPr>
+              <a:t>gộp chung 127/150 · KTC 95% 78–90%</a:t>
+            </a:r>
+            <a:endParaRPr lang="en-US" sz="950" dirty="0"/>
+          </a:p>
+        </p:txBody>
+      </p:sp>
+      <p:sp>
+        <p:nvSpPr>
+          <p:cNvPr id="10" name="Text 6"/>
+          <p:cNvSpPr txBox="1"/>
+          <p:nvPr/>
+        </p:nvSpPr>
+        <p:spPr>
+          <a:xfrm>
+            <a:off x="6309360" y="2322576"/>
+            <a:ext cx="2377440" cy="228600"/>
+          </a:xfrm>
+          <a:prstGeom prst="rect">
+            <a:avLst/>
+          </a:prstGeom>
+          <a:noFill/>
+          <a:ln/>
+        </p:spPr>
+        <p:txBody>
+          <a:bodyPr wrap="square" lIns="0" tIns="0" rIns="0" bIns="0" rtlCol="0" anchor="ctr"/>
+          <a:lstStyle/>
+          <a:p>
+            <a:pPr algn="ctr" indent="0" marL="0">
+              <a:buNone/>
+            </a:pPr>
+            <a:r>
+              <a:rPr lang="en-US" sz="950" dirty="0">
+                <a:solidFill>
+                  <a:srgbClr val="5B6B7A"/>
+                </a:solidFill>
+                <a:latin typeface="Calibri" pitchFamily="34" charset="0"/>
+                <a:ea typeface="Calibri" pitchFamily="34" charset="-122"/>
+                <a:cs typeface="Calibri" pitchFamily="34" charset="-120"/>
+              </a:rPr>
+              <a:t>theo loại (macro) 84,6%</a:t>
+            </a:r>
+            <a:endParaRPr lang="en-US" sz="950" dirty="0"/>
+          </a:p>
+        </p:txBody>
+      </p:sp>
+      <p:sp>
+        <p:nvSpPr>
+          <p:cNvPr id="11" name="Shape 7"/>
+          <p:cNvSpPr/>
+          <p:nvPr/>
+        </p:nvSpPr>
+        <p:spPr>
+          <a:xfrm>
+            <a:off x="6309360" y="2743200"/>
+            <a:ext cx="2377440" cy="1417320"/>
+          </a:xfrm>
+          <a:prstGeom prst="rect">
+            <a:avLst/>
+          </a:prstGeom>
+          <a:solidFill>
+            <a:srgbClr val="FFFFFF"/>
+          </a:solidFill>
+          <a:ln w="9525">
+            <a:solidFill>
+              <a:srgbClr val="DCE3EA"/>
+            </a:solidFill>
+            <a:prstDash val="solid"/>
+          </a:ln>
+        </p:spPr>
+      </p:sp>
+      <p:sp>
+        <p:nvSpPr>
+          <p:cNvPr id="12" name="Text 8"/>
+          <p:cNvSpPr txBox="1"/>
+          <p:nvPr/>
+        </p:nvSpPr>
+        <p:spPr>
+          <a:xfrm>
+            <a:off x="6309360" y="2816352"/>
+            <a:ext cx="2377440" cy="274320"/>
+          </a:xfrm>
+          <a:prstGeom prst="rect">
+            <a:avLst/>
+          </a:prstGeom>
+          <a:noFill/>
+          <a:ln/>
+        </p:spPr>
+        <p:txBody>
+          <a:bodyPr wrap="square" lIns="0" tIns="0" rIns="0" bIns="0" rtlCol="0" anchor="ctr"/>
+          <a:lstStyle/>
+          <a:p>
+            <a:pPr algn="ctr" indent="0" marL="0">
+              <a:buNone/>
+            </a:pPr>
+            <a:r>
+              <a:rPr lang="en-US" sz="1200" b="1" dirty="0">
+                <a:solidFill>
+                  <a:srgbClr val="F2A541"/>
+                </a:solidFill>
+                <a:latin typeface="Calibri" pitchFamily="34" charset="0"/>
+                <a:ea typeface="Calibri" pitchFamily="34" charset="-122"/>
+                <a:cs typeface="Calibri" pitchFamily="34" charset="-120"/>
+              </a:rPr>
+              <a:t>LightMem</a:t>
+            </a:r>
+            <a:endParaRPr lang="en-US" sz="1200" dirty="0"/>
+          </a:p>
+        </p:txBody>
+      </p:sp>
+      <p:sp>
+        <p:nvSpPr>
+          <p:cNvPr id="13" name="Text 9"/>
+          <p:cNvSpPr txBox="1"/>
+          <p:nvPr/>
+        </p:nvSpPr>
+        <p:spPr>
+          <a:xfrm>
+            <a:off x="6309360" y="3090672"/>
+            <a:ext cx="2377440" cy="594360"/>
+          </a:xfrm>
+          <a:prstGeom prst="rect">
+            <a:avLst/>
+          </a:prstGeom>
+          <a:noFill/>
+          <a:ln/>
+        </p:spPr>
+        <p:txBody>
+          <a:bodyPr wrap="square" lIns="0" tIns="0" rIns="0" bIns="0" rtlCol="0" anchor="ctr"/>
+          <a:lstStyle/>
+          <a:p>
+            <a:pPr algn="ctr" indent="0" marL="0">
+              <a:buNone/>
+            </a:pPr>
+            <a:r>
+              <a:rPr lang="en-US" sz="3200" b="1" dirty="0">
+                <a:solidFill>
+                  <a:srgbClr val="10243E"/>
+                </a:solidFill>
+                <a:latin typeface="Cambria" pitchFamily="34" charset="0"/>
+                <a:ea typeface="Cambria" pitchFamily="34" charset="-122"/>
+                <a:cs typeface="Cambria" pitchFamily="34" charset="-120"/>
+              </a:rPr>
+              <a:t>81,3%</a:t>
+            </a:r>
+            <a:endParaRPr lang="en-US" sz="3200" dirty="0"/>
+          </a:p>
+        </p:txBody>
+      </p:sp>
+      <p:sp>
+        <p:nvSpPr>
+          <p:cNvPr id="14" name="Text 10"/>
+          <p:cNvSpPr txBox="1"/>
+          <p:nvPr/>
+        </p:nvSpPr>
+        <p:spPr>
+          <a:xfrm>
+            <a:off x="6309360" y="3657600"/>
+            <a:ext cx="2377440" cy="228600"/>
+          </a:xfrm>
+          <a:prstGeom prst="rect">
+            <a:avLst/>
+          </a:prstGeom>
+          <a:noFill/>
+          <a:ln/>
+        </p:spPr>
+        <p:txBody>
+          <a:bodyPr wrap="square" lIns="0" tIns="0" rIns="0" bIns="0" rtlCol="0" anchor="ctr"/>
+          <a:lstStyle/>
+          <a:p>
+            <a:pPr algn="ctr" indent="0" marL="0">
+              <a:buNone/>
+            </a:pPr>
+            <a:r>
+              <a:rPr lang="en-US" sz="950" dirty="0">
+                <a:solidFill>
+                  <a:srgbClr val="5B6B7A"/>
+                </a:solidFill>
+                <a:latin typeface="Calibri" pitchFamily="34" charset="0"/>
+                <a:ea typeface="Calibri" pitchFamily="34" charset="-122"/>
+                <a:cs typeface="Calibri" pitchFamily="34" charset="-120"/>
+              </a:rPr>
+              <a:t>gộp chung 122/150 · KTC 95% 74–87%</a:t>
+            </a:r>
+            <a:endParaRPr lang="en-US" sz="950" dirty="0"/>
+          </a:p>
+        </p:txBody>
+      </p:sp>
+      <p:sp>
+        <p:nvSpPr>
+          <p:cNvPr id="15" name="Text 11"/>
+          <p:cNvSpPr txBox="1"/>
+          <p:nvPr/>
+        </p:nvSpPr>
+        <p:spPr>
+          <a:xfrm>
+            <a:off x="6309360" y="3877056"/>
+            <a:ext cx="2377440" cy="228600"/>
+          </a:xfrm>
+          <a:prstGeom prst="rect">
+            <a:avLst/>
+          </a:prstGeom>
+          <a:noFill/>
+          <a:ln/>
+        </p:spPr>
+        <p:txBody>
+          <a:bodyPr wrap="square" lIns="0" tIns="0" rIns="0" bIns="0" rtlCol="0" anchor="ctr"/>
+          <a:lstStyle/>
+          <a:p>
+            <a:pPr algn="ctr" indent="0" marL="0">
+              <a:buNone/>
+            </a:pPr>
+            <a:r>
+              <a:rPr lang="en-US" sz="950" dirty="0">
+                <a:solidFill>
+                  <a:srgbClr val="5B6B7A"/>
+                </a:solidFill>
+                <a:latin typeface="Calibri" pitchFamily="34" charset="0"/>
+                <a:ea typeface="Calibri" pitchFamily="34" charset="-122"/>
+                <a:cs typeface="Calibri" pitchFamily="34" charset="-120"/>
+              </a:rPr>
+              <a:t>theo loại (macro) 78,9%</a:t>
+            </a:r>
+            <a:endParaRPr lang="en-US" sz="950" dirty="0"/>
+          </a:p>
+        </p:txBody>
+      </p:sp>
+      <p:sp>
+        <p:nvSpPr>
+          <p:cNvPr id="16" name="Shape 12"/>
+          <p:cNvSpPr/>
+          <p:nvPr/>
+        </p:nvSpPr>
+        <p:spPr>
+          <a:xfrm>
+            <a:off x="365760" y="4389120"/>
+            <a:ext cx="8321040" cy="502920"/>
+          </a:xfrm>
+          <a:prstGeom prst="rect">
+            <a:avLst/>
+          </a:prstGeom>
+          <a:solidFill>
+            <a:srgbClr val="FDF3E1"/>
+          </a:solidFill>
+          <a:ln w="9525">
+            <a:solidFill>
+              <a:srgbClr val="DCE3EA"/>
+            </a:solidFill>
+            <a:prstDash val="solid"/>
+          </a:ln>
+        </p:spPr>
+      </p:sp>
+      <p:sp>
+        <p:nvSpPr>
+          <p:cNvPr id="17" name="Text 13"/>
+          <p:cNvSpPr txBox="1"/>
+          <p:nvPr/>
+        </p:nvSpPr>
+        <p:spPr>
+          <a:xfrm>
+            <a:off x="548640" y="4416552"/>
+            <a:ext cx="7955280" cy="457200"/>
+          </a:xfrm>
+          <a:prstGeom prst="rect">
+            <a:avLst/>
+          </a:prstGeom>
+          <a:noFill/>
+          <a:ln/>
+        </p:spPr>
+        <p:txBody>
+          <a:bodyPr wrap="square" lIns="0" tIns="0" rIns="0" bIns="0" rtlCol="0" anchor="ctr"/>
+          <a:lstStyle/>
+          <a:p>
+            <a:pPr indent="0" marL="0">
+              <a:buNone/>
+            </a:pPr>
+            <a:r>
+              <a:rPr lang="en-US" sz="1050" b="1" dirty="0">
                 <a:solidFill>
                   <a:srgbClr val="C8553D"/>
                 </a:solidFill>
@@ -6644,28 +8855,26 @@
                 <a:ea typeface="Calibri" pitchFamily="34" charset="-122"/>
                 <a:cs typeface="Calibri" pitchFamily="34" charset="-120"/>
               </a:rPr>
-              <a:t>Số liệu sơ bộ: 125/150 câu dev</a:t>
-            </a:r>
-            <a:endParaRPr lang="en-US" sz="1000" dirty="0"/>
-          </a:p>
-        </p:txBody>
-      </p:sp>
-      <p:graphicFrame>
-        <p:nvGraphicFramePr>
-          <p:cNvPr id="6" name="Chart 0" descr=""/>
-          <p:cNvGraphicFramePr/>
-          <p:nvPr/>
-        </p:nvGraphicFramePr>
-        <p:xfrm>
-          <a:off x="457200" y="1188720"/>
-          <a:ext cx="8229600" cy="3383280"/>
-        </p:xfrm>
-        <a:graphic xmlns:a="http://schemas.openxmlformats.org/drawingml/2006/main">
-          <a:graphicData uri="http://schemas.openxmlformats.org/drawingml/2006/chart">
-            <c:chart xmlns:c="http://schemas.openxmlformats.org/drawingml/2006/chart" r:id="rId1"/>
-          </a:graphicData>
-        </a:graphic>
-      </p:graphicFrame>
+              <a:t>Đọc đúng mức: </a:t>
+            </a:r>
+            <a:pPr indent="0" marL="0">
+              <a:buNone/>
+            </a:pPr>
+            <a:r>
+              <a:rPr lang="en-US" sz="1050" dirty="0">
+                <a:solidFill>
+                  <a:srgbClr val="1B2B3A"/>
+                </a:solidFill>
+                <a:latin typeface="Calibri" pitchFamily="34" charset="0"/>
+                <a:ea typeface="Calibri" pitchFamily="34" charset="-122"/>
+                <a:cs typeface="Calibri" pitchFamily="34" charset="-120"/>
+              </a:rPr>
+              <a:t>chênh 5 câu trên 150 câu; nhóm câu từ chối (_abs) chỉ có 4 câu (APEX-MEM 3, LightMem 2). Cả hai hệ cùng model nên khác biệt đến từ cách lưu và truy xuất ký ức.</a:t>
+            </a:r>
+            <a:endParaRPr lang="en-US" sz="1050" dirty="0"/>
+          </a:p>
+        </p:txBody>
+      </p:sp>
     </p:spTree>
   </p:cSld>
   <p:clrMapOvr>
@@ -6731,7 +8940,7 @@
                 <a:ea typeface="Calibri" pitchFamily="34" charset="-122"/>
                 <a:cs typeface="Calibri" pitchFamily="34" charset="-120"/>
               </a:rPr>
-              <a:t>KẾT QUẢ</a:t>
+              <a:t>CHÊNH LỆCH ĐẾN TỪ ĐÂU</a:t>
             </a:r>
             <a:endParaRPr lang="en-US" sz="1100" dirty="0"/>
           </a:p>
@@ -6770,7 +8979,7 @@
                 <a:ea typeface="Cambria" pitchFamily="34" charset="-122"/>
                 <a:cs typeface="Cambria" pitchFamily="34" charset="-120"/>
               </a:rPr>
-              <a:t>Năm loại đạt 78–100%, riêng lượt trợ lý 33%</a:t>
+              <a:t>Toàn bộ chênh lệch nằm ở loại lượt trợ lý</a:t>
             </a:r>
             <a:endParaRPr lang="en-US" sz="2600" dirty="0"/>
           </a:p>
@@ -6778,69 +8987,14 @@
       </p:sp>
       <p:sp>
         <p:nvSpPr>
-          <p:cNvPr id="4" name="Text 2"/>
-          <p:cNvSpPr txBox="1"/>
-          <p:nvPr/>
-        </p:nvSpPr>
-        <p:spPr>
-          <a:xfrm>
-            <a:off x="6309360" y="274320"/>
-            <a:ext cx="2377440" cy="274320"/>
-          </a:xfrm>
-          <a:prstGeom prst="rect">
-            <a:avLst/>
-          </a:prstGeom>
-          <a:noFill/>
-          <a:ln/>
-        </p:spPr>
-        <p:txBody>
-          <a:bodyPr wrap="square" lIns="0" tIns="0" rIns="0" bIns="0" rtlCol="0" anchor="ctr"/>
-          <a:lstStyle/>
-          <a:p>
-            <a:pPr algn="r" indent="0" marL="0">
-              <a:buNone/>
-            </a:pPr>
-            <a:r>
-              <a:rPr lang="en-US" sz="1000" b="1" dirty="0">
-                <a:solidFill>
-                  <a:srgbClr val="C8553D"/>
-                </a:solidFill>
-                <a:latin typeface="Calibri" pitchFamily="34" charset="0"/>
-                <a:ea typeface="Calibri" pitchFamily="34" charset="-122"/>
-                <a:cs typeface="Calibri" pitchFamily="34" charset="-120"/>
-              </a:rPr>
-              <a:t>Số liệu sơ bộ: 125/150 câu dev</a:t>
-            </a:r>
-            <a:endParaRPr lang="en-US" sz="1000" dirty="0"/>
-          </a:p>
-        </p:txBody>
-      </p:sp>
-      <p:graphicFrame>
-        <p:nvGraphicFramePr>
-          <p:cNvPr id="6" name="Chart 0" descr=""/>
-          <p:cNvGraphicFramePr/>
-          <p:nvPr/>
-        </p:nvGraphicFramePr>
-        <p:xfrm>
-          <a:off x="365760" y="1143000"/>
-          <a:ext cx="5212080" cy="2926080"/>
-        </p:xfrm>
-        <a:graphic xmlns:a="http://schemas.openxmlformats.org/drawingml/2006/main">
-          <a:graphicData uri="http://schemas.openxmlformats.org/drawingml/2006/chart">
-            <c:chart xmlns:c="http://schemas.openxmlformats.org/drawingml/2006/chart" r:id="rId1"/>
-          </a:graphicData>
-        </a:graphic>
-      </p:graphicFrame>
-      <p:sp>
-        <p:nvSpPr>
-          <p:cNvPr id="7" name="Shape 3"/>
+          <p:cNvPr id="5" name="Shape 2"/>
           <p:cNvSpPr/>
           <p:nvPr/>
         </p:nvSpPr>
         <p:spPr>
           <a:xfrm>
-            <a:off x="5760720" y="1143000"/>
-            <a:ext cx="2926080" cy="914400"/>
+            <a:off x="365760" y="1188720"/>
+            <a:ext cx="2057400" cy="1280160"/>
           </a:xfrm>
           <a:prstGeom prst="rect">
             <a:avLst/>
@@ -6858,14 +9012,14 @@
       </p:sp>
       <p:sp>
         <p:nvSpPr>
-          <p:cNvPr id="8" name="Text 4"/>
+          <p:cNvPr id="6" name="Text 3"/>
           <p:cNvSpPr txBox="1"/>
           <p:nvPr/>
         </p:nvSpPr>
         <p:spPr>
           <a:xfrm>
-            <a:off x="5760720" y="1188720"/>
-            <a:ext cx="2926080" cy="566928"/>
+            <a:off x="365760" y="1298448"/>
+            <a:ext cx="2057400" cy="685800"/>
           </a:xfrm>
           <a:prstGeom prst="rect">
             <a:avLst/>
@@ -6881,7 +9035,7 @@
               <a:buNone/>
             </a:pPr>
             <a:r>
-              <a:rPr lang="en-US" sz="3200" b="1" dirty="0">
+              <a:rPr lang="en-US" sz="3800" b="1" dirty="0">
                 <a:solidFill>
                   <a:srgbClr val="1F6F8B"/>
                 </a:solidFill>
@@ -6889,22 +9043,22 @@
                 <a:ea typeface="Cambria" pitchFamily="34" charset="-122"/>
                 <a:cs typeface="Cambria" pitchFamily="34" charset="-120"/>
               </a:rPr>
-              <a:t>79,0%</a:t>
-            </a:r>
-            <a:endParaRPr lang="en-US" sz="3200" dirty="0"/>
-          </a:p>
-        </p:txBody>
-      </p:sp>
-      <p:sp>
-        <p:nvSpPr>
-          <p:cNvPr id="9" name="Text 5"/>
+              <a:t>107</a:t>
+            </a:r>
+            <a:endParaRPr lang="en-US" sz="3800" dirty="0"/>
+          </a:p>
+        </p:txBody>
+      </p:sp>
+      <p:sp>
+        <p:nvSpPr>
+          <p:cNvPr id="7" name="Text 4"/>
           <p:cNvSpPr txBox="1"/>
           <p:nvPr/>
         </p:nvSpPr>
         <p:spPr>
           <a:xfrm>
-            <a:off x="5760720" y="1737360"/>
-            <a:ext cx="2926080" cy="274320"/>
+            <a:off x="365760" y="2011680"/>
+            <a:ext cx="2057400" cy="274320"/>
           </a:xfrm>
           <a:prstGeom prst="rect">
             <a:avLst/>
@@ -6920,30 +9074,1236 @@
               <a:buNone/>
             </a:pPr>
             <a:r>
-              <a:rPr lang="en-US" sz="1050" dirty="0">
+              <a:rPr lang="en-US" sz="1150" dirty="0">
                 <a:solidFill>
-                  <a:srgbClr val="5B6B7A"/>
+                  <a:srgbClr val="1B2B3A"/>
                 </a:solidFill>
                 <a:latin typeface="Calibri" pitchFamily="34" charset="0"/>
                 <a:ea typeface="Calibri" pitchFamily="34" charset="-122"/>
                 <a:cs typeface="Calibri" pitchFamily="34" charset="-120"/>
               </a:rPr>
-              <a:t>macro-average, 6/6 loại · micro 84,0%</a:t>
-            </a:r>
-            <a:endParaRPr lang="en-US" sz="1050" dirty="0"/>
-          </a:p>
-        </p:txBody>
-      </p:sp>
-      <p:sp>
-        <p:nvSpPr>
-          <p:cNvPr id="10" name="Shape 6"/>
+              <a:t>cả hai đúng</a:t>
+            </a:r>
+            <a:endParaRPr lang="en-US" sz="1150" dirty="0"/>
+          </a:p>
+        </p:txBody>
+      </p:sp>
+      <p:sp>
+        <p:nvSpPr>
+          <p:cNvPr id="8" name="Shape 5"/>
           <p:cNvSpPr/>
           <p:nvPr/>
         </p:nvSpPr>
         <p:spPr>
           <a:xfrm>
-            <a:off x="5760720" y="2240280"/>
-            <a:ext cx="2926080" cy="1828800"/>
+            <a:off x="2514600" y="1188720"/>
+            <a:ext cx="2057400" cy="1280160"/>
+          </a:xfrm>
+          <a:prstGeom prst="rect">
+            <a:avLst/>
+          </a:prstGeom>
+          <a:solidFill>
+            <a:srgbClr val="E4F1F5"/>
+          </a:solidFill>
+          <a:ln w="9525">
+            <a:solidFill>
+              <a:srgbClr val="DCE3EA"/>
+            </a:solidFill>
+            <a:prstDash val="solid"/>
+          </a:ln>
+        </p:spPr>
+      </p:sp>
+      <p:sp>
+        <p:nvSpPr>
+          <p:cNvPr id="9" name="Text 6"/>
+          <p:cNvSpPr txBox="1"/>
+          <p:nvPr/>
+        </p:nvSpPr>
+        <p:spPr>
+          <a:xfrm>
+            <a:off x="2514600" y="1298448"/>
+            <a:ext cx="2057400" cy="685800"/>
+          </a:xfrm>
+          <a:prstGeom prst="rect">
+            <a:avLst/>
+          </a:prstGeom>
+          <a:noFill/>
+          <a:ln/>
+        </p:spPr>
+        <p:txBody>
+          <a:bodyPr wrap="square" lIns="0" tIns="0" rIns="0" bIns="0" rtlCol="0" anchor="ctr"/>
+          <a:lstStyle/>
+          <a:p>
+            <a:pPr algn="ctr" indent="0" marL="0">
+              <a:buNone/>
+            </a:pPr>
+            <a:r>
+              <a:rPr lang="en-US" sz="3800" b="1" dirty="0">
+                <a:solidFill>
+                  <a:srgbClr val="1F6F8B"/>
+                </a:solidFill>
+                <a:latin typeface="Cambria" pitchFamily="34" charset="0"/>
+                <a:ea typeface="Cambria" pitchFamily="34" charset="-122"/>
+                <a:cs typeface="Cambria" pitchFamily="34" charset="-120"/>
+              </a:rPr>
+              <a:t>20</a:t>
+            </a:r>
+            <a:endParaRPr lang="en-US" sz="3800" dirty="0"/>
+          </a:p>
+        </p:txBody>
+      </p:sp>
+      <p:sp>
+        <p:nvSpPr>
+          <p:cNvPr id="10" name="Text 7"/>
+          <p:cNvSpPr txBox="1"/>
+          <p:nvPr/>
+        </p:nvSpPr>
+        <p:spPr>
+          <a:xfrm>
+            <a:off x="2514600" y="2011680"/>
+            <a:ext cx="2057400" cy="274320"/>
+          </a:xfrm>
+          <a:prstGeom prst="rect">
+            <a:avLst/>
+          </a:prstGeom>
+          <a:noFill/>
+          <a:ln/>
+        </p:spPr>
+        <p:txBody>
+          <a:bodyPr wrap="square" lIns="0" tIns="0" rIns="0" bIns="0" rtlCol="0" anchor="ctr"/>
+          <a:lstStyle/>
+          <a:p>
+            <a:pPr algn="ctr" indent="0" marL="0">
+              <a:buNone/>
+            </a:pPr>
+            <a:r>
+              <a:rPr lang="en-US" sz="1150" dirty="0">
+                <a:solidFill>
+                  <a:srgbClr val="1B2B3A"/>
+                </a:solidFill>
+                <a:latin typeface="Calibri" pitchFamily="34" charset="0"/>
+                <a:ea typeface="Calibri" pitchFamily="34" charset="-122"/>
+                <a:cs typeface="Calibri" pitchFamily="34" charset="-120"/>
+              </a:rPr>
+              <a:t>chỉ APEX-MEM đúng</a:t>
+            </a:r>
+            <a:endParaRPr lang="en-US" sz="1150" dirty="0"/>
+          </a:p>
+        </p:txBody>
+      </p:sp>
+      <p:sp>
+        <p:nvSpPr>
+          <p:cNvPr id="11" name="Shape 8"/>
+          <p:cNvSpPr/>
+          <p:nvPr/>
+        </p:nvSpPr>
+        <p:spPr>
+          <a:xfrm>
+            <a:off x="365760" y="2560320"/>
+            <a:ext cx="2057400" cy="1280160"/>
+          </a:xfrm>
+          <a:prstGeom prst="rect">
+            <a:avLst/>
+          </a:prstGeom>
+          <a:solidFill>
+            <a:srgbClr val="FDF3E1"/>
+          </a:solidFill>
+          <a:ln w="9525">
+            <a:solidFill>
+              <a:srgbClr val="DCE3EA"/>
+            </a:solidFill>
+            <a:prstDash val="solid"/>
+          </a:ln>
+        </p:spPr>
+      </p:sp>
+      <p:sp>
+        <p:nvSpPr>
+          <p:cNvPr id="12" name="Text 9"/>
+          <p:cNvSpPr txBox="1"/>
+          <p:nvPr/>
+        </p:nvSpPr>
+        <p:spPr>
+          <a:xfrm>
+            <a:off x="365760" y="2670048"/>
+            <a:ext cx="2057400" cy="685800"/>
+          </a:xfrm>
+          <a:prstGeom prst="rect">
+            <a:avLst/>
+          </a:prstGeom>
+          <a:noFill/>
+          <a:ln/>
+        </p:spPr>
+        <p:txBody>
+          <a:bodyPr wrap="square" lIns="0" tIns="0" rIns="0" bIns="0" rtlCol="0" anchor="ctr"/>
+          <a:lstStyle/>
+          <a:p>
+            <a:pPr algn="ctr" indent="0" marL="0">
+              <a:buNone/>
+            </a:pPr>
+            <a:r>
+              <a:rPr lang="en-US" sz="3800" b="1" dirty="0">
+                <a:solidFill>
+                  <a:srgbClr val="F2A541"/>
+                </a:solidFill>
+                <a:latin typeface="Cambria" pitchFamily="34" charset="0"/>
+                <a:ea typeface="Cambria" pitchFamily="34" charset="-122"/>
+                <a:cs typeface="Cambria" pitchFamily="34" charset="-120"/>
+              </a:rPr>
+              <a:t>15</a:t>
+            </a:r>
+            <a:endParaRPr lang="en-US" sz="3800" dirty="0"/>
+          </a:p>
+        </p:txBody>
+      </p:sp>
+      <p:sp>
+        <p:nvSpPr>
+          <p:cNvPr id="13" name="Text 10"/>
+          <p:cNvSpPr txBox="1"/>
+          <p:nvPr/>
+        </p:nvSpPr>
+        <p:spPr>
+          <a:xfrm>
+            <a:off x="365760" y="3383280"/>
+            <a:ext cx="2057400" cy="274320"/>
+          </a:xfrm>
+          <a:prstGeom prst="rect">
+            <a:avLst/>
+          </a:prstGeom>
+          <a:noFill/>
+          <a:ln/>
+        </p:spPr>
+        <p:txBody>
+          <a:bodyPr wrap="square" lIns="0" tIns="0" rIns="0" bIns="0" rtlCol="0" anchor="ctr"/>
+          <a:lstStyle/>
+          <a:p>
+            <a:pPr algn="ctr" indent="0" marL="0">
+              <a:buNone/>
+            </a:pPr>
+            <a:r>
+              <a:rPr lang="en-US" sz="1150" dirty="0">
+                <a:solidFill>
+                  <a:srgbClr val="1B2B3A"/>
+                </a:solidFill>
+                <a:latin typeface="Calibri" pitchFamily="34" charset="0"/>
+                <a:ea typeface="Calibri" pitchFamily="34" charset="-122"/>
+                <a:cs typeface="Calibri" pitchFamily="34" charset="-120"/>
+              </a:rPr>
+              <a:t>chỉ LightMem đúng</a:t>
+            </a:r>
+            <a:endParaRPr lang="en-US" sz="1150" dirty="0"/>
+          </a:p>
+        </p:txBody>
+      </p:sp>
+      <p:sp>
+        <p:nvSpPr>
+          <p:cNvPr id="14" name="Shape 11"/>
+          <p:cNvSpPr/>
+          <p:nvPr/>
+        </p:nvSpPr>
+        <p:spPr>
+          <a:xfrm>
+            <a:off x="2514600" y="2560320"/>
+            <a:ext cx="2057400" cy="1280160"/>
+          </a:xfrm>
+          <a:prstGeom prst="rect">
+            <a:avLst/>
+          </a:prstGeom>
+          <a:solidFill>
+            <a:srgbClr val="FFFFFF"/>
+          </a:solidFill>
+          <a:ln w="9525">
+            <a:solidFill>
+              <a:srgbClr val="DCE3EA"/>
+            </a:solidFill>
+            <a:prstDash val="solid"/>
+          </a:ln>
+        </p:spPr>
+      </p:sp>
+      <p:sp>
+        <p:nvSpPr>
+          <p:cNvPr id="15" name="Text 12"/>
+          <p:cNvSpPr txBox="1"/>
+          <p:nvPr/>
+        </p:nvSpPr>
+        <p:spPr>
+          <a:xfrm>
+            <a:off x="2514600" y="2670048"/>
+            <a:ext cx="2057400" cy="685800"/>
+          </a:xfrm>
+          <a:prstGeom prst="rect">
+            <a:avLst/>
+          </a:prstGeom>
+          <a:noFill/>
+          <a:ln/>
+        </p:spPr>
+        <p:txBody>
+          <a:bodyPr wrap="square" lIns="0" tIns="0" rIns="0" bIns="0" rtlCol="0" anchor="ctr"/>
+          <a:lstStyle/>
+          <a:p>
+            <a:pPr algn="ctr" indent="0" marL="0">
+              <a:buNone/>
+            </a:pPr>
+            <a:r>
+              <a:rPr lang="en-US" sz="3800" b="1" dirty="0">
+                <a:solidFill>
+                  <a:srgbClr val="5B6B7A"/>
+                </a:solidFill>
+                <a:latin typeface="Cambria" pitchFamily="34" charset="0"/>
+                <a:ea typeface="Cambria" pitchFamily="34" charset="-122"/>
+                <a:cs typeface="Cambria" pitchFamily="34" charset="-120"/>
+              </a:rPr>
+              <a:t>8</a:t>
+            </a:r>
+            <a:endParaRPr lang="en-US" sz="3800" dirty="0"/>
+          </a:p>
+        </p:txBody>
+      </p:sp>
+      <p:sp>
+        <p:nvSpPr>
+          <p:cNvPr id="16" name="Text 13"/>
+          <p:cNvSpPr txBox="1"/>
+          <p:nvPr/>
+        </p:nvSpPr>
+        <p:spPr>
+          <a:xfrm>
+            <a:off x="2514600" y="3383280"/>
+            <a:ext cx="2057400" cy="274320"/>
+          </a:xfrm>
+          <a:prstGeom prst="rect">
+            <a:avLst/>
+          </a:prstGeom>
+          <a:noFill/>
+          <a:ln/>
+        </p:spPr>
+        <p:txBody>
+          <a:bodyPr wrap="square" lIns="0" tIns="0" rIns="0" bIns="0" rtlCol="0" anchor="ctr"/>
+          <a:lstStyle/>
+          <a:p>
+            <a:pPr algn="ctr" indent="0" marL="0">
+              <a:buNone/>
+            </a:pPr>
+            <a:r>
+              <a:rPr lang="en-US" sz="1150" dirty="0">
+                <a:solidFill>
+                  <a:srgbClr val="1B2B3A"/>
+                </a:solidFill>
+                <a:latin typeface="Calibri" pitchFamily="34" charset="0"/>
+                <a:ea typeface="Calibri" pitchFamily="34" charset="-122"/>
+                <a:cs typeface="Calibri" pitchFamily="34" charset="-120"/>
+              </a:rPr>
+              <a:t>cả hai sai</a:t>
+            </a:r>
+            <a:endParaRPr lang="en-US" sz="1150" dirty="0"/>
+          </a:p>
+        </p:txBody>
+      </p:sp>
+      <p:sp>
+        <p:nvSpPr>
+          <p:cNvPr id="17" name="Text 14"/>
+          <p:cNvSpPr txBox="1"/>
+          <p:nvPr/>
+        </p:nvSpPr>
+        <p:spPr>
+          <a:xfrm>
+            <a:off x="365760" y="3950208"/>
+            <a:ext cx="4206240" cy="274320"/>
+          </a:xfrm>
+          <a:prstGeom prst="rect">
+            <a:avLst/>
+          </a:prstGeom>
+          <a:noFill/>
+          <a:ln/>
+        </p:spPr>
+        <p:txBody>
+          <a:bodyPr wrap="square" lIns="0" tIns="0" rIns="0" bIns="0" rtlCol="0" anchor="ctr"/>
+          <a:lstStyle/>
+          <a:p>
+            <a:pPr indent="0" marL="0">
+              <a:buNone/>
+            </a:pPr>
+            <a:r>
+              <a:rPr lang="en-US" sz="1100" b="1" dirty="0">
+                <a:solidFill>
+                  <a:srgbClr val="10243E"/>
+                </a:solidFill>
+                <a:latin typeface="Calibri" pitchFamily="34" charset="0"/>
+                <a:ea typeface="Calibri" pitchFamily="34" charset="-122"/>
+                <a:cs typeface="Calibri" pitchFamily="34" charset="-120"/>
+              </a:rPr>
+              <a:t>McNemar chính xác: p = 0,50 (chưa khác biệt)</a:t>
+            </a:r>
+            <a:endParaRPr lang="en-US" sz="1100" dirty="0"/>
+          </a:p>
+        </p:txBody>
+      </p:sp>
+      <p:graphicFrame>
+        <p:nvGraphicFramePr>
+          <p:cNvPr id="6" name="Table 0"/>
+          <p:cNvGraphicFramePr>
+            <a:graphicFrameLocks noGrp="1"/>
+          </p:cNvGraphicFramePr>
+          <p:nvPr>
+            <p:extLst>
+              <p:ext uri="{D42A27DB-BD31-4B8C-83A1-F6EECF244321}">
+                <p14:modId xmlns:p14="http://schemas.microsoft.com/office/powerpoint/2010/main" val="1579011935"/>
+              </p:ext>
+            </p:extLst>
+          </p:nvPr>
+        </p:nvGraphicFramePr>
+        <p:xfrm>
+          <a:off x="4754880" y="1188720"/>
+          <a:ext cx="3931920" cy="914400"/>
+        </p:xfrm>
+        <a:graphic>
+          <a:graphicData uri="http://schemas.openxmlformats.org/drawingml/2006/table">
+            <a:tbl>
+              <a:tblPr/>
+              <a:tblGrid>
+                <a:gridCol w="1325880"/>
+                <a:gridCol w="1051560"/>
+                <a:gridCol w="914400"/>
+                <a:gridCol w="640080"/>
+              </a:tblGrid>
+              <a:tr h="457200">
+                <a:tc>
+                  <a:txBody>
+                    <a:bodyPr/>
+                    <a:lstStyle/>
+                    <a:p>
+                      <a:pPr indent="0" marL="0">
+                        <a:buNone/>
+                      </a:pPr>
+                      <a:endParaRPr lang="en-US" sz="1100" dirty="0">
+                        <a:latin typeface="Calibri" charset="0"/>
+                        <a:ea typeface="Calibri" charset="0"/>
+                        <a:cs typeface="Calibri" charset="0"/>
+                      </a:endParaRPr>
+                    </a:p>
+                  </a:txBody>
+                  <a:tcPr marL="91440" marR="91440" marT="45720" marB="45720" anchor="ctr">
+                    <a:lnL w="9525" cap="flat" cmpd="sng" algn="ctr">
+                      <a:solidFill>
+                        <a:srgbClr val="DCE3EA"/>
+                      </a:solidFill>
+                      <a:prstDash val="solid"/>
+                      <a:round/>
+                      <a:headEnd type="none" w="med" len="med"/>
+                      <a:tailEnd type="none" w="med" len="med"/>
+                    </a:lnL>
+                    <a:lnR w="9525" cap="flat" cmpd="sng" algn="ctr">
+                      <a:solidFill>
+                        <a:srgbClr val="DCE3EA"/>
+                      </a:solidFill>
+                      <a:prstDash val="solid"/>
+                      <a:round/>
+                      <a:headEnd type="none" w="med" len="med"/>
+                      <a:tailEnd type="none" w="med" len="med"/>
+                    </a:lnR>
+                    <a:lnT w="9525" cap="flat" cmpd="sng" algn="ctr">
+                      <a:solidFill>
+                        <a:srgbClr val="DCE3EA"/>
+                      </a:solidFill>
+                      <a:prstDash val="solid"/>
+                      <a:round/>
+                      <a:headEnd type="none" w="med" len="med"/>
+                      <a:tailEnd type="none" w="med" len="med"/>
+                    </a:lnT>
+                    <a:lnB w="9525" cap="flat" cmpd="sng" algn="ctr">
+                      <a:solidFill>
+                        <a:srgbClr val="DCE3EA"/>
+                      </a:solidFill>
+                      <a:prstDash val="solid"/>
+                      <a:round/>
+                      <a:headEnd type="none" w="med" len="med"/>
+                      <a:tailEnd type="none" w="med" len="med"/>
+                    </a:lnB>
+                    <a:solidFill>
+                      <a:srgbClr val="1F6F8B"/>
+                    </a:solidFill>
+                  </a:tcPr>
+                </a:tc>
+                <a:tc>
+                  <a:txBody>
+                    <a:bodyPr/>
+                    <a:lstStyle/>
+                    <a:p>
+                      <a:pPr algn="ctr" indent="0" marL="0">
+                        <a:buNone/>
+                      </a:pPr>
+                      <a:r>
+                        <a:rPr lang="en-US" sz="1100" b="1" dirty="0">
+                          <a:solidFill>
+                            <a:srgbClr val="FFFFFF"/>
+                          </a:solidFill>
+                          <a:latin typeface="Calibri" pitchFamily="34" charset="0"/>
+                          <a:ea typeface="Calibri" pitchFamily="34" charset="-122"/>
+                          <a:cs typeface="Calibri" pitchFamily="34" charset="-120"/>
+                        </a:rPr>
+                        <a:t>APEX-MEM</a:t>
+                      </a:r>
+                      <a:endParaRPr lang="en-US" sz="1100" dirty="0">
+                        <a:latin typeface="Calibri" charset="0"/>
+                        <a:ea typeface="Calibri" charset="0"/>
+                        <a:cs typeface="Calibri" charset="0"/>
+                      </a:endParaRPr>
+                    </a:p>
+                  </a:txBody>
+                  <a:tcPr marL="91440" marR="91440" marT="45720" marB="45720" anchor="ctr">
+                    <a:lnL w="9525" cap="flat" cmpd="sng" algn="ctr">
+                      <a:solidFill>
+                        <a:srgbClr val="DCE3EA"/>
+                      </a:solidFill>
+                      <a:prstDash val="solid"/>
+                      <a:round/>
+                      <a:headEnd type="none" w="med" len="med"/>
+                      <a:tailEnd type="none" w="med" len="med"/>
+                    </a:lnL>
+                    <a:lnR w="9525" cap="flat" cmpd="sng" algn="ctr">
+                      <a:solidFill>
+                        <a:srgbClr val="DCE3EA"/>
+                      </a:solidFill>
+                      <a:prstDash val="solid"/>
+                      <a:round/>
+                      <a:headEnd type="none" w="med" len="med"/>
+                      <a:tailEnd type="none" w="med" len="med"/>
+                    </a:lnR>
+                    <a:lnT w="9525" cap="flat" cmpd="sng" algn="ctr">
+                      <a:solidFill>
+                        <a:srgbClr val="DCE3EA"/>
+                      </a:solidFill>
+                      <a:prstDash val="solid"/>
+                      <a:round/>
+                      <a:headEnd type="none" w="med" len="med"/>
+                      <a:tailEnd type="none" w="med" len="med"/>
+                    </a:lnT>
+                    <a:lnB w="9525" cap="flat" cmpd="sng" algn="ctr">
+                      <a:solidFill>
+                        <a:srgbClr val="DCE3EA"/>
+                      </a:solidFill>
+                      <a:prstDash val="solid"/>
+                      <a:round/>
+                      <a:headEnd type="none" w="med" len="med"/>
+                      <a:tailEnd type="none" w="med" len="med"/>
+                    </a:lnB>
+                    <a:solidFill>
+                      <a:srgbClr val="1F6F8B"/>
+                    </a:solidFill>
+                  </a:tcPr>
+                </a:tc>
+                <a:tc>
+                  <a:txBody>
+                    <a:bodyPr/>
+                    <a:lstStyle/>
+                    <a:p>
+                      <a:pPr algn="ctr" indent="0" marL="0">
+                        <a:buNone/>
+                      </a:pPr>
+                      <a:r>
+                        <a:rPr lang="en-US" sz="1100" b="1" dirty="0">
+                          <a:solidFill>
+                            <a:srgbClr val="FFFFFF"/>
+                          </a:solidFill>
+                          <a:latin typeface="Calibri" pitchFamily="34" charset="0"/>
+                          <a:ea typeface="Calibri" pitchFamily="34" charset="-122"/>
+                          <a:cs typeface="Calibri" pitchFamily="34" charset="-120"/>
+                        </a:rPr>
+                        <a:t>LightMem</a:t>
+                      </a:r>
+                      <a:endParaRPr lang="en-US" sz="1100" dirty="0">
+                        <a:latin typeface="Calibri" charset="0"/>
+                        <a:ea typeface="Calibri" charset="0"/>
+                        <a:cs typeface="Calibri" charset="0"/>
+                      </a:endParaRPr>
+                    </a:p>
+                  </a:txBody>
+                  <a:tcPr marL="91440" marR="91440" marT="45720" marB="45720" anchor="ctr">
+                    <a:lnL w="9525" cap="flat" cmpd="sng" algn="ctr">
+                      <a:solidFill>
+                        <a:srgbClr val="DCE3EA"/>
+                      </a:solidFill>
+                      <a:prstDash val="solid"/>
+                      <a:round/>
+                      <a:headEnd type="none" w="med" len="med"/>
+                      <a:tailEnd type="none" w="med" len="med"/>
+                    </a:lnL>
+                    <a:lnR w="9525" cap="flat" cmpd="sng" algn="ctr">
+                      <a:solidFill>
+                        <a:srgbClr val="DCE3EA"/>
+                      </a:solidFill>
+                      <a:prstDash val="solid"/>
+                      <a:round/>
+                      <a:headEnd type="none" w="med" len="med"/>
+                      <a:tailEnd type="none" w="med" len="med"/>
+                    </a:lnR>
+                    <a:lnT w="9525" cap="flat" cmpd="sng" algn="ctr">
+                      <a:solidFill>
+                        <a:srgbClr val="DCE3EA"/>
+                      </a:solidFill>
+                      <a:prstDash val="solid"/>
+                      <a:round/>
+                      <a:headEnd type="none" w="med" len="med"/>
+                      <a:tailEnd type="none" w="med" len="med"/>
+                    </a:lnT>
+                    <a:lnB w="9525" cap="flat" cmpd="sng" algn="ctr">
+                      <a:solidFill>
+                        <a:srgbClr val="DCE3EA"/>
+                      </a:solidFill>
+                      <a:prstDash val="solid"/>
+                      <a:round/>
+                      <a:headEnd type="none" w="med" len="med"/>
+                      <a:tailEnd type="none" w="med" len="med"/>
+                    </a:lnB>
+                    <a:solidFill>
+                      <a:srgbClr val="1F6F8B"/>
+                    </a:solidFill>
+                  </a:tcPr>
+                </a:tc>
+                <a:tc>
+                  <a:txBody>
+                    <a:bodyPr/>
+                    <a:lstStyle/>
+                    <a:p>
+                      <a:pPr algn="ctr" indent="0" marL="0">
+                        <a:buNone/>
+                      </a:pPr>
+                      <a:r>
+                        <a:rPr lang="en-US" sz="1100" b="1" dirty="0">
+                          <a:solidFill>
+                            <a:srgbClr val="FFFFFF"/>
+                          </a:solidFill>
+                          <a:latin typeface="Calibri" pitchFamily="34" charset="0"/>
+                          <a:ea typeface="Calibri" pitchFamily="34" charset="-122"/>
+                          <a:cs typeface="Calibri" pitchFamily="34" charset="-120"/>
+                        </a:rPr>
+                        <a:t>Chênh</a:t>
+                      </a:r>
+                      <a:endParaRPr lang="en-US" sz="1100" dirty="0">
+                        <a:latin typeface="Calibri" charset="0"/>
+                        <a:ea typeface="Calibri" charset="0"/>
+                        <a:cs typeface="Calibri" charset="0"/>
+                      </a:endParaRPr>
+                    </a:p>
+                  </a:txBody>
+                  <a:tcPr marL="91440" marR="91440" marT="45720" marB="45720" anchor="ctr">
+                    <a:lnL w="9525" cap="flat" cmpd="sng" algn="ctr">
+                      <a:solidFill>
+                        <a:srgbClr val="DCE3EA"/>
+                      </a:solidFill>
+                      <a:prstDash val="solid"/>
+                      <a:round/>
+                      <a:headEnd type="none" w="med" len="med"/>
+                      <a:tailEnd type="none" w="med" len="med"/>
+                    </a:lnL>
+                    <a:lnR w="9525" cap="flat" cmpd="sng" algn="ctr">
+                      <a:solidFill>
+                        <a:srgbClr val="DCE3EA"/>
+                      </a:solidFill>
+                      <a:prstDash val="solid"/>
+                      <a:round/>
+                      <a:headEnd type="none" w="med" len="med"/>
+                      <a:tailEnd type="none" w="med" len="med"/>
+                    </a:lnR>
+                    <a:lnT w="9525" cap="flat" cmpd="sng" algn="ctr">
+                      <a:solidFill>
+                        <a:srgbClr val="DCE3EA"/>
+                      </a:solidFill>
+                      <a:prstDash val="solid"/>
+                      <a:round/>
+                      <a:headEnd type="none" w="med" len="med"/>
+                      <a:tailEnd type="none" w="med" len="med"/>
+                    </a:lnT>
+                    <a:lnB w="9525" cap="flat" cmpd="sng" algn="ctr">
+                      <a:solidFill>
+                        <a:srgbClr val="DCE3EA"/>
+                      </a:solidFill>
+                      <a:prstDash val="solid"/>
+                      <a:round/>
+                      <a:headEnd type="none" w="med" len="med"/>
+                      <a:tailEnd type="none" w="med" len="med"/>
+                    </a:lnB>
+                    <a:solidFill>
+                      <a:srgbClr val="1F6F8B"/>
+                    </a:solidFill>
+                  </a:tcPr>
+                </a:tc>
+              </a:tr>
+              <a:tr h="457200">
+                <a:tc>
+                  <a:txBody>
+                    <a:bodyPr/>
+                    <a:lstStyle/>
+                    <a:p>
+                      <a:pPr indent="0" marL="0">
+                        <a:buNone/>
+                      </a:pPr>
+                      <a:r>
+                        <a:rPr lang="en-US" sz="1100" b="1" dirty="0">
+                          <a:solidFill>
+                            <a:srgbClr val="1B2B3A"/>
+                          </a:solidFill>
+                          <a:latin typeface="Calibri" pitchFamily="34" charset="0"/>
+                          <a:ea typeface="Calibri" pitchFamily="34" charset="-122"/>
+                          <a:cs typeface="Calibri" pitchFamily="34" charset="-120"/>
+                        </a:rPr>
+                        <a:t>Loại lượt trợ lý</a:t>
+                      </a:r>
+                      <a:endParaRPr lang="en-US" sz="1100" dirty="0">
+                        <a:latin typeface="Calibri" charset="0"/>
+                        <a:ea typeface="Calibri" charset="0"/>
+                        <a:cs typeface="Calibri" charset="0"/>
+                      </a:endParaRPr>
+                    </a:p>
+                  </a:txBody>
+                  <a:tcPr marL="91440" marR="91440" marT="45720" marB="45720" anchor="ctr">
+                    <a:lnL w="9525" cap="flat" cmpd="sng" algn="ctr">
+                      <a:solidFill>
+                        <a:srgbClr val="DCE3EA"/>
+                      </a:solidFill>
+                      <a:prstDash val="solid"/>
+                      <a:round/>
+                      <a:headEnd type="none" w="med" len="med"/>
+                      <a:tailEnd type="none" w="med" len="med"/>
+                    </a:lnL>
+                    <a:lnR w="9525" cap="flat" cmpd="sng" algn="ctr">
+                      <a:solidFill>
+                        <a:srgbClr val="DCE3EA"/>
+                      </a:solidFill>
+                      <a:prstDash val="solid"/>
+                      <a:round/>
+                      <a:headEnd type="none" w="med" len="med"/>
+                      <a:tailEnd type="none" w="med" len="med"/>
+                    </a:lnR>
+                    <a:lnT w="9525" cap="flat" cmpd="sng" algn="ctr">
+                      <a:solidFill>
+                        <a:srgbClr val="DCE3EA"/>
+                      </a:solidFill>
+                      <a:prstDash val="solid"/>
+                      <a:round/>
+                      <a:headEnd type="none" w="med" len="med"/>
+                      <a:tailEnd type="none" w="med" len="med"/>
+                    </a:lnT>
+                    <a:lnB w="9525" cap="flat" cmpd="sng" algn="ctr">
+                      <a:solidFill>
+                        <a:srgbClr val="DCE3EA"/>
+                      </a:solidFill>
+                      <a:prstDash val="solid"/>
+                      <a:round/>
+                      <a:headEnd type="none" w="med" len="med"/>
+                      <a:tailEnd type="none" w="med" len="med"/>
+                    </a:lnB>
+                  </a:tcPr>
+                </a:tc>
+                <a:tc>
+                  <a:txBody>
+                    <a:bodyPr/>
+                    <a:lstStyle/>
+                    <a:p>
+                      <a:pPr algn="ctr" indent="0" marL="0">
+                        <a:buNone/>
+                      </a:pPr>
+                      <a:r>
+                        <a:rPr lang="en-US" sz="1100" dirty="0">
+                          <a:solidFill>
+                            <a:srgbClr val="1B2B3A"/>
+                          </a:solidFill>
+                          <a:latin typeface="Calibri" pitchFamily="34" charset="0"/>
+                          <a:ea typeface="Calibri" pitchFamily="34" charset="-122"/>
+                          <a:cs typeface="Calibri" pitchFamily="34" charset="-120"/>
+                        </a:rPr>
+                        <a:t>14/17</a:t>
+                      </a:r>
+                      <a:endParaRPr lang="en-US" sz="1100" dirty="0">
+                        <a:latin typeface="Calibri" charset="0"/>
+                        <a:ea typeface="Calibri" charset="0"/>
+                        <a:cs typeface="Calibri" charset="0"/>
+                      </a:endParaRPr>
+                    </a:p>
+                  </a:txBody>
+                  <a:tcPr marL="91440" marR="91440" marT="45720" marB="45720" anchor="ctr">
+                    <a:lnL w="9525" cap="flat" cmpd="sng" algn="ctr">
+                      <a:solidFill>
+                        <a:srgbClr val="DCE3EA"/>
+                      </a:solidFill>
+                      <a:prstDash val="solid"/>
+                      <a:round/>
+                      <a:headEnd type="none" w="med" len="med"/>
+                      <a:tailEnd type="none" w="med" len="med"/>
+                    </a:lnL>
+                    <a:lnR w="9525" cap="flat" cmpd="sng" algn="ctr">
+                      <a:solidFill>
+                        <a:srgbClr val="DCE3EA"/>
+                      </a:solidFill>
+                      <a:prstDash val="solid"/>
+                      <a:round/>
+                      <a:headEnd type="none" w="med" len="med"/>
+                      <a:tailEnd type="none" w="med" len="med"/>
+                    </a:lnR>
+                    <a:lnT w="9525" cap="flat" cmpd="sng" algn="ctr">
+                      <a:solidFill>
+                        <a:srgbClr val="DCE3EA"/>
+                      </a:solidFill>
+                      <a:prstDash val="solid"/>
+                      <a:round/>
+                      <a:headEnd type="none" w="med" len="med"/>
+                      <a:tailEnd type="none" w="med" len="med"/>
+                    </a:lnT>
+                    <a:lnB w="9525" cap="flat" cmpd="sng" algn="ctr">
+                      <a:solidFill>
+                        <a:srgbClr val="DCE3EA"/>
+                      </a:solidFill>
+                      <a:prstDash val="solid"/>
+                      <a:round/>
+                      <a:headEnd type="none" w="med" len="med"/>
+                      <a:tailEnd type="none" w="med" len="med"/>
+                    </a:lnB>
+                  </a:tcPr>
+                </a:tc>
+                <a:tc>
+                  <a:txBody>
+                    <a:bodyPr/>
+                    <a:lstStyle/>
+                    <a:p>
+                      <a:pPr algn="ctr" indent="0" marL="0">
+                        <a:buNone/>
+                      </a:pPr>
+                      <a:r>
+                        <a:rPr lang="en-US" sz="1100" dirty="0">
+                          <a:solidFill>
+                            <a:srgbClr val="1B2B3A"/>
+                          </a:solidFill>
+                          <a:latin typeface="Calibri" pitchFamily="34" charset="0"/>
+                          <a:ea typeface="Calibri" pitchFamily="34" charset="-122"/>
+                          <a:cs typeface="Calibri" pitchFamily="34" charset="-120"/>
+                        </a:rPr>
+                        <a:t>7/17</a:t>
+                      </a:r>
+                      <a:endParaRPr lang="en-US" sz="1100" dirty="0">
+                        <a:latin typeface="Calibri" charset="0"/>
+                        <a:ea typeface="Calibri" charset="0"/>
+                        <a:cs typeface="Calibri" charset="0"/>
+                      </a:endParaRPr>
+                    </a:p>
+                  </a:txBody>
+                  <a:tcPr marL="91440" marR="91440" marT="45720" marB="45720" anchor="ctr">
+                    <a:lnL w="9525" cap="flat" cmpd="sng" algn="ctr">
+                      <a:solidFill>
+                        <a:srgbClr val="DCE3EA"/>
+                      </a:solidFill>
+                      <a:prstDash val="solid"/>
+                      <a:round/>
+                      <a:headEnd type="none" w="med" len="med"/>
+                      <a:tailEnd type="none" w="med" len="med"/>
+                    </a:lnL>
+                    <a:lnR w="9525" cap="flat" cmpd="sng" algn="ctr">
+                      <a:solidFill>
+                        <a:srgbClr val="DCE3EA"/>
+                      </a:solidFill>
+                      <a:prstDash val="solid"/>
+                      <a:round/>
+                      <a:headEnd type="none" w="med" len="med"/>
+                      <a:tailEnd type="none" w="med" len="med"/>
+                    </a:lnR>
+                    <a:lnT w="9525" cap="flat" cmpd="sng" algn="ctr">
+                      <a:solidFill>
+                        <a:srgbClr val="DCE3EA"/>
+                      </a:solidFill>
+                      <a:prstDash val="solid"/>
+                      <a:round/>
+                      <a:headEnd type="none" w="med" len="med"/>
+                      <a:tailEnd type="none" w="med" len="med"/>
+                    </a:lnT>
+                    <a:lnB w="9525" cap="flat" cmpd="sng" algn="ctr">
+                      <a:solidFill>
+                        <a:srgbClr val="DCE3EA"/>
+                      </a:solidFill>
+                      <a:prstDash val="solid"/>
+                      <a:round/>
+                      <a:headEnd type="none" w="med" len="med"/>
+                      <a:tailEnd type="none" w="med" len="med"/>
+                    </a:lnB>
+                  </a:tcPr>
+                </a:tc>
+                <a:tc>
+                  <a:txBody>
+                    <a:bodyPr/>
+                    <a:lstStyle/>
+                    <a:p>
+                      <a:pPr algn="ctr" indent="0" marL="0">
+                        <a:buNone/>
+                      </a:pPr>
+                      <a:r>
+                        <a:rPr lang="en-US" sz="1100" b="1" dirty="0">
+                          <a:solidFill>
+                            <a:srgbClr val="1F6F8B"/>
+                          </a:solidFill>
+                          <a:latin typeface="Calibri" pitchFamily="34" charset="0"/>
+                          <a:ea typeface="Calibri" pitchFamily="34" charset="-122"/>
+                          <a:cs typeface="Calibri" pitchFamily="34" charset="-120"/>
+                        </a:rPr>
+                        <a:t>+7</a:t>
+                      </a:r>
+                      <a:endParaRPr lang="en-US" sz="1100" dirty="0">
+                        <a:latin typeface="Calibri" charset="0"/>
+                        <a:ea typeface="Calibri" charset="0"/>
+                        <a:cs typeface="Calibri" charset="0"/>
+                      </a:endParaRPr>
+                    </a:p>
+                  </a:txBody>
+                  <a:tcPr marL="91440" marR="91440" marT="45720" marB="45720" anchor="ctr">
+                    <a:lnL w="9525" cap="flat" cmpd="sng" algn="ctr">
+                      <a:solidFill>
+                        <a:srgbClr val="DCE3EA"/>
+                      </a:solidFill>
+                      <a:prstDash val="solid"/>
+                      <a:round/>
+                      <a:headEnd type="none" w="med" len="med"/>
+                      <a:tailEnd type="none" w="med" len="med"/>
+                    </a:lnL>
+                    <a:lnR w="9525" cap="flat" cmpd="sng" algn="ctr">
+                      <a:solidFill>
+                        <a:srgbClr val="DCE3EA"/>
+                      </a:solidFill>
+                      <a:prstDash val="solid"/>
+                      <a:round/>
+                      <a:headEnd type="none" w="med" len="med"/>
+                      <a:tailEnd type="none" w="med" len="med"/>
+                    </a:lnR>
+                    <a:lnT w="9525" cap="flat" cmpd="sng" algn="ctr">
+                      <a:solidFill>
+                        <a:srgbClr val="DCE3EA"/>
+                      </a:solidFill>
+                      <a:prstDash val="solid"/>
+                      <a:round/>
+                      <a:headEnd type="none" w="med" len="med"/>
+                      <a:tailEnd type="none" w="med" len="med"/>
+                    </a:lnT>
+                    <a:lnB w="9525" cap="flat" cmpd="sng" algn="ctr">
+                      <a:solidFill>
+                        <a:srgbClr val="DCE3EA"/>
+                      </a:solidFill>
+                      <a:prstDash val="solid"/>
+                      <a:round/>
+                      <a:headEnd type="none" w="med" len="med"/>
+                      <a:tailEnd type="none" w="med" len="med"/>
+                    </a:lnB>
+                  </a:tcPr>
+                </a:tc>
+              </a:tr>
+              <a:tr h="457200">
+                <a:tc>
+                  <a:txBody>
+                    <a:bodyPr/>
+                    <a:lstStyle/>
+                    <a:p>
+                      <a:pPr indent="0" marL="0">
+                        <a:buNone/>
+                      </a:pPr>
+                      <a:r>
+                        <a:rPr lang="en-US" sz="1100" b="1" dirty="0">
+                          <a:solidFill>
+                            <a:srgbClr val="1B2B3A"/>
+                          </a:solidFill>
+                          <a:latin typeface="Calibri" pitchFamily="34" charset="0"/>
+                          <a:ea typeface="Calibri" pitchFamily="34" charset="-122"/>
+                          <a:cs typeface="Calibri" pitchFamily="34" charset="-120"/>
+                        </a:rPr>
+                        <a:t>Năm loại còn lại</a:t>
+                      </a:r>
+                      <a:endParaRPr lang="en-US" sz="1100" dirty="0">
+                        <a:latin typeface="Calibri" charset="0"/>
+                        <a:ea typeface="Calibri" charset="0"/>
+                        <a:cs typeface="Calibri" charset="0"/>
+                      </a:endParaRPr>
+                    </a:p>
+                  </a:txBody>
+                  <a:tcPr marL="91440" marR="91440" marT="45720" marB="45720" anchor="ctr">
+                    <a:lnL w="9525" cap="flat" cmpd="sng" algn="ctr">
+                      <a:solidFill>
+                        <a:srgbClr val="DCE3EA"/>
+                      </a:solidFill>
+                      <a:prstDash val="solid"/>
+                      <a:round/>
+                      <a:headEnd type="none" w="med" len="med"/>
+                      <a:tailEnd type="none" w="med" len="med"/>
+                    </a:lnL>
+                    <a:lnR w="9525" cap="flat" cmpd="sng" algn="ctr">
+                      <a:solidFill>
+                        <a:srgbClr val="DCE3EA"/>
+                      </a:solidFill>
+                      <a:prstDash val="solid"/>
+                      <a:round/>
+                      <a:headEnd type="none" w="med" len="med"/>
+                      <a:tailEnd type="none" w="med" len="med"/>
+                    </a:lnR>
+                    <a:lnT w="9525" cap="flat" cmpd="sng" algn="ctr">
+                      <a:solidFill>
+                        <a:srgbClr val="DCE3EA"/>
+                      </a:solidFill>
+                      <a:prstDash val="solid"/>
+                      <a:round/>
+                      <a:headEnd type="none" w="med" len="med"/>
+                      <a:tailEnd type="none" w="med" len="med"/>
+                    </a:lnT>
+                    <a:lnB w="9525" cap="flat" cmpd="sng" algn="ctr">
+                      <a:solidFill>
+                        <a:srgbClr val="DCE3EA"/>
+                      </a:solidFill>
+                      <a:prstDash val="solid"/>
+                      <a:round/>
+                      <a:headEnd type="none" w="med" len="med"/>
+                      <a:tailEnd type="none" w="med" len="med"/>
+                    </a:lnB>
+                  </a:tcPr>
+                </a:tc>
+                <a:tc>
+                  <a:txBody>
+                    <a:bodyPr/>
+                    <a:lstStyle/>
+                    <a:p>
+                      <a:pPr algn="ctr" indent="0" marL="0">
+                        <a:buNone/>
+                      </a:pPr>
+                      <a:r>
+                        <a:rPr lang="en-US" sz="1100" dirty="0">
+                          <a:solidFill>
+                            <a:srgbClr val="1B2B3A"/>
+                          </a:solidFill>
+                          <a:latin typeface="Calibri" pitchFamily="34" charset="0"/>
+                          <a:ea typeface="Calibri" pitchFamily="34" charset="-122"/>
+                          <a:cs typeface="Calibri" pitchFamily="34" charset="-120"/>
+                        </a:rPr>
+                        <a:t>113/133</a:t>
+                      </a:r>
+                      <a:endParaRPr lang="en-US" sz="1100" dirty="0">
+                        <a:latin typeface="Calibri" charset="0"/>
+                        <a:ea typeface="Calibri" charset="0"/>
+                        <a:cs typeface="Calibri" charset="0"/>
+                      </a:endParaRPr>
+                    </a:p>
+                  </a:txBody>
+                  <a:tcPr marL="91440" marR="91440" marT="45720" marB="45720" anchor="ctr">
+                    <a:lnL w="9525" cap="flat" cmpd="sng" algn="ctr">
+                      <a:solidFill>
+                        <a:srgbClr val="DCE3EA"/>
+                      </a:solidFill>
+                      <a:prstDash val="solid"/>
+                      <a:round/>
+                      <a:headEnd type="none" w="med" len="med"/>
+                      <a:tailEnd type="none" w="med" len="med"/>
+                    </a:lnL>
+                    <a:lnR w="9525" cap="flat" cmpd="sng" algn="ctr">
+                      <a:solidFill>
+                        <a:srgbClr val="DCE3EA"/>
+                      </a:solidFill>
+                      <a:prstDash val="solid"/>
+                      <a:round/>
+                      <a:headEnd type="none" w="med" len="med"/>
+                      <a:tailEnd type="none" w="med" len="med"/>
+                    </a:lnR>
+                    <a:lnT w="9525" cap="flat" cmpd="sng" algn="ctr">
+                      <a:solidFill>
+                        <a:srgbClr val="DCE3EA"/>
+                      </a:solidFill>
+                      <a:prstDash val="solid"/>
+                      <a:round/>
+                      <a:headEnd type="none" w="med" len="med"/>
+                      <a:tailEnd type="none" w="med" len="med"/>
+                    </a:lnT>
+                    <a:lnB w="9525" cap="flat" cmpd="sng" algn="ctr">
+                      <a:solidFill>
+                        <a:srgbClr val="DCE3EA"/>
+                      </a:solidFill>
+                      <a:prstDash val="solid"/>
+                      <a:round/>
+                      <a:headEnd type="none" w="med" len="med"/>
+                      <a:tailEnd type="none" w="med" len="med"/>
+                    </a:lnB>
+                  </a:tcPr>
+                </a:tc>
+                <a:tc>
+                  <a:txBody>
+                    <a:bodyPr/>
+                    <a:lstStyle/>
+                    <a:p>
+                      <a:pPr algn="ctr" indent="0" marL="0">
+                        <a:buNone/>
+                      </a:pPr>
+                      <a:r>
+                        <a:rPr lang="en-US" sz="1100" dirty="0">
+                          <a:solidFill>
+                            <a:srgbClr val="1B2B3A"/>
+                          </a:solidFill>
+                          <a:latin typeface="Calibri" pitchFamily="34" charset="0"/>
+                          <a:ea typeface="Calibri" pitchFamily="34" charset="-122"/>
+                          <a:cs typeface="Calibri" pitchFamily="34" charset="-120"/>
+                        </a:rPr>
+                        <a:t>115/133</a:t>
+                      </a:r>
+                      <a:endParaRPr lang="en-US" sz="1100" dirty="0">
+                        <a:latin typeface="Calibri" charset="0"/>
+                        <a:ea typeface="Calibri" charset="0"/>
+                        <a:cs typeface="Calibri" charset="0"/>
+                      </a:endParaRPr>
+                    </a:p>
+                  </a:txBody>
+                  <a:tcPr marL="91440" marR="91440" marT="45720" marB="45720" anchor="ctr">
+                    <a:lnL w="9525" cap="flat" cmpd="sng" algn="ctr">
+                      <a:solidFill>
+                        <a:srgbClr val="DCE3EA"/>
+                      </a:solidFill>
+                      <a:prstDash val="solid"/>
+                      <a:round/>
+                      <a:headEnd type="none" w="med" len="med"/>
+                      <a:tailEnd type="none" w="med" len="med"/>
+                    </a:lnL>
+                    <a:lnR w="9525" cap="flat" cmpd="sng" algn="ctr">
+                      <a:solidFill>
+                        <a:srgbClr val="DCE3EA"/>
+                      </a:solidFill>
+                      <a:prstDash val="solid"/>
+                      <a:round/>
+                      <a:headEnd type="none" w="med" len="med"/>
+                      <a:tailEnd type="none" w="med" len="med"/>
+                    </a:lnR>
+                    <a:lnT w="9525" cap="flat" cmpd="sng" algn="ctr">
+                      <a:solidFill>
+                        <a:srgbClr val="DCE3EA"/>
+                      </a:solidFill>
+                      <a:prstDash val="solid"/>
+                      <a:round/>
+                      <a:headEnd type="none" w="med" len="med"/>
+                      <a:tailEnd type="none" w="med" len="med"/>
+                    </a:lnT>
+                    <a:lnB w="9525" cap="flat" cmpd="sng" algn="ctr">
+                      <a:solidFill>
+                        <a:srgbClr val="DCE3EA"/>
+                      </a:solidFill>
+                      <a:prstDash val="solid"/>
+                      <a:round/>
+                      <a:headEnd type="none" w="med" len="med"/>
+                      <a:tailEnd type="none" w="med" len="med"/>
+                    </a:lnB>
+                  </a:tcPr>
+                </a:tc>
+                <a:tc>
+                  <a:txBody>
+                    <a:bodyPr/>
+                    <a:lstStyle/>
+                    <a:p>
+                      <a:pPr algn="ctr" indent="0" marL="0">
+                        <a:buNone/>
+                      </a:pPr>
+                      <a:r>
+                        <a:rPr lang="en-US" sz="1100" b="1" dirty="0">
+                          <a:solidFill>
+                            <a:srgbClr val="C8553D"/>
+                          </a:solidFill>
+                          <a:latin typeface="Calibri" pitchFamily="34" charset="0"/>
+                          <a:ea typeface="Calibri" pitchFamily="34" charset="-122"/>
+                          <a:cs typeface="Calibri" pitchFamily="34" charset="-120"/>
+                        </a:rPr>
+                        <a:t>-2</a:t>
+                      </a:r>
+                      <a:endParaRPr lang="en-US" sz="1100" dirty="0">
+                        <a:latin typeface="Calibri" charset="0"/>
+                        <a:ea typeface="Calibri" charset="0"/>
+                        <a:cs typeface="Calibri" charset="0"/>
+                      </a:endParaRPr>
+                    </a:p>
+                  </a:txBody>
+                  <a:tcPr marL="91440" marR="91440" marT="45720" marB="45720" anchor="ctr">
+                    <a:lnL w="9525" cap="flat" cmpd="sng" algn="ctr">
+                      <a:solidFill>
+                        <a:srgbClr val="DCE3EA"/>
+                      </a:solidFill>
+                      <a:prstDash val="solid"/>
+                      <a:round/>
+                      <a:headEnd type="none" w="med" len="med"/>
+                      <a:tailEnd type="none" w="med" len="med"/>
+                    </a:lnL>
+                    <a:lnR w="9525" cap="flat" cmpd="sng" algn="ctr">
+                      <a:solidFill>
+                        <a:srgbClr val="DCE3EA"/>
+                      </a:solidFill>
+                      <a:prstDash val="solid"/>
+                      <a:round/>
+                      <a:headEnd type="none" w="med" len="med"/>
+                      <a:tailEnd type="none" w="med" len="med"/>
+                    </a:lnR>
+                    <a:lnT w="9525" cap="flat" cmpd="sng" algn="ctr">
+                      <a:solidFill>
+                        <a:srgbClr val="DCE3EA"/>
+                      </a:solidFill>
+                      <a:prstDash val="solid"/>
+                      <a:round/>
+                      <a:headEnd type="none" w="med" len="med"/>
+                      <a:tailEnd type="none" w="med" len="med"/>
+                    </a:lnT>
+                    <a:lnB w="9525" cap="flat" cmpd="sng" algn="ctr">
+                      <a:solidFill>
+                        <a:srgbClr val="DCE3EA"/>
+                      </a:solidFill>
+                      <a:prstDash val="solid"/>
+                      <a:round/>
+                      <a:headEnd type="none" w="med" len="med"/>
+                      <a:tailEnd type="none" w="med" len="med"/>
+                    </a:lnB>
+                  </a:tcPr>
+                </a:tc>
+              </a:tr>
+            </a:tbl>
+          </a:graphicData>
+        </a:graphic>
+      </p:graphicFrame>
+      <p:sp>
+        <p:nvSpPr>
+          <p:cNvPr id="19" name="Text 15"/>
+          <p:cNvSpPr txBox="1"/>
+          <p:nvPr/>
+        </p:nvSpPr>
+        <p:spPr>
+          <a:xfrm>
+            <a:off x="4754880" y="2697480"/>
+            <a:ext cx="3931920" cy="457200"/>
+          </a:xfrm>
+          <a:prstGeom prst="rect">
+            <a:avLst/>
+          </a:prstGeom>
+          <a:noFill/>
+          <a:ln/>
+        </p:spPr>
+        <p:txBody>
+          <a:bodyPr wrap="square" lIns="0" tIns="0" rIns="0" bIns="0" rtlCol="0" anchor="t"/>
+          <a:lstStyle/>
+          <a:p>
+            <a:pPr indent="0" marL="0">
+              <a:buNone/>
+            </a:pPr>
+            <a:r>
+              <a:rPr lang="en-US" sz="1100" dirty="0">
+                <a:solidFill>
+                  <a:srgbClr val="1B2B3A"/>
+                </a:solidFill>
+                <a:latin typeface="Calibri" pitchFamily="34" charset="0"/>
+                <a:ea typeface="Calibri" pitchFamily="34" charset="-122"/>
+                <a:cs typeface="Calibri" pitchFamily="34" charset="-120"/>
+              </a:rPr>
+              <a:t>Năm loại còn lại: APEX-MEM 85,0%, LightMem 86,5%.</a:t>
+            </a:r>
+            <a:endParaRPr lang="en-US" sz="1100" dirty="0"/>
+          </a:p>
+        </p:txBody>
+      </p:sp>
+      <p:sp>
+        <p:nvSpPr>
+          <p:cNvPr id="20" name="Shape 16"/>
+          <p:cNvSpPr/>
+          <p:nvPr/>
+        </p:nvSpPr>
+        <p:spPr>
+          <a:xfrm>
+            <a:off x="4754880" y="3200400"/>
+            <a:ext cx="3931920" cy="1024128"/>
           </a:xfrm>
           <a:prstGeom prst="rect">
             <a:avLst/>
@@ -6961,14 +10321,14 @@
       </p:sp>
       <p:sp>
         <p:nvSpPr>
-          <p:cNvPr id="11" name="Text 7"/>
+          <p:cNvPr id="21" name="Text 17"/>
           <p:cNvSpPr txBox="1"/>
           <p:nvPr/>
         </p:nvSpPr>
         <p:spPr>
           <a:xfrm>
-            <a:off x="5760720" y="2331720"/>
-            <a:ext cx="2926080" cy="548640"/>
+            <a:off x="4892040" y="3246120"/>
+            <a:ext cx="3657600" cy="932688"/>
           </a:xfrm>
           <a:prstGeom prst="rect">
             <a:avLst/>
@@ -6980,34 +10340,73 @@
           <a:bodyPr wrap="square" lIns="0" tIns="0" rIns="0" bIns="0" rtlCol="0" anchor="ctr"/>
           <a:lstStyle/>
           <a:p>
-            <a:pPr algn="ctr" indent="0" marL="0">
+            <a:pPr indent="0" marL="0">
               <a:buNone/>
             </a:pPr>
             <a:r>
-              <a:rPr lang="en-US" sz="3200" b="1" dirty="0">
+              <a:rPr lang="en-US" sz="1050" b="1" dirty="0">
                 <a:solidFill>
                   <a:srgbClr val="C8553D"/>
                 </a:solidFill>
-                <a:latin typeface="Cambria" pitchFamily="34" charset="0"/>
-                <a:ea typeface="Cambria" pitchFamily="34" charset="-122"/>
-                <a:cs typeface="Cambria" pitchFamily="34" charset="-120"/>
+                <a:latin typeface="Calibri" pitchFamily="34" charset="0"/>
+                <a:ea typeface="Calibri" pitchFamily="34" charset="-122"/>
+                <a:cs typeface="Calibri" pitchFamily="34" charset="-120"/>
               </a:rPr>
-              <a:t>33,3%</a:t>
-            </a:r>
-            <a:endParaRPr lang="en-US" sz="3200" dirty="0"/>
-          </a:p>
-        </p:txBody>
-      </p:sp>
-      <p:sp>
-        <p:nvSpPr>
-          <p:cNvPr id="12" name="Text 8"/>
+              <a:t>Khác biệt cấu hình: </a:t>
+            </a:r>
+            <a:pPr indent="0" marL="0">
+              <a:buNone/>
+            </a:pPr>
+            <a:r>
+              <a:rPr lang="en-US" sz="1050" dirty="0">
+                <a:solidFill>
+                  <a:srgbClr val="1B2B3A"/>
+                </a:solidFill>
+                <a:latin typeface="Calibri" pitchFamily="34" charset="0"/>
+                <a:ea typeface="Calibri" pitchFamily="34" charset="-122"/>
+                <a:cs typeface="Calibri" pitchFamily="34" charset="-120"/>
+              </a:rPr>
+              <a:t>APEX-MEM lưu cả lượt trợ lý, LightMem mặc định chỉ lưu lượt người dùng. Loại câu hỏi này hỏi đúng về lời trợ lý.</a:t>
+            </a:r>
+            <a:endParaRPr lang="en-US" sz="1050" dirty="0"/>
+          </a:p>
+        </p:txBody>
+      </p:sp>
+      <p:sp>
+        <p:nvSpPr>
+          <p:cNvPr id="22" name="Shape 18"/>
+          <p:cNvSpPr/>
+          <p:nvPr/>
+        </p:nvSpPr>
+        <p:spPr>
+          <a:xfrm>
+            <a:off x="365760" y="4370832"/>
+            <a:ext cx="8321040" cy="530352"/>
+          </a:xfrm>
+          <a:prstGeom prst="rect">
+            <a:avLst/>
+          </a:prstGeom>
+          <a:solidFill>
+            <a:srgbClr val="E7F0F4"/>
+          </a:solidFill>
+          <a:ln w="9525">
+            <a:solidFill>
+              <a:srgbClr val="DCE3EA"/>
+            </a:solidFill>
+            <a:prstDash val="solid"/>
+          </a:ln>
+        </p:spPr>
+      </p:sp>
+      <p:sp>
+        <p:nvSpPr>
+          <p:cNvPr id="23" name="Text 19"/>
           <p:cNvSpPr txBox="1"/>
           <p:nvPr/>
         </p:nvSpPr>
         <p:spPr>
           <a:xfrm>
-            <a:off x="5760720" y="2880360"/>
-            <a:ext cx="2926080" cy="274320"/>
+            <a:off x="548640" y="4398264"/>
+            <a:ext cx="7955280" cy="475488"/>
           </a:xfrm>
           <a:prstGeom prst="rect">
             <a:avLst/>
@@ -7019,11 +10418,11 @@
           <a:bodyPr wrap="square" lIns="0" tIns="0" rIns="0" bIns="0" rtlCol="0" anchor="ctr"/>
           <a:lstStyle/>
           <a:p>
-            <a:pPr algn="ctr" indent="0" marL="0">
+            <a:pPr indent="0" marL="0">
               <a:buNone/>
             </a:pPr>
             <a:r>
-              <a:rPr lang="en-US" sz="1100" b="1" dirty="0">
+              <a:rPr lang="en-US" sz="1050" b="1" dirty="0">
                 <a:solidFill>
                   <a:srgbClr val="10243E"/>
                 </a:solidFill>
@@ -7031,38 +10430,13 @@
                 <a:ea typeface="Calibri" pitchFamily="34" charset="-122"/>
                 <a:cs typeface="Calibri" pitchFamily="34" charset="-120"/>
               </a:rPr>
-              <a:t>Đơn phiên · trợ lý (3/9)</a:t>
-            </a:r>
-            <a:endParaRPr lang="en-US" sz="1100" dirty="0"/>
-          </a:p>
-        </p:txBody>
-      </p:sp>
-      <p:sp>
-        <p:nvSpPr>
-          <p:cNvPr id="13" name="Text 9"/>
-          <p:cNvSpPr txBox="1"/>
-          <p:nvPr/>
-        </p:nvSpPr>
-        <p:spPr>
-          <a:xfrm>
-            <a:off x="5943600" y="3200400"/>
-            <a:ext cx="2560320" cy="777240"/>
-          </a:xfrm>
-          <a:prstGeom prst="rect">
-            <a:avLst/>
-          </a:prstGeom>
-          <a:noFill/>
-          <a:ln/>
-        </p:spPr>
-        <p:txBody>
-          <a:bodyPr wrap="square" lIns="0" tIns="0" rIns="0" bIns="0" rtlCol="0" anchor="t"/>
-          <a:lstStyle/>
-          <a:p>
+              <a:t>Chưa kết luận được: </a:t>
+            </a:r>
             <a:pPr indent="0" marL="0">
               <a:buNone/>
             </a:pPr>
             <a:r>
-              <a:rPr lang="en-US" sz="1100" dirty="0">
+              <a:rPr lang="en-US" sz="1050" dirty="0">
                 <a:solidFill>
                   <a:srgbClr val="1B2B3A"/>
                 </a:solidFill>
@@ -7070,87 +10444,9 @@
                 <a:ea typeface="Calibri" pitchFamily="34" charset="-122"/>
                 <a:cs typeface="Calibri" pitchFamily="34" charset="-120"/>
               </a:rPr>
-              <a:t>LightMem chỉ lưu lượt người dùng (user_only), nên câu hỏi “trước đây bạn gợi ý gì” không có bằng chứng nào trong bộ nhớ.</a:t>
-            </a:r>
-            <a:endParaRPr lang="en-US" sz="1100" dirty="0"/>
-          </a:p>
-        </p:txBody>
-      </p:sp>
-      <p:sp>
-        <p:nvSpPr>
-          <p:cNvPr id="14" name="Shape 10"/>
-          <p:cNvSpPr/>
-          <p:nvPr/>
-        </p:nvSpPr>
-        <p:spPr>
-          <a:xfrm>
-            <a:off x="365760" y="4251960"/>
-            <a:ext cx="8321040" cy="594360"/>
-          </a:xfrm>
-          <a:prstGeom prst="rect">
-            <a:avLst/>
-          </a:prstGeom>
-          <a:solidFill>
-            <a:srgbClr val="FDF3E1"/>
-          </a:solidFill>
-          <a:ln w="9525">
-            <a:solidFill>
-              <a:srgbClr val="DCE3EA"/>
-            </a:solidFill>
-            <a:prstDash val="solid"/>
-          </a:ln>
-        </p:spPr>
-      </p:sp>
-      <p:sp>
-        <p:nvSpPr>
-          <p:cNvPr id="15" name="Text 11"/>
-          <p:cNvSpPr txBox="1"/>
-          <p:nvPr/>
-        </p:nvSpPr>
-        <p:spPr>
-          <a:xfrm>
-            <a:off x="548640" y="4297680"/>
-            <a:ext cx="7955280" cy="502920"/>
-          </a:xfrm>
-          <a:prstGeom prst="rect">
-            <a:avLst/>
-          </a:prstGeom>
-          <a:noFill/>
-          <a:ln/>
-        </p:spPr>
-        <p:txBody>
-          <a:bodyPr wrap="square" lIns="0" tIns="0" rIns="0" bIns="0" rtlCol="0" anchor="ctr"/>
-          <a:lstStyle/>
-          <a:p>
-            <a:pPr indent="0" marL="0">
-              <a:buNone/>
-            </a:pPr>
-            <a:r>
-              <a:rPr lang="en-US" sz="1150" b="1" dirty="0">
-                <a:solidFill>
-                  <a:srgbClr val="C8553D"/>
-                </a:solidFill>
-                <a:latin typeface="Calibri" pitchFamily="34" charset="0"/>
-                <a:ea typeface="Calibri" pitchFamily="34" charset="-122"/>
-                <a:cs typeface="Calibri" pitchFamily="34" charset="-120"/>
-              </a:rPr>
-              <a:t>Số liệu sơ bộ. </a:t>
-            </a:r>
-            <a:pPr indent="0" marL="0">
-              <a:buNone/>
-            </a:pPr>
-            <a:r>
-              <a:rPr lang="en-US" sz="1150" dirty="0">
-                <a:solidFill>
-                  <a:srgbClr val="1B2B3A"/>
-                </a:solidFill>
-                <a:latin typeface="Calibri" pitchFamily="34" charset="0"/>
-                <a:ea typeface="Calibri" pitchFamily="34" charset="-122"/>
-                <a:cs typeface="Calibri" pitchFamily="34" charset="-120"/>
-              </a:rPr>
-              <a:t>Chưa chạy đủ: Đơn phiên · trợ lý 9/17 · Suy luận thời gian 30/40 · Cập nhật kiến thức 16/23. Nhóm câu từ chối (_abs) mới có 1 câu.</a:t>
-            </a:r>
-            <a:endParaRPr lang="en-US" sz="1150" dirty="0"/>
+              <a:t>giả thuyết là khác biệt cấu hình, không phải đồ thị, tạo ra chênh lệch. Muốn kiểm chứng phải chạy lại LightMem loại này với messages_use = user_assistant.</a:t>
+            </a:r>
+            <a:endParaRPr lang="en-US" sz="1050" dirty="0"/>
           </a:p>
         </p:txBody>
       </p:sp>
@@ -7219,7 +10515,7 @@
                 <a:ea typeface="Calibri" pitchFamily="34" charset="-122"/>
                 <a:cs typeface="Calibri" pitchFamily="34" charset="-120"/>
               </a:rPr>
-              <a:t>PHÂN TÍCH LỖI</a:t>
+              <a:t>KẾT QUẢ LIGHTMEM</a:t>
             </a:r>
             <a:endParaRPr lang="en-US" sz="1100" dirty="0"/>
           </a:p>
@@ -7258,61 +10554,38 @@
                 <a:ea typeface="Cambria" pitchFamily="34" charset="-122"/>
                 <a:cs typeface="Cambria" pitchFamily="34" charset="-120"/>
               </a:rPr>
-              <a:t>Hai kiểu lỗi chính trong 20 câu sai</a:t>
+              <a:t>Năm loại đạt 78–100%, riêng lượt trợ lý 41%</a:t>
             </a:r>
             <a:endParaRPr lang="en-US" sz="2600" dirty="0"/>
           </a:p>
         </p:txBody>
       </p:sp>
-      <p:sp>
-        <p:nvSpPr>
-          <p:cNvPr id="4" name="Text 2"/>
-          <p:cNvSpPr txBox="1"/>
-          <p:nvPr/>
-        </p:nvSpPr>
-        <p:spPr>
-          <a:xfrm>
-            <a:off x="6309360" y="274320"/>
-            <a:ext cx="2377440" cy="274320"/>
-          </a:xfrm>
-          <a:prstGeom prst="rect">
-            <a:avLst/>
-          </a:prstGeom>
-          <a:noFill/>
-          <a:ln/>
-        </p:spPr>
-        <p:txBody>
-          <a:bodyPr wrap="square" lIns="0" tIns="0" rIns="0" bIns="0" rtlCol="0" anchor="ctr"/>
-          <a:lstStyle/>
-          <a:p>
-            <a:pPr algn="r" indent="0" marL="0">
-              <a:buNone/>
-            </a:pPr>
-            <a:r>
-              <a:rPr lang="en-US" sz="1000" b="1" dirty="0">
-                <a:solidFill>
-                  <a:srgbClr val="C8553D"/>
-                </a:solidFill>
-                <a:latin typeface="Calibri" pitchFamily="34" charset="0"/>
-                <a:ea typeface="Calibri" pitchFamily="34" charset="-122"/>
-                <a:cs typeface="Calibri" pitchFamily="34" charset="-120"/>
-              </a:rPr>
-              <a:t>Số liệu sơ bộ: 125/150 câu dev</a:t>
-            </a:r>
-            <a:endParaRPr lang="en-US" sz="1000" dirty="0"/>
-          </a:p>
-        </p:txBody>
-      </p:sp>
-      <p:sp>
-        <p:nvSpPr>
-          <p:cNvPr id="6" name="Shape 3"/>
+      <p:graphicFrame>
+        <p:nvGraphicFramePr>
+          <p:cNvPr id="5" name="Chart 0" descr=""/>
+          <p:cNvGraphicFramePr/>
+          <p:nvPr/>
+        </p:nvGraphicFramePr>
+        <p:xfrm>
+          <a:off x="365760" y="1143000"/>
+          <a:ext cx="5212080" cy="2926080"/>
+        </p:xfrm>
+        <a:graphic xmlns:a="http://schemas.openxmlformats.org/drawingml/2006/main">
+          <a:graphicData uri="http://schemas.openxmlformats.org/drawingml/2006/chart">
+            <c:chart xmlns:c="http://schemas.openxmlformats.org/drawingml/2006/chart" r:id="rId1"/>
+          </a:graphicData>
+        </a:graphic>
+      </p:graphicFrame>
+      <p:sp>
+        <p:nvSpPr>
+          <p:cNvPr id="6" name="Shape 2"/>
           <p:cNvSpPr/>
           <p:nvPr/>
         </p:nvSpPr>
         <p:spPr>
           <a:xfrm>
-            <a:off x="365760" y="1188720"/>
-            <a:ext cx="2651760" cy="3291840"/>
+            <a:off x="5760720" y="1143000"/>
+            <a:ext cx="2926080" cy="914400"/>
           </a:xfrm>
           <a:prstGeom prst="rect">
             <a:avLst/>
@@ -7330,7 +10603,440 @@
       </p:sp>
       <p:sp>
         <p:nvSpPr>
-          <p:cNvPr id="7" name="Text 4"/>
+          <p:cNvPr id="7" name="Text 3"/>
+          <p:cNvSpPr txBox="1"/>
+          <p:nvPr/>
+        </p:nvSpPr>
+        <p:spPr>
+          <a:xfrm>
+            <a:off x="5760720" y="1188720"/>
+            <a:ext cx="2926080" cy="566928"/>
+          </a:xfrm>
+          <a:prstGeom prst="rect">
+            <a:avLst/>
+          </a:prstGeom>
+          <a:noFill/>
+          <a:ln/>
+        </p:spPr>
+        <p:txBody>
+          <a:bodyPr wrap="square" lIns="0" tIns="0" rIns="0" bIns="0" rtlCol="0" anchor="ctr"/>
+          <a:lstStyle/>
+          <a:p>
+            <a:pPr algn="ctr" indent="0" marL="0">
+              <a:buNone/>
+            </a:pPr>
+            <a:r>
+              <a:rPr lang="en-US" sz="3200" b="1" dirty="0">
+                <a:solidFill>
+                  <a:srgbClr val="1F6F8B"/>
+                </a:solidFill>
+                <a:latin typeface="Cambria" pitchFamily="34" charset="0"/>
+                <a:ea typeface="Cambria" pitchFamily="34" charset="-122"/>
+                <a:cs typeface="Cambria" pitchFamily="34" charset="-120"/>
+              </a:rPr>
+              <a:t>78,9%</a:t>
+            </a:r>
+            <a:endParaRPr lang="en-US" sz="3200" dirty="0"/>
+          </a:p>
+        </p:txBody>
+      </p:sp>
+      <p:sp>
+        <p:nvSpPr>
+          <p:cNvPr id="8" name="Text 4"/>
+          <p:cNvSpPr txBox="1"/>
+          <p:nvPr/>
+        </p:nvSpPr>
+        <p:spPr>
+          <a:xfrm>
+            <a:off x="5760720" y="1737360"/>
+            <a:ext cx="2926080" cy="274320"/>
+          </a:xfrm>
+          <a:prstGeom prst="rect">
+            <a:avLst/>
+          </a:prstGeom>
+          <a:noFill/>
+          <a:ln/>
+        </p:spPr>
+        <p:txBody>
+          <a:bodyPr wrap="square" lIns="0" tIns="0" rIns="0" bIns="0" rtlCol="0" anchor="ctr"/>
+          <a:lstStyle/>
+          <a:p>
+            <a:pPr algn="ctr" indent="0" marL="0">
+              <a:buNone/>
+            </a:pPr>
+            <a:r>
+              <a:rPr lang="en-US" sz="1050" dirty="0">
+                <a:solidFill>
+                  <a:srgbClr val="5B6B7A"/>
+                </a:solidFill>
+                <a:latin typeface="Calibri" pitchFamily="34" charset="0"/>
+                <a:ea typeface="Calibri" pitchFamily="34" charset="-122"/>
+                <a:cs typeface="Calibri" pitchFamily="34" charset="-120"/>
+              </a:rPr>
+              <a:t>macro-average, 6/6 loại · micro 81,3%</a:t>
+            </a:r>
+            <a:endParaRPr lang="en-US" sz="1050" dirty="0"/>
+          </a:p>
+        </p:txBody>
+      </p:sp>
+      <p:sp>
+        <p:nvSpPr>
+          <p:cNvPr id="9" name="Shape 5"/>
+          <p:cNvSpPr/>
+          <p:nvPr/>
+        </p:nvSpPr>
+        <p:spPr>
+          <a:xfrm>
+            <a:off x="5760720" y="2240280"/>
+            <a:ext cx="2926080" cy="1828800"/>
+          </a:xfrm>
+          <a:prstGeom prst="rect">
+            <a:avLst/>
+          </a:prstGeom>
+          <a:solidFill>
+            <a:srgbClr val="FBEAE5"/>
+          </a:solidFill>
+          <a:ln w="9525">
+            <a:solidFill>
+              <a:srgbClr val="DCE3EA"/>
+            </a:solidFill>
+            <a:prstDash val="solid"/>
+          </a:ln>
+        </p:spPr>
+      </p:sp>
+      <p:sp>
+        <p:nvSpPr>
+          <p:cNvPr id="10" name="Text 6"/>
+          <p:cNvSpPr txBox="1"/>
+          <p:nvPr/>
+        </p:nvSpPr>
+        <p:spPr>
+          <a:xfrm>
+            <a:off x="5760720" y="2331720"/>
+            <a:ext cx="2926080" cy="548640"/>
+          </a:xfrm>
+          <a:prstGeom prst="rect">
+            <a:avLst/>
+          </a:prstGeom>
+          <a:noFill/>
+          <a:ln/>
+        </p:spPr>
+        <p:txBody>
+          <a:bodyPr wrap="square" lIns="0" tIns="0" rIns="0" bIns="0" rtlCol="0" anchor="ctr"/>
+          <a:lstStyle/>
+          <a:p>
+            <a:pPr algn="ctr" indent="0" marL="0">
+              <a:buNone/>
+            </a:pPr>
+            <a:r>
+              <a:rPr lang="en-US" sz="3200" b="1" dirty="0">
+                <a:solidFill>
+                  <a:srgbClr val="C8553D"/>
+                </a:solidFill>
+                <a:latin typeface="Cambria" pitchFamily="34" charset="0"/>
+                <a:ea typeface="Cambria" pitchFamily="34" charset="-122"/>
+                <a:cs typeface="Cambria" pitchFamily="34" charset="-120"/>
+              </a:rPr>
+              <a:t>41,2%</a:t>
+            </a:r>
+            <a:endParaRPr lang="en-US" sz="3200" dirty="0"/>
+          </a:p>
+        </p:txBody>
+      </p:sp>
+      <p:sp>
+        <p:nvSpPr>
+          <p:cNvPr id="11" name="Text 7"/>
+          <p:cNvSpPr txBox="1"/>
+          <p:nvPr/>
+        </p:nvSpPr>
+        <p:spPr>
+          <a:xfrm>
+            <a:off x="5760720" y="2880360"/>
+            <a:ext cx="2926080" cy="274320"/>
+          </a:xfrm>
+          <a:prstGeom prst="rect">
+            <a:avLst/>
+          </a:prstGeom>
+          <a:noFill/>
+          <a:ln/>
+        </p:spPr>
+        <p:txBody>
+          <a:bodyPr wrap="square" lIns="0" tIns="0" rIns="0" bIns="0" rtlCol="0" anchor="ctr"/>
+          <a:lstStyle/>
+          <a:p>
+            <a:pPr algn="ctr" indent="0" marL="0">
+              <a:buNone/>
+            </a:pPr>
+            <a:r>
+              <a:rPr lang="en-US" sz="1100" b="1" dirty="0">
+                <a:solidFill>
+                  <a:srgbClr val="10243E"/>
+                </a:solidFill>
+                <a:latin typeface="Calibri" pitchFamily="34" charset="0"/>
+                <a:ea typeface="Calibri" pitchFamily="34" charset="-122"/>
+                <a:cs typeface="Calibri" pitchFamily="34" charset="-120"/>
+              </a:rPr>
+              <a:t>Đơn phiên · trợ lý (7/17)</a:t>
+            </a:r>
+            <a:endParaRPr lang="en-US" sz="1100" dirty="0"/>
+          </a:p>
+        </p:txBody>
+      </p:sp>
+      <p:sp>
+        <p:nvSpPr>
+          <p:cNvPr id="12" name="Text 8"/>
+          <p:cNvSpPr txBox="1"/>
+          <p:nvPr/>
+        </p:nvSpPr>
+        <p:spPr>
+          <a:xfrm>
+            <a:off x="5943600" y="3200400"/>
+            <a:ext cx="2560320" cy="777240"/>
+          </a:xfrm>
+          <a:prstGeom prst="rect">
+            <a:avLst/>
+          </a:prstGeom>
+          <a:noFill/>
+          <a:ln/>
+        </p:spPr>
+        <p:txBody>
+          <a:bodyPr wrap="square" lIns="0" tIns="0" rIns="0" bIns="0" rtlCol="0" anchor="t"/>
+          <a:lstStyle/>
+          <a:p>
+            <a:pPr indent="0" marL="0">
+              <a:buNone/>
+            </a:pPr>
+            <a:r>
+              <a:rPr lang="en-US" sz="1100" dirty="0">
+                <a:solidFill>
+                  <a:srgbClr val="1B2B3A"/>
+                </a:solidFill>
+                <a:latin typeface="Calibri" pitchFamily="34" charset="0"/>
+                <a:ea typeface="Calibri" pitchFamily="34" charset="-122"/>
+                <a:cs typeface="Calibri" pitchFamily="34" charset="-120"/>
+              </a:rPr>
+              <a:t>LightMem chỉ lưu lượt người dùng (user_only), nên câu hỏi “trước đây bạn gợi ý gì” không có bằng chứng nào trong bộ nhớ.</a:t>
+            </a:r>
+            <a:endParaRPr lang="en-US" sz="1100" dirty="0"/>
+          </a:p>
+        </p:txBody>
+      </p:sp>
+      <p:sp>
+        <p:nvSpPr>
+          <p:cNvPr id="13" name="Shape 9"/>
+          <p:cNvSpPr/>
+          <p:nvPr/>
+        </p:nvSpPr>
+        <p:spPr>
+          <a:xfrm>
+            <a:off x="365760" y="4251960"/>
+            <a:ext cx="8321040" cy="594360"/>
+          </a:xfrm>
+          <a:prstGeom prst="rect">
+            <a:avLst/>
+          </a:prstGeom>
+          <a:solidFill>
+            <a:srgbClr val="FDF3E1"/>
+          </a:solidFill>
+          <a:ln w="9525">
+            <a:solidFill>
+              <a:srgbClr val="DCE3EA"/>
+            </a:solidFill>
+            <a:prstDash val="solid"/>
+          </a:ln>
+        </p:spPr>
+      </p:sp>
+      <p:sp>
+        <p:nvSpPr>
+          <p:cNvPr id="14" name="Text 10"/>
+          <p:cNvSpPr txBox="1"/>
+          <p:nvPr/>
+        </p:nvSpPr>
+        <p:spPr>
+          <a:xfrm>
+            <a:off x="548640" y="4297680"/>
+            <a:ext cx="7955280" cy="502920"/>
+          </a:xfrm>
+          <a:prstGeom prst="rect">
+            <a:avLst/>
+          </a:prstGeom>
+          <a:noFill/>
+          <a:ln/>
+        </p:spPr>
+        <p:txBody>
+          <a:bodyPr wrap="square" lIns="0" tIns="0" rIns="0" bIns="0" rtlCol="0" anchor="ctr"/>
+          <a:lstStyle/>
+          <a:p>
+            <a:pPr indent="0" marL="0">
+              <a:buNone/>
+            </a:pPr>
+            <a:r>
+              <a:rPr lang="en-US" sz="1150" b="1" dirty="0">
+                <a:solidFill>
+                  <a:srgbClr val="C8553D"/>
+                </a:solidFill>
+                <a:latin typeface="Calibri" pitchFamily="34" charset="0"/>
+                <a:ea typeface="Calibri" pitchFamily="34" charset="-122"/>
+                <a:cs typeface="Calibri" pitchFamily="34" charset="-120"/>
+              </a:rPr>
+              <a:t>Đủ 150 câu dev. </a:t>
+            </a:r>
+            <a:pPr indent="0" marL="0">
+              <a:buNone/>
+            </a:pPr>
+            <a:r>
+              <a:rPr lang="en-US" sz="1150" dirty="0">
+                <a:solidFill>
+                  <a:srgbClr val="1B2B3A"/>
+                </a:solidFill>
+                <a:latin typeface="Calibri" pitchFamily="34" charset="0"/>
+                <a:ea typeface="Calibri" pitchFamily="34" charset="-122"/>
+                <a:cs typeface="Calibri" pitchFamily="34" charset="-120"/>
+              </a:rPr>
+              <a:t>Nhóm câu từ chối (_abs) chỉ có 4 câu, quá ít để nói về năng lực biết từ chối.</a:t>
+            </a:r>
+            <a:endParaRPr lang="en-US" sz="1150" dirty="0"/>
+          </a:p>
+        </p:txBody>
+      </p:sp>
+    </p:spTree>
+  </p:cSld>
+  <p:clrMapOvr>
+    <a:masterClrMapping/>
+  </p:clrMapOvr>
+</p:sld>
+</file>
+
+<file path=ppt/slides/slide7.xml><?xml version="1.0" encoding="utf-8"?>
+<p:sld xmlns:a="http://schemas.openxmlformats.org/drawingml/2006/main" xmlns:r="http://schemas.openxmlformats.org/officeDocument/2006/relationships" xmlns:p="http://schemas.openxmlformats.org/presentationml/2006/main">
+  <p:cSld name="Slide 7">
+    <p:bg>
+      <p:bgPr>
+        <a:solidFill>
+          <a:srgbClr val="F7F9FB"/>
+        </a:solidFill>
+      </p:bgPr>
+    </p:bg>
+    <p:spTree>
+      <p:nvGrpSpPr>
+        <p:cNvPr id="1" name=""/>
+        <p:cNvGrpSpPr/>
+        <p:nvPr/>
+      </p:nvGrpSpPr>
+      <p:grpSpPr>
+        <a:xfrm>
+          <a:off x="0" y="0"/>
+          <a:ext cx="0" cy="0"/>
+          <a:chOff x="0" y="0"/>
+          <a:chExt cx="0" cy="0"/>
+        </a:xfrm>
+      </p:grpSpPr>
+      <p:sp>
+        <p:nvSpPr>
+          <p:cNvPr id="2" name="Text 0"/>
+          <p:cNvSpPr txBox="1"/>
+          <p:nvPr/>
+        </p:nvSpPr>
+        <p:spPr>
+          <a:xfrm>
+            <a:off x="457200" y="274320"/>
+            <a:ext cx="8229600" cy="274320"/>
+          </a:xfrm>
+          <a:prstGeom prst="rect">
+            <a:avLst/>
+          </a:prstGeom>
+          <a:noFill/>
+          <a:ln/>
+        </p:spPr>
+        <p:txBody>
+          <a:bodyPr wrap="square" lIns="0" tIns="0" rIns="0" bIns="0" rtlCol="0" anchor="ctr"/>
+          <a:lstStyle/>
+          <a:p>
+            <a:pPr indent="0" marL="0">
+              <a:buNone/>
+            </a:pPr>
+            <a:r>
+              <a:rPr lang="en-US" sz="1100" b="1" dirty="0">
+                <a:solidFill>
+                  <a:srgbClr val="1F6F8B"/>
+                </a:solidFill>
+                <a:latin typeface="Calibri" pitchFamily="34" charset="0"/>
+                <a:ea typeface="Calibri" pitchFamily="34" charset="-122"/>
+                <a:cs typeface="Calibri" pitchFamily="34" charset="-120"/>
+              </a:rPr>
+              <a:t>PHÂN TÍCH LỖI</a:t>
+            </a:r>
+            <a:endParaRPr lang="en-US" sz="1100" dirty="0"/>
+          </a:p>
+        </p:txBody>
+      </p:sp>
+      <p:sp>
+        <p:nvSpPr>
+          <p:cNvPr id="3" name="Text 1"/>
+          <p:cNvSpPr txBox="1"/>
+          <p:nvPr/>
+        </p:nvSpPr>
+        <p:spPr>
+          <a:xfrm>
+            <a:off x="457200" y="502920"/>
+            <a:ext cx="8229600" cy="548640"/>
+          </a:xfrm>
+          <a:prstGeom prst="rect">
+            <a:avLst/>
+          </a:prstGeom>
+          <a:noFill/>
+          <a:ln/>
+        </p:spPr>
+        <p:txBody>
+          <a:bodyPr wrap="square" lIns="0" tIns="0" rIns="0" bIns="0" rtlCol="0" anchor="ctr"/>
+          <a:lstStyle/>
+          <a:p>
+            <a:pPr indent="0" marL="0">
+              <a:buNone/>
+            </a:pPr>
+            <a:r>
+              <a:rPr lang="en-US" sz="2600" b="1" dirty="0">
+                <a:solidFill>
+                  <a:srgbClr val="10243E"/>
+                </a:solidFill>
+                <a:latin typeface="Cambria" pitchFamily="34" charset="0"/>
+                <a:ea typeface="Cambria" pitchFamily="34" charset="-122"/>
+                <a:cs typeface="Cambria" pitchFamily="34" charset="-120"/>
+              </a:rPr>
+              <a:t>Hai kiểu lỗi chính trong 28 câu sai</a:t>
+            </a:r>
+            <a:endParaRPr lang="en-US" sz="2600" dirty="0"/>
+          </a:p>
+        </p:txBody>
+      </p:sp>
+      <p:sp>
+        <p:nvSpPr>
+          <p:cNvPr id="5" name="Shape 2"/>
+          <p:cNvSpPr/>
+          <p:nvPr/>
+        </p:nvSpPr>
+        <p:spPr>
+          <a:xfrm>
+            <a:off x="365760" y="1188720"/>
+            <a:ext cx="2651760" cy="3291840"/>
+          </a:xfrm>
+          <a:prstGeom prst="rect">
+            <a:avLst/>
+          </a:prstGeom>
+          <a:solidFill>
+            <a:srgbClr val="FFFFFF"/>
+          </a:solidFill>
+          <a:ln w="9525">
+            <a:solidFill>
+              <a:srgbClr val="DCE3EA"/>
+            </a:solidFill>
+            <a:prstDash val="solid"/>
+          </a:ln>
+        </p:spPr>
+      </p:sp>
+      <p:sp>
+        <p:nvSpPr>
+          <p:cNvPr id="6" name="Text 3"/>
           <p:cNvSpPr txBox="1"/>
           <p:nvPr/>
         </p:nvSpPr>
@@ -7361,7 +11067,7 @@
                 <a:ea typeface="Cambria" pitchFamily="34" charset="-122"/>
                 <a:cs typeface="Cambria" pitchFamily="34" charset="-120"/>
               </a:rPr>
-              <a:t>20</a:t>
+              <a:t>28</a:t>
             </a:r>
             <a:endParaRPr lang="en-US" sz="4600" dirty="0"/>
           </a:p>
@@ -7369,7 +11075,7 @@
       </p:sp>
       <p:sp>
         <p:nvSpPr>
-          <p:cNvPr id="8" name="Text 5"/>
+          <p:cNvPr id="7" name="Text 4"/>
           <p:cNvSpPr txBox="1"/>
           <p:nvPr/>
         </p:nvSpPr>
@@ -7400,7 +11106,46 @@
                 <a:ea typeface="Calibri" pitchFamily="34" charset="-122"/>
                 <a:cs typeface="Calibri" pitchFamily="34" charset="-120"/>
               </a:rPr>
-              <a:t>câu sai trong 125 câu đã chạy</a:t>
+              <a:t>câu sai trong 150 câu đã chạy</a:t>
+            </a:r>
+            <a:endParaRPr lang="en-US" sz="1150" dirty="0"/>
+          </a:p>
+        </p:txBody>
+      </p:sp>
+      <p:sp>
+        <p:nvSpPr>
+          <p:cNvPr id="8" name="Text 5"/>
+          <p:cNvSpPr txBox="1"/>
+          <p:nvPr/>
+        </p:nvSpPr>
+        <p:spPr>
+          <a:xfrm>
+            <a:off x="594360" y="2560320"/>
+            <a:ext cx="1828800" cy="310896"/>
+          </a:xfrm>
+          <a:prstGeom prst="rect">
+            <a:avLst/>
+          </a:prstGeom>
+          <a:noFill/>
+          <a:ln/>
+        </p:spPr>
+        <p:txBody>
+          <a:bodyPr wrap="square" lIns="0" tIns="0" rIns="0" bIns="0" rtlCol="0" anchor="ctr"/>
+          <a:lstStyle/>
+          <a:p>
+            <a:pPr indent="0" marL="0">
+              <a:buNone/>
+            </a:pPr>
+            <a:r>
+              <a:rPr lang="en-US" sz="1150" dirty="0">
+                <a:solidFill>
+                  <a:srgbClr val="1B2B3A"/>
+                </a:solidFill>
+                <a:latin typeface="Calibri" pitchFamily="34" charset="0"/>
+                <a:ea typeface="Calibri" pitchFamily="34" charset="-122"/>
+                <a:cs typeface="Calibri" pitchFamily="34" charset="-120"/>
+              </a:rPr>
+              <a:t>Đơn phiên · trợ lý</a:t>
             </a:r>
             <a:endParaRPr lang="en-US" sz="1150" dirty="0"/>
           </a:p>
@@ -7414,7 +11159,46 @@
         </p:nvSpPr>
         <p:spPr>
           <a:xfrm>
-            <a:off x="594360" y="2560320"/>
+            <a:off x="2423160" y="2560320"/>
+            <a:ext cx="411480" cy="310896"/>
+          </a:xfrm>
+          <a:prstGeom prst="rect">
+            <a:avLst/>
+          </a:prstGeom>
+          <a:noFill/>
+          <a:ln/>
+        </p:spPr>
+        <p:txBody>
+          <a:bodyPr wrap="square" lIns="0" tIns="0" rIns="0" bIns="0" rtlCol="0" anchor="ctr"/>
+          <a:lstStyle/>
+          <a:p>
+            <a:pPr algn="r" indent="0" marL="0">
+              <a:buNone/>
+            </a:pPr>
+            <a:r>
+              <a:rPr lang="en-US" sz="1150" b="1" dirty="0">
+                <a:solidFill>
+                  <a:srgbClr val="C8553D"/>
+                </a:solidFill>
+                <a:latin typeface="Calibri" pitchFamily="34" charset="0"/>
+                <a:ea typeface="Calibri" pitchFamily="34" charset="-122"/>
+                <a:cs typeface="Calibri" pitchFamily="34" charset="-120"/>
+              </a:rPr>
+              <a:t>10</a:t>
+            </a:r>
+            <a:endParaRPr lang="en-US" sz="1150" dirty="0"/>
+          </a:p>
+        </p:txBody>
+      </p:sp>
+      <p:sp>
+        <p:nvSpPr>
+          <p:cNvPr id="10" name="Text 7"/>
+          <p:cNvSpPr txBox="1"/>
+          <p:nvPr/>
+        </p:nvSpPr>
+        <p:spPr>
+          <a:xfrm>
+            <a:off x="594360" y="2926080"/>
             <a:ext cx="1828800" cy="310896"/>
           </a:xfrm>
           <a:prstGeom prst="rect">
@@ -7447,13 +11231,13 @@
       </p:sp>
       <p:sp>
         <p:nvSpPr>
-          <p:cNvPr id="10" name="Text 7"/>
+          <p:cNvPr id="11" name="Text 8"/>
           <p:cNvSpPr txBox="1"/>
           <p:nvPr/>
         </p:nvSpPr>
         <p:spPr>
           <a:xfrm>
-            <a:off x="2423160" y="2560320"/>
+            <a:off x="2423160" y="2926080"/>
             <a:ext cx="411480" cy="310896"/>
           </a:xfrm>
           <a:prstGeom prst="rect">
@@ -7486,85 +11270,7 @@
       </p:sp>
       <p:sp>
         <p:nvSpPr>
-          <p:cNvPr id="11" name="Text 8"/>
-          <p:cNvSpPr txBox="1"/>
-          <p:nvPr/>
-        </p:nvSpPr>
-        <p:spPr>
-          <a:xfrm>
-            <a:off x="594360" y="2926080"/>
-            <a:ext cx="1828800" cy="310896"/>
-          </a:xfrm>
-          <a:prstGeom prst="rect">
-            <a:avLst/>
-          </a:prstGeom>
-          <a:noFill/>
-          <a:ln/>
-        </p:spPr>
-        <p:txBody>
-          <a:bodyPr wrap="square" lIns="0" tIns="0" rIns="0" bIns="0" rtlCol="0" anchor="ctr"/>
-          <a:lstStyle/>
-          <a:p>
-            <a:pPr indent="0" marL="0">
-              <a:buNone/>
-            </a:pPr>
-            <a:r>
-              <a:rPr lang="en-US" sz="1150" dirty="0">
-                <a:solidFill>
-                  <a:srgbClr val="1B2B3A"/>
-                </a:solidFill>
-                <a:latin typeface="Calibri" pitchFamily="34" charset="0"/>
-                <a:ea typeface="Calibri" pitchFamily="34" charset="-122"/>
-                <a:cs typeface="Calibri" pitchFamily="34" charset="-120"/>
-              </a:rPr>
-              <a:t>Đơn phiên · trợ lý</a:t>
-            </a:r>
-            <a:endParaRPr lang="en-US" sz="1150" dirty="0"/>
-          </a:p>
-        </p:txBody>
-      </p:sp>
-      <p:sp>
-        <p:nvSpPr>
           <p:cNvPr id="12" name="Text 9"/>
-          <p:cNvSpPr txBox="1"/>
-          <p:nvPr/>
-        </p:nvSpPr>
-        <p:spPr>
-          <a:xfrm>
-            <a:off x="2423160" y="2926080"/>
-            <a:ext cx="411480" cy="310896"/>
-          </a:xfrm>
-          <a:prstGeom prst="rect">
-            <a:avLst/>
-          </a:prstGeom>
-          <a:noFill/>
-          <a:ln/>
-        </p:spPr>
-        <p:txBody>
-          <a:bodyPr wrap="square" lIns="0" tIns="0" rIns="0" bIns="0" rtlCol="0" anchor="ctr"/>
-          <a:lstStyle/>
-          <a:p>
-            <a:pPr algn="r" indent="0" marL="0">
-              <a:buNone/>
-            </a:pPr>
-            <a:r>
-              <a:rPr lang="en-US" sz="1150" b="1" dirty="0">
-                <a:solidFill>
-                  <a:srgbClr val="C8553D"/>
-                </a:solidFill>
-                <a:latin typeface="Calibri" pitchFamily="34" charset="0"/>
-                <a:ea typeface="Calibri" pitchFamily="34" charset="-122"/>
-                <a:cs typeface="Calibri" pitchFamily="34" charset="-120"/>
-              </a:rPr>
-              <a:t>6</a:t>
-            </a:r>
-            <a:endParaRPr lang="en-US" sz="1150" dirty="0"/>
-          </a:p>
-        </p:txBody>
-      </p:sp>
-      <p:sp>
-        <p:nvSpPr>
-          <p:cNvPr id="13" name="Text 10"/>
           <p:cNvSpPr txBox="1"/>
           <p:nvPr/>
         </p:nvSpPr>
@@ -7603,7 +11309,7 @@
       </p:sp>
       <p:sp>
         <p:nvSpPr>
-          <p:cNvPr id="14" name="Text 11"/>
+          <p:cNvPr id="13" name="Text 10"/>
           <p:cNvSpPr txBox="1"/>
           <p:nvPr/>
         </p:nvSpPr>
@@ -7634,7 +11340,46 @@
                 <a:ea typeface="Calibri" pitchFamily="34" charset="-122"/>
                 <a:cs typeface="Calibri" pitchFamily="34" charset="-120"/>
               </a:rPr>
-              <a:t>4</a:t>
+              <a:t>6</a:t>
+            </a:r>
+            <a:endParaRPr lang="en-US" sz="1150" dirty="0"/>
+          </a:p>
+        </p:txBody>
+      </p:sp>
+      <p:sp>
+        <p:nvSpPr>
+          <p:cNvPr id="14" name="Text 11"/>
+          <p:cNvSpPr txBox="1"/>
+          <p:nvPr/>
+        </p:nvSpPr>
+        <p:spPr>
+          <a:xfrm>
+            <a:off x="594360" y="3657600"/>
+            <a:ext cx="1828800" cy="310896"/>
+          </a:xfrm>
+          <a:prstGeom prst="rect">
+            <a:avLst/>
+          </a:prstGeom>
+          <a:noFill/>
+          <a:ln/>
+        </p:spPr>
+        <p:txBody>
+          <a:bodyPr wrap="square" lIns="0" tIns="0" rIns="0" bIns="0" rtlCol="0" anchor="ctr"/>
+          <a:lstStyle/>
+          <a:p>
+            <a:pPr indent="0" marL="0">
+              <a:buNone/>
+            </a:pPr>
+            <a:r>
+              <a:rPr lang="en-US" sz="1150" dirty="0">
+                <a:solidFill>
+                  <a:srgbClr val="1B2B3A"/>
+                </a:solidFill>
+                <a:latin typeface="Calibri" pitchFamily="34" charset="0"/>
+                <a:ea typeface="Calibri" pitchFamily="34" charset="-122"/>
+                <a:cs typeface="Calibri" pitchFamily="34" charset="-120"/>
+              </a:rPr>
+              <a:t>Cập nhật kiến thức</a:t>
             </a:r>
             <a:endParaRPr lang="en-US" sz="1150" dirty="0"/>
           </a:p>
@@ -7648,7 +11393,46 @@
         </p:nvSpPr>
         <p:spPr>
           <a:xfrm>
-            <a:off x="594360" y="3657600"/>
+            <a:off x="2423160" y="3657600"/>
+            <a:ext cx="411480" cy="310896"/>
+          </a:xfrm>
+          <a:prstGeom prst="rect">
+            <a:avLst/>
+          </a:prstGeom>
+          <a:noFill/>
+          <a:ln/>
+        </p:spPr>
+        <p:txBody>
+          <a:bodyPr wrap="square" lIns="0" tIns="0" rIns="0" bIns="0" rtlCol="0" anchor="ctr"/>
+          <a:lstStyle/>
+          <a:p>
+            <a:pPr algn="r" indent="0" marL="0">
+              <a:buNone/>
+            </a:pPr>
+            <a:r>
+              <a:rPr lang="en-US" sz="1150" b="1" dirty="0">
+                <a:solidFill>
+                  <a:srgbClr val="5B6B7A"/>
+                </a:solidFill>
+                <a:latin typeface="Calibri" pitchFamily="34" charset="0"/>
+                <a:ea typeface="Calibri" pitchFamily="34" charset="-122"/>
+                <a:cs typeface="Calibri" pitchFamily="34" charset="-120"/>
+              </a:rPr>
+              <a:t>3</a:t>
+            </a:r>
+            <a:endParaRPr lang="en-US" sz="1150" dirty="0"/>
+          </a:p>
+        </p:txBody>
+      </p:sp>
+      <p:sp>
+        <p:nvSpPr>
+          <p:cNvPr id="16" name="Text 13"/>
+          <p:cNvSpPr txBox="1"/>
+          <p:nvPr/>
+        </p:nvSpPr>
+        <p:spPr>
+          <a:xfrm>
+            <a:off x="594360" y="4023360"/>
             <a:ext cx="1828800" cy="310896"/>
           </a:xfrm>
           <a:prstGeom prst="rect">
@@ -7681,13 +11465,13 @@
       </p:sp>
       <p:sp>
         <p:nvSpPr>
-          <p:cNvPr id="16" name="Text 13"/>
+          <p:cNvPr id="17" name="Text 14"/>
           <p:cNvSpPr txBox="1"/>
           <p:nvPr/>
         </p:nvSpPr>
         <p:spPr>
           <a:xfrm>
-            <a:off x="2423160" y="3657600"/>
+            <a:off x="2423160" y="4023360"/>
             <a:ext cx="411480" cy="310896"/>
           </a:xfrm>
           <a:prstGeom prst="rect">
@@ -7718,87 +11502,9 @@
           </a:p>
         </p:txBody>
       </p:sp>
-      <p:sp>
-        <p:nvSpPr>
-          <p:cNvPr id="17" name="Text 14"/>
-          <p:cNvSpPr txBox="1"/>
-          <p:nvPr/>
-        </p:nvSpPr>
-        <p:spPr>
-          <a:xfrm>
-            <a:off x="594360" y="4023360"/>
-            <a:ext cx="1828800" cy="310896"/>
-          </a:xfrm>
-          <a:prstGeom prst="rect">
-            <a:avLst/>
-          </a:prstGeom>
-          <a:noFill/>
-          <a:ln/>
-        </p:spPr>
-        <p:txBody>
-          <a:bodyPr wrap="square" lIns="0" tIns="0" rIns="0" bIns="0" rtlCol="0" anchor="ctr"/>
-          <a:lstStyle/>
-          <a:p>
-            <a:pPr indent="0" marL="0">
-              <a:buNone/>
-            </a:pPr>
-            <a:r>
-              <a:rPr lang="en-US" sz="1150" dirty="0">
-                <a:solidFill>
-                  <a:srgbClr val="1B2B3A"/>
-                </a:solidFill>
-                <a:latin typeface="Calibri" pitchFamily="34" charset="0"/>
-                <a:ea typeface="Calibri" pitchFamily="34" charset="-122"/>
-                <a:cs typeface="Calibri" pitchFamily="34" charset="-120"/>
-              </a:rPr>
-              <a:t>Cập nhật kiến thức</a:t>
-            </a:r>
-            <a:endParaRPr lang="en-US" sz="1150" dirty="0"/>
-          </a:p>
-        </p:txBody>
-      </p:sp>
-      <p:sp>
-        <p:nvSpPr>
-          <p:cNvPr id="18" name="Text 15"/>
-          <p:cNvSpPr txBox="1"/>
-          <p:nvPr/>
-        </p:nvSpPr>
-        <p:spPr>
-          <a:xfrm>
-            <a:off x="2423160" y="4023360"/>
-            <a:ext cx="411480" cy="310896"/>
-          </a:xfrm>
-          <a:prstGeom prst="rect">
-            <a:avLst/>
-          </a:prstGeom>
-          <a:noFill/>
-          <a:ln/>
-        </p:spPr>
-        <p:txBody>
-          <a:bodyPr wrap="square" lIns="0" tIns="0" rIns="0" bIns="0" rtlCol="0" anchor="ctr"/>
-          <a:lstStyle/>
-          <a:p>
-            <a:pPr algn="r" indent="0" marL="0">
-              <a:buNone/>
-            </a:pPr>
-            <a:r>
-              <a:rPr lang="en-US" sz="1150" b="1" dirty="0">
-                <a:solidFill>
-                  <a:srgbClr val="5B6B7A"/>
-                </a:solidFill>
-                <a:latin typeface="Calibri" pitchFamily="34" charset="0"/>
-                <a:ea typeface="Calibri" pitchFamily="34" charset="-122"/>
-                <a:cs typeface="Calibri" pitchFamily="34" charset="-120"/>
-              </a:rPr>
-              <a:t>1</a:t>
-            </a:r>
-            <a:endParaRPr lang="en-US" sz="1150" dirty="0"/>
-          </a:p>
-        </p:txBody>
-      </p:sp>
       <p:graphicFrame>
         <p:nvGraphicFramePr>
-          <p:cNvPr id="7" name="Table 0"/>
+          <p:cNvPr id="8" name="Table 0"/>
           <p:cNvGraphicFramePr>
             <a:graphicFrameLocks noGrp="1"/>
           </p:cNvGraphicFramePr>
@@ -9152,7 +12858,7 @@
       </p:graphicFrame>
       <p:sp>
         <p:nvSpPr>
-          <p:cNvPr id="20" name="Shape 16"/>
+          <p:cNvPr id="19" name="Shape 15"/>
           <p:cNvSpPr/>
           <p:nvPr/>
         </p:nvSpPr>
@@ -9177,7 +12883,7 @@
       </p:sp>
       <p:sp>
         <p:nvSpPr>
-          <p:cNvPr id="21" name="Text 17"/>
+          <p:cNvPr id="20" name="Text 16"/>
           <p:cNvSpPr txBox="1"/>
           <p:nvPr/>
         </p:nvSpPr>
@@ -9222,718 +12928,9 @@
                 <a:ea typeface="Calibri" pitchFamily="34" charset="-122"/>
                 <a:cs typeface="Calibri" pitchFamily="34" charset="-120"/>
               </a:rPr>
-              <a:t>4/6 câu sai loại lượt trợ lý, hệ trả lời thẳng là không tìm thấy thông tin trong bộ nhớ, khớp với cấu hình user_only.</a:t>
+              <a:t>6/10 câu sai loại lượt trợ lý, hệ trả lời thẳng là không tìm thấy thông tin trong bộ nhớ, khớp với cấu hình user_only.</a:t>
             </a:r>
             <a:endParaRPr lang="en-US" sz="1050" dirty="0"/>
-          </a:p>
-        </p:txBody>
-      </p:sp>
-    </p:spTree>
-  </p:cSld>
-  <p:clrMapOvr>
-    <a:masterClrMapping/>
-  </p:clrMapOvr>
-</p:sld>
-</file>
-
-<file path=ppt/slides/slide7.xml><?xml version="1.0" encoding="utf-8"?>
-<p:sld xmlns:a="http://schemas.openxmlformats.org/drawingml/2006/main" xmlns:r="http://schemas.openxmlformats.org/officeDocument/2006/relationships" xmlns:p="http://schemas.openxmlformats.org/presentationml/2006/main">
-  <p:cSld name="Slide 7">
-    <p:bg>
-      <p:bgPr>
-        <a:solidFill>
-          <a:srgbClr val="F7F9FB"/>
-        </a:solidFill>
-      </p:bgPr>
-    </p:bg>
-    <p:spTree>
-      <p:nvGrpSpPr>
-        <p:cNvPr id="1" name=""/>
-        <p:cNvGrpSpPr/>
-        <p:nvPr/>
-      </p:nvGrpSpPr>
-      <p:grpSpPr>
-        <a:xfrm>
-          <a:off x="0" y="0"/>
-          <a:ext cx="0" cy="0"/>
-          <a:chOff x="0" y="0"/>
-          <a:chExt cx="0" cy="0"/>
-        </a:xfrm>
-      </p:grpSpPr>
-      <p:sp>
-        <p:nvSpPr>
-          <p:cNvPr id="2" name="Text 0"/>
-          <p:cNvSpPr txBox="1"/>
-          <p:nvPr/>
-        </p:nvSpPr>
-        <p:spPr>
-          <a:xfrm>
-            <a:off x="457200" y="274320"/>
-            <a:ext cx="8229600" cy="274320"/>
-          </a:xfrm>
-          <a:prstGeom prst="rect">
-            <a:avLst/>
-          </a:prstGeom>
-          <a:noFill/>
-          <a:ln/>
-        </p:spPr>
-        <p:txBody>
-          <a:bodyPr wrap="square" lIns="0" tIns="0" rIns="0" bIns="0" rtlCol="0" anchor="ctr"/>
-          <a:lstStyle/>
-          <a:p>
-            <a:pPr indent="0" marL="0">
-              <a:buNone/>
-            </a:pPr>
-            <a:r>
-              <a:rPr lang="en-US" sz="1100" b="1" dirty="0">
-                <a:solidFill>
-                  <a:srgbClr val="1F6F8B"/>
-                </a:solidFill>
-                <a:latin typeface="Calibri" pitchFamily="34" charset="0"/>
-                <a:ea typeface="Calibri" pitchFamily="34" charset="-122"/>
-                <a:cs typeface="Calibri" pitchFamily="34" charset="-120"/>
-              </a:rPr>
-              <a:t>TÁCH NGUỒN LỖI</a:t>
-            </a:r>
-            <a:endParaRPr lang="en-US" sz="1100" dirty="0"/>
-          </a:p>
-        </p:txBody>
-      </p:sp>
-      <p:sp>
-        <p:nvSpPr>
-          <p:cNvPr id="3" name="Text 1"/>
-          <p:cNvSpPr txBox="1"/>
-          <p:nvPr/>
-        </p:nvSpPr>
-        <p:spPr>
-          <a:xfrm>
-            <a:off x="457200" y="502920"/>
-            <a:ext cx="8229600" cy="548640"/>
-          </a:xfrm>
-          <a:prstGeom prst="rect">
-            <a:avLst/>
-          </a:prstGeom>
-          <a:noFill/>
-          <a:ln/>
-        </p:spPr>
-        <p:txBody>
-          <a:bodyPr wrap="square" lIns="0" tIns="0" rIns="0" bIns="0" rtlCol="0" anchor="ctr"/>
-          <a:lstStyle/>
-          <a:p>
-            <a:pPr indent="0" marL="0">
-              <a:buNone/>
-            </a:pPr>
-            <a:r>
-              <a:rPr lang="en-US" sz="2600" b="1" dirty="0">
-                <a:solidFill>
-                  <a:srgbClr val="10243E"/>
-                </a:solidFill>
-                <a:latin typeface="Cambria" pitchFamily="34" charset="0"/>
-                <a:ea typeface="Cambria" pitchFamily="34" charset="-122"/>
-                <a:cs typeface="Cambria" pitchFamily="34" charset="-120"/>
-              </a:rPr>
-              <a:t>Lỗi không nằm ở khâu tìm kiếm</a:t>
-            </a:r>
-            <a:endParaRPr lang="en-US" sz="2600" dirty="0"/>
-          </a:p>
-        </p:txBody>
-      </p:sp>
-      <p:sp>
-        <p:nvSpPr>
-          <p:cNvPr id="4" name="Text 2"/>
-          <p:cNvSpPr txBox="1"/>
-          <p:nvPr/>
-        </p:nvSpPr>
-        <p:spPr>
-          <a:xfrm>
-            <a:off x="6309360" y="274320"/>
-            <a:ext cx="2377440" cy="274320"/>
-          </a:xfrm>
-          <a:prstGeom prst="rect">
-            <a:avLst/>
-          </a:prstGeom>
-          <a:noFill/>
-          <a:ln/>
-        </p:spPr>
-        <p:txBody>
-          <a:bodyPr wrap="square" lIns="0" tIns="0" rIns="0" bIns="0" rtlCol="0" anchor="ctr"/>
-          <a:lstStyle/>
-          <a:p>
-            <a:pPr algn="r" indent="0" marL="0">
-              <a:buNone/>
-            </a:pPr>
-            <a:r>
-              <a:rPr lang="en-US" sz="1000" b="1" dirty="0">
-                <a:solidFill>
-                  <a:srgbClr val="C8553D"/>
-                </a:solidFill>
-                <a:latin typeface="Calibri" pitchFamily="34" charset="0"/>
-                <a:ea typeface="Calibri" pitchFamily="34" charset="-122"/>
-                <a:cs typeface="Calibri" pitchFamily="34" charset="-120"/>
-              </a:rPr>
-              <a:t>Số liệu sơ bộ: 125/150 câu dev</a:t>
-            </a:r>
-            <a:endParaRPr lang="en-US" sz="1000" dirty="0"/>
-          </a:p>
-        </p:txBody>
-      </p:sp>
-      <p:sp>
-        <p:nvSpPr>
-          <p:cNvPr id="6" name="Shape 3"/>
-          <p:cNvSpPr/>
-          <p:nvPr/>
-        </p:nvSpPr>
-        <p:spPr>
-          <a:xfrm>
-            <a:off x="365760" y="1188720"/>
-            <a:ext cx="2651760" cy="2926080"/>
-          </a:xfrm>
-          <a:prstGeom prst="rect">
-            <a:avLst/>
-          </a:prstGeom>
-          <a:solidFill>
-            <a:srgbClr val="FFFFFF"/>
-          </a:solidFill>
-          <a:ln w="9525">
-            <a:solidFill>
-              <a:srgbClr val="DCE3EA"/>
-            </a:solidFill>
-            <a:prstDash val="solid"/>
-          </a:ln>
-        </p:spPr>
-      </p:sp>
-      <p:sp>
-        <p:nvSpPr>
-          <p:cNvPr id="7" name="Text 4"/>
-          <p:cNvSpPr txBox="1"/>
-          <p:nvPr/>
-        </p:nvSpPr>
-        <p:spPr>
-          <a:xfrm>
-            <a:off x="365760" y="1325880"/>
-            <a:ext cx="2651760" cy="731520"/>
-          </a:xfrm>
-          <a:prstGeom prst="rect">
-            <a:avLst/>
-          </a:prstGeom>
-          <a:noFill/>
-          <a:ln/>
-        </p:spPr>
-        <p:txBody>
-          <a:bodyPr wrap="square" lIns="0" tIns="0" rIns="0" bIns="0" rtlCol="0" anchor="ctr"/>
-          <a:lstStyle/>
-          <a:p>
-            <a:pPr algn="ctr" indent="0" marL="0">
-              <a:buNone/>
-            </a:pPr>
-            <a:r>
-              <a:rPr lang="en-US" sz="4000" b="1" dirty="0">
-                <a:solidFill>
-                  <a:srgbClr val="1F6F8B"/>
-                </a:solidFill>
-                <a:latin typeface="Cambria" pitchFamily="34" charset="0"/>
-                <a:ea typeface="Cambria" pitchFamily="34" charset="-122"/>
-                <a:cs typeface="Cambria" pitchFamily="34" charset="-120"/>
-              </a:rPr>
-              <a:t>99,2%</a:t>
-            </a:r>
-            <a:endParaRPr lang="en-US" sz="4000" dirty="0"/>
-          </a:p>
-        </p:txBody>
-      </p:sp>
-      <p:sp>
-        <p:nvSpPr>
-          <p:cNvPr id="8" name="Text 5"/>
-          <p:cNvSpPr txBox="1"/>
-          <p:nvPr/>
-        </p:nvSpPr>
-        <p:spPr>
-          <a:xfrm>
-            <a:off x="548640" y="2057400"/>
-            <a:ext cx="2286000" cy="548640"/>
-          </a:xfrm>
-          <a:prstGeom prst="rect">
-            <a:avLst/>
-          </a:prstGeom>
-          <a:noFill/>
-          <a:ln/>
-        </p:spPr>
-        <p:txBody>
-          <a:bodyPr wrap="square" lIns="0" tIns="0" rIns="0" bIns="0" rtlCol="0" anchor="t"/>
-          <a:lstStyle/>
-          <a:p>
-            <a:pPr algn="ctr" indent="0" marL="0">
-              <a:buNone/>
-            </a:pPr>
-            <a:r>
-              <a:rPr lang="en-US" sz="1200" dirty="0">
-                <a:solidFill>
-                  <a:srgbClr val="5B6B7A"/>
-                </a:solidFill>
-                <a:latin typeface="Calibri" pitchFamily="34" charset="0"/>
-                <a:ea typeface="Calibri" pitchFamily="34" charset="-122"/>
-                <a:cs typeface="Calibri" pitchFamily="34" charset="-120"/>
-              </a:rPr>
-              <a:t>truy xuất trúng phiên chứa bằng chứng (124/125 câu)</a:t>
-            </a:r>
-            <a:endParaRPr lang="en-US" sz="1200" dirty="0"/>
-          </a:p>
-        </p:txBody>
-      </p:sp>
-      <p:sp>
-        <p:nvSpPr>
-          <p:cNvPr id="9" name="Text 6"/>
-          <p:cNvSpPr txBox="1"/>
-          <p:nvPr/>
-        </p:nvSpPr>
-        <p:spPr>
-          <a:xfrm>
-            <a:off x="548640" y="2697480"/>
-            <a:ext cx="2286000" cy="1325880"/>
-          </a:xfrm>
-          <a:prstGeom prst="rect">
-            <a:avLst/>
-          </a:prstGeom>
-          <a:noFill/>
-          <a:ln/>
-        </p:spPr>
-        <p:txBody>
-          <a:bodyPr wrap="square" lIns="0" tIns="0" rIns="0" bIns="0" rtlCol="0" anchor="t"/>
-          <a:lstStyle/>
-          <a:p>
-            <a:pPr indent="0" marL="0">
-              <a:buNone/>
-            </a:pPr>
-            <a:r>
-              <a:rPr lang="en-US" sz="1050" b="1" dirty="0">
-                <a:solidFill>
-                  <a:srgbClr val="10243E"/>
-                </a:solidFill>
-                <a:latin typeface="Calibri" pitchFamily="34" charset="0"/>
-                <a:ea typeface="Calibri" pitchFamily="34" charset="-122"/>
-                <a:cs typeface="Calibri" pitchFamily="34" charset="-120"/>
-              </a:rPr>
-              <a:t>Đo thế nào</a:t>
-            </a:r>
-            <a:endParaRPr lang="en-US" sz="1050" dirty="0"/>
-          </a:p>
-          <a:p>
-            <a:pPr indent="0" marL="0">
-              <a:buNone/>
-            </a:pPr>
-            <a:r>
-              <a:rPr lang="en-US" sz="1050" dirty="0">
-                <a:solidFill>
-                  <a:srgbClr val="1B2B3A"/>
-                </a:solidFill>
-                <a:latin typeface="Calibri" pitchFamily="34" charset="0"/>
-                <a:ea typeface="Calibri" pitchFamily="34" charset="-122"/>
-                <a:cs typeface="Calibri" pitchFamily="34" charset="-120"/>
-              </a:rPr>
-              <a:t>Mỗi ký ức LightMem trả về đều mở đầu bằng mốc thời gian của phiên. Khớp mốc đó với haystack_dates để biết ký ức đến từ phiên nào, rồi so với answer_session_ids của bộ dữ liệu.</a:t>
-            </a:r>
-            <a:endParaRPr lang="en-US" sz="1050" dirty="0"/>
-          </a:p>
-        </p:txBody>
-      </p:sp>
-      <p:sp>
-        <p:nvSpPr>
-          <p:cNvPr id="10" name="Text 7"/>
-          <p:cNvSpPr txBox="1"/>
-          <p:nvPr/>
-        </p:nvSpPr>
-        <p:spPr>
-          <a:xfrm>
-            <a:off x="3291840" y="1188720"/>
-            <a:ext cx="5394960" cy="274320"/>
-          </a:xfrm>
-          <a:prstGeom prst="rect">
-            <a:avLst/>
-          </a:prstGeom>
-          <a:noFill/>
-          <a:ln/>
-        </p:spPr>
-        <p:txBody>
-          <a:bodyPr wrap="square" lIns="0" tIns="0" rIns="0" bIns="0" rtlCol="0" anchor="ctr"/>
-          <a:lstStyle/>
-          <a:p>
-            <a:pPr indent="0" marL="0">
-              <a:buNone/>
-            </a:pPr>
-            <a:r>
-              <a:rPr lang="en-US" sz="1500" b="1" dirty="0">
-                <a:solidFill>
-                  <a:srgbClr val="10243E"/>
-                </a:solidFill>
-                <a:latin typeface="Cambria" pitchFamily="34" charset="0"/>
-                <a:ea typeface="Cambria" pitchFamily="34" charset="-122"/>
-                <a:cs typeface="Cambria" pitchFamily="34" charset="-120"/>
-              </a:rPr>
-              <a:t>Trong 20 câu sai</a:t>
-            </a:r>
-            <a:endParaRPr lang="en-US" sz="1500" dirty="0"/>
-          </a:p>
-        </p:txBody>
-      </p:sp>
-      <p:sp>
-        <p:nvSpPr>
-          <p:cNvPr id="11" name="Shape 8"/>
-          <p:cNvSpPr/>
-          <p:nvPr/>
-        </p:nvSpPr>
-        <p:spPr>
-          <a:xfrm>
-            <a:off x="3291840" y="1554480"/>
-            <a:ext cx="5394960" cy="1600200"/>
-          </a:xfrm>
-          <a:prstGeom prst="rect">
-            <a:avLst/>
-          </a:prstGeom>
-          <a:solidFill>
-            <a:srgbClr val="FBEAE5"/>
-          </a:solidFill>
-          <a:ln w="9525">
-            <a:solidFill>
-              <a:srgbClr val="DCE3EA"/>
-            </a:solidFill>
-            <a:prstDash val="solid"/>
-          </a:ln>
-        </p:spPr>
-      </p:sp>
-      <p:sp>
-        <p:nvSpPr>
-          <p:cNvPr id="12" name="Text 9"/>
-          <p:cNvSpPr txBox="1"/>
-          <p:nvPr/>
-        </p:nvSpPr>
-        <p:spPr>
-          <a:xfrm>
-            <a:off x="3429000" y="1691640"/>
-            <a:ext cx="868680" cy="731520"/>
-          </a:xfrm>
-          <a:prstGeom prst="rect">
-            <a:avLst/>
-          </a:prstGeom>
-          <a:noFill/>
-          <a:ln/>
-        </p:spPr>
-        <p:txBody>
-          <a:bodyPr wrap="square" lIns="0" tIns="0" rIns="0" bIns="0" rtlCol="0" anchor="ctr"/>
-          <a:lstStyle/>
-          <a:p>
-            <a:pPr algn="ctr" indent="0" marL="0">
-              <a:buNone/>
-            </a:pPr>
-            <a:r>
-              <a:rPr lang="en-US" sz="3800" b="1" dirty="0">
-                <a:solidFill>
-                  <a:srgbClr val="C8553D"/>
-                </a:solidFill>
-                <a:latin typeface="Cambria" pitchFamily="34" charset="0"/>
-                <a:ea typeface="Cambria" pitchFamily="34" charset="-122"/>
-                <a:cs typeface="Cambria" pitchFamily="34" charset="-120"/>
-              </a:rPr>
-              <a:t>19</a:t>
-            </a:r>
-            <a:endParaRPr lang="en-US" sz="3800" dirty="0"/>
-          </a:p>
-        </p:txBody>
-      </p:sp>
-      <p:sp>
-        <p:nvSpPr>
-          <p:cNvPr id="13" name="Text 10"/>
-          <p:cNvSpPr txBox="1"/>
-          <p:nvPr/>
-        </p:nvSpPr>
-        <p:spPr>
-          <a:xfrm>
-            <a:off x="4389120" y="1682496"/>
-            <a:ext cx="4160520" cy="384048"/>
-          </a:xfrm>
-          <a:prstGeom prst="rect">
-            <a:avLst/>
-          </a:prstGeom>
-          <a:noFill/>
-          <a:ln/>
-        </p:spPr>
-        <p:txBody>
-          <a:bodyPr wrap="square" lIns="0" tIns="0" rIns="0" bIns="0" rtlCol="0" anchor="ctr"/>
-          <a:lstStyle/>
-          <a:p>
-            <a:pPr indent="0" marL="0">
-              <a:buNone/>
-            </a:pPr>
-            <a:r>
-              <a:rPr lang="en-US" sz="1250" b="1" dirty="0">
-                <a:solidFill>
-                  <a:srgbClr val="10243E"/>
-                </a:solidFill>
-                <a:latin typeface="Calibri" pitchFamily="34" charset="0"/>
-                <a:ea typeface="Calibri" pitchFamily="34" charset="-122"/>
-                <a:cs typeface="Calibri" pitchFamily="34" charset="-120"/>
-              </a:rPr>
-              <a:t>đã có bằng chứng trong ký ức lấy về, vẫn trả lời sai</a:t>
-            </a:r>
-            <a:endParaRPr lang="en-US" sz="1250" dirty="0"/>
-          </a:p>
-        </p:txBody>
-      </p:sp>
-      <p:sp>
-        <p:nvSpPr>
-          <p:cNvPr id="14" name="Text 11"/>
-          <p:cNvSpPr txBox="1"/>
-          <p:nvPr/>
-        </p:nvSpPr>
-        <p:spPr>
-          <a:xfrm>
-            <a:off x="4389120" y="2066544"/>
-            <a:ext cx="4160520" cy="978408"/>
-          </a:xfrm>
-          <a:prstGeom prst="rect">
-            <a:avLst/>
-          </a:prstGeom>
-          <a:noFill/>
-          <a:ln/>
-        </p:spPr>
-        <p:txBody>
-          <a:bodyPr wrap="square" lIns="0" tIns="0" rIns="0" bIns="0" rtlCol="0" anchor="t"/>
-          <a:lstStyle/>
-          <a:p>
-            <a:pPr indent="0" marL="0">
-              <a:buNone/>
-            </a:pPr>
-            <a:r>
-              <a:rPr lang="en-US" sz="1100" dirty="0">
-                <a:solidFill>
-                  <a:srgbClr val="1B2B3A"/>
-                </a:solidFill>
-                <a:latin typeface="Calibri" pitchFamily="34" charset="0"/>
-                <a:ea typeface="Calibri" pitchFamily="34" charset="-122"/>
-                <a:cs typeface="Calibri" pitchFamily="34" charset="-120"/>
-              </a:rPr>
-              <a:t>Lỗi nằm ở tầng trích xuất (nén làm mất chi tiết) hoặc tầng suy luận, không phải tầng tìm kiếm. Ví dụ rõ nhất: một câu tính khoảng ngày, hệ nêu đúng cả hai mốc 22/03 và 15/04/2023 nhưng tính ra 18 ngày thay vì 24 — ký ức đúng, phép trừ sai.</a:t>
-            </a:r>
-            <a:endParaRPr lang="en-US" sz="1100" dirty="0"/>
-          </a:p>
-        </p:txBody>
-      </p:sp>
-      <p:sp>
-        <p:nvSpPr>
-          <p:cNvPr id="15" name="Shape 12"/>
-          <p:cNvSpPr/>
-          <p:nvPr/>
-        </p:nvSpPr>
-        <p:spPr>
-          <a:xfrm>
-            <a:off x="3291840" y="3291840"/>
-            <a:ext cx="5394960" cy="914400"/>
-          </a:xfrm>
-          <a:prstGeom prst="rect">
-            <a:avLst/>
-          </a:prstGeom>
-          <a:solidFill>
-            <a:srgbClr val="FFFFFF"/>
-          </a:solidFill>
-          <a:ln w="9525">
-            <a:solidFill>
-              <a:srgbClr val="DCE3EA"/>
-            </a:solidFill>
-            <a:prstDash val="solid"/>
-          </a:ln>
-        </p:spPr>
-      </p:sp>
-      <p:sp>
-        <p:nvSpPr>
-          <p:cNvPr id="16" name="Text 13"/>
-          <p:cNvSpPr txBox="1"/>
-          <p:nvPr/>
-        </p:nvSpPr>
-        <p:spPr>
-          <a:xfrm>
-            <a:off x="3429000" y="3429000"/>
-            <a:ext cx="868680" cy="731520"/>
-          </a:xfrm>
-          <a:prstGeom prst="rect">
-            <a:avLst/>
-          </a:prstGeom>
-          <a:noFill/>
-          <a:ln/>
-        </p:spPr>
-        <p:txBody>
-          <a:bodyPr wrap="square" lIns="0" tIns="0" rIns="0" bIns="0" rtlCol="0" anchor="ctr"/>
-          <a:lstStyle/>
-          <a:p>
-            <a:pPr algn="ctr" indent="0" marL="0">
-              <a:buNone/>
-            </a:pPr>
-            <a:r>
-              <a:rPr lang="en-US" sz="3800" b="1" dirty="0">
-                <a:solidFill>
-                  <a:srgbClr val="5B6B7A"/>
-                </a:solidFill>
-                <a:latin typeface="Cambria" pitchFamily="34" charset="0"/>
-                <a:ea typeface="Cambria" pitchFamily="34" charset="-122"/>
-                <a:cs typeface="Cambria" pitchFamily="34" charset="-120"/>
-              </a:rPr>
-              <a:t>1</a:t>
-            </a:r>
-            <a:endParaRPr lang="en-US" sz="3800" dirty="0"/>
-          </a:p>
-        </p:txBody>
-      </p:sp>
-      <p:sp>
-        <p:nvSpPr>
-          <p:cNvPr id="17" name="Text 14"/>
-          <p:cNvSpPr txBox="1"/>
-          <p:nvPr/>
-        </p:nvSpPr>
-        <p:spPr>
-          <a:xfrm>
-            <a:off x="4389120" y="3419856"/>
-            <a:ext cx="4160520" cy="384048"/>
-          </a:xfrm>
-          <a:prstGeom prst="rect">
-            <a:avLst/>
-          </a:prstGeom>
-          <a:noFill/>
-          <a:ln/>
-        </p:spPr>
-        <p:txBody>
-          <a:bodyPr wrap="square" lIns="0" tIns="0" rIns="0" bIns="0" rtlCol="0" anchor="ctr"/>
-          <a:lstStyle/>
-          <a:p>
-            <a:pPr indent="0" marL="0">
-              <a:buNone/>
-            </a:pPr>
-            <a:r>
-              <a:rPr lang="en-US" sz="1250" b="1" dirty="0">
-                <a:solidFill>
-                  <a:srgbClr val="10243E"/>
-                </a:solidFill>
-                <a:latin typeface="Calibri" pitchFamily="34" charset="0"/>
-                <a:ea typeface="Calibri" pitchFamily="34" charset="-122"/>
-                <a:cs typeface="Calibri" pitchFamily="34" charset="-120"/>
-              </a:rPr>
-              <a:t>không truy xuất được bằng chứng</a:t>
-            </a:r>
-            <a:endParaRPr lang="en-US" sz="1250" dirty="0"/>
-          </a:p>
-        </p:txBody>
-      </p:sp>
-      <p:sp>
-        <p:nvSpPr>
-          <p:cNvPr id="18" name="Text 15"/>
-          <p:cNvSpPr txBox="1"/>
-          <p:nvPr/>
-        </p:nvSpPr>
-        <p:spPr>
-          <a:xfrm>
-            <a:off x="4389120" y="3803904"/>
-            <a:ext cx="4160520" cy="292608"/>
-          </a:xfrm>
-          <a:prstGeom prst="rect">
-            <a:avLst/>
-          </a:prstGeom>
-          <a:noFill/>
-          <a:ln/>
-        </p:spPr>
-        <p:txBody>
-          <a:bodyPr wrap="square" lIns="0" tIns="0" rIns="0" bIns="0" rtlCol="0" anchor="t"/>
-          <a:lstStyle/>
-          <a:p>
-            <a:pPr indent="0" marL="0">
-              <a:buNone/>
-            </a:pPr>
-            <a:r>
-              <a:rPr lang="en-US" sz="1100" dirty="0">
-                <a:solidFill>
-                  <a:srgbClr val="1B2B3A"/>
-                </a:solidFill>
-                <a:latin typeface="Calibri" pitchFamily="34" charset="0"/>
-                <a:ea typeface="Calibri" pitchFamily="34" charset="-122"/>
-                <a:cs typeface="Calibri" pitchFamily="34" charset="-120"/>
-              </a:rPr>
-              <a:t>Câu duy nhất thuộc loại lượt trợ lý, mà lời trợ lý thì không được lưu do cấu hình user_only.</a:t>
-            </a:r>
-            <a:endParaRPr lang="en-US" sz="1100" dirty="0"/>
-          </a:p>
-        </p:txBody>
-      </p:sp>
-      <p:sp>
-        <p:nvSpPr>
-          <p:cNvPr id="19" name="Shape 16"/>
-          <p:cNvSpPr/>
-          <p:nvPr/>
-        </p:nvSpPr>
-        <p:spPr>
-          <a:xfrm>
-            <a:off x="365760" y="4343400"/>
-            <a:ext cx="8321040" cy="548640"/>
-          </a:xfrm>
-          <a:prstGeom prst="rect">
-            <a:avLst/>
-          </a:prstGeom>
-          <a:solidFill>
-            <a:srgbClr val="FDF3E1"/>
-          </a:solidFill>
-          <a:ln w="9525">
-            <a:solidFill>
-              <a:srgbClr val="DCE3EA"/>
-            </a:solidFill>
-            <a:prstDash val="solid"/>
-          </a:ln>
-        </p:spPr>
-      </p:sp>
-      <p:sp>
-        <p:nvSpPr>
-          <p:cNvPr id="20" name="Text 17"/>
-          <p:cNvSpPr txBox="1"/>
-          <p:nvPr/>
-        </p:nvSpPr>
-        <p:spPr>
-          <a:xfrm>
-            <a:off x="548640" y="4389120"/>
-            <a:ext cx="7955280" cy="457200"/>
-          </a:xfrm>
-          <a:prstGeom prst="rect">
-            <a:avLst/>
-          </a:prstGeom>
-          <a:noFill/>
-          <a:ln/>
-        </p:spPr>
-        <p:txBody>
-          <a:bodyPr wrap="square" lIns="0" tIns="0" rIns="0" bIns="0" rtlCol="0" anchor="ctr"/>
-          <a:lstStyle/>
-          <a:p>
-            <a:pPr indent="0" marL="0">
-              <a:buNone/>
-            </a:pPr>
-            <a:r>
-              <a:rPr lang="en-US" sz="1150" b="1" dirty="0">
-                <a:solidFill>
-                  <a:srgbClr val="10243E"/>
-                </a:solidFill>
-                <a:latin typeface="Calibri" pitchFamily="34" charset="0"/>
-                <a:ea typeface="Calibri" pitchFamily="34" charset="-122"/>
-                <a:cs typeface="Calibri" pitchFamily="34" charset="-120"/>
-              </a:rPr>
-              <a:t>Ý nghĩa cho hệ của nhóm: </a:t>
-            </a:r>
-            <a:pPr indent="0" marL="0">
-              <a:buNone/>
-            </a:pPr>
-            <a:r>
-              <a:rPr lang="en-US" sz="1150" dirty="0">
-                <a:solidFill>
-                  <a:srgbClr val="1B2B3A"/>
-                </a:solidFill>
-                <a:latin typeface="Calibri" pitchFamily="34" charset="0"/>
-                <a:ea typeface="Calibri" pitchFamily="34" charset="-122"/>
-                <a:cs typeface="Calibri" pitchFamily="34" charset="-120"/>
-              </a:rPr>
-              <a:t>trên bộ dữ liệu này, cải thiện khâu tìm kiếm gần như không còn dư địa; điểm số phụ thuộc vào việc trích xuất giữ được bao nhiêu chi tiết và mô hình suy luận ra sao.</a:t>
-            </a:r>
-            <a:endParaRPr lang="en-US" sz="1150" dirty="0"/>
           </a:p>
         </p:txBody>
       </p:sp>
@@ -10002,6 +12999,676 @@
                 <a:ea typeface="Calibri" pitchFamily="34" charset="-122"/>
                 <a:cs typeface="Calibri" pitchFamily="34" charset="-120"/>
               </a:rPr>
+              <a:t>TÁCH NGUỒN LỖI</a:t>
+            </a:r>
+            <a:endParaRPr lang="en-US" sz="1100" dirty="0"/>
+          </a:p>
+        </p:txBody>
+      </p:sp>
+      <p:sp>
+        <p:nvSpPr>
+          <p:cNvPr id="3" name="Text 1"/>
+          <p:cNvSpPr txBox="1"/>
+          <p:nvPr/>
+        </p:nvSpPr>
+        <p:spPr>
+          <a:xfrm>
+            <a:off x="457200" y="502920"/>
+            <a:ext cx="8229600" cy="548640"/>
+          </a:xfrm>
+          <a:prstGeom prst="rect">
+            <a:avLst/>
+          </a:prstGeom>
+          <a:noFill/>
+          <a:ln/>
+        </p:spPr>
+        <p:txBody>
+          <a:bodyPr wrap="square" lIns="0" tIns="0" rIns="0" bIns="0" rtlCol="0" anchor="ctr"/>
+          <a:lstStyle/>
+          <a:p>
+            <a:pPr indent="0" marL="0">
+              <a:buNone/>
+            </a:pPr>
+            <a:r>
+              <a:rPr lang="en-US" sz="2600" b="1" dirty="0">
+                <a:solidFill>
+                  <a:srgbClr val="10243E"/>
+                </a:solidFill>
+                <a:latin typeface="Cambria" pitchFamily="34" charset="0"/>
+                <a:ea typeface="Cambria" pitchFamily="34" charset="-122"/>
+                <a:cs typeface="Cambria" pitchFamily="34" charset="-120"/>
+              </a:rPr>
+              <a:t>Lỗi không nằm ở khâu tìm kiếm</a:t>
+            </a:r>
+            <a:endParaRPr lang="en-US" sz="2600" dirty="0"/>
+          </a:p>
+        </p:txBody>
+      </p:sp>
+      <p:sp>
+        <p:nvSpPr>
+          <p:cNvPr id="5" name="Shape 2"/>
+          <p:cNvSpPr/>
+          <p:nvPr/>
+        </p:nvSpPr>
+        <p:spPr>
+          <a:xfrm>
+            <a:off x="365760" y="1188720"/>
+            <a:ext cx="2651760" cy="2926080"/>
+          </a:xfrm>
+          <a:prstGeom prst="rect">
+            <a:avLst/>
+          </a:prstGeom>
+          <a:solidFill>
+            <a:srgbClr val="FFFFFF"/>
+          </a:solidFill>
+          <a:ln w="9525">
+            <a:solidFill>
+              <a:srgbClr val="DCE3EA"/>
+            </a:solidFill>
+            <a:prstDash val="solid"/>
+          </a:ln>
+        </p:spPr>
+      </p:sp>
+      <p:sp>
+        <p:nvSpPr>
+          <p:cNvPr id="6" name="Text 3"/>
+          <p:cNvSpPr txBox="1"/>
+          <p:nvPr/>
+        </p:nvSpPr>
+        <p:spPr>
+          <a:xfrm>
+            <a:off x="365760" y="1325880"/>
+            <a:ext cx="2651760" cy="731520"/>
+          </a:xfrm>
+          <a:prstGeom prst="rect">
+            <a:avLst/>
+          </a:prstGeom>
+          <a:noFill/>
+          <a:ln/>
+        </p:spPr>
+        <p:txBody>
+          <a:bodyPr wrap="square" lIns="0" tIns="0" rIns="0" bIns="0" rtlCol="0" anchor="ctr"/>
+          <a:lstStyle/>
+          <a:p>
+            <a:pPr algn="ctr" indent="0" marL="0">
+              <a:buNone/>
+            </a:pPr>
+            <a:r>
+              <a:rPr lang="en-US" sz="4000" b="1" dirty="0">
+                <a:solidFill>
+                  <a:srgbClr val="1F6F8B"/>
+                </a:solidFill>
+                <a:latin typeface="Cambria" pitchFamily="34" charset="0"/>
+                <a:ea typeface="Cambria" pitchFamily="34" charset="-122"/>
+                <a:cs typeface="Cambria" pitchFamily="34" charset="-120"/>
+              </a:rPr>
+              <a:t>99,3%</a:t>
+            </a:r>
+            <a:endParaRPr lang="en-US" sz="4000" dirty="0"/>
+          </a:p>
+        </p:txBody>
+      </p:sp>
+      <p:sp>
+        <p:nvSpPr>
+          <p:cNvPr id="7" name="Text 4"/>
+          <p:cNvSpPr txBox="1"/>
+          <p:nvPr/>
+        </p:nvSpPr>
+        <p:spPr>
+          <a:xfrm>
+            <a:off x="548640" y="2057400"/>
+            <a:ext cx="2286000" cy="548640"/>
+          </a:xfrm>
+          <a:prstGeom prst="rect">
+            <a:avLst/>
+          </a:prstGeom>
+          <a:noFill/>
+          <a:ln/>
+        </p:spPr>
+        <p:txBody>
+          <a:bodyPr wrap="square" lIns="0" tIns="0" rIns="0" bIns="0" rtlCol="0" anchor="t"/>
+          <a:lstStyle/>
+          <a:p>
+            <a:pPr algn="ctr" indent="0" marL="0">
+              <a:buNone/>
+            </a:pPr>
+            <a:r>
+              <a:rPr lang="en-US" sz="1200" dirty="0">
+                <a:solidFill>
+                  <a:srgbClr val="5B6B7A"/>
+                </a:solidFill>
+                <a:latin typeface="Calibri" pitchFamily="34" charset="0"/>
+                <a:ea typeface="Calibri" pitchFamily="34" charset="-122"/>
+                <a:cs typeface="Calibri" pitchFamily="34" charset="-120"/>
+              </a:rPr>
+              <a:t>truy xuất trúng phiên chứa bằng chứng (149/150 câu)</a:t>
+            </a:r>
+            <a:endParaRPr lang="en-US" sz="1200" dirty="0"/>
+          </a:p>
+        </p:txBody>
+      </p:sp>
+      <p:sp>
+        <p:nvSpPr>
+          <p:cNvPr id="8" name="Text 5"/>
+          <p:cNvSpPr txBox="1"/>
+          <p:nvPr/>
+        </p:nvSpPr>
+        <p:spPr>
+          <a:xfrm>
+            <a:off x="548640" y="2697480"/>
+            <a:ext cx="2286000" cy="1325880"/>
+          </a:xfrm>
+          <a:prstGeom prst="rect">
+            <a:avLst/>
+          </a:prstGeom>
+          <a:noFill/>
+          <a:ln/>
+        </p:spPr>
+        <p:txBody>
+          <a:bodyPr wrap="square" lIns="0" tIns="0" rIns="0" bIns="0" rtlCol="0" anchor="t"/>
+          <a:lstStyle/>
+          <a:p>
+            <a:pPr indent="0" marL="0">
+              <a:buNone/>
+            </a:pPr>
+            <a:r>
+              <a:rPr lang="en-US" sz="1050" b="1" dirty="0">
+                <a:solidFill>
+                  <a:srgbClr val="10243E"/>
+                </a:solidFill>
+                <a:latin typeface="Calibri" pitchFamily="34" charset="0"/>
+                <a:ea typeface="Calibri" pitchFamily="34" charset="-122"/>
+                <a:cs typeface="Calibri" pitchFamily="34" charset="-120"/>
+              </a:rPr>
+              <a:t>Đo thế nào</a:t>
+            </a:r>
+            <a:endParaRPr lang="en-US" sz="1050" dirty="0"/>
+          </a:p>
+          <a:p>
+            <a:pPr indent="0" marL="0">
+              <a:buNone/>
+            </a:pPr>
+            <a:r>
+              <a:rPr lang="en-US" sz="1050" dirty="0">
+                <a:solidFill>
+                  <a:srgbClr val="1B2B3A"/>
+                </a:solidFill>
+                <a:latin typeface="Calibri" pitchFamily="34" charset="0"/>
+                <a:ea typeface="Calibri" pitchFamily="34" charset="-122"/>
+                <a:cs typeface="Calibri" pitchFamily="34" charset="-120"/>
+              </a:rPr>
+              <a:t>Mỗi ký ức LightMem trả về đều mở đầu bằng mốc thời gian của phiên. Khớp mốc đó với haystack_dates để biết ký ức đến từ phiên nào, rồi so với answer_session_ids của bộ dữ liệu. Có 2 câu có phiên trùng mốc với phiên khác nên khớp chưa chắc chắn.</a:t>
+            </a:r>
+            <a:endParaRPr lang="en-US" sz="1050" dirty="0"/>
+          </a:p>
+        </p:txBody>
+      </p:sp>
+      <p:sp>
+        <p:nvSpPr>
+          <p:cNvPr id="9" name="Text 6"/>
+          <p:cNvSpPr txBox="1"/>
+          <p:nvPr/>
+        </p:nvSpPr>
+        <p:spPr>
+          <a:xfrm>
+            <a:off x="3291840" y="1188720"/>
+            <a:ext cx="5394960" cy="274320"/>
+          </a:xfrm>
+          <a:prstGeom prst="rect">
+            <a:avLst/>
+          </a:prstGeom>
+          <a:noFill/>
+          <a:ln/>
+        </p:spPr>
+        <p:txBody>
+          <a:bodyPr wrap="square" lIns="0" tIns="0" rIns="0" bIns="0" rtlCol="0" anchor="ctr"/>
+          <a:lstStyle/>
+          <a:p>
+            <a:pPr indent="0" marL="0">
+              <a:buNone/>
+            </a:pPr>
+            <a:r>
+              <a:rPr lang="en-US" sz="1500" b="1" dirty="0">
+                <a:solidFill>
+                  <a:srgbClr val="10243E"/>
+                </a:solidFill>
+                <a:latin typeface="Cambria" pitchFamily="34" charset="0"/>
+                <a:ea typeface="Cambria" pitchFamily="34" charset="-122"/>
+                <a:cs typeface="Cambria" pitchFamily="34" charset="-120"/>
+              </a:rPr>
+              <a:t>Trong 28 câu sai</a:t>
+            </a:r>
+            <a:endParaRPr lang="en-US" sz="1500" dirty="0"/>
+          </a:p>
+        </p:txBody>
+      </p:sp>
+      <p:sp>
+        <p:nvSpPr>
+          <p:cNvPr id="10" name="Shape 7"/>
+          <p:cNvSpPr/>
+          <p:nvPr/>
+        </p:nvSpPr>
+        <p:spPr>
+          <a:xfrm>
+            <a:off x="3291840" y="1554480"/>
+            <a:ext cx="5394960" cy="1600200"/>
+          </a:xfrm>
+          <a:prstGeom prst="rect">
+            <a:avLst/>
+          </a:prstGeom>
+          <a:solidFill>
+            <a:srgbClr val="FBEAE5"/>
+          </a:solidFill>
+          <a:ln w="9525">
+            <a:solidFill>
+              <a:srgbClr val="DCE3EA"/>
+            </a:solidFill>
+            <a:prstDash val="solid"/>
+          </a:ln>
+        </p:spPr>
+      </p:sp>
+      <p:sp>
+        <p:nvSpPr>
+          <p:cNvPr id="11" name="Text 8"/>
+          <p:cNvSpPr txBox="1"/>
+          <p:nvPr/>
+        </p:nvSpPr>
+        <p:spPr>
+          <a:xfrm>
+            <a:off x="3429000" y="1691640"/>
+            <a:ext cx="868680" cy="731520"/>
+          </a:xfrm>
+          <a:prstGeom prst="rect">
+            <a:avLst/>
+          </a:prstGeom>
+          <a:noFill/>
+          <a:ln/>
+        </p:spPr>
+        <p:txBody>
+          <a:bodyPr wrap="square" lIns="0" tIns="0" rIns="0" bIns="0" rtlCol="0" anchor="ctr"/>
+          <a:lstStyle/>
+          <a:p>
+            <a:pPr algn="ctr" indent="0" marL="0">
+              <a:buNone/>
+            </a:pPr>
+            <a:r>
+              <a:rPr lang="en-US" sz="3800" b="1" dirty="0">
+                <a:solidFill>
+                  <a:srgbClr val="C8553D"/>
+                </a:solidFill>
+                <a:latin typeface="Cambria" pitchFamily="34" charset="0"/>
+                <a:ea typeface="Cambria" pitchFamily="34" charset="-122"/>
+                <a:cs typeface="Cambria" pitchFamily="34" charset="-120"/>
+              </a:rPr>
+              <a:t>27</a:t>
+            </a:r>
+            <a:endParaRPr lang="en-US" sz="3800" dirty="0"/>
+          </a:p>
+        </p:txBody>
+      </p:sp>
+      <p:sp>
+        <p:nvSpPr>
+          <p:cNvPr id="12" name="Text 9"/>
+          <p:cNvSpPr txBox="1"/>
+          <p:nvPr/>
+        </p:nvSpPr>
+        <p:spPr>
+          <a:xfrm>
+            <a:off x="4389120" y="1682496"/>
+            <a:ext cx="4160520" cy="384048"/>
+          </a:xfrm>
+          <a:prstGeom prst="rect">
+            <a:avLst/>
+          </a:prstGeom>
+          <a:noFill/>
+          <a:ln/>
+        </p:spPr>
+        <p:txBody>
+          <a:bodyPr wrap="square" lIns="0" tIns="0" rIns="0" bIns="0" rtlCol="0" anchor="ctr"/>
+          <a:lstStyle/>
+          <a:p>
+            <a:pPr indent="0" marL="0">
+              <a:buNone/>
+            </a:pPr>
+            <a:r>
+              <a:rPr lang="en-US" sz="1250" b="1" dirty="0">
+                <a:solidFill>
+                  <a:srgbClr val="10243E"/>
+                </a:solidFill>
+                <a:latin typeface="Calibri" pitchFamily="34" charset="0"/>
+                <a:ea typeface="Calibri" pitchFamily="34" charset="-122"/>
+                <a:cs typeface="Calibri" pitchFamily="34" charset="-120"/>
+              </a:rPr>
+              <a:t>đã có bằng chứng trong ký ức lấy về, vẫn trả lời sai</a:t>
+            </a:r>
+            <a:endParaRPr lang="en-US" sz="1250" dirty="0"/>
+          </a:p>
+        </p:txBody>
+      </p:sp>
+      <p:sp>
+        <p:nvSpPr>
+          <p:cNvPr id="13" name="Text 10"/>
+          <p:cNvSpPr txBox="1"/>
+          <p:nvPr/>
+        </p:nvSpPr>
+        <p:spPr>
+          <a:xfrm>
+            <a:off x="4389120" y="2066544"/>
+            <a:ext cx="4160520" cy="978408"/>
+          </a:xfrm>
+          <a:prstGeom prst="rect">
+            <a:avLst/>
+          </a:prstGeom>
+          <a:noFill/>
+          <a:ln/>
+        </p:spPr>
+        <p:txBody>
+          <a:bodyPr wrap="square" lIns="0" tIns="0" rIns="0" bIns="0" rtlCol="0" anchor="t"/>
+          <a:lstStyle/>
+          <a:p>
+            <a:pPr indent="0" marL="0">
+              <a:buNone/>
+            </a:pPr>
+            <a:r>
+              <a:rPr lang="en-US" sz="1100" dirty="0">
+                <a:solidFill>
+                  <a:srgbClr val="1B2B3A"/>
+                </a:solidFill>
+                <a:latin typeface="Calibri" pitchFamily="34" charset="0"/>
+                <a:ea typeface="Calibri" pitchFamily="34" charset="-122"/>
+                <a:cs typeface="Calibri" pitchFamily="34" charset="-120"/>
+              </a:rPr>
+              <a:t>Lỗi nằm ở tầng trích xuất (nén làm mất chi tiết) hoặc tầng suy luận, không phải tầng tìm kiếm. Ví dụ rõ nhất: một câu tính khoảng ngày, hệ nêu đúng cả hai mốc 22/03 và 15/04/2023 nhưng tính ra 18 ngày thay vì 24 — ký ức đúng, phép trừ sai.</a:t>
+            </a:r>
+            <a:endParaRPr lang="en-US" sz="1100" dirty="0"/>
+          </a:p>
+        </p:txBody>
+      </p:sp>
+      <p:sp>
+        <p:nvSpPr>
+          <p:cNvPr id="14" name="Shape 11"/>
+          <p:cNvSpPr/>
+          <p:nvPr/>
+        </p:nvSpPr>
+        <p:spPr>
+          <a:xfrm>
+            <a:off x="3291840" y="3291840"/>
+            <a:ext cx="5394960" cy="914400"/>
+          </a:xfrm>
+          <a:prstGeom prst="rect">
+            <a:avLst/>
+          </a:prstGeom>
+          <a:solidFill>
+            <a:srgbClr val="FFFFFF"/>
+          </a:solidFill>
+          <a:ln w="9525">
+            <a:solidFill>
+              <a:srgbClr val="DCE3EA"/>
+            </a:solidFill>
+            <a:prstDash val="solid"/>
+          </a:ln>
+        </p:spPr>
+      </p:sp>
+      <p:sp>
+        <p:nvSpPr>
+          <p:cNvPr id="15" name="Text 12"/>
+          <p:cNvSpPr txBox="1"/>
+          <p:nvPr/>
+        </p:nvSpPr>
+        <p:spPr>
+          <a:xfrm>
+            <a:off x="3429000" y="3429000"/>
+            <a:ext cx="868680" cy="731520"/>
+          </a:xfrm>
+          <a:prstGeom prst="rect">
+            <a:avLst/>
+          </a:prstGeom>
+          <a:noFill/>
+          <a:ln/>
+        </p:spPr>
+        <p:txBody>
+          <a:bodyPr wrap="square" lIns="0" tIns="0" rIns="0" bIns="0" rtlCol="0" anchor="ctr"/>
+          <a:lstStyle/>
+          <a:p>
+            <a:pPr algn="ctr" indent="0" marL="0">
+              <a:buNone/>
+            </a:pPr>
+            <a:r>
+              <a:rPr lang="en-US" sz="3800" b="1" dirty="0">
+                <a:solidFill>
+                  <a:srgbClr val="5B6B7A"/>
+                </a:solidFill>
+                <a:latin typeface="Cambria" pitchFamily="34" charset="0"/>
+                <a:ea typeface="Cambria" pitchFamily="34" charset="-122"/>
+                <a:cs typeface="Cambria" pitchFamily="34" charset="-120"/>
+              </a:rPr>
+              <a:t>1</a:t>
+            </a:r>
+            <a:endParaRPr lang="en-US" sz="3800" dirty="0"/>
+          </a:p>
+        </p:txBody>
+      </p:sp>
+      <p:sp>
+        <p:nvSpPr>
+          <p:cNvPr id="16" name="Text 13"/>
+          <p:cNvSpPr txBox="1"/>
+          <p:nvPr/>
+        </p:nvSpPr>
+        <p:spPr>
+          <a:xfrm>
+            <a:off x="4389120" y="3419856"/>
+            <a:ext cx="4160520" cy="384048"/>
+          </a:xfrm>
+          <a:prstGeom prst="rect">
+            <a:avLst/>
+          </a:prstGeom>
+          <a:noFill/>
+          <a:ln/>
+        </p:spPr>
+        <p:txBody>
+          <a:bodyPr wrap="square" lIns="0" tIns="0" rIns="0" bIns="0" rtlCol="0" anchor="ctr"/>
+          <a:lstStyle/>
+          <a:p>
+            <a:pPr indent="0" marL="0">
+              <a:buNone/>
+            </a:pPr>
+            <a:r>
+              <a:rPr lang="en-US" sz="1250" b="1" dirty="0">
+                <a:solidFill>
+                  <a:srgbClr val="10243E"/>
+                </a:solidFill>
+                <a:latin typeface="Calibri" pitchFamily="34" charset="0"/>
+                <a:ea typeface="Calibri" pitchFamily="34" charset="-122"/>
+                <a:cs typeface="Calibri" pitchFamily="34" charset="-120"/>
+              </a:rPr>
+              <a:t>không truy xuất được bằng chứng</a:t>
+            </a:r>
+            <a:endParaRPr lang="en-US" sz="1250" dirty="0"/>
+          </a:p>
+        </p:txBody>
+      </p:sp>
+      <p:sp>
+        <p:nvSpPr>
+          <p:cNvPr id="17" name="Text 14"/>
+          <p:cNvSpPr txBox="1"/>
+          <p:nvPr/>
+        </p:nvSpPr>
+        <p:spPr>
+          <a:xfrm>
+            <a:off x="4389120" y="3803904"/>
+            <a:ext cx="4160520" cy="292608"/>
+          </a:xfrm>
+          <a:prstGeom prst="rect">
+            <a:avLst/>
+          </a:prstGeom>
+          <a:noFill/>
+          <a:ln/>
+        </p:spPr>
+        <p:txBody>
+          <a:bodyPr wrap="square" lIns="0" tIns="0" rIns="0" bIns="0" rtlCol="0" anchor="t"/>
+          <a:lstStyle/>
+          <a:p>
+            <a:pPr indent="0" marL="0">
+              <a:buNone/>
+            </a:pPr>
+            <a:r>
+              <a:rPr lang="en-US" sz="1100" dirty="0">
+                <a:solidFill>
+                  <a:srgbClr val="1B2B3A"/>
+                </a:solidFill>
+                <a:latin typeface="Calibri" pitchFamily="34" charset="0"/>
+                <a:ea typeface="Calibri" pitchFamily="34" charset="-122"/>
+                <a:cs typeface="Calibri" pitchFamily="34" charset="-120"/>
+              </a:rPr>
+              <a:t>Câu duy nhất thuộc loại lượt trợ lý, mà lời trợ lý thì không được lưu do cấu hình user_only.</a:t>
+            </a:r>
+            <a:endParaRPr lang="en-US" sz="1100" dirty="0"/>
+          </a:p>
+        </p:txBody>
+      </p:sp>
+      <p:sp>
+        <p:nvSpPr>
+          <p:cNvPr id="18" name="Shape 15"/>
+          <p:cNvSpPr/>
+          <p:nvPr/>
+        </p:nvSpPr>
+        <p:spPr>
+          <a:xfrm>
+            <a:off x="365760" y="4343400"/>
+            <a:ext cx="8321040" cy="548640"/>
+          </a:xfrm>
+          <a:prstGeom prst="rect">
+            <a:avLst/>
+          </a:prstGeom>
+          <a:solidFill>
+            <a:srgbClr val="FDF3E1"/>
+          </a:solidFill>
+          <a:ln w="9525">
+            <a:solidFill>
+              <a:srgbClr val="DCE3EA"/>
+            </a:solidFill>
+            <a:prstDash val="solid"/>
+          </a:ln>
+        </p:spPr>
+      </p:sp>
+      <p:sp>
+        <p:nvSpPr>
+          <p:cNvPr id="19" name="Text 16"/>
+          <p:cNvSpPr txBox="1"/>
+          <p:nvPr/>
+        </p:nvSpPr>
+        <p:spPr>
+          <a:xfrm>
+            <a:off x="548640" y="4389120"/>
+            <a:ext cx="7955280" cy="457200"/>
+          </a:xfrm>
+          <a:prstGeom prst="rect">
+            <a:avLst/>
+          </a:prstGeom>
+          <a:noFill/>
+          <a:ln/>
+        </p:spPr>
+        <p:txBody>
+          <a:bodyPr wrap="square" lIns="0" tIns="0" rIns="0" bIns="0" rtlCol="0" anchor="ctr"/>
+          <a:lstStyle/>
+          <a:p>
+            <a:pPr indent="0" marL="0">
+              <a:buNone/>
+            </a:pPr>
+            <a:r>
+              <a:rPr lang="en-US" sz="1150" b="1" dirty="0">
+                <a:solidFill>
+                  <a:srgbClr val="10243E"/>
+                </a:solidFill>
+                <a:latin typeface="Calibri" pitchFamily="34" charset="0"/>
+                <a:ea typeface="Calibri" pitchFamily="34" charset="-122"/>
+                <a:cs typeface="Calibri" pitchFamily="34" charset="-120"/>
+              </a:rPr>
+              <a:t>Ý nghĩa cho hệ của nhóm: </a:t>
+            </a:r>
+            <a:pPr indent="0" marL="0">
+              <a:buNone/>
+            </a:pPr>
+            <a:r>
+              <a:rPr lang="en-US" sz="1150" dirty="0">
+                <a:solidFill>
+                  <a:srgbClr val="1B2B3A"/>
+                </a:solidFill>
+                <a:latin typeface="Calibri" pitchFamily="34" charset="0"/>
+                <a:ea typeface="Calibri" pitchFamily="34" charset="-122"/>
+                <a:cs typeface="Calibri" pitchFamily="34" charset="-120"/>
+              </a:rPr>
+              <a:t>trên bộ dữ liệu này, cải thiện khâu tìm kiếm gần như không còn dư địa; điểm số phụ thuộc vào việc trích xuất giữ được bao nhiêu chi tiết và mô hình suy luận ra sao.</a:t>
+            </a:r>
+            <a:endParaRPr lang="en-US" sz="1150" dirty="0"/>
+          </a:p>
+        </p:txBody>
+      </p:sp>
+    </p:spTree>
+  </p:cSld>
+  <p:clrMapOvr>
+    <a:masterClrMapping/>
+  </p:clrMapOvr>
+</p:sld>
+</file>
+
+<file path=ppt/slides/slide9.xml><?xml version="1.0" encoding="utf-8"?>
+<p:sld xmlns:a="http://schemas.openxmlformats.org/drawingml/2006/main" xmlns:r="http://schemas.openxmlformats.org/officeDocument/2006/relationships" xmlns:p="http://schemas.openxmlformats.org/presentationml/2006/main">
+  <p:cSld name="Slide 9">
+    <p:bg>
+      <p:bgPr>
+        <a:solidFill>
+          <a:srgbClr val="F7F9FB"/>
+        </a:solidFill>
+      </p:bgPr>
+    </p:bg>
+    <p:spTree>
+      <p:nvGrpSpPr>
+        <p:cNvPr id="1" name=""/>
+        <p:cNvGrpSpPr/>
+        <p:nvPr/>
+      </p:nvGrpSpPr>
+      <p:grpSpPr>
+        <a:xfrm>
+          <a:off x="0" y="0"/>
+          <a:ext cx="0" cy="0"/>
+          <a:chOff x="0" y="0"/>
+          <a:chExt cx="0" cy="0"/>
+        </a:xfrm>
+      </p:grpSpPr>
+      <p:sp>
+        <p:nvSpPr>
+          <p:cNvPr id="2" name="Text 0"/>
+          <p:cNvSpPr txBox="1"/>
+          <p:nvPr/>
+        </p:nvSpPr>
+        <p:spPr>
+          <a:xfrm>
+            <a:off x="457200" y="274320"/>
+            <a:ext cx="8229600" cy="274320"/>
+          </a:xfrm>
+          <a:prstGeom prst="rect">
+            <a:avLst/>
+          </a:prstGeom>
+          <a:noFill/>
+          <a:ln/>
+        </p:spPr>
+        <p:txBody>
+          <a:bodyPr wrap="square" lIns="0" tIns="0" rIns="0" bIns="0" rtlCol="0" anchor="ctr"/>
+          <a:lstStyle/>
+          <a:p>
+            <a:pPr indent="0" marL="0">
+              <a:buNone/>
+            </a:pPr>
+            <a:r>
+              <a:rPr lang="en-US" sz="1100" b="1" dirty="0">
+                <a:solidFill>
+                  <a:srgbClr val="1F6F8B"/>
+                </a:solidFill>
+                <a:latin typeface="Calibri" pitchFamily="34" charset="0"/>
+                <a:ea typeface="Calibri" pitchFamily="34" charset="-122"/>
+                <a:cs typeface="Calibri" pitchFamily="34" charset="-120"/>
+              </a:rPr>
               <a:t>ĐỘ TIN CẬY CỦA PHÉP ĐO</a:t>
             </a:r>
             <a:endParaRPr lang="en-US" sz="1100" dirty="0"/>
@@ -10049,46 +13716,7 @@
       </p:sp>
       <p:sp>
         <p:nvSpPr>
-          <p:cNvPr id="4" name="Text 2"/>
-          <p:cNvSpPr txBox="1"/>
-          <p:nvPr/>
-        </p:nvSpPr>
-        <p:spPr>
-          <a:xfrm>
-            <a:off x="6309360" y="274320"/>
-            <a:ext cx="2377440" cy="274320"/>
-          </a:xfrm>
-          <a:prstGeom prst="rect">
-            <a:avLst/>
-          </a:prstGeom>
-          <a:noFill/>
-          <a:ln/>
-        </p:spPr>
-        <p:txBody>
-          <a:bodyPr wrap="square" lIns="0" tIns="0" rIns="0" bIns="0" rtlCol="0" anchor="ctr"/>
-          <a:lstStyle/>
-          <a:p>
-            <a:pPr algn="r" indent="0" marL="0">
-              <a:buNone/>
-            </a:pPr>
-            <a:r>
-              <a:rPr lang="en-US" sz="1000" b="1" dirty="0">
-                <a:solidFill>
-                  <a:srgbClr val="C8553D"/>
-                </a:solidFill>
-                <a:latin typeface="Calibri" pitchFamily="34" charset="0"/>
-                <a:ea typeface="Calibri" pitchFamily="34" charset="-122"/>
-                <a:cs typeface="Calibri" pitchFamily="34" charset="-120"/>
-              </a:rPr>
-              <a:t>Số liệu sơ bộ: 125/150 câu dev</a:t>
-            </a:r>
-            <a:endParaRPr lang="en-US" sz="1000" dirty="0"/>
-          </a:p>
-        </p:txBody>
-      </p:sp>
-      <p:sp>
-        <p:nvSpPr>
-          <p:cNvPr id="6" name="Shape 3"/>
+          <p:cNvPr id="5" name="Shape 2"/>
           <p:cNvSpPr/>
           <p:nvPr/>
         </p:nvSpPr>
@@ -10113,7 +13741,7 @@
       </p:sp>
       <p:sp>
         <p:nvSpPr>
-          <p:cNvPr id="7" name="Text 4"/>
+          <p:cNvPr id="6" name="Text 3"/>
           <p:cNvSpPr txBox="1"/>
           <p:nvPr/>
         </p:nvSpPr>
@@ -10144,7 +13772,7 @@
                 <a:ea typeface="Cambria" pitchFamily="34" charset="-122"/>
                 <a:cs typeface="Cambria" pitchFamily="34" charset="-120"/>
               </a:rPr>
-              <a:t>0/12</a:t>
+              <a:t>0/20</a:t>
             </a:r>
             <a:endParaRPr lang="en-US" sz="3000" dirty="0"/>
           </a:p>
@@ -10152,7 +13780,7 @@
       </p:sp>
       <p:sp>
         <p:nvSpPr>
-          <p:cNvPr id="8" name="Text 5"/>
+          <p:cNvPr id="7" name="Text 4"/>
           <p:cNvSpPr txBox="1"/>
           <p:nvPr/>
         </p:nvSpPr>
@@ -10191,7 +13819,7 @@
       </p:sp>
       <p:sp>
         <p:nvSpPr>
-          <p:cNvPr id="9" name="Text 6"/>
+          <p:cNvPr id="8" name="Text 5"/>
           <p:cNvSpPr txBox="1"/>
           <p:nvPr/>
         </p:nvSpPr>
@@ -10230,7 +13858,7 @@
       </p:sp>
       <p:sp>
         <p:nvSpPr>
-          <p:cNvPr id="10" name="Shape 7"/>
+          <p:cNvPr id="9" name="Shape 6"/>
           <p:cNvSpPr/>
           <p:nvPr/>
         </p:nvSpPr>
@@ -10255,7 +13883,7 @@
       </p:sp>
       <p:sp>
         <p:nvSpPr>
-          <p:cNvPr id="11" name="Text 8"/>
+          <p:cNvPr id="10" name="Text 7"/>
           <p:cNvSpPr txBox="1"/>
           <p:nvPr/>
         </p:nvSpPr>
@@ -10286,7 +13914,7 @@
                 <a:ea typeface="Cambria" pitchFamily="34" charset="-122"/>
                 <a:cs typeface="Cambria" pitchFamily="34" charset="-120"/>
               </a:rPr>
-              <a:t>2/20</a:t>
+              <a:t>2/28</a:t>
             </a:r>
             <a:endParaRPr lang="en-US" sz="3000" dirty="0"/>
           </a:p>
@@ -10294,7 +13922,7 @@
       </p:sp>
       <p:sp>
         <p:nvSpPr>
-          <p:cNvPr id="12" name="Text 9"/>
+          <p:cNvPr id="11" name="Text 8"/>
           <p:cNvSpPr txBox="1"/>
           <p:nvPr/>
         </p:nvSpPr>
@@ -10333,7 +13961,7 @@
       </p:sp>
       <p:sp>
         <p:nvSpPr>
-          <p:cNvPr id="13" name="Text 10"/>
+          <p:cNvPr id="12" name="Text 9"/>
           <p:cNvSpPr txBox="1"/>
           <p:nvPr/>
         </p:nvSpPr>
@@ -10372,7 +14000,7 @@
       </p:sp>
       <p:graphicFrame>
         <p:nvGraphicFramePr>
-          <p:cNvPr id="9" name="Table 0"/>
+          <p:cNvPr id="10" name="Table 0"/>
           <p:cNvGraphicFramePr>
             <a:graphicFrameLocks noGrp="1"/>
           </p:cNvGraphicFramePr>
@@ -11003,7 +14631,7 @@
       </p:graphicFrame>
       <p:sp>
         <p:nvSpPr>
-          <p:cNvPr id="15" name="Shape 11"/>
+          <p:cNvPr id="14" name="Shape 10"/>
           <p:cNvSpPr/>
           <p:nvPr/>
         </p:nvSpPr>
@@ -11028,7 +14656,7 @@
       </p:sp>
       <p:sp>
         <p:nvSpPr>
-          <p:cNvPr id="16" name="Text 12"/>
+          <p:cNvPr id="15" name="Text 11"/>
           <p:cNvSpPr txBox="1"/>
           <p:nvPr/>
         </p:nvSpPr>
@@ -11076,570 +14704,6 @@
               <a:t>giữ nguyên kế hoạch chấm 3 lần lấy trung bình, và dùng đúng một model chấm cho cả LightMem lẫn APEX-MEM để sai lệch này triệt tiêu khi so sánh.</a:t>
             </a:r>
             <a:endParaRPr lang="en-US" sz="1050" dirty="0"/>
-          </a:p>
-        </p:txBody>
-      </p:sp>
-    </p:spTree>
-  </p:cSld>
-  <p:clrMapOvr>
-    <a:masterClrMapping/>
-  </p:clrMapOvr>
-</p:sld>
-</file>
-
-<file path=ppt/slides/slide9.xml><?xml version="1.0" encoding="utf-8"?>
-<p:sld xmlns:a="http://schemas.openxmlformats.org/drawingml/2006/main" xmlns:r="http://schemas.openxmlformats.org/officeDocument/2006/relationships" xmlns:p="http://schemas.openxmlformats.org/presentationml/2006/main">
-  <p:cSld name="Slide 9">
-    <p:bg>
-      <p:bgPr>
-        <a:solidFill>
-          <a:srgbClr val="F7F9FB"/>
-        </a:solidFill>
-      </p:bgPr>
-    </p:bg>
-    <p:spTree>
-      <p:nvGrpSpPr>
-        <p:cNvPr id="1" name=""/>
-        <p:cNvGrpSpPr/>
-        <p:nvPr/>
-      </p:nvGrpSpPr>
-      <p:grpSpPr>
-        <a:xfrm>
-          <a:off x="0" y="0"/>
-          <a:ext cx="0" cy="0"/>
-          <a:chOff x="0" y="0"/>
-          <a:chExt cx="0" cy="0"/>
-        </a:xfrm>
-      </p:grpSpPr>
-      <p:sp>
-        <p:nvSpPr>
-          <p:cNvPr id="2" name="Text 0"/>
-          <p:cNvSpPr txBox="1"/>
-          <p:nvPr/>
-        </p:nvSpPr>
-        <p:spPr>
-          <a:xfrm>
-            <a:off x="457200" y="274320"/>
-            <a:ext cx="8229600" cy="274320"/>
-          </a:xfrm>
-          <a:prstGeom prst="rect">
-            <a:avLst/>
-          </a:prstGeom>
-          <a:noFill/>
-          <a:ln/>
-        </p:spPr>
-        <p:txBody>
-          <a:bodyPr wrap="square" lIns="0" tIns="0" rIns="0" bIns="0" rtlCol="0" anchor="ctr"/>
-          <a:lstStyle/>
-          <a:p>
-            <a:pPr indent="0" marL="0">
-              <a:buNone/>
-            </a:pPr>
-            <a:r>
-              <a:rPr lang="en-US" sz="1100" b="1" dirty="0">
-                <a:solidFill>
-                  <a:srgbClr val="1F6F8B"/>
-                </a:solidFill>
-                <a:latin typeface="Calibri" pitchFamily="34" charset="0"/>
-                <a:ea typeface="Calibri" pitchFamily="34" charset="-122"/>
-                <a:cs typeface="Calibri" pitchFamily="34" charset="-120"/>
-              </a:rPr>
-              <a:t>VẬN HÀNH</a:t>
-            </a:r>
-            <a:endParaRPr lang="en-US" sz="1100" dirty="0"/>
-          </a:p>
-        </p:txBody>
-      </p:sp>
-      <p:sp>
-        <p:nvSpPr>
-          <p:cNvPr id="3" name="Text 1"/>
-          <p:cNvSpPr txBox="1"/>
-          <p:nvPr/>
-        </p:nvSpPr>
-        <p:spPr>
-          <a:xfrm>
-            <a:off x="457200" y="502920"/>
-            <a:ext cx="8229600" cy="548640"/>
-          </a:xfrm>
-          <a:prstGeom prst="rect">
-            <a:avLst/>
-          </a:prstGeom>
-          <a:noFill/>
-          <a:ln/>
-        </p:spPr>
-        <p:txBody>
-          <a:bodyPr wrap="square" lIns="0" tIns="0" rIns="0" bIns="0" rtlCol="0" anchor="ctr"/>
-          <a:lstStyle/>
-          <a:p>
-            <a:pPr indent="0" marL="0">
-              <a:buNone/>
-            </a:pPr>
-            <a:r>
-              <a:rPr lang="en-US" sz="2600" b="1" dirty="0">
-                <a:solidFill>
-                  <a:srgbClr val="10243E"/>
-                </a:solidFill>
-                <a:latin typeface="Cambria" pitchFamily="34" charset="0"/>
-                <a:ea typeface="Cambria" pitchFamily="34" charset="-122"/>
-                <a:cs typeface="Cambria" pitchFamily="34" charset="-120"/>
-              </a:rPr>
-              <a:t>Dựng bộ nhớ chiếm gần như toàn bộ thời gian</a:t>
-            </a:r>
-            <a:endParaRPr lang="en-US" sz="2600" dirty="0"/>
-          </a:p>
-        </p:txBody>
-      </p:sp>
-      <p:sp>
-        <p:nvSpPr>
-          <p:cNvPr id="4" name="Text 2"/>
-          <p:cNvSpPr txBox="1"/>
-          <p:nvPr/>
-        </p:nvSpPr>
-        <p:spPr>
-          <a:xfrm>
-            <a:off x="6309360" y="274320"/>
-            <a:ext cx="2377440" cy="274320"/>
-          </a:xfrm>
-          <a:prstGeom prst="rect">
-            <a:avLst/>
-          </a:prstGeom>
-          <a:noFill/>
-          <a:ln/>
-        </p:spPr>
-        <p:txBody>
-          <a:bodyPr wrap="square" lIns="0" tIns="0" rIns="0" bIns="0" rtlCol="0" anchor="ctr"/>
-          <a:lstStyle/>
-          <a:p>
-            <a:pPr algn="r" indent="0" marL="0">
-              <a:buNone/>
-            </a:pPr>
-            <a:r>
-              <a:rPr lang="en-US" sz="1000" b="1" dirty="0">
-                <a:solidFill>
-                  <a:srgbClr val="C8553D"/>
-                </a:solidFill>
-                <a:latin typeface="Calibri" pitchFamily="34" charset="0"/>
-                <a:ea typeface="Calibri" pitchFamily="34" charset="-122"/>
-                <a:cs typeface="Calibri" pitchFamily="34" charset="-120"/>
-              </a:rPr>
-              <a:t>Số liệu sơ bộ: 125/150 câu dev</a:t>
-            </a:r>
-            <a:endParaRPr lang="en-US" sz="1000" dirty="0"/>
-          </a:p>
-        </p:txBody>
-      </p:sp>
-      <p:sp>
-        <p:nvSpPr>
-          <p:cNvPr id="6" name="Shape 3"/>
-          <p:cNvSpPr/>
-          <p:nvPr/>
-        </p:nvSpPr>
-        <p:spPr>
-          <a:xfrm>
-            <a:off x="457200" y="1280160"/>
-            <a:ext cx="2651760" cy="1371600"/>
-          </a:xfrm>
-          <a:prstGeom prst="rect">
-            <a:avLst/>
-          </a:prstGeom>
-          <a:solidFill>
-            <a:srgbClr val="FFFFFF"/>
-          </a:solidFill>
-          <a:ln w="9525">
-            <a:solidFill>
-              <a:srgbClr val="DCE3EA"/>
-            </a:solidFill>
-            <a:prstDash val="solid"/>
-          </a:ln>
-        </p:spPr>
-      </p:sp>
-      <p:sp>
-        <p:nvSpPr>
-          <p:cNvPr id="7" name="Text 4"/>
-          <p:cNvSpPr txBox="1"/>
-          <p:nvPr/>
-        </p:nvSpPr>
-        <p:spPr>
-          <a:xfrm>
-            <a:off x="457200" y="1371600"/>
-            <a:ext cx="2651760" cy="731520"/>
-          </a:xfrm>
-          <a:prstGeom prst="rect">
-            <a:avLst/>
-          </a:prstGeom>
-          <a:noFill/>
-          <a:ln/>
-        </p:spPr>
-        <p:txBody>
-          <a:bodyPr wrap="square" lIns="0" tIns="0" rIns="0" bIns="0" rtlCol="0" anchor="ctr"/>
-          <a:lstStyle/>
-          <a:p>
-            <a:pPr algn="ctr" indent="0" marL="0">
-              <a:buNone/>
-            </a:pPr>
-            <a:r>
-              <a:rPr lang="en-US" sz="3400" b="1" dirty="0">
-                <a:solidFill>
-                  <a:srgbClr val="C8553D"/>
-                </a:solidFill>
-                <a:latin typeface="Cambria" pitchFamily="34" charset="0"/>
-                <a:ea typeface="Cambria" pitchFamily="34" charset="-122"/>
-                <a:cs typeface="Cambria" pitchFamily="34" charset="-120"/>
-              </a:rPr>
-              <a:t>33 phút</a:t>
-            </a:r>
-            <a:endParaRPr lang="en-US" sz="3400" dirty="0"/>
-          </a:p>
-        </p:txBody>
-      </p:sp>
-      <p:sp>
-        <p:nvSpPr>
-          <p:cNvPr id="8" name="Text 5"/>
-          <p:cNvSpPr txBox="1"/>
-          <p:nvPr/>
-        </p:nvSpPr>
-        <p:spPr>
-          <a:xfrm>
-            <a:off x="457200" y="2103120"/>
-            <a:ext cx="2651760" cy="365760"/>
-          </a:xfrm>
-          <a:prstGeom prst="rect">
-            <a:avLst/>
-          </a:prstGeom>
-          <a:noFill/>
-          <a:ln/>
-        </p:spPr>
-        <p:txBody>
-          <a:bodyPr wrap="square" lIns="0" tIns="0" rIns="0" bIns="0" rtlCol="0" anchor="ctr"/>
-          <a:lstStyle/>
-          <a:p>
-            <a:pPr algn="ctr" indent="0" marL="0">
-              <a:buNone/>
-            </a:pPr>
-            <a:r>
-              <a:rPr lang="en-US" sz="1200" dirty="0">
-                <a:solidFill>
-                  <a:srgbClr val="5B6B7A"/>
-                </a:solidFill>
-                <a:latin typeface="Calibri" pitchFamily="34" charset="0"/>
-                <a:ea typeface="Calibri" pitchFamily="34" charset="-122"/>
-                <a:cs typeface="Calibri" pitchFamily="34" charset="-120"/>
-              </a:rPr>
-              <a:t>dựng bộ nhớ mỗi câu (trung vị)</a:t>
-            </a:r>
-            <a:endParaRPr lang="en-US" sz="1200" dirty="0"/>
-          </a:p>
-        </p:txBody>
-      </p:sp>
-      <p:sp>
-        <p:nvSpPr>
-          <p:cNvPr id="9" name="Shape 6"/>
-          <p:cNvSpPr/>
-          <p:nvPr/>
-        </p:nvSpPr>
-        <p:spPr>
-          <a:xfrm>
-            <a:off x="3246120" y="1280160"/>
-            <a:ext cx="2651760" cy="1371600"/>
-          </a:xfrm>
-          <a:prstGeom prst="rect">
-            <a:avLst/>
-          </a:prstGeom>
-          <a:solidFill>
-            <a:srgbClr val="FFFFFF"/>
-          </a:solidFill>
-          <a:ln w="9525">
-            <a:solidFill>
-              <a:srgbClr val="DCE3EA"/>
-            </a:solidFill>
-            <a:prstDash val="solid"/>
-          </a:ln>
-        </p:spPr>
-      </p:sp>
-      <p:sp>
-        <p:nvSpPr>
-          <p:cNvPr id="10" name="Text 7"/>
-          <p:cNvSpPr txBox="1"/>
-          <p:nvPr/>
-        </p:nvSpPr>
-        <p:spPr>
-          <a:xfrm>
-            <a:off x="3246120" y="1371600"/>
-            <a:ext cx="2651760" cy="731520"/>
-          </a:xfrm>
-          <a:prstGeom prst="rect">
-            <a:avLst/>
-          </a:prstGeom>
-          <a:noFill/>
-          <a:ln/>
-        </p:spPr>
-        <p:txBody>
-          <a:bodyPr wrap="square" lIns="0" tIns="0" rIns="0" bIns="0" rtlCol="0" anchor="ctr"/>
-          <a:lstStyle/>
-          <a:p>
-            <a:pPr algn="ctr" indent="0" marL="0">
-              <a:buNone/>
-            </a:pPr>
-            <a:r>
-              <a:rPr lang="en-US" sz="3400" b="1" dirty="0">
-                <a:solidFill>
-                  <a:srgbClr val="1F6F8B"/>
-                </a:solidFill>
-                <a:latin typeface="Cambria" pitchFamily="34" charset="0"/>
-                <a:ea typeface="Cambria" pitchFamily="34" charset="-122"/>
-                <a:cs typeface="Cambria" pitchFamily="34" charset="-120"/>
-              </a:rPr>
-              <a:t>0,18 s</a:t>
-            </a:r>
-            <a:endParaRPr lang="en-US" sz="3400" dirty="0"/>
-          </a:p>
-        </p:txBody>
-      </p:sp>
-      <p:sp>
-        <p:nvSpPr>
-          <p:cNvPr id="11" name="Text 8"/>
-          <p:cNvSpPr txBox="1"/>
-          <p:nvPr/>
-        </p:nvSpPr>
-        <p:spPr>
-          <a:xfrm>
-            <a:off x="3246120" y="2103120"/>
-            <a:ext cx="2651760" cy="365760"/>
-          </a:xfrm>
-          <a:prstGeom prst="rect">
-            <a:avLst/>
-          </a:prstGeom>
-          <a:noFill/>
-          <a:ln/>
-        </p:spPr>
-        <p:txBody>
-          <a:bodyPr wrap="square" lIns="0" tIns="0" rIns="0" bIns="0" rtlCol="0" anchor="ctr"/>
-          <a:lstStyle/>
-          <a:p>
-            <a:pPr algn="ctr" indent="0" marL="0">
-              <a:buNone/>
-            </a:pPr>
-            <a:r>
-              <a:rPr lang="en-US" sz="1200" dirty="0">
-                <a:solidFill>
-                  <a:srgbClr val="5B6B7A"/>
-                </a:solidFill>
-                <a:latin typeface="Calibri" pitchFamily="34" charset="0"/>
-                <a:ea typeface="Calibri" pitchFamily="34" charset="-122"/>
-                <a:cs typeface="Calibri" pitchFamily="34" charset="-120"/>
-              </a:rPr>
-              <a:t>truy xuất</a:t>
-            </a:r>
-            <a:endParaRPr lang="en-US" sz="1200" dirty="0"/>
-          </a:p>
-        </p:txBody>
-      </p:sp>
-      <p:sp>
-        <p:nvSpPr>
-          <p:cNvPr id="12" name="Shape 9"/>
-          <p:cNvSpPr/>
-          <p:nvPr/>
-        </p:nvSpPr>
-        <p:spPr>
-          <a:xfrm>
-            <a:off x="6035040" y="1280160"/>
-            <a:ext cx="2651760" cy="1371600"/>
-          </a:xfrm>
-          <a:prstGeom prst="rect">
-            <a:avLst/>
-          </a:prstGeom>
-          <a:solidFill>
-            <a:srgbClr val="FFFFFF"/>
-          </a:solidFill>
-          <a:ln w="9525">
-            <a:solidFill>
-              <a:srgbClr val="DCE3EA"/>
-            </a:solidFill>
-            <a:prstDash val="solid"/>
-          </a:ln>
-        </p:spPr>
-      </p:sp>
-      <p:sp>
-        <p:nvSpPr>
-          <p:cNvPr id="13" name="Text 10"/>
-          <p:cNvSpPr txBox="1"/>
-          <p:nvPr/>
-        </p:nvSpPr>
-        <p:spPr>
-          <a:xfrm>
-            <a:off x="6035040" y="1371600"/>
-            <a:ext cx="2651760" cy="731520"/>
-          </a:xfrm>
-          <a:prstGeom prst="rect">
-            <a:avLst/>
-          </a:prstGeom>
-          <a:noFill/>
-          <a:ln/>
-        </p:spPr>
-        <p:txBody>
-          <a:bodyPr wrap="square" lIns="0" tIns="0" rIns="0" bIns="0" rtlCol="0" anchor="ctr"/>
-          <a:lstStyle/>
-          <a:p>
-            <a:pPr algn="ctr" indent="0" marL="0">
-              <a:buNone/>
-            </a:pPr>
-            <a:r>
-              <a:rPr lang="en-US" sz="3400" b="1" dirty="0">
-                <a:solidFill>
-                  <a:srgbClr val="1F6F8B"/>
-                </a:solidFill>
-                <a:latin typeface="Cambria" pitchFamily="34" charset="0"/>
-                <a:ea typeface="Cambria" pitchFamily="34" charset="-122"/>
-                <a:cs typeface="Cambria" pitchFamily="34" charset="-120"/>
-              </a:rPr>
-              <a:t>4,1 s</a:t>
-            </a:r>
-            <a:endParaRPr lang="en-US" sz="3400" dirty="0"/>
-          </a:p>
-        </p:txBody>
-      </p:sp>
-      <p:sp>
-        <p:nvSpPr>
-          <p:cNvPr id="14" name="Text 11"/>
-          <p:cNvSpPr txBox="1"/>
-          <p:nvPr/>
-        </p:nvSpPr>
-        <p:spPr>
-          <a:xfrm>
-            <a:off x="6035040" y="2103120"/>
-            <a:ext cx="2651760" cy="365760"/>
-          </a:xfrm>
-          <a:prstGeom prst="rect">
-            <a:avLst/>
-          </a:prstGeom>
-          <a:noFill/>
-          <a:ln/>
-        </p:spPr>
-        <p:txBody>
-          <a:bodyPr wrap="square" lIns="0" tIns="0" rIns="0" bIns="0" rtlCol="0" anchor="ctr"/>
-          <a:lstStyle/>
-          <a:p>
-            <a:pPr algn="ctr" indent="0" marL="0">
-              <a:buNone/>
-            </a:pPr>
-            <a:r>
-              <a:rPr lang="en-US" sz="1200" dirty="0">
-                <a:solidFill>
-                  <a:srgbClr val="5B6B7A"/>
-                </a:solidFill>
-                <a:latin typeface="Calibri" pitchFamily="34" charset="0"/>
-                <a:ea typeface="Calibri" pitchFamily="34" charset="-122"/>
-                <a:cs typeface="Calibri" pitchFamily="34" charset="-120"/>
-              </a:rPr>
-              <a:t>sinh câu trả lời</a:t>
-            </a:r>
-            <a:endParaRPr lang="en-US" sz="1200" dirty="0"/>
-          </a:p>
-        </p:txBody>
-      </p:sp>
-      <p:sp>
-        <p:nvSpPr>
-          <p:cNvPr id="15" name="Text 12"/>
-          <p:cNvSpPr txBox="1"/>
-          <p:nvPr/>
-        </p:nvSpPr>
-        <p:spPr>
-          <a:xfrm>
-            <a:off x="457200" y="2880360"/>
-            <a:ext cx="8229600" cy="1737360"/>
-          </a:xfrm>
-          <a:prstGeom prst="rect">
-            <a:avLst/>
-          </a:prstGeom>
-          <a:noFill/>
-          <a:ln/>
-        </p:spPr>
-        <p:txBody>
-          <a:bodyPr wrap="square" lIns="0" tIns="0" rIns="0" bIns="0" rtlCol="0" anchor="t"/>
-          <a:lstStyle/>
-          <a:p>
-            <a:pPr marL="342900" indent="-342900">
-              <a:spcAft>
-                <a:spcPts val="600"/>
-              </a:spcAft>
-              <a:buSzPct val="100000"/>
-              <a:buChar char="•"/>
-            </a:pPr>
-            <a:r>
-              <a:rPr lang="en-US" sz="1300" dirty="0">
-                <a:solidFill>
-                  <a:srgbClr val="1B2B3A"/>
-                </a:solidFill>
-                <a:latin typeface="Calibri" pitchFamily="34" charset="0"/>
-                <a:ea typeface="Calibri" pitchFamily="34" charset="-122"/>
-                <a:cs typeface="Calibri" pitchFamily="34" charset="-120"/>
-              </a:rPr>
-              <a:t>Mỗi câu gọi LLM hàng trăm lần: hội thoại dài chia thành hàng trăm topic, mỗi topic trích fact và xử lý riêng.</a:t>
-            </a:r>
-            <a:endParaRPr lang="en-US" sz="1300" dirty="0"/>
-          </a:p>
-          <a:p>
-            <a:pPr marL="342900" indent="-342900">
-              <a:spcAft>
-                <a:spcPts val="600"/>
-              </a:spcAft>
-              <a:buSzPct val="100000"/>
-              <a:buChar char="•"/>
-            </a:pPr>
-            <a:r>
-              <a:rPr lang="en-US" sz="1300" dirty="0">
-                <a:solidFill>
-                  <a:srgbClr val="1B2B3A"/>
-                </a:solidFill>
-                <a:latin typeface="Calibri" pitchFamily="34" charset="0"/>
-                <a:ea typeface="Calibri" pitchFamily="34" charset="-122"/>
-                <a:cs typeface="Calibri" pitchFamily="34" charset="-120"/>
-              </a:rPr>
-              <a:t>Chạy 5–9 luồng song song, mỗi câu 33 phút (chậm nhất 61 phút); cả tập dev cần vài chục giờ.</a:t>
-            </a:r>
-            <a:endParaRPr lang="en-US" sz="1300" dirty="0"/>
-          </a:p>
-          <a:p>
-            <a:pPr marL="342900" indent="-342900">
-              <a:spcAft>
-                <a:spcPts val="600"/>
-              </a:spcAft>
-              <a:buSzPct val="100000"/>
-              <a:buChar char="•"/>
-            </a:pPr>
-            <a:r>
-              <a:rPr lang="en-US" sz="1300" dirty="0">
-                <a:solidFill>
-                  <a:srgbClr val="1B2B3A"/>
-                </a:solidFill>
-                <a:latin typeface="Calibri" pitchFamily="34" charset="0"/>
-                <a:ea typeface="Calibri" pitchFamily="34" charset="-122"/>
-                <a:cs typeface="Calibri" pitchFamily="34" charset="-120"/>
-              </a:rPr>
-              <a:t>9router chèn ~2,5 nghìn token system prompt mỗi lời gọi: khi báo cáo token phải tách phần này ra.</a:t>
-            </a:r>
-            <a:endParaRPr lang="en-US" sz="1300" dirty="0"/>
-          </a:p>
-          <a:p>
-            <a:pPr marL="342900" indent="-342900">
-              <a:spcAft>
-                <a:spcPts val="600"/>
-              </a:spcAft>
-              <a:buSzPct val="100000"/>
-              <a:buChar char="•"/>
-            </a:pPr>
-            <a:r>
-              <a:rPr lang="en-US" sz="1300" dirty="0">
-                <a:solidFill>
-                  <a:srgbClr val="1B2B3A"/>
-                </a:solidFill>
-                <a:latin typeface="Calibri" pitchFamily="34" charset="0"/>
-                <a:ea typeface="Calibri" pitchFamily="34" charset="-122"/>
-                <a:cs typeface="Calibri" pitchFamily="34" charset="-120"/>
-              </a:rPr>
-              <a:t>Tài khoản ChatGPT có trần sử dụng: đã chạm giới hạn (429), phải chờ hoặc thêm tài khoản.</a:t>
-            </a:r>
-            <a:endParaRPr lang="en-US" sz="1300" dirty="0"/>
           </a:p>
         </p:txBody>
       </p:sp>
